--- a/presentation/JMLC_pitch.pptx
+++ b/presentation/JMLC_pitch.pptx
@@ -6,19 +6,17 @@
   </p:sldMasterIdLst>
   <p:sldIdLst>
     <p:sldId id="256" r:id="rId7"/>
-    <p:sldId id="257" r:id="rId8"/>
-    <p:sldId id="258" r:id="rId9"/>
-    <p:sldId id="259" r:id="rId10"/>
-    <p:sldId id="260" r:id="rId11"/>
-    <p:sldId id="261" r:id="rId12"/>
-    <p:sldId id="262" r:id="rId13"/>
-    <p:sldId id="263" r:id="rId14"/>
-    <p:sldId id="264" r:id="rId15"/>
-    <p:sldId id="265" r:id="rId16"/>
-    <p:sldId id="266" r:id="rId17"/>
-    <p:sldId id="267" r:id="rId18"/>
+    <p:sldId id="257" r:id="rId9"/>
+    <p:sldId id="258" r:id="rId10"/>
+    <p:sldId id="259" r:id="rId11"/>
+    <p:sldId id="260" r:id="rId12"/>
+    <p:sldId id="261" r:id="rId13"/>
+    <p:sldId id="262" r:id="rId14"/>
+    <p:sldId id="263" r:id="rId15"/>
+    <p:sldId id="264" r:id="rId16"/>
+    <p:sldId id="265" r:id="rId17"/>
   </p:sldIdLst>
-  <p:sldSz cx="12191695" cy="6858000" type="screen4x3"/>
+  <p:sldSz cx="12192000" cy="6858000" type="screen4x3"/>
   <p:notesSz cx="6858000" cy="9144000"/>
   <p:defaultTextStyle>
     <a:defPPr>
@@ -116,6 +114,1236 @@
     </a:lvl9pPr>
   </p:defaultTextStyle>
 </p:presentation>
+</file>
+
+<file path=ppt/notesMasters/notesMaster1.xml><?xml version="1.0" encoding="utf-8"?>
+<p:notesMaster xmlns:a="http://schemas.openxmlformats.org/drawingml/2006/main" xmlns:p="http://schemas.openxmlformats.org/presentationml/2006/main" xmlns:r="http://schemas.openxmlformats.org/officeDocument/2006/relationships">
+  <p:cSld>
+    <p:bg>
+      <p:bgRef idx="1001">
+        <a:schemeClr val="bg1"/>
+      </p:bgRef>
+    </p:bg>
+    <p:spTree>
+      <p:nvGrpSpPr>
+        <p:cNvPr id="1" name=""/>
+        <p:cNvGrpSpPr/>
+        <p:nvPr/>
+      </p:nvGrpSpPr>
+      <p:grpSpPr>
+        <a:xfrm>
+          <a:off x="0" y="0"/>
+          <a:ext cx="0" cy="0"/>
+          <a:chOff x="0" y="0"/>
+          <a:chExt cx="0" cy="0"/>
+        </a:xfrm>
+      </p:grpSpPr>
+      <p:sp>
+        <p:nvSpPr>
+          <p:cNvPr id="2" name="Header Placeholder 1"/>
+          <p:cNvSpPr>
+            <a:spLocks noGrp="1"/>
+          </p:cNvSpPr>
+          <p:nvPr>
+            <p:ph type="hdr" sz="quarter"/>
+          </p:nvPr>
+        </p:nvSpPr>
+        <p:spPr>
+          <a:xfrm>
+            <a:off x="0" y="0"/>
+            <a:ext cx="2971800" cy="457200"/>
+          </a:xfrm>
+          <a:prstGeom prst="rect">
+            <a:avLst/>
+          </a:prstGeom>
+        </p:spPr>
+        <p:txBody>
+          <a:bodyPr vert="horz" lIns="91440" tIns="45720" rIns="91440" bIns="45720" rtlCol="0"/>
+          <a:lstStyle>
+            <a:lvl1pPr algn="l">
+              <a:defRPr sz="1200"/>
+            </a:lvl1pPr>
+          </a:lstStyle>
+          <a:p>
+            <a:endParaRPr lang="en-US"/>
+          </a:p>
+        </p:txBody>
+      </p:sp>
+      <p:sp>
+        <p:nvSpPr>
+          <p:cNvPr id="3" name="Date Placeholder 2"/>
+          <p:cNvSpPr>
+            <a:spLocks noGrp="1"/>
+          </p:cNvSpPr>
+          <p:nvPr>
+            <p:ph type="dt" idx="1"/>
+          </p:nvPr>
+        </p:nvSpPr>
+        <p:spPr>
+          <a:xfrm>
+            <a:off x="3884613" y="0"/>
+            <a:ext cx="2971800" cy="457200"/>
+          </a:xfrm>
+          <a:prstGeom prst="rect">
+            <a:avLst/>
+          </a:prstGeom>
+        </p:spPr>
+        <p:txBody>
+          <a:bodyPr vert="horz" lIns="91440" tIns="45720" rIns="91440" bIns="45720" rtlCol="0"/>
+          <a:lstStyle>
+            <a:lvl1pPr algn="r">
+              <a:defRPr sz="1200"/>
+            </a:lvl1pPr>
+          </a:lstStyle>
+          <a:p>
+            <a:fld id="{0F89C1C7-3DCD-1040-A9CF-14679D8B5DDD}" type="datetimeFigureOut">
+              <a:rPr lang="en-US" smtClean="0"/>
+              <a:t>10/17/16</a:t>
+            </a:fld>
+            <a:endParaRPr lang="en-US"/>
+          </a:p>
+        </p:txBody>
+      </p:sp>
+      <p:sp>
+        <p:nvSpPr>
+          <p:cNvPr id="4" name="Slide Image Placeholder 3"/>
+          <p:cNvSpPr>
+            <a:spLocks noGrp="1" noRot="1" noChangeAspect="1"/>
+          </p:cNvSpPr>
+          <p:nvPr>
+            <p:ph type="sldImg" idx="2"/>
+          </p:nvPr>
+        </p:nvSpPr>
+        <p:spPr>
+          <a:xfrm>
+            <a:off x="1143000" y="685800"/>
+            <a:ext cx="4572000" cy="3429000"/>
+          </a:xfrm>
+          <a:prstGeom prst="rect">
+            <a:avLst/>
+          </a:prstGeom>
+          <a:noFill/>
+          <a:ln w="12700">
+            <a:solidFill>
+              <a:prstClr val="black"/>
+            </a:solidFill>
+          </a:ln>
+        </p:spPr>
+        <p:txBody>
+          <a:bodyPr vert="horz" lIns="91440" tIns="45720" rIns="91440" bIns="45720" rtlCol="0" anchor="ctr"/>
+          <a:lstStyle/>
+          <a:p>
+            <a:endParaRPr lang="en-US"/>
+          </a:p>
+        </p:txBody>
+      </p:sp>
+      <p:sp>
+        <p:nvSpPr>
+          <p:cNvPr id="5" name="Notes Placeholder 4"/>
+          <p:cNvSpPr>
+            <a:spLocks noGrp="1"/>
+          </p:cNvSpPr>
+          <p:nvPr>
+            <p:ph type="body" sz="quarter" idx="3"/>
+          </p:nvPr>
+        </p:nvSpPr>
+        <p:spPr>
+          <a:xfrm>
+            <a:off x="685800" y="4343400"/>
+            <a:ext cx="5486400" cy="4114800"/>
+          </a:xfrm>
+          <a:prstGeom prst="rect">
+            <a:avLst/>
+          </a:prstGeom>
+        </p:spPr>
+        <p:txBody>
+          <a:bodyPr vert="horz" lIns="91440" tIns="45720" rIns="91440" bIns="45720" rtlCol="0"/>
+          <a:lstStyle/>
+          <a:p>
+            <a:pPr lvl="0"/>
+            <a:r>
+              <a:rPr lang="en-US" smtClean="0"/>
+              <a:t>Click to edit Master text styles</a:t>
+            </a:r>
+          </a:p>
+          <a:p>
+            <a:pPr lvl="1"/>
+            <a:r>
+              <a:rPr lang="en-US" smtClean="0"/>
+              <a:t>Second level</a:t>
+            </a:r>
+          </a:p>
+          <a:p>
+            <a:pPr lvl="2"/>
+            <a:r>
+              <a:rPr lang="en-US" smtClean="0"/>
+              <a:t>Third level</a:t>
+            </a:r>
+          </a:p>
+          <a:p>
+            <a:pPr lvl="3"/>
+            <a:r>
+              <a:rPr lang="en-US" smtClean="0"/>
+              <a:t>Fourth level</a:t>
+            </a:r>
+          </a:p>
+          <a:p>
+            <a:pPr lvl="4"/>
+            <a:r>
+              <a:rPr lang="en-US" smtClean="0"/>
+              <a:t>Fifth level</a:t>
+            </a:r>
+            <a:endParaRPr lang="en-US"/>
+          </a:p>
+        </p:txBody>
+      </p:sp>
+      <p:sp>
+        <p:nvSpPr>
+          <p:cNvPr id="6" name="Footer Placeholder 5"/>
+          <p:cNvSpPr>
+            <a:spLocks noGrp="1"/>
+          </p:cNvSpPr>
+          <p:nvPr>
+            <p:ph type="ftr" sz="quarter" idx="4"/>
+          </p:nvPr>
+        </p:nvSpPr>
+        <p:spPr>
+          <a:xfrm>
+            <a:off x="0" y="8685213"/>
+            <a:ext cx="2971800" cy="457200"/>
+          </a:xfrm>
+          <a:prstGeom prst="rect">
+            <a:avLst/>
+          </a:prstGeom>
+        </p:spPr>
+        <p:txBody>
+          <a:bodyPr vert="horz" lIns="91440" tIns="45720" rIns="91440" bIns="45720" rtlCol="0" anchor="b"/>
+          <a:lstStyle>
+            <a:lvl1pPr algn="l">
+              <a:defRPr sz="1200"/>
+            </a:lvl1pPr>
+          </a:lstStyle>
+          <a:p>
+            <a:endParaRPr lang="en-US"/>
+          </a:p>
+        </p:txBody>
+      </p:sp>
+      <p:sp>
+        <p:nvSpPr>
+          <p:cNvPr id="7" name="Slide Number Placeholder 6"/>
+          <p:cNvSpPr>
+            <a:spLocks noGrp="1"/>
+          </p:cNvSpPr>
+          <p:nvPr>
+            <p:ph type="sldNum" sz="quarter" idx="5"/>
+          </p:nvPr>
+        </p:nvSpPr>
+        <p:spPr>
+          <a:xfrm>
+            <a:off x="3884613" y="8685213"/>
+            <a:ext cx="2971800" cy="457200"/>
+          </a:xfrm>
+          <a:prstGeom prst="rect">
+            <a:avLst/>
+          </a:prstGeom>
+        </p:spPr>
+        <p:txBody>
+          <a:bodyPr vert="horz" lIns="91440" tIns="45720" rIns="91440" bIns="45720" rtlCol="0" anchor="b"/>
+          <a:lstStyle>
+            <a:lvl1pPr algn="r">
+              <a:defRPr sz="1200"/>
+            </a:lvl1pPr>
+          </a:lstStyle>
+          <a:p>
+            <a:fld id="{BB5E49A5-4136-284D-997B-48E1D791AD67}" type="slidenum">
+              <a:rPr lang="en-US" smtClean="0"/>
+              <a:t>‹#›</a:t>
+            </a:fld>
+            <a:endParaRPr lang="en-US"/>
+          </a:p>
+        </p:txBody>
+      </p:sp>
+    </p:spTree>
+    <p:extLst>
+      <p:ext uri="{BB962C8B-B14F-4D97-AF65-F5344CB8AC3E}">
+        <p14:creationId xmlns:p14="http://schemas.microsoft.com/office/powerpoint/2010/main" val="2623252185"/>
+      </p:ext>
+    </p:extLst>
+  </p:cSld>
+  <p:clrMap bg1="lt1" tx1="dk1" bg2="lt2" tx2="dk2" accent1="accent1" accent2="accent2" accent3="accent3" accent4="accent4" accent5="accent5" accent6="accent6" hlink="hlink" folHlink="folHlink"/>
+  <p:notesStyle>
+    <a:lvl1pPr marL="0" algn="l" defTabSz="457200" rtl="0" eaLnBrk="1" latinLnBrk="0" hangingPunct="1">
+      <a:defRPr sz="1200" kern="1200">
+        <a:solidFill>
+          <a:schemeClr val="tx1"/>
+        </a:solidFill>
+        <a:latin typeface="+mn-lt"/>
+        <a:ea typeface="+mn-ea"/>
+        <a:cs typeface="+mn-cs"/>
+      </a:defRPr>
+    </a:lvl1pPr>
+    <a:lvl2pPr marL="457200" algn="l" defTabSz="457200" rtl="0" eaLnBrk="1" latinLnBrk="0" hangingPunct="1">
+      <a:defRPr sz="1200" kern="1200">
+        <a:solidFill>
+          <a:schemeClr val="tx1"/>
+        </a:solidFill>
+        <a:latin typeface="+mn-lt"/>
+        <a:ea typeface="+mn-ea"/>
+        <a:cs typeface="+mn-cs"/>
+      </a:defRPr>
+    </a:lvl2pPr>
+    <a:lvl3pPr marL="914400" algn="l" defTabSz="457200" rtl="0" eaLnBrk="1" latinLnBrk="0" hangingPunct="1">
+      <a:defRPr sz="1200" kern="1200">
+        <a:solidFill>
+          <a:schemeClr val="tx1"/>
+        </a:solidFill>
+        <a:latin typeface="+mn-lt"/>
+        <a:ea typeface="+mn-ea"/>
+        <a:cs typeface="+mn-cs"/>
+      </a:defRPr>
+    </a:lvl3pPr>
+    <a:lvl4pPr marL="1371600" algn="l" defTabSz="457200" rtl="0" eaLnBrk="1" latinLnBrk="0" hangingPunct="1">
+      <a:defRPr sz="1200" kern="1200">
+        <a:solidFill>
+          <a:schemeClr val="tx1"/>
+        </a:solidFill>
+        <a:latin typeface="+mn-lt"/>
+        <a:ea typeface="+mn-ea"/>
+        <a:cs typeface="+mn-cs"/>
+      </a:defRPr>
+    </a:lvl4pPr>
+    <a:lvl5pPr marL="1828800" algn="l" defTabSz="457200" rtl="0" eaLnBrk="1" latinLnBrk="0" hangingPunct="1">
+      <a:defRPr sz="1200" kern="1200">
+        <a:solidFill>
+          <a:schemeClr val="tx1"/>
+        </a:solidFill>
+        <a:latin typeface="+mn-lt"/>
+        <a:ea typeface="+mn-ea"/>
+        <a:cs typeface="+mn-cs"/>
+      </a:defRPr>
+    </a:lvl5pPr>
+    <a:lvl6pPr marL="2286000" algn="l" defTabSz="457200" rtl="0" eaLnBrk="1" latinLnBrk="0" hangingPunct="1">
+      <a:defRPr sz="1200" kern="1200">
+        <a:solidFill>
+          <a:schemeClr val="tx1"/>
+        </a:solidFill>
+        <a:latin typeface="+mn-lt"/>
+        <a:ea typeface="+mn-ea"/>
+        <a:cs typeface="+mn-cs"/>
+      </a:defRPr>
+    </a:lvl6pPr>
+    <a:lvl7pPr marL="2743200" algn="l" defTabSz="457200" rtl="0" eaLnBrk="1" latinLnBrk="0" hangingPunct="1">
+      <a:defRPr sz="1200" kern="1200">
+        <a:solidFill>
+          <a:schemeClr val="tx1"/>
+        </a:solidFill>
+        <a:latin typeface="+mn-lt"/>
+        <a:ea typeface="+mn-ea"/>
+        <a:cs typeface="+mn-cs"/>
+      </a:defRPr>
+    </a:lvl7pPr>
+    <a:lvl8pPr marL="3200400" algn="l" defTabSz="457200" rtl="0" eaLnBrk="1" latinLnBrk="0" hangingPunct="1">
+      <a:defRPr sz="1200" kern="1200">
+        <a:solidFill>
+          <a:schemeClr val="tx1"/>
+        </a:solidFill>
+        <a:latin typeface="+mn-lt"/>
+        <a:ea typeface="+mn-ea"/>
+        <a:cs typeface="+mn-cs"/>
+      </a:defRPr>
+    </a:lvl8pPr>
+    <a:lvl9pPr marL="3657600" algn="l" defTabSz="457200" rtl="0" eaLnBrk="1" latinLnBrk="0" hangingPunct="1">
+      <a:defRPr sz="1200" kern="1200">
+        <a:solidFill>
+          <a:schemeClr val="tx1"/>
+        </a:solidFill>
+        <a:latin typeface="+mn-lt"/>
+        <a:ea typeface="+mn-ea"/>
+        <a:cs typeface="+mn-cs"/>
+      </a:defRPr>
+    </a:lvl9pPr>
+  </p:notesStyle>
+</p:notesMaster>
+</file>
+
+<file path=ppt/notesSlides/notesSlide1.xml><?xml version="1.0" encoding="utf-8"?>
+<p:notes xmlns:a="http://schemas.openxmlformats.org/drawingml/2006/main" xmlns:p="http://schemas.openxmlformats.org/presentationml/2006/main" xmlns:r="http://schemas.openxmlformats.org/officeDocument/2006/relationships">
+  <p:cSld>
+    <p:spTree>
+      <p:nvGrpSpPr>
+        <p:cNvPr id="1" name=""/>
+        <p:cNvGrpSpPr/>
+        <p:nvPr/>
+      </p:nvGrpSpPr>
+      <p:grpSpPr>
+        <a:xfrm>
+          <a:off x="0" y="0"/>
+          <a:ext cx="0" cy="0"/>
+          <a:chOff x="0" y="0"/>
+          <a:chExt cx="0" cy="0"/>
+        </a:xfrm>
+      </p:grpSpPr>
+      <p:sp>
+        <p:nvSpPr>
+          <p:cNvPr id="2" name="Slide Image Placeholder 1"/>
+          <p:cNvSpPr>
+            <a:spLocks noGrp="1"/>
+          </p:cNvSpPr>
+          <p:nvPr>
+            <p:ph type="sldImg" idx="2"/>
+          </p:nvPr>
+        </p:nvSpPr>
+        <p:spPr/>
+      </p:sp>
+      <p:sp>
+        <p:nvSpPr>
+          <p:cNvPr id="3" name="Notes Placeholder 2"/>
+          <p:cNvSpPr>
+            <a:spLocks noGrp="1"/>
+          </p:cNvSpPr>
+          <p:nvPr>
+            <p:ph type="body" idx="3" sz="quarter"/>
+          </p:nvPr>
+        </p:nvSpPr>
+        <p:spPr/>
+        <p:txBody>
+          <a:bodyPr/>
+          <a:lstStyle/>
+          <a:p>
+            <a:r>
+              <a:t>[0:00–0:15] Здравствуйте. Меня зовут Дмитрий Новичков. Я покажу проект,</a:t>
+            </a:r>
+          </a:p>
+          <a:p>
+            <a:r>
+              <a:t>который по уличной панораме определяет тип городского участка. Это боль, с которой</a:t>
+            </a:r>
+          </a:p>
+          <a:p>
+            <a:r>
+              <a:t>я сталкиваюсь в работе аналитика девелопера. Пять минут — поехали.</a:t>
+            </a:r>
+          </a:p>
+        </p:txBody>
+      </p:sp>
+      <p:sp>
+        <p:nvSpPr>
+          <p:cNvPr id="4" name="Slide Number Placeholder 3"/>
+          <p:cNvSpPr>
+            <a:spLocks noGrp="1"/>
+          </p:cNvSpPr>
+          <p:nvPr>
+            <p:ph type="sldNum" idx="5" sz="quarter"/>
+          </p:nvPr>
+        </p:nvSpPr>
+        <p:spPr/>
+      </p:sp>
+    </p:spTree>
+  </p:cSld>
+  <p:clrMapOvr>
+    <a:masterClrMapping/>
+  </p:clrMapOvr>
+</p:notes>
+</file>
+
+<file path=ppt/notesSlides/notesSlide10.xml><?xml version="1.0" encoding="utf-8"?>
+<p:notes xmlns:a="http://schemas.openxmlformats.org/drawingml/2006/main" xmlns:p="http://schemas.openxmlformats.org/presentationml/2006/main" xmlns:r="http://schemas.openxmlformats.org/officeDocument/2006/relationships">
+  <p:cSld>
+    <p:spTree>
+      <p:nvGrpSpPr>
+        <p:cNvPr id="1" name=""/>
+        <p:cNvGrpSpPr/>
+        <p:nvPr/>
+      </p:nvGrpSpPr>
+      <p:grpSpPr>
+        <a:xfrm>
+          <a:off x="0" y="0"/>
+          <a:ext cx="0" cy="0"/>
+          <a:chOff x="0" y="0"/>
+          <a:chExt cx="0" cy="0"/>
+        </a:xfrm>
+      </p:grpSpPr>
+      <p:sp>
+        <p:nvSpPr>
+          <p:cNvPr id="2" name="Slide Image Placeholder 1"/>
+          <p:cNvSpPr>
+            <a:spLocks noGrp="1"/>
+          </p:cNvSpPr>
+          <p:nvPr>
+            <p:ph type="sldImg" idx="2"/>
+          </p:nvPr>
+        </p:nvSpPr>
+        <p:spPr/>
+      </p:sp>
+      <p:sp>
+        <p:nvSpPr>
+          <p:cNvPr id="3" name="Notes Placeholder 2"/>
+          <p:cNvSpPr>
+            <a:spLocks noGrp="1"/>
+          </p:cNvSpPr>
+          <p:nvPr>
+            <p:ph type="body" idx="3" sz="quarter"/>
+          </p:nvPr>
+        </p:nvSpPr>
+        <p:spPr/>
+        <p:txBody>
+          <a:bodyPr/>
+          <a:lstStyle/>
+          <a:p>
+            <a:r>
+              <a:t>[4:50–5:00] Итог: это полный цикл от сбора данных до продукта и</a:t>
+            </a:r>
+          </a:p>
+          <a:p>
+            <a:r>
+              <a:t>автономного агента, с честными метриками и понятной нишей применения. Спасибо!</a:t>
+            </a:r>
+          </a:p>
+          <a:p>
+            <a:r>
+              <a:t>Готов ответить на вопросы. Демо поднимается одной командой.</a:t>
+            </a:r>
+          </a:p>
+        </p:txBody>
+      </p:sp>
+      <p:sp>
+        <p:nvSpPr>
+          <p:cNvPr id="4" name="Slide Number Placeholder 3"/>
+          <p:cNvSpPr>
+            <a:spLocks noGrp="1"/>
+          </p:cNvSpPr>
+          <p:nvPr>
+            <p:ph type="sldNum" idx="5" sz="quarter"/>
+          </p:nvPr>
+        </p:nvSpPr>
+        <p:spPr/>
+      </p:sp>
+    </p:spTree>
+  </p:cSld>
+  <p:clrMapOvr>
+    <a:masterClrMapping/>
+  </p:clrMapOvr>
+</p:notes>
+</file>
+
+<file path=ppt/notesSlides/notesSlide2.xml><?xml version="1.0" encoding="utf-8"?>
+<p:notes xmlns:a="http://schemas.openxmlformats.org/drawingml/2006/main" xmlns:p="http://schemas.openxmlformats.org/presentationml/2006/main" xmlns:r="http://schemas.openxmlformats.org/officeDocument/2006/relationships">
+  <p:cSld>
+    <p:spTree>
+      <p:nvGrpSpPr>
+        <p:cNvPr id="1" name=""/>
+        <p:cNvGrpSpPr/>
+        <p:nvPr/>
+      </p:nvGrpSpPr>
+      <p:grpSpPr>
+        <a:xfrm>
+          <a:off x="0" y="0"/>
+          <a:ext cx="0" cy="0"/>
+          <a:chOff x="0" y="0"/>
+          <a:chExt cx="0" cy="0"/>
+        </a:xfrm>
+      </p:grpSpPr>
+      <p:sp>
+        <p:nvSpPr>
+          <p:cNvPr id="2" name="Slide Image Placeholder 1"/>
+          <p:cNvSpPr>
+            <a:spLocks noGrp="1"/>
+          </p:cNvSpPr>
+          <p:nvPr>
+            <p:ph type="sldImg" idx="2"/>
+          </p:nvPr>
+        </p:nvSpPr>
+        <p:spPr/>
+      </p:sp>
+      <p:sp>
+        <p:nvSpPr>
+          <p:cNvPr id="3" name="Notes Placeholder 2"/>
+          <p:cNvSpPr>
+            <a:spLocks noGrp="1"/>
+          </p:cNvSpPr>
+          <p:nvPr>
+            <p:ph type="body" idx="3" sz="quarter"/>
+          </p:nvPr>
+        </p:nvSpPr>
+        <p:spPr/>
+        <p:txBody>
+          <a:bodyPr/>
+          <a:lstStyle/>
+          <a:p>
+            <a:r>
+              <a:t>[0:15–0:50] Проблема простая и реальная. Аналитики вручную относят</a:t>
+            </a:r>
+          </a:p>
+          <a:p>
+            <a:r>
+              <a:t>тысячи участков к типам застройки. Спутник тут бесполезен — он не видит дворы и</a:t>
+            </a:r>
+          </a:p>
+          <a:p>
+            <a:r>
+              <a:t>фасады. Текстовое описание из кадастра тоже подводит: например, 1712 участков имеют</a:t>
+            </a:r>
+          </a:p>
+          <a:p>
+            <a:r>
+              <a:t>одинаковую фразу «зелень во дворах», но по факту это разные классы. Различить их</a:t>
+            </a:r>
+          </a:p>
+          <a:p>
+            <a:r>
+              <a:t>можно только по уличной панораме. Отсюда идея проекта.</a:t>
+            </a:r>
+          </a:p>
+        </p:txBody>
+      </p:sp>
+      <p:sp>
+        <p:nvSpPr>
+          <p:cNvPr id="4" name="Slide Number Placeholder 3"/>
+          <p:cNvSpPr>
+            <a:spLocks noGrp="1"/>
+          </p:cNvSpPr>
+          <p:nvPr>
+            <p:ph type="sldNum" idx="5" sz="quarter"/>
+          </p:nvPr>
+        </p:nvSpPr>
+        <p:spPr/>
+      </p:sp>
+    </p:spTree>
+  </p:cSld>
+  <p:clrMapOvr>
+    <a:masterClrMapping/>
+  </p:clrMapOvr>
+</p:notes>
+</file>
+
+<file path=ppt/notesSlides/notesSlide3.xml><?xml version="1.0" encoding="utf-8"?>
+<p:notes xmlns:a="http://schemas.openxmlformats.org/drawingml/2006/main" xmlns:p="http://schemas.openxmlformats.org/presentationml/2006/main" xmlns:r="http://schemas.openxmlformats.org/officeDocument/2006/relationships">
+  <p:cSld>
+    <p:spTree>
+      <p:nvGrpSpPr>
+        <p:cNvPr id="1" name=""/>
+        <p:cNvGrpSpPr/>
+        <p:nvPr/>
+      </p:nvGrpSpPr>
+      <p:grpSpPr>
+        <a:xfrm>
+          <a:off x="0" y="0"/>
+          <a:ext cx="0" cy="0"/>
+          <a:chOff x="0" y="0"/>
+          <a:chExt cx="0" cy="0"/>
+        </a:xfrm>
+      </p:grpSpPr>
+      <p:sp>
+        <p:nvSpPr>
+          <p:cNvPr id="2" name="Slide Image Placeholder 1"/>
+          <p:cNvSpPr>
+            <a:spLocks noGrp="1"/>
+          </p:cNvSpPr>
+          <p:nvPr>
+            <p:ph type="sldImg" idx="2"/>
+          </p:nvPr>
+        </p:nvSpPr>
+        <p:spPr/>
+      </p:sp>
+      <p:sp>
+        <p:nvSpPr>
+          <p:cNvPr id="3" name="Notes Placeholder 2"/>
+          <p:cNvSpPr>
+            <a:spLocks noGrp="1"/>
+          </p:cNvSpPr>
+          <p:nvPr>
+            <p:ph type="body" idx="3" sz="quarter"/>
+          </p:nvPr>
+        </p:nvSpPr>
+        <p:spPr/>
+        <p:txBody>
+          <a:bodyPr/>
+          <a:lstStyle/>
+          <a:p>
+            <a:r>
+              <a:t>[0:50–1:25] Решение: берём координаты участка из GeoPackage, находим</a:t>
+            </a:r>
+          </a:p>
+          <a:p>
+            <a:r>
+              <a:t>уличную панораму, вырезаем кадр и предсказываем один из шести типов территории —</a:t>
+            </a:r>
+          </a:p>
+          <a:p>
+            <a:r>
+              <a:t>от активной застройки до природных зон. Вокруг модели — веб-инструмент, где аналитик</a:t>
+            </a:r>
+          </a:p>
+          <a:p>
+            <a:r>
+              <a:t>проверяет и правит результат. То есть это не просто модель, а рабочий продукт.</a:t>
+            </a:r>
+          </a:p>
+        </p:txBody>
+      </p:sp>
+      <p:sp>
+        <p:nvSpPr>
+          <p:cNvPr id="4" name="Slide Number Placeholder 3"/>
+          <p:cNvSpPr>
+            <a:spLocks noGrp="1"/>
+          </p:cNvSpPr>
+          <p:nvPr>
+            <p:ph type="sldNum" idx="5" sz="quarter"/>
+          </p:nvPr>
+        </p:nvSpPr>
+        <p:spPr/>
+      </p:sp>
+    </p:spTree>
+  </p:cSld>
+  <p:clrMapOvr>
+    <a:masterClrMapping/>
+  </p:clrMapOvr>
+</p:notes>
+</file>
+
+<file path=ppt/notesSlides/notesSlide4.xml><?xml version="1.0" encoding="utf-8"?>
+<p:notes xmlns:a="http://schemas.openxmlformats.org/drawingml/2006/main" xmlns:p="http://schemas.openxmlformats.org/presentationml/2006/main" xmlns:r="http://schemas.openxmlformats.org/officeDocument/2006/relationships">
+  <p:cSld>
+    <p:spTree>
+      <p:nvGrpSpPr>
+        <p:cNvPr id="1" name=""/>
+        <p:cNvGrpSpPr/>
+        <p:nvPr/>
+      </p:nvGrpSpPr>
+      <p:grpSpPr>
+        <a:xfrm>
+          <a:off x="0" y="0"/>
+          <a:ext cx="0" cy="0"/>
+          <a:chOff x="0" y="0"/>
+          <a:chExt cx="0" cy="0"/>
+        </a:xfrm>
+      </p:grpSpPr>
+      <p:sp>
+        <p:nvSpPr>
+          <p:cNvPr id="2" name="Slide Image Placeholder 1"/>
+          <p:cNvSpPr>
+            <a:spLocks noGrp="1"/>
+          </p:cNvSpPr>
+          <p:nvPr>
+            <p:ph type="sldImg" idx="2"/>
+          </p:nvPr>
+        </p:nvSpPr>
+        <p:spPr/>
+      </p:sp>
+      <p:sp>
+        <p:nvSpPr>
+          <p:cNvPr id="3" name="Notes Placeholder 2"/>
+          <p:cNvSpPr>
+            <a:spLocks noGrp="1"/>
+          </p:cNvSpPr>
+          <p:nvPr>
+            <p:ph type="body" idx="3" sz="quarter"/>
+          </p:nvPr>
+        </p:nvSpPr>
+        <p:spPr/>
+        <p:txBody>
+          <a:bodyPr/>
+          <a:lstStyle/>
+          <a:p>
+            <a:r>
+              <a:t>[1:25–2:05] Про данные — здесь была основная работа. Первое: почти</a:t>
+            </a:r>
+          </a:p>
+          <a:p>
+            <a:r>
+              <a:t>треть кадров смотрели мимо участка, потому что панорама снята прямо в точке объекта.</a:t>
+            </a:r>
+          </a:p>
+          <a:p>
+            <a:r>
+              <a:t>Починили, рендеря четыре направления. Второе и главное: сырые метки OSM совпадали с</a:t>
+            </a:r>
+          </a:p>
+          <a:p>
+            <a:r>
+              <a:t>тем, что реально на кадре, лишь на 20%. Поэтому переразметили данные VLM-судьёй и</a:t>
+            </a:r>
+          </a:p>
+          <a:p>
+            <a:r>
+              <a:t>вычитали руками. Плюс дедупликация и валидация без утечки сезонов. Именно качество</a:t>
+            </a:r>
+          </a:p>
+          <a:p>
+            <a:r>
+              <a:t>меток, а не архитектура, дало основной прирост.</a:t>
+            </a:r>
+          </a:p>
+        </p:txBody>
+      </p:sp>
+      <p:sp>
+        <p:nvSpPr>
+          <p:cNvPr id="4" name="Slide Number Placeholder 3"/>
+          <p:cNvSpPr>
+            <a:spLocks noGrp="1"/>
+          </p:cNvSpPr>
+          <p:nvPr>
+            <p:ph type="sldNum" idx="5" sz="quarter"/>
+          </p:nvPr>
+        </p:nvSpPr>
+        <p:spPr/>
+      </p:sp>
+    </p:spTree>
+  </p:cSld>
+  <p:clrMapOvr>
+    <a:masterClrMapping/>
+  </p:clrMapOvr>
+</p:notes>
+</file>
+
+<file path=ppt/notesSlides/notesSlide5.xml><?xml version="1.0" encoding="utf-8"?>
+<p:notes xmlns:a="http://schemas.openxmlformats.org/drawingml/2006/main" xmlns:p="http://schemas.openxmlformats.org/presentationml/2006/main" xmlns:r="http://schemas.openxmlformats.org/officeDocument/2006/relationships">
+  <p:cSld>
+    <p:spTree>
+      <p:nvGrpSpPr>
+        <p:cNvPr id="1" name=""/>
+        <p:cNvGrpSpPr/>
+        <p:nvPr/>
+      </p:nvGrpSpPr>
+      <p:grpSpPr>
+        <a:xfrm>
+          <a:off x="0" y="0"/>
+          <a:ext cx="0" cy="0"/>
+          <a:chOff x="0" y="0"/>
+          <a:chExt cx="0" cy="0"/>
+        </a:xfrm>
+      </p:grpSpPr>
+      <p:sp>
+        <p:nvSpPr>
+          <p:cNvPr id="2" name="Slide Image Placeholder 1"/>
+          <p:cNvSpPr>
+            <a:spLocks noGrp="1"/>
+          </p:cNvSpPr>
+          <p:nvPr>
+            <p:ph type="sldImg" idx="2"/>
+          </p:nvPr>
+        </p:nvSpPr>
+        <p:spPr/>
+      </p:sp>
+      <p:sp>
+        <p:nvSpPr>
+          <p:cNvPr id="3" name="Notes Placeholder 2"/>
+          <p:cNvSpPr>
+            <a:spLocks noGrp="1"/>
+          </p:cNvSpPr>
+          <p:nvPr>
+            <p:ph type="body" idx="3" sz="quarter"/>
+          </p:nvPr>
+        </p:nvSpPr>
+        <p:spPr/>
+        <p:txBody>
+          <a:bodyPr/>
+          <a:lstStyle/>
+          <a:p>
+            <a:r>
+              <a:t>[2:05–2:45] Как это работает под капотом. По контуру участка находим</a:t>
+            </a:r>
+          </a:p>
+          <a:p>
+            <a:r>
+              <a:t>точки панорам, вырезаем кадры в четырёх направлениях, прогоняем через замороженный</a:t>
+            </a:r>
+          </a:p>
+          <a:p>
+            <a:r>
+              <a:t>CLIP и обучаем поверх него лёгкий линейный классификатор. Заморозка важна: данных</a:t>
+            </a:r>
+          </a:p>
+          <a:p>
+            <a:r>
+              <a:t>немного, а так модель не переобучается. У участка обычно несколько ракурсов —</a:t>
+            </a:r>
+          </a:p>
+          <a:p>
+            <a:r>
+              <a:t>финальный класс выбираем голосованием с весом по уверенности.</a:t>
+            </a:r>
+          </a:p>
+        </p:txBody>
+      </p:sp>
+      <p:sp>
+        <p:nvSpPr>
+          <p:cNvPr id="4" name="Slide Number Placeholder 3"/>
+          <p:cNvSpPr>
+            <a:spLocks noGrp="1"/>
+          </p:cNvSpPr>
+          <p:nvPr>
+            <p:ph type="sldNum" idx="5" sz="quarter"/>
+          </p:nvPr>
+        </p:nvSpPr>
+        <p:spPr/>
+      </p:sp>
+    </p:spTree>
+  </p:cSld>
+  <p:clrMapOvr>
+    <a:masterClrMapping/>
+  </p:clrMapOvr>
+</p:notes>
+</file>
+
+<file path=ppt/notesSlides/notesSlide6.xml><?xml version="1.0" encoding="utf-8"?>
+<p:notes xmlns:a="http://schemas.openxmlformats.org/drawingml/2006/main" xmlns:p="http://schemas.openxmlformats.org/presentationml/2006/main" xmlns:r="http://schemas.openxmlformats.org/officeDocument/2006/relationships">
+  <p:cSld>
+    <p:spTree>
+      <p:nvGrpSpPr>
+        <p:cNvPr id="1" name=""/>
+        <p:cNvGrpSpPr/>
+        <p:nvPr/>
+      </p:nvGrpSpPr>
+      <p:grpSpPr>
+        <a:xfrm>
+          <a:off x="0" y="0"/>
+          <a:ext cx="0" cy="0"/>
+          <a:chOff x="0" y="0"/>
+          <a:chExt cx="0" cy="0"/>
+        </a:xfrm>
+      </p:grpSpPr>
+      <p:sp>
+        <p:nvSpPr>
+          <p:cNvPr id="2" name="Slide Image Placeholder 1"/>
+          <p:cNvSpPr>
+            <a:spLocks noGrp="1"/>
+          </p:cNvSpPr>
+          <p:nvPr>
+            <p:ph type="sldImg" idx="2"/>
+          </p:nvPr>
+        </p:nvSpPr>
+        <p:spPr/>
+      </p:sp>
+      <p:sp>
+        <p:nvSpPr>
+          <p:cNvPr id="3" name="Notes Placeholder 2"/>
+          <p:cNvSpPr>
+            <a:spLocks noGrp="1"/>
+          </p:cNvSpPr>
+          <p:nvPr>
+            <p:ph type="body" idx="3" sz="quarter"/>
+          </p:nvPr>
+        </p:nvSpPr>
+        <p:spPr/>
+        <p:txBody>
+          <a:bodyPr/>
+          <a:lstStyle/>
+          <a:p>
+            <a:r>
+              <a:t>[2:45–3:30] Результаты. Продакшен-модель на честной валидации со</a:t>
+            </a:r>
+          </a:p>
+          <a:p>
+            <a:r>
+              <a:t>сплитом по объектам: точность 76%, macro-F1 61%, а сбалансированный F1 — почти 74%.</a:t>
+            </a:r>
+          </a:p>
+          <a:p>
+            <a:r>
+              <a:t>В валидации есть все шесть классов. Посмотрите на нижнюю ленту: мы начинали с</a:t>
+            </a:r>
+          </a:p>
+          <a:p>
+            <a:r>
+              <a:t>zero-shot CLIP на уровне 20%, fine-tune на шумных метках упирался в 40%, а переход на</a:t>
+            </a:r>
+          </a:p>
+          <a:p>
+            <a:r>
+              <a:t>VLM-метки поднял точность до 76%. То есть главный рычаг — качество данных.</a:t>
+            </a:r>
+          </a:p>
+        </p:txBody>
+      </p:sp>
+      <p:sp>
+        <p:nvSpPr>
+          <p:cNvPr id="4" name="Slide Number Placeholder 3"/>
+          <p:cNvSpPr>
+            <a:spLocks noGrp="1"/>
+          </p:cNvSpPr>
+          <p:nvPr>
+            <p:ph type="sldNum" idx="5" sz="quarter"/>
+          </p:nvPr>
+        </p:nvSpPr>
+        <p:spPr/>
+      </p:sp>
+    </p:spTree>
+  </p:cSld>
+  <p:clrMapOvr>
+    <a:masterClrMapping/>
+  </p:clrMapOvr>
+</p:notes>
+</file>
+
+<file path=ppt/notesSlides/notesSlide7.xml><?xml version="1.0" encoding="utf-8"?>
+<p:notes xmlns:a="http://schemas.openxmlformats.org/drawingml/2006/main" xmlns:p="http://schemas.openxmlformats.org/presentationml/2006/main" xmlns:r="http://schemas.openxmlformats.org/officeDocument/2006/relationships">
+  <p:cSld>
+    <p:spTree>
+      <p:nvGrpSpPr>
+        <p:cNvPr id="1" name=""/>
+        <p:cNvGrpSpPr/>
+        <p:nvPr/>
+      </p:nvGrpSpPr>
+      <p:grpSpPr>
+        <a:xfrm>
+          <a:off x="0" y="0"/>
+          <a:ext cx="0" cy="0"/>
+          <a:chOff x="0" y="0"/>
+          <a:chExt cx="0" cy="0"/>
+        </a:xfrm>
+      </p:grpSpPr>
+      <p:sp>
+        <p:nvSpPr>
+          <p:cNvPr id="2" name="Slide Image Placeholder 1"/>
+          <p:cNvSpPr>
+            <a:spLocks noGrp="1"/>
+          </p:cNvSpPr>
+          <p:nvPr>
+            <p:ph type="sldImg" idx="2"/>
+          </p:nvPr>
+        </p:nvSpPr>
+        <p:spPr/>
+      </p:sp>
+      <p:sp>
+        <p:nvSpPr>
+          <p:cNvPr id="3" name="Notes Placeholder 2"/>
+          <p:cNvSpPr>
+            <a:spLocks noGrp="1"/>
+          </p:cNvSpPr>
+          <p:nvPr>
+            <p:ph type="body" idx="3" sz="quarter"/>
+          </p:nvPr>
+        </p:nvSpPr>
+        <p:spPr/>
+        <p:txBody>
+          <a:bodyPr/>
+          <a:lstStyle/>
+          <a:p>
+            <a:r>
+              <a:t>[3:30–4:00] Важно быть честным. Если сравнивать в лоб на всём GPKG,</a:t>
+            </a:r>
+          </a:p>
+          <a:p>
+            <a:r>
+              <a:t>простая текстовая эвристика даёт 88% — выше нашей модели. Это нормально: в тексте</a:t>
+            </a:r>
+          </a:p>
+          <a:p>
+            <a:r>
+              <a:t>кадастра уже зашиты подсказки. Ценность ML в другом — там, где текст одинаковый, как</a:t>
+            </a:r>
+          </a:p>
+          <a:p>
+            <a:r>
+              <a:t>на «зелени во дворах», решает только картинка. Я явно документирую ограничения:</a:t>
+            </a:r>
+          </a:p>
+          <a:p>
+            <a:r>
+              <a:t>сдвиг домена и маленькие выборки. ML — это дополнение к тексту на сложных случаях.</a:t>
+            </a:r>
+          </a:p>
+        </p:txBody>
+      </p:sp>
+      <p:sp>
+        <p:nvSpPr>
+          <p:cNvPr id="4" name="Slide Number Placeholder 3"/>
+          <p:cNvSpPr>
+            <a:spLocks noGrp="1"/>
+          </p:cNvSpPr>
+          <p:nvPr>
+            <p:ph type="sldNum" idx="5" sz="quarter"/>
+          </p:nvPr>
+        </p:nvSpPr>
+        <p:spPr/>
+      </p:sp>
+    </p:spTree>
+  </p:cSld>
+  <p:clrMapOvr>
+    <a:masterClrMapping/>
+  </p:clrMapOvr>
+</p:notes>
+</file>
+
+<file path=ppt/notesSlides/notesSlide8.xml><?xml version="1.0" encoding="utf-8"?>
+<p:notes xmlns:a="http://schemas.openxmlformats.org/drawingml/2006/main" xmlns:p="http://schemas.openxmlformats.org/presentationml/2006/main" xmlns:r="http://schemas.openxmlformats.org/officeDocument/2006/relationships">
+  <p:cSld>
+    <p:spTree>
+      <p:nvGrpSpPr>
+        <p:cNvPr id="1" name=""/>
+        <p:cNvGrpSpPr/>
+        <p:nvPr/>
+      </p:nvGrpSpPr>
+      <p:grpSpPr>
+        <a:xfrm>
+          <a:off x="0" y="0"/>
+          <a:ext cx="0" cy="0"/>
+          <a:chOff x="0" y="0"/>
+          <a:chExt cx="0" cy="0"/>
+        </a:xfrm>
+      </p:grpSpPr>
+      <p:sp>
+        <p:nvSpPr>
+          <p:cNvPr id="2" name="Slide Image Placeholder 1"/>
+          <p:cNvSpPr>
+            <a:spLocks noGrp="1"/>
+          </p:cNvSpPr>
+          <p:nvPr>
+            <p:ph type="sldImg" idx="2"/>
+          </p:nvPr>
+        </p:nvSpPr>
+        <p:spPr/>
+      </p:sp>
+      <p:sp>
+        <p:nvSpPr>
+          <p:cNvPr id="3" name="Notes Placeholder 2"/>
+          <p:cNvSpPr>
+            <a:spLocks noGrp="1"/>
+          </p:cNvSpPr>
+          <p:nvPr>
+            <p:ph type="body" idx="3" sz="quarter"/>
+          </p:nvPr>
+        </p:nvSpPr>
+        <p:spPr/>
+        <p:txBody>
+          <a:bodyPr/>
+          <a:lstStyle/>
+          <a:p>
+            <a:r>
+              <a:t>[4:00–4:30] Теперь продукт. Аналитик загружает GeoPackage, видит</a:t>
+            </a:r>
+          </a:p>
+          <a:p>
+            <a:r>
+              <a:t>автоклассификацию по панораме, карту и все ракурсы, правит класс и выгружает</a:t>
+            </a:r>
+          </a:p>
+          <a:p>
+            <a:r>
+              <a:t>результат обратно. Ключевое — правки не пропадают: это готовые gold-метки. Уже есть</a:t>
+            </a:r>
+          </a:p>
+          <a:p>
+            <a:r>
+              <a:t>7535 скорректированных участков, которые возвращаются в дообучение. Получается</a:t>
+            </a:r>
+          </a:p>
+          <a:p>
+            <a:r>
+              <a:t>замкнутый цикл: продукт улучшает модель.</a:t>
+            </a:r>
+          </a:p>
+        </p:txBody>
+      </p:sp>
+      <p:sp>
+        <p:nvSpPr>
+          <p:cNvPr id="4" name="Slide Number Placeholder 3"/>
+          <p:cNvSpPr>
+            <a:spLocks noGrp="1"/>
+          </p:cNvSpPr>
+          <p:nvPr>
+            <p:ph type="sldNum" idx="5" sz="quarter"/>
+          </p:nvPr>
+        </p:nvSpPr>
+        <p:spPr/>
+      </p:sp>
+    </p:spTree>
+  </p:cSld>
+  <p:clrMapOvr>
+    <a:masterClrMapping/>
+  </p:clrMapOvr>
+</p:notes>
+</file>
+
+<file path=ppt/notesSlides/notesSlide9.xml><?xml version="1.0" encoding="utf-8"?>
+<p:notes xmlns:a="http://schemas.openxmlformats.org/drawingml/2006/main" xmlns:p="http://schemas.openxmlformats.org/presentationml/2006/main" xmlns:r="http://schemas.openxmlformats.org/officeDocument/2006/relationships">
+  <p:cSld>
+    <p:spTree>
+      <p:nvGrpSpPr>
+        <p:cNvPr id="1" name=""/>
+        <p:cNvGrpSpPr/>
+        <p:nvPr/>
+      </p:nvGrpSpPr>
+      <p:grpSpPr>
+        <a:xfrm>
+          <a:off x="0" y="0"/>
+          <a:ext cx="0" cy="0"/>
+          <a:chOff x="0" y="0"/>
+          <a:chExt cx="0" cy="0"/>
+        </a:xfrm>
+      </p:grpSpPr>
+      <p:sp>
+        <p:nvSpPr>
+          <p:cNvPr id="2" name="Slide Image Placeholder 1"/>
+          <p:cNvSpPr>
+            <a:spLocks noGrp="1"/>
+          </p:cNvSpPr>
+          <p:nvPr>
+            <p:ph type="sldImg" idx="2"/>
+          </p:nvPr>
+        </p:nvSpPr>
+        <p:spPr/>
+      </p:sp>
+      <p:sp>
+        <p:nvSpPr>
+          <p:cNvPr id="3" name="Notes Placeholder 2"/>
+          <p:cNvSpPr>
+            <a:spLocks noGrp="1"/>
+          </p:cNvSpPr>
+          <p:nvPr>
+            <p:ph type="body" idx="3" sz="quarter"/>
+          </p:nvPr>
+        </p:nvSpPr>
+        <p:spPr/>
+        <p:txBody>
+          <a:bodyPr/>
+          <a:lstStyle/>
+          <a:p>
+            <a:r>
+              <a:t>[4:30–4:50] Инженерно всё сделано по-взрослому и воспроизводимо:</a:t>
+            </a:r>
+          </a:p>
+          <a:p>
+            <a:r>
+              <a:t>конфигурация на Hydra, трекинг экспериментов в TensorBoard, W&amp;B и MLflow, стадии</a:t>
+            </a:r>
+          </a:p>
+          <a:p>
+            <a:r>
+              <a:t>пайплайна в DVC, тесты и линтеры на pre-commit, Docker и CI на каждый коммит.</a:t>
+            </a:r>
+          </a:p>
+          <a:p>
+            <a:r>
+              <a:t>Отдельно — автономный LangGraph-агент, который сам гоняет цикл «оцени — спланируй —</a:t>
+            </a:r>
+          </a:p>
+          <a:p>
+            <a:r>
+              <a:t>обучи» до целевых метрик.</a:t>
+            </a:r>
+          </a:p>
+        </p:txBody>
+      </p:sp>
+      <p:sp>
+        <p:nvSpPr>
+          <p:cNvPr id="4" name="Slide Number Placeholder 3"/>
+          <p:cNvSpPr>
+            <a:spLocks noGrp="1"/>
+          </p:cNvSpPr>
+          <p:nvPr>
+            <p:ph type="sldNum" idx="5" sz="quarter"/>
+          </p:nvPr>
+        </p:nvSpPr>
+        <p:spPr/>
+      </p:sp>
+    </p:spTree>
+  </p:cSld>
+  <p:clrMapOvr>
+    <a:masterClrMapping/>
+  </p:clrMapOvr>
+</p:notes>
 </file>
 
 <file path=ppt/slideLayouts/slideLayout1.xml><?xml version="1.0" encoding="utf-8"?>
@@ -3101,14 +4329,102 @@
       <p:grpSpPr/>
       <p:sp>
         <p:nvSpPr>
-          <p:cNvPr id="2" name="TextBox 1"/>
+          <p:cNvPr id="2" name="Rectangle 1"/>
+          <p:cNvSpPr/>
+          <p:nvPr/>
+        </p:nvSpPr>
+        <p:spPr>
+          <a:xfrm>
+            <a:off x="0" y="0"/>
+            <a:ext cx="12192000" cy="6858000"/>
+          </a:xfrm>
+          <a:prstGeom prst="rect">
+            <a:avLst/>
+          </a:prstGeom>
+          <a:solidFill>
+            <a:srgbClr val="0F1E3D"/>
+          </a:solidFill>
+          <a:ln>
+            <a:noFill/>
+          </a:ln>
+          <a:effectLst/>
+        </p:spPr>
+        <p:style>
+          <a:lnRef idx="1">
+            <a:schemeClr val="accent1"/>
+          </a:lnRef>
+          <a:fillRef idx="3">
+            <a:schemeClr val="accent1"/>
+          </a:fillRef>
+          <a:effectRef idx="2">
+            <a:schemeClr val="accent1"/>
+          </a:effectRef>
+          <a:fontRef idx="minor">
+            <a:schemeClr val="lt1"/>
+          </a:fontRef>
+        </p:style>
+        <p:txBody>
+          <a:bodyPr rtlCol="0" anchor="ctr"/>
+          <a:lstStyle/>
+          <a:p>
+            <a:pPr algn="ctr"/>
+          </a:p>
+        </p:txBody>
+      </p:sp>
+      <p:sp>
+        <p:nvSpPr>
+          <p:cNvPr id="3" name="Rectangle 2"/>
+          <p:cNvSpPr/>
+          <p:nvPr/>
+        </p:nvSpPr>
+        <p:spPr>
+          <a:xfrm>
+            <a:off x="700000" y="2400000"/>
+            <a:ext cx="200000" cy="1500000"/>
+          </a:xfrm>
+          <a:prstGeom prst="rect">
+            <a:avLst/>
+          </a:prstGeom>
+          <a:solidFill>
+            <a:srgbClr val="E87A22"/>
+          </a:solidFill>
+          <a:ln>
+            <a:noFill/>
+          </a:ln>
+          <a:effectLst/>
+        </p:spPr>
+        <p:style>
+          <a:lnRef idx="1">
+            <a:schemeClr val="accent1"/>
+          </a:lnRef>
+          <a:fillRef idx="3">
+            <a:schemeClr val="accent1"/>
+          </a:fillRef>
+          <a:effectRef idx="2">
+            <a:schemeClr val="accent1"/>
+          </a:effectRef>
+          <a:fontRef idx="minor">
+            <a:schemeClr val="lt1"/>
+          </a:fontRef>
+        </p:style>
+        <p:txBody>
+          <a:bodyPr rtlCol="0" anchor="ctr"/>
+          <a:lstStyle/>
+          <a:p>
+            <a:pPr algn="ctr"/>
+          </a:p>
+        </p:txBody>
+      </p:sp>
+      <p:sp>
+        <p:nvSpPr>
+          <p:cNvPr id="4" name="TextBox 3"/>
           <p:cNvSpPr txBox="1"/>
           <p:nvPr/>
         </p:nvSpPr>
         <p:spPr>
           <a:xfrm>
-            <a:off x="548640" y="457200"/>
-            <a:ext cx="10972800" cy="1097280"/>
+            <a:off x="1050000" y="2350000"/>
+            <a:ext cx="10492000" cy="2100000"/>
           </a:xfrm>
           <a:prstGeom prst="rect">
             <a:avLst/>
@@ -3116,60 +4432,52 @@
           <a:noFill/>
         </p:spPr>
         <p:txBody>
-          <a:bodyPr wrap="none">
+          <a:bodyPr wrap="square" anchor="ctr">
             <a:spAutoFit/>
           </a:bodyPr>
           <a:lstStyle/>
           <a:p>
+            <a:pPr algn="l">
+              <a:spcAft>
+                <a:spcPts val="1000"/>
+              </a:spcAft>
+            </a:pPr>
+            <a:r>
+              <a:rPr sz="1500" b="1">
+                <a:solidFill>
+                  <a:srgbClr val="14A08F"/>
+                </a:solidFill>
+                <a:latin typeface="Calibri"/>
+              </a:rPr>
+              <a:t>JUNIOR ML CONTEST 2026 · AI TALENT HUB</a:t>
+            </a:r>
+          </a:p>
+          <a:p>
+            <a:r>
+              <a:rPr sz="4000" b="1">
+                <a:solidFill>
+                  <a:srgbClr val="FFFFFF"/>
+                </a:solidFill>
+                <a:latin typeface="Calibri"/>
+              </a:rPr>
+              <a:t>Классификатор городских участков
+по уличным панорамам</a:t>
+            </a:r>
+          </a:p>
+          <a:p>
             <a:pPr>
-              <a:defRPr sz="3200" b="1"/>
+              <a:spcBef>
+                <a:spcPts val="1800"/>
+              </a:spcBef>
             </a:pPr>
             <a:r>
-              <a:t>От панорамы к решению</a:t>
-            </a:r>
-          </a:p>
-        </p:txBody>
-      </p:sp>
-      <p:sp>
-        <p:nvSpPr>
-          <p:cNvPr id="3" name="TextBox 2"/>
-          <p:cNvSpPr txBox="1"/>
-          <p:nvPr/>
-        </p:nvSpPr>
-        <p:spPr>
-          <a:xfrm>
-            <a:off x="548640" y="1645920"/>
-            <a:ext cx="10972800" cy="4754880"/>
-          </a:xfrm>
-          <a:prstGeom prst="rect">
-            <a:avLst/>
-          </a:prstGeom>
-          <a:noFill/>
-        </p:spPr>
-        <p:txBody>
-          <a:bodyPr wrap="square">
-            <a:spAutoFit/>
-          </a:bodyPr>
-          <a:lstStyle/>
-          <a:p>
-            <a:pPr>
-              <a:defRPr sz="2000"/>
-            </a:pPr>
-            <a:r>
-              <a:t>Классификация городских участков по уличным панорамам</a:t>
-            </a:r>
-          </a:p>
-          <a:p>
-            <a:pPr>
-              <a:defRPr sz="1800"/>
-            </a:pPr>
-          </a:p>
-          <a:p>
-            <a:pPr>
-              <a:defRPr sz="1800"/>
-            </a:pPr>
-            <a:r>
-              <a:t>Дмитрий Новичков · ПИК AI Lab · JMLC 2026</a:t>
+              <a:rPr sz="2000">
+                <a:solidFill>
+                  <a:srgbClr val="C7D0DC"/>
+                </a:solidFill>
+                <a:latin typeface="Calibri"/>
+              </a:rPr>
+              <a:t>Дмитрий Новичков · ПИК AI Lab</a:t>
             </a:r>
           </a:p>
         </p:txBody>
@@ -3194,14 +4502,102 @@
       <p:grpSpPr/>
       <p:sp>
         <p:nvSpPr>
-          <p:cNvPr id="2" name="TextBox 1"/>
+          <p:cNvPr id="2" name="Rectangle 1"/>
+          <p:cNvSpPr/>
+          <p:nvPr/>
+        </p:nvSpPr>
+        <p:spPr>
+          <a:xfrm>
+            <a:off x="0" y="0"/>
+            <a:ext cx="12192000" cy="6858000"/>
+          </a:xfrm>
+          <a:prstGeom prst="rect">
+            <a:avLst/>
+          </a:prstGeom>
+          <a:solidFill>
+            <a:srgbClr val="0F1E3D"/>
+          </a:solidFill>
+          <a:ln>
+            <a:noFill/>
+          </a:ln>
+          <a:effectLst/>
+        </p:spPr>
+        <p:style>
+          <a:lnRef idx="1">
+            <a:schemeClr val="accent1"/>
+          </a:lnRef>
+          <a:fillRef idx="3">
+            <a:schemeClr val="accent1"/>
+          </a:fillRef>
+          <a:effectRef idx="2">
+            <a:schemeClr val="accent1"/>
+          </a:effectRef>
+          <a:fontRef idx="minor">
+            <a:schemeClr val="lt1"/>
+          </a:fontRef>
+        </p:style>
+        <p:txBody>
+          <a:bodyPr rtlCol="0" anchor="ctr"/>
+          <a:lstStyle/>
+          <a:p>
+            <a:pPr algn="ctr"/>
+          </a:p>
+        </p:txBody>
+      </p:sp>
+      <p:sp>
+        <p:nvSpPr>
+          <p:cNvPr id="3" name="Rectangle 2"/>
+          <p:cNvSpPr/>
+          <p:nvPr/>
+        </p:nvSpPr>
+        <p:spPr>
+          <a:xfrm>
+            <a:off x="700000" y="1700000"/>
+            <a:ext cx="200000" cy="1600000"/>
+          </a:xfrm>
+          <a:prstGeom prst="rect">
+            <a:avLst/>
+          </a:prstGeom>
+          <a:solidFill>
+            <a:srgbClr val="E87A22"/>
+          </a:solidFill>
+          <a:ln>
+            <a:noFill/>
+          </a:ln>
+          <a:effectLst/>
+        </p:spPr>
+        <p:style>
+          <a:lnRef idx="1">
+            <a:schemeClr val="accent1"/>
+          </a:lnRef>
+          <a:fillRef idx="3">
+            <a:schemeClr val="accent1"/>
+          </a:fillRef>
+          <a:effectRef idx="2">
+            <a:schemeClr val="accent1"/>
+          </a:effectRef>
+          <a:fontRef idx="minor">
+            <a:schemeClr val="lt1"/>
+          </a:fontRef>
+        </p:style>
+        <p:txBody>
+          <a:bodyPr rtlCol="0" anchor="ctr"/>
+          <a:lstStyle/>
+          <a:p>
+            <a:pPr algn="ctr"/>
+          </a:p>
+        </p:txBody>
+      </p:sp>
+      <p:sp>
+        <p:nvSpPr>
+          <p:cNvPr id="4" name="TextBox 3"/>
           <p:cNvSpPr txBox="1"/>
           <p:nvPr/>
         </p:nvSpPr>
         <p:spPr>
           <a:xfrm>
-            <a:off x="548640" y="457200"/>
-            <a:ext cx="10972800" cy="1097280"/>
+            <a:off x="1050000" y="1650000"/>
+            <a:ext cx="10492000" cy="2000000"/>
           </a:xfrm>
           <a:prstGeom prst="rect">
             <a:avLst/>
@@ -3209,30 +4605,123 @@
           <a:noFill/>
         </p:spPr>
         <p:txBody>
-          <a:bodyPr wrap="none">
+          <a:bodyPr wrap="square" anchor="t">
             <a:spAutoFit/>
           </a:bodyPr>
           <a:lstStyle/>
           <a:p>
+            <a:pPr algn="l">
+              <a:spcAft>
+                <a:spcPts val="1400"/>
+              </a:spcAft>
+            </a:pPr>
+            <a:r>
+              <a:rPr sz="1500" b="1">
+                <a:solidFill>
+                  <a:srgbClr val="14A08F"/>
+                </a:solidFill>
+                <a:latin typeface="Calibri"/>
+              </a:rPr>
+              <a:t>ИТОГ</a:t>
+            </a:r>
+            <a:r>
+              <a:rPr sz="1900" b="0">
+                <a:solidFill>
+                  <a:srgbClr val="FFFFFF"/>
+                </a:solidFill>
+                <a:latin typeface="Calibri"/>
+              </a:rPr>
+              <a:t>Полный цикл: данные → EDA → CLIP-probe → веб-пилот → AI-агент</a:t>
+            </a:r>
+          </a:p>
+          <a:p>
             <a:pPr>
-              <a:defRPr sz="3200" b="1"/>
+              <a:spcAft>
+                <a:spcPts val="1400"/>
+              </a:spcAft>
             </a:pPr>
             <a:r>
-              <a:t>Инженерия</a:t>
-            </a:r>
-          </a:p>
-        </p:txBody>
-      </p:sp>
-      <p:sp>
-        <p:nvSpPr>
-          <p:cNvPr id="3" name="TextBox 2"/>
+              <a:rPr sz="1900" b="0">
+                <a:solidFill>
+                  <a:srgbClr val="FFFFFF"/>
+                </a:solidFill>
+                <a:latin typeface="Calibri"/>
+              </a:rPr>
+              <a:t>76.2% на честной валидации; ниша — где текст не различает класс</a:t>
+            </a:r>
+          </a:p>
+          <a:p>
+            <a:pPr>
+              <a:spcAft>
+                <a:spcPts val="1400"/>
+              </a:spcAft>
+            </a:pPr>
+            <a:r>
+              <a:rPr sz="1900" b="0">
+                <a:solidFill>
+                  <a:srgbClr val="FFFFFF"/>
+                </a:solidFill>
+                <a:latin typeface="Calibri"/>
+              </a:rPr>
+              <a:t>Работающий продукт с петлёй обратной связи для аналитиков</a:t>
+            </a:r>
+          </a:p>
+        </p:txBody>
+      </p:sp>
+      <p:sp>
+        <p:nvSpPr>
+          <p:cNvPr id="5" name="Rectangle 4"/>
+          <p:cNvSpPr/>
+          <p:nvPr/>
+        </p:nvSpPr>
+        <p:spPr>
+          <a:xfrm>
+            <a:off x="700000" y="4900000"/>
+            <a:ext cx="10792000" cy="2"/>
+          </a:xfrm>
+          <a:prstGeom prst="rect">
+            <a:avLst/>
+          </a:prstGeom>
+          <a:noFill/>
+          <a:ln w="12700">
+            <a:solidFill>
+              <a:srgbClr val="14A08F"/>
+            </a:solidFill>
+          </a:ln>
+          <a:effectLst/>
+        </p:spPr>
+        <p:style>
+          <a:lnRef idx="1">
+            <a:schemeClr val="accent1"/>
+          </a:lnRef>
+          <a:fillRef idx="3">
+            <a:schemeClr val="accent1"/>
+          </a:fillRef>
+          <a:effectRef idx="2">
+            <a:schemeClr val="accent1"/>
+          </a:effectRef>
+          <a:fontRef idx="minor">
+            <a:schemeClr val="lt1"/>
+          </a:fontRef>
+        </p:style>
+        <p:txBody>
+          <a:bodyPr rtlCol="0" anchor="ctr"/>
+          <a:lstStyle/>
+          <a:p>
+            <a:pPr algn="ctr"/>
+          </a:p>
+        </p:txBody>
+      </p:sp>
+      <p:sp>
+        <p:nvSpPr>
+          <p:cNvPr id="6" name="TextBox 5"/>
           <p:cNvSpPr txBox="1"/>
           <p:nvPr/>
         </p:nvSpPr>
         <p:spPr>
           <a:xfrm>
-            <a:off x="548640" y="1645920"/>
-            <a:ext cx="10972800" cy="4754880"/>
+            <a:off x="700000" y="5150000"/>
+            <a:ext cx="10792000" cy="900000"/>
           </a:xfrm>
           <a:prstGeom prst="rect">
             <a:avLst/>
@@ -3240,69 +4729,47 @@
           <a:noFill/>
         </p:spPr>
         <p:txBody>
-          <a:bodyPr wrap="square">
+          <a:bodyPr wrap="square" anchor="t">
             <a:spAutoFit/>
           </a:bodyPr>
           <a:lstStyle/>
           <a:p>
-            <a:pPr>
-              <a:defRPr sz="2000"/>
+            <a:pPr algn="l">
+              <a:spcAft>
+                <a:spcPts val="600"/>
+              </a:spcAft>
             </a:pPr>
             <a:r>
-              <a:t>Python · PyTorch · OpenCLIP · Flask · GeoPandas</a:t>
-            </a:r>
-          </a:p>
-          <a:p>
-            <a:pPr>
-              <a:defRPr sz="1800"/>
-            </a:pPr>
-            <a:r>
-              <a:t>Docker · CI · воспроизводимые скрипты</a:t>
-            </a:r>
-          </a:p>
-          <a:p>
-            <a:pPr>
-              <a:defRPr sz="1800"/>
-            </a:pPr>
-          </a:p>
-          <a:p>
-            <a:pPr>
-              <a:defRPr sz="1800"/>
-            </a:pPr>
-            <a:r>
-              <a:t>github.com/mfclabber/aith_junior_ml_contest</a:t>
-            </a:r>
-          </a:p>
-        </p:txBody>
-      </p:sp>
-    </p:spTree>
-  </p:cSld>
-  <p:clrMapOvr>
-    <a:masterClrMapping/>
-  </p:clrMapOvr>
-</p:sld>
-</file>
-
-<file path=ppt/slides/slide11.xml><?xml version="1.0" encoding="utf-8"?>
-<p:sld xmlns:a="http://schemas.openxmlformats.org/drawingml/2006/main" xmlns:p="http://schemas.openxmlformats.org/presentationml/2006/main" xmlns:r="http://schemas.openxmlformats.org/officeDocument/2006/relationships">
-  <p:cSld>
-    <p:spTree>
-      <p:nvGrpSpPr>
-        <p:cNvPr id="1" name=""/>
-        <p:cNvGrpSpPr/>
-        <p:nvPr/>
-      </p:nvGrpSpPr>
-      <p:grpSpPr/>
-      <p:sp>
-        <p:nvSpPr>
-          <p:cNvPr id="2" name="TextBox 1"/>
+              <a:rPr sz="1800" b="1">
+                <a:solidFill>
+                  <a:srgbClr val="FFFFFF"/>
+                </a:solidFill>
+                <a:latin typeface="Calibri"/>
+              </a:rPr>
+              <a:t>Дмитрий Новичков   </a:t>
+            </a:r>
+            <a:r>
+              <a:rPr sz="1600" b="0">
+                <a:solidFill>
+                  <a:srgbClr val="C7D0DC"/>
+                </a:solidFill>
+                <a:latin typeface="Calibri"/>
+              </a:rPr>
+              <a:t>novichkovde@pik.ru · github.com/mfclabber/aith_junior_ml_contest</a:t>
+            </a:r>
+          </a:p>
+        </p:txBody>
+      </p:sp>
+      <p:sp>
+        <p:nvSpPr>
+          <p:cNvPr id="7" name="TextBox 6"/>
           <p:cNvSpPr txBox="1"/>
           <p:nvPr/>
         </p:nvSpPr>
         <p:spPr>
           <a:xfrm>
-            <a:off x="548640" y="457200"/>
-            <a:ext cx="10972800" cy="1097280"/>
+            <a:off x="700000" y="5750000"/>
+            <a:ext cx="10792000" cy="500000"/>
           </a:xfrm>
           <a:prstGeom prst="rect">
             <a:avLst/>
@@ -3310,172 +4777,24 @@
           <a:noFill/>
         </p:spPr>
         <p:txBody>
-          <a:bodyPr wrap="none">
+          <a:bodyPr wrap="square" anchor="t">
             <a:spAutoFit/>
           </a:bodyPr>
           <a:lstStyle/>
           <a:p>
-            <a:pPr>
-              <a:defRPr sz="3200" b="1"/>
+            <a:pPr algn="l">
+              <a:spcAft>
+                <a:spcPts val="600"/>
+              </a:spcAft>
             </a:pPr>
             <a:r>
-              <a:t>Импакт и roadmap</a:t>
-            </a:r>
-          </a:p>
-        </p:txBody>
-      </p:sp>
-      <p:sp>
-        <p:nvSpPr>
-          <p:cNvPr id="3" name="TextBox 2"/>
-          <p:cNvSpPr txBox="1"/>
-          <p:nvPr/>
-        </p:nvSpPr>
-        <p:spPr>
-          <a:xfrm>
-            <a:off x="548640" y="1645920"/>
-            <a:ext cx="10972800" cy="4754880"/>
-          </a:xfrm>
-          <a:prstGeom prst="rect">
-            <a:avLst/>
-          </a:prstGeom>
-          <a:noFill/>
-        </p:spPr>
-        <p:txBody>
-          <a:bodyPr wrap="square">
-            <a:spAutoFit/>
-          </a:bodyPr>
-          <a:lstStyle/>
-          <a:p>
-            <a:pPr>
-              <a:defRPr sz="2000"/>
-            </a:pPr>
-            <a:r>
-              <a:t>• Пилот для аналитиков девелопера</a:t>
-            </a:r>
-          </a:p>
-          <a:p>
-            <a:pPr>
-              <a:defRPr sz="1800"/>
-            </a:pPr>
-            <a:r>
-              <a:t>• Сокращение ручного просмотра панорам</a:t>
-            </a:r>
-          </a:p>
-          <a:p>
-            <a:pPr>
-              <a:defRPr sz="1800"/>
-            </a:pPr>
-            <a:r>
-              <a:t>• Roadmap: analyst fine-tune, greenery hard-cases,</a:t>
-            </a:r>
-          </a:p>
-          <a:p>
-            <a:pPr>
-              <a:defRPr sz="1800"/>
-            </a:pPr>
-            <a:r>
-              <a:t>  active learning, VLM в production API</a:t>
-            </a:r>
-          </a:p>
-        </p:txBody>
-      </p:sp>
-    </p:spTree>
-  </p:cSld>
-  <p:clrMapOvr>
-    <a:masterClrMapping/>
-  </p:clrMapOvr>
-</p:sld>
-</file>
-
-<file path=ppt/slides/slide12.xml><?xml version="1.0" encoding="utf-8"?>
-<p:sld xmlns:a="http://schemas.openxmlformats.org/drawingml/2006/main" xmlns:p="http://schemas.openxmlformats.org/presentationml/2006/main" xmlns:r="http://schemas.openxmlformats.org/officeDocument/2006/relationships">
-  <p:cSld>
-    <p:spTree>
-      <p:nvGrpSpPr>
-        <p:cNvPr id="1" name=""/>
-        <p:cNvGrpSpPr/>
-        <p:nvPr/>
-      </p:nvGrpSpPr>
-      <p:grpSpPr/>
-      <p:sp>
-        <p:nvSpPr>
-          <p:cNvPr id="2" name="TextBox 1"/>
-          <p:cNvSpPr txBox="1"/>
-          <p:nvPr/>
-        </p:nvSpPr>
-        <p:spPr>
-          <a:xfrm>
-            <a:off x="548640" y="457200"/>
-            <a:ext cx="10972800" cy="1097280"/>
-          </a:xfrm>
-          <a:prstGeom prst="rect">
-            <a:avLst/>
-          </a:prstGeom>
-          <a:noFill/>
-        </p:spPr>
-        <p:txBody>
-          <a:bodyPr wrap="none">
-            <a:spAutoFit/>
-          </a:bodyPr>
-          <a:lstStyle/>
-          <a:p>
-            <a:pPr>
-              <a:defRPr sz="3200" b="1"/>
-            </a:pPr>
-            <a:r>
-              <a:t>Спасибо!</a:t>
-            </a:r>
-          </a:p>
-        </p:txBody>
-      </p:sp>
-      <p:sp>
-        <p:nvSpPr>
-          <p:cNvPr id="3" name="TextBox 2"/>
-          <p:cNvSpPr txBox="1"/>
-          <p:nvPr/>
-        </p:nvSpPr>
-        <p:spPr>
-          <a:xfrm>
-            <a:off x="548640" y="1645920"/>
-            <a:ext cx="10972800" cy="4754880"/>
-          </a:xfrm>
-          <a:prstGeom prst="rect">
-            <a:avLst/>
-          </a:prstGeom>
-          <a:noFill/>
-        </p:spPr>
-        <p:txBody>
-          <a:bodyPr wrap="square">
-            <a:spAutoFit/>
-          </a:bodyPr>
-          <a:lstStyle/>
-          <a:p>
-            <a:pPr>
-              <a:defRPr sz="2000"/>
-            </a:pPr>
-            <a:r>
-              <a:t>Демо: docker compose up</a:t>
-            </a:r>
-          </a:p>
-          <a:p>
-            <a:pPr>
-              <a:defRPr sz="1800"/>
-            </a:pPr>
-            <a:r>
-              <a:t>Вопросы?</a:t>
-            </a:r>
-          </a:p>
-          <a:p>
-            <a:pPr>
-              <a:defRPr sz="1800"/>
-            </a:pPr>
-          </a:p>
-          <a:p>
-            <a:pPr>
-              <a:defRPr sz="1800"/>
-            </a:pPr>
-            <a:r>
-              <a:t>novichkovde@pik.ru · github.com/mfclabber</a:t>
+              <a:rPr sz="1500" b="1">
+                <a:solidFill>
+                  <a:srgbClr val="14A08F"/>
+                </a:solidFill>
+                <a:latin typeface="Calibri"/>
+              </a:rPr>
+              <a:t>Демо: make demo  ·  Спасибо! Готов к вопросам.</a:t>
             </a:r>
           </a:p>
         </p:txBody>
@@ -3500,14 +4819,146 @@
       <p:grpSpPr/>
       <p:sp>
         <p:nvSpPr>
-          <p:cNvPr id="2" name="TextBox 1"/>
+          <p:cNvPr id="2" name="Rectangle 1"/>
+          <p:cNvSpPr/>
+          <p:nvPr/>
+        </p:nvSpPr>
+        <p:spPr>
+          <a:xfrm>
+            <a:off x="0" y="0"/>
+            <a:ext cx="12192000" cy="6858000"/>
+          </a:xfrm>
+          <a:prstGeom prst="rect">
+            <a:avLst/>
+          </a:prstGeom>
+          <a:solidFill>
+            <a:srgbClr val="FFFFFF"/>
+          </a:solidFill>
+          <a:ln>
+            <a:noFill/>
+          </a:ln>
+          <a:effectLst/>
+        </p:spPr>
+        <p:style>
+          <a:lnRef idx="1">
+            <a:schemeClr val="accent1"/>
+          </a:lnRef>
+          <a:fillRef idx="3">
+            <a:schemeClr val="accent1"/>
+          </a:fillRef>
+          <a:effectRef idx="2">
+            <a:schemeClr val="accent1"/>
+          </a:effectRef>
+          <a:fontRef idx="minor">
+            <a:schemeClr val="lt1"/>
+          </a:fontRef>
+        </p:style>
+        <p:txBody>
+          <a:bodyPr rtlCol="0" anchor="ctr"/>
+          <a:lstStyle/>
+          <a:p>
+            <a:pPr algn="ctr"/>
+          </a:p>
+        </p:txBody>
+      </p:sp>
+      <p:sp>
+        <p:nvSpPr>
+          <p:cNvPr id="3" name="Rectangle 2"/>
+          <p:cNvSpPr/>
+          <p:nvPr/>
+        </p:nvSpPr>
+        <p:spPr>
+          <a:xfrm>
+            <a:off x="0" y="0"/>
+            <a:ext cx="12192000" cy="1500000"/>
+          </a:xfrm>
+          <a:prstGeom prst="rect">
+            <a:avLst/>
+          </a:prstGeom>
+          <a:solidFill>
+            <a:srgbClr val="0F1E3D"/>
+          </a:solidFill>
+          <a:ln>
+            <a:noFill/>
+          </a:ln>
+          <a:effectLst/>
+        </p:spPr>
+        <p:style>
+          <a:lnRef idx="1">
+            <a:schemeClr val="accent1"/>
+          </a:lnRef>
+          <a:fillRef idx="3">
+            <a:schemeClr val="accent1"/>
+          </a:fillRef>
+          <a:effectRef idx="2">
+            <a:schemeClr val="accent1"/>
+          </a:effectRef>
+          <a:fontRef idx="minor">
+            <a:schemeClr val="lt1"/>
+          </a:fontRef>
+        </p:style>
+        <p:txBody>
+          <a:bodyPr rtlCol="0" anchor="ctr"/>
+          <a:lstStyle/>
+          <a:p>
+            <a:pPr algn="ctr"/>
+          </a:p>
+        </p:txBody>
+      </p:sp>
+      <p:sp>
+        <p:nvSpPr>
+          <p:cNvPr id="4" name="Rectangle 3"/>
+          <p:cNvSpPr/>
+          <p:nvPr/>
+        </p:nvSpPr>
+        <p:spPr>
+          <a:xfrm>
+            <a:off x="700000" y="560000"/>
+            <a:ext cx="180000" cy="560000"/>
+          </a:xfrm>
+          <a:prstGeom prst="rect">
+            <a:avLst/>
+          </a:prstGeom>
+          <a:solidFill>
+            <a:srgbClr val="E87A22"/>
+          </a:solidFill>
+          <a:ln>
+            <a:noFill/>
+          </a:ln>
+          <a:effectLst/>
+        </p:spPr>
+        <p:style>
+          <a:lnRef idx="1">
+            <a:schemeClr val="accent1"/>
+          </a:lnRef>
+          <a:fillRef idx="3">
+            <a:schemeClr val="accent1"/>
+          </a:fillRef>
+          <a:effectRef idx="2">
+            <a:schemeClr val="accent1"/>
+          </a:effectRef>
+          <a:fontRef idx="minor">
+            <a:schemeClr val="lt1"/>
+          </a:fontRef>
+        </p:style>
+        <p:txBody>
+          <a:bodyPr rtlCol="0" anchor="ctr"/>
+          <a:lstStyle/>
+          <a:p>
+            <a:pPr algn="ctr"/>
+          </a:p>
+        </p:txBody>
+      </p:sp>
+      <p:sp>
+        <p:nvSpPr>
+          <p:cNvPr id="5" name="TextBox 4"/>
           <p:cNvSpPr txBox="1"/>
           <p:nvPr/>
         </p:nvSpPr>
         <p:spPr>
           <a:xfrm>
-            <a:off x="548640" y="457200"/>
-            <a:ext cx="10972800" cy="1097280"/>
+            <a:off x="1000000" y="360000"/>
+            <a:ext cx="10492000" cy="900000"/>
           </a:xfrm>
           <a:prstGeom prst="rect">
             <a:avLst/>
@@ -3515,30 +4966,49 @@
           <a:noFill/>
         </p:spPr>
         <p:txBody>
-          <a:bodyPr wrap="none">
+          <a:bodyPr wrap="square" anchor="ctr">
             <a:spAutoFit/>
           </a:bodyPr>
           <a:lstStyle/>
           <a:p>
-            <a:pPr>
-              <a:defRPr sz="3200" b="1"/>
+            <a:pPr algn="l">
+              <a:spcAft>
+                <a:spcPts val="200"/>
+              </a:spcAft>
             </a:pPr>
             <a:r>
-              <a:t>Проблема</a:t>
-            </a:r>
-          </a:p>
-        </p:txBody>
-      </p:sp>
-      <p:sp>
-        <p:nvSpPr>
-          <p:cNvPr id="3" name="TextBox 2"/>
+              <a:rPr sz="1300" b="1">
+                <a:solidFill>
+                  <a:srgbClr val="14A08F"/>
+                </a:solidFill>
+                <a:latin typeface="Calibri"/>
+              </a:rPr>
+              <a:t>ПРОБЛЕМА</a:t>
+            </a:r>
+          </a:p>
+          <a:p>
+            <a:r>
+              <a:rPr sz="3000" b="1">
+                <a:solidFill>
+                  <a:srgbClr val="FFFFFF"/>
+                </a:solidFill>
+                <a:latin typeface="Calibri"/>
+              </a:rPr>
+              <a:t>Тысячи участков нужно оценивать вручную</a:t>
+            </a:r>
+          </a:p>
+        </p:txBody>
+      </p:sp>
+      <p:sp>
+        <p:nvSpPr>
+          <p:cNvPr id="6" name="TextBox 5"/>
           <p:cNvSpPr txBox="1"/>
           <p:nvPr/>
         </p:nvSpPr>
         <p:spPr>
           <a:xfrm>
-            <a:off x="548640" y="1645920"/>
-            <a:ext cx="10972800" cy="4754880"/>
+            <a:off x="700000" y="1900000"/>
+            <a:ext cx="10792000" cy="4200000"/>
           </a:xfrm>
           <a:prstGeom prst="rect">
             <a:avLst/>
@@ -3546,48 +5016,138 @@
           <a:noFill/>
         </p:spPr>
         <p:txBody>
-          <a:bodyPr wrap="square">
+          <a:bodyPr wrap="square" anchor="t">
             <a:spAutoFit/>
           </a:bodyPr>
           <a:lstStyle/>
           <a:p>
             <a:pPr>
-              <a:defRPr sz="2000"/>
+              <a:spcAft>
+                <a:spcPts val="1600"/>
+              </a:spcAft>
             </a:pPr>
             <a:r>
-              <a:t>• Тысячи участков — нужна оценка состояния застройки</a:t>
+              <a:rPr sz="2000" b="0">
+                <a:solidFill>
+                  <a:srgbClr val="1B2538"/>
+                </a:solidFill>
+                <a:latin typeface="Calibri"/>
+              </a:rPr>
+              <a:t>Аналитики руками просматривают тысячи участков Москвы: стройка, деградация, недоиспользование. Медленно и не масштабируется.</a:t>
             </a:r>
           </a:p>
           <a:p>
             <a:pPr>
-              <a:defRPr sz="1800"/>
+              <a:spcAft>
+                <a:spcPts val="1600"/>
+              </a:spcAft>
             </a:pPr>
             <a:r>
-              <a:t>• Спутник не видит фасады и дворы</a:t>
+              <a:rPr sz="2000" b="0">
+                <a:solidFill>
+                  <a:srgbClr val="1B2538"/>
+                </a:solidFill>
+                <a:latin typeface="Calibri"/>
+              </a:rPr>
+              <a:t>Спутник не помогает — </a:t>
+            </a:r>
+            <a:r>
+              <a:rPr sz="2000" b="1">
+                <a:solidFill>
+                  <a:srgbClr val="1B2538"/>
+                </a:solidFill>
+                <a:latin typeface="Calibri"/>
+              </a:rPr>
+              <a:t>не видит дворы и фасады.</a:t>
             </a:r>
           </a:p>
           <a:p>
             <a:pPr>
-              <a:defRPr sz="1800"/>
+              <a:spcAft>
+                <a:spcPts val="1600"/>
+              </a:spcAft>
             </a:pPr>
             <a:r>
-              <a:t>• Текст в GPKG часто не различает класс</a:t>
+              <a:rPr sz="2000" b="0">
+                <a:solidFill>
+                  <a:srgbClr val="1B2538"/>
+                </a:solidFill>
+                <a:latin typeface="Calibri"/>
+              </a:rPr>
+              <a:t>Текст в GPKG часто не различает класс: </a:t>
+            </a:r>
+            <a:r>
+              <a:rPr sz="2000" b="1">
+                <a:solidFill>
+                  <a:srgbClr val="E87A22"/>
+                </a:solidFill>
+                <a:latin typeface="Calibri"/>
+              </a:rPr>
+              <a:t>1712 участков</a:t>
+            </a:r>
+            <a:r>
+              <a:rPr sz="2000" b="0">
+                <a:solidFill>
+                  <a:srgbClr val="1B2538"/>
+                </a:solidFill>
+                <a:latin typeface="Calibri"/>
+              </a:rPr>
+              <a:t> с одной фразой «зелень во дворах» — а классы разные.</a:t>
             </a:r>
           </a:p>
           <a:p>
             <a:pPr>
-              <a:defRPr sz="1800"/>
+              <a:spcAft>
+                <a:spcPts val="1600"/>
+              </a:spcAft>
             </a:pPr>
             <a:r>
-              <a:t>  (1712× «зелень во дворах» → природа ИЛИ жилой фонд)</a:t>
-            </a:r>
-          </a:p>
-          <a:p>
-            <a:pPr>
-              <a:defRPr sz="1800"/>
+              <a:rPr sz="2000" b="1">
+                <a:solidFill>
+                  <a:srgbClr val="14A08F"/>
+                </a:solidFill>
+                <a:latin typeface="Calibri"/>
+              </a:rPr>
+              <a:t>Отличить их можно только по виду с улицы.</a:t>
+            </a:r>
+          </a:p>
+        </p:txBody>
+      </p:sp>
+      <p:sp>
+        <p:nvSpPr>
+          <p:cNvPr id="7" name="TextBox 6"/>
+          <p:cNvSpPr txBox="1"/>
+          <p:nvPr/>
+        </p:nvSpPr>
+        <p:spPr>
+          <a:xfrm>
+            <a:off x="11292000" y="6358000"/>
+            <a:ext cx="700000" cy="350000"/>
+          </a:xfrm>
+          <a:prstGeom prst="rect">
+            <a:avLst/>
+          </a:prstGeom>
+          <a:noFill/>
+        </p:spPr>
+        <p:txBody>
+          <a:bodyPr wrap="square" anchor="t">
+            <a:spAutoFit/>
+          </a:bodyPr>
+          <a:lstStyle/>
+          <a:p>
+            <a:pPr algn="r">
+              <a:spcAft>
+                <a:spcPts val="600"/>
+              </a:spcAft>
             </a:pPr>
             <a:r>
-              <a:t>• Аналитик тратит часы на ручной просмотр панорам</a:t>
+              <a:rPr sz="1100" b="0">
+                <a:solidFill>
+                  <a:srgbClr val="5B6672"/>
+                </a:solidFill>
+                <a:latin typeface="Calibri"/>
+              </a:rPr>
+              <a:t>2/10</a:t>
             </a:r>
           </a:p>
         </p:txBody>
@@ -3612,14 +5172,146 @@
       <p:grpSpPr/>
       <p:sp>
         <p:nvSpPr>
-          <p:cNvPr id="2" name="TextBox 1"/>
+          <p:cNvPr id="2" name="Rectangle 1"/>
+          <p:cNvSpPr/>
+          <p:nvPr/>
+        </p:nvSpPr>
+        <p:spPr>
+          <a:xfrm>
+            <a:off x="0" y="0"/>
+            <a:ext cx="12192000" cy="6858000"/>
+          </a:xfrm>
+          <a:prstGeom prst="rect">
+            <a:avLst/>
+          </a:prstGeom>
+          <a:solidFill>
+            <a:srgbClr val="FFFFFF"/>
+          </a:solidFill>
+          <a:ln>
+            <a:noFill/>
+          </a:ln>
+          <a:effectLst/>
+        </p:spPr>
+        <p:style>
+          <a:lnRef idx="1">
+            <a:schemeClr val="accent1"/>
+          </a:lnRef>
+          <a:fillRef idx="3">
+            <a:schemeClr val="accent1"/>
+          </a:fillRef>
+          <a:effectRef idx="2">
+            <a:schemeClr val="accent1"/>
+          </a:effectRef>
+          <a:fontRef idx="minor">
+            <a:schemeClr val="lt1"/>
+          </a:fontRef>
+        </p:style>
+        <p:txBody>
+          <a:bodyPr rtlCol="0" anchor="ctr"/>
+          <a:lstStyle/>
+          <a:p>
+            <a:pPr algn="ctr"/>
+          </a:p>
+        </p:txBody>
+      </p:sp>
+      <p:sp>
+        <p:nvSpPr>
+          <p:cNvPr id="3" name="Rectangle 2"/>
+          <p:cNvSpPr/>
+          <p:nvPr/>
+        </p:nvSpPr>
+        <p:spPr>
+          <a:xfrm>
+            <a:off x="0" y="0"/>
+            <a:ext cx="12192000" cy="1500000"/>
+          </a:xfrm>
+          <a:prstGeom prst="rect">
+            <a:avLst/>
+          </a:prstGeom>
+          <a:solidFill>
+            <a:srgbClr val="0F1E3D"/>
+          </a:solidFill>
+          <a:ln>
+            <a:noFill/>
+          </a:ln>
+          <a:effectLst/>
+        </p:spPr>
+        <p:style>
+          <a:lnRef idx="1">
+            <a:schemeClr val="accent1"/>
+          </a:lnRef>
+          <a:fillRef idx="3">
+            <a:schemeClr val="accent1"/>
+          </a:fillRef>
+          <a:effectRef idx="2">
+            <a:schemeClr val="accent1"/>
+          </a:effectRef>
+          <a:fontRef idx="minor">
+            <a:schemeClr val="lt1"/>
+          </a:fontRef>
+        </p:style>
+        <p:txBody>
+          <a:bodyPr rtlCol="0" anchor="ctr"/>
+          <a:lstStyle/>
+          <a:p>
+            <a:pPr algn="ctr"/>
+          </a:p>
+        </p:txBody>
+      </p:sp>
+      <p:sp>
+        <p:nvSpPr>
+          <p:cNvPr id="4" name="Rectangle 3"/>
+          <p:cNvSpPr/>
+          <p:nvPr/>
+        </p:nvSpPr>
+        <p:spPr>
+          <a:xfrm>
+            <a:off x="700000" y="560000"/>
+            <a:ext cx="180000" cy="560000"/>
+          </a:xfrm>
+          <a:prstGeom prst="rect">
+            <a:avLst/>
+          </a:prstGeom>
+          <a:solidFill>
+            <a:srgbClr val="E87A22"/>
+          </a:solidFill>
+          <a:ln>
+            <a:noFill/>
+          </a:ln>
+          <a:effectLst/>
+        </p:spPr>
+        <p:style>
+          <a:lnRef idx="1">
+            <a:schemeClr val="accent1"/>
+          </a:lnRef>
+          <a:fillRef idx="3">
+            <a:schemeClr val="accent1"/>
+          </a:fillRef>
+          <a:effectRef idx="2">
+            <a:schemeClr val="accent1"/>
+          </a:effectRef>
+          <a:fontRef idx="minor">
+            <a:schemeClr val="lt1"/>
+          </a:fontRef>
+        </p:style>
+        <p:txBody>
+          <a:bodyPr rtlCol="0" anchor="ctr"/>
+          <a:lstStyle/>
+          <a:p>
+            <a:pPr algn="ctr"/>
+          </a:p>
+        </p:txBody>
+      </p:sp>
+      <p:sp>
+        <p:nvSpPr>
+          <p:cNvPr id="5" name="TextBox 4"/>
           <p:cNvSpPr txBox="1"/>
           <p:nvPr/>
         </p:nvSpPr>
         <p:spPr>
           <a:xfrm>
-            <a:off x="548640" y="457200"/>
-            <a:ext cx="10972800" cy="1097280"/>
+            <a:off x="1000000" y="360000"/>
+            <a:ext cx="10492000" cy="900000"/>
           </a:xfrm>
           <a:prstGeom prst="rect">
             <a:avLst/>
@@ -3627,30 +5319,49 @@
           <a:noFill/>
         </p:spPr>
         <p:txBody>
-          <a:bodyPr wrap="none">
+          <a:bodyPr wrap="square" anchor="ctr">
             <a:spAutoFit/>
           </a:bodyPr>
           <a:lstStyle/>
           <a:p>
-            <a:pPr>
-              <a:defRPr sz="3200" b="1"/>
+            <a:pPr algn="l">
+              <a:spcAft>
+                <a:spcPts val="200"/>
+              </a:spcAft>
             </a:pPr>
             <a:r>
-              <a:t>Решение / MVP</a:t>
-            </a:r>
-          </a:p>
-        </p:txBody>
-      </p:sp>
-      <p:sp>
-        <p:nvSpPr>
-          <p:cNvPr id="3" name="TextBox 2"/>
+              <a:rPr sz="1300" b="1">
+                <a:solidFill>
+                  <a:srgbClr val="14A08F"/>
+                </a:solidFill>
+                <a:latin typeface="Calibri"/>
+              </a:rPr>
+              <a:t>РЕШЕНИЕ</a:t>
+            </a:r>
+          </a:p>
+          <a:p>
+            <a:r>
+              <a:rPr sz="3000" b="1">
+                <a:solidFill>
+                  <a:srgbClr val="FFFFFF"/>
+                </a:solidFill>
+                <a:latin typeface="Calibri"/>
+              </a:rPr>
+              <a:t>Панорама участка → тип территории</a:t>
+            </a:r>
+          </a:p>
+        </p:txBody>
+      </p:sp>
+      <p:sp>
+        <p:nvSpPr>
+          <p:cNvPr id="6" name="TextBox 5"/>
           <p:cNvSpPr txBox="1"/>
           <p:nvPr/>
         </p:nvSpPr>
         <p:spPr>
           <a:xfrm>
-            <a:off x="548640" y="1645920"/>
-            <a:ext cx="10972800" cy="4754880"/>
+            <a:off x="700000" y="1750000"/>
+            <a:ext cx="10792000" cy="700000"/>
           </a:xfrm>
           <a:prstGeom prst="rect">
             <a:avLst/>
@@ -3658,45 +5369,921 @@
           <a:noFill/>
         </p:spPr>
         <p:txBody>
-          <a:bodyPr wrap="square">
+          <a:bodyPr wrap="square" anchor="t">
             <a:spAutoFit/>
           </a:bodyPr>
           <a:lstStyle/>
           <a:p>
-            <a:pPr>
-              <a:defRPr sz="2000"/>
+            <a:pPr algn="l">
+              <a:spcAft>
+                <a:spcPts val="600"/>
+              </a:spcAft>
             </a:pPr>
             <a:r>
-              <a:t>GeoPackage → панорамы Яндекса → ML-классификация</a:t>
-            </a:r>
-          </a:p>
-          <a:p>
-            <a:pPr>
-              <a:defRPr sz="1800"/>
+              <a:rPr sz="1900" b="0">
+                <a:solidFill>
+                  <a:srgbClr val="1B2538"/>
+                </a:solidFill>
+                <a:latin typeface="Calibri"/>
+              </a:rPr>
+              <a:t>GeoPackage → панорамы Яндекса → CLIP-классификатор → </a:t>
+            </a:r>
+            <a:r>
+              <a:rPr sz="1900" b="1">
+                <a:solidFill>
+                  <a:srgbClr val="14A08F"/>
+                </a:solidFill>
+                <a:latin typeface="Calibri"/>
+              </a:rPr>
+              <a:t>6 классов UTT</a:t>
+            </a:r>
+            <a:r>
+              <a:rPr sz="1900" b="0">
+                <a:solidFill>
+                  <a:srgbClr val="1B2538"/>
+                </a:solidFill>
+                <a:latin typeface="Calibri"/>
+              </a:rPr>
+              <a:t> + веб-инструмент для правок.</a:t>
+            </a:r>
+          </a:p>
+        </p:txBody>
+      </p:sp>
+      <p:sp>
+        <p:nvSpPr>
+          <p:cNvPr id="7" name="Rectangle 6"/>
+          <p:cNvSpPr/>
+          <p:nvPr/>
+        </p:nvSpPr>
+        <p:spPr>
+          <a:xfrm>
+            <a:off x="700000" y="2700000"/>
+            <a:ext cx="3464000" cy="1250000"/>
+          </a:xfrm>
+          <a:prstGeom prst="rect">
+            <a:avLst/>
+          </a:prstGeom>
+          <a:solidFill>
+            <a:srgbClr val="F3F5F7"/>
+          </a:solidFill>
+          <a:ln w="12700">
+            <a:solidFill>
+              <a:srgbClr val="DDE3EA"/>
+            </a:solidFill>
+          </a:ln>
+          <a:effectLst/>
+        </p:spPr>
+        <p:style>
+          <a:lnRef idx="1">
+            <a:schemeClr val="accent1"/>
+          </a:lnRef>
+          <a:fillRef idx="3">
+            <a:schemeClr val="accent1"/>
+          </a:fillRef>
+          <a:effectRef idx="2">
+            <a:schemeClr val="accent1"/>
+          </a:effectRef>
+          <a:fontRef idx="minor">
+            <a:schemeClr val="lt1"/>
+          </a:fontRef>
+        </p:style>
+        <p:txBody>
+          <a:bodyPr rtlCol="0" anchor="ctr"/>
+          <a:lstStyle/>
+          <a:p>
+            <a:pPr algn="ctr"/>
+          </a:p>
+        </p:txBody>
+      </p:sp>
+      <p:sp>
+        <p:nvSpPr>
+          <p:cNvPr id="8" name="Rectangle 7"/>
+          <p:cNvSpPr/>
+          <p:nvPr/>
+        </p:nvSpPr>
+        <p:spPr>
+          <a:xfrm>
+            <a:off x="700000" y="2700000"/>
+            <a:ext cx="120000" cy="1250000"/>
+          </a:xfrm>
+          <a:prstGeom prst="rect">
+            <a:avLst/>
+          </a:prstGeom>
+          <a:solidFill>
+            <a:srgbClr val="14A08F"/>
+          </a:solidFill>
+          <a:ln>
+            <a:noFill/>
+          </a:ln>
+          <a:effectLst/>
+        </p:spPr>
+        <p:style>
+          <a:lnRef idx="1">
+            <a:schemeClr val="accent1"/>
+          </a:lnRef>
+          <a:fillRef idx="3">
+            <a:schemeClr val="accent1"/>
+          </a:fillRef>
+          <a:effectRef idx="2">
+            <a:schemeClr val="accent1"/>
+          </a:effectRef>
+          <a:fontRef idx="minor">
+            <a:schemeClr val="lt1"/>
+          </a:fontRef>
+        </p:style>
+        <p:txBody>
+          <a:bodyPr rtlCol="0" anchor="ctr"/>
+          <a:lstStyle/>
+          <a:p>
+            <a:pPr algn="ctr"/>
+          </a:p>
+        </p:txBody>
+      </p:sp>
+      <p:sp>
+        <p:nvSpPr>
+          <p:cNvPr id="9" name="TextBox 8"/>
+          <p:cNvSpPr txBox="1"/>
+          <p:nvPr/>
+        </p:nvSpPr>
+        <p:spPr>
+          <a:xfrm>
+            <a:off x="940000" y="2880000"/>
+            <a:ext cx="3084000" cy="890000"/>
+          </a:xfrm>
+          <a:prstGeom prst="rect">
+            <a:avLst/>
+          </a:prstGeom>
+          <a:noFill/>
+        </p:spPr>
+        <p:txBody>
+          <a:bodyPr wrap="square" anchor="ctr">
+            <a:spAutoFit/>
+          </a:bodyPr>
+          <a:lstStyle/>
+          <a:p>
+            <a:pPr algn="l">
+              <a:spcAft>
+                <a:spcPts val="400"/>
+              </a:spcAft>
             </a:pPr>
             <a:r>
-              <a:t>→ 6 классов UTT + подкласс + уверенность</a:t>
-            </a:r>
-          </a:p>
-          <a:p>
-            <a:pPr>
-              <a:defRPr sz="1800"/>
+              <a:rPr sz="1500" b="1">
+                <a:solidFill>
+                  <a:srgbClr val="0F1E3D"/>
+                </a:solidFill>
+                <a:latin typeface="Calibri"/>
+              </a:rPr>
+              <a:t>active_urban</a:t>
+            </a:r>
+          </a:p>
+          <a:p>
+            <a:r>
+              <a:rPr sz="1300">
+                <a:solidFill>
+                  <a:srgbClr val="5B6672"/>
+                </a:solidFill>
+                <a:latin typeface="Calibri"/>
+              </a:rPr>
+              <a:t>сформированная застройка</a:t>
+            </a:r>
+          </a:p>
+        </p:txBody>
+      </p:sp>
+      <p:sp>
+        <p:nvSpPr>
+          <p:cNvPr id="10" name="Rectangle 9"/>
+          <p:cNvSpPr/>
+          <p:nvPr/>
+        </p:nvSpPr>
+        <p:spPr>
+          <a:xfrm>
+            <a:off x="4364000" y="2700000"/>
+            <a:ext cx="3464000" cy="1250000"/>
+          </a:xfrm>
+          <a:prstGeom prst="rect">
+            <a:avLst/>
+          </a:prstGeom>
+          <a:solidFill>
+            <a:srgbClr val="F3F5F7"/>
+          </a:solidFill>
+          <a:ln w="12700">
+            <a:solidFill>
+              <a:srgbClr val="DDE3EA"/>
+            </a:solidFill>
+          </a:ln>
+          <a:effectLst/>
+        </p:spPr>
+        <p:style>
+          <a:lnRef idx="1">
+            <a:schemeClr val="accent1"/>
+          </a:lnRef>
+          <a:fillRef idx="3">
+            <a:schemeClr val="accent1"/>
+          </a:fillRef>
+          <a:effectRef idx="2">
+            <a:schemeClr val="accent1"/>
+          </a:effectRef>
+          <a:fontRef idx="minor">
+            <a:schemeClr val="lt1"/>
+          </a:fontRef>
+        </p:style>
+        <p:txBody>
+          <a:bodyPr rtlCol="0" anchor="ctr"/>
+          <a:lstStyle/>
+          <a:p>
+            <a:pPr algn="ctr"/>
+          </a:p>
+        </p:txBody>
+      </p:sp>
+      <p:sp>
+        <p:nvSpPr>
+          <p:cNvPr id="11" name="Rectangle 10"/>
+          <p:cNvSpPr/>
+          <p:nvPr/>
+        </p:nvSpPr>
+        <p:spPr>
+          <a:xfrm>
+            <a:off x="4364000" y="2700000"/>
+            <a:ext cx="120000" cy="1250000"/>
+          </a:xfrm>
+          <a:prstGeom prst="rect">
+            <a:avLst/>
+          </a:prstGeom>
+          <a:solidFill>
+            <a:srgbClr val="14A08F"/>
+          </a:solidFill>
+          <a:ln>
+            <a:noFill/>
+          </a:ln>
+          <a:effectLst/>
+        </p:spPr>
+        <p:style>
+          <a:lnRef idx="1">
+            <a:schemeClr val="accent1"/>
+          </a:lnRef>
+          <a:fillRef idx="3">
+            <a:schemeClr val="accent1"/>
+          </a:fillRef>
+          <a:effectRef idx="2">
+            <a:schemeClr val="accent1"/>
+          </a:effectRef>
+          <a:fontRef idx="minor">
+            <a:schemeClr val="lt1"/>
+          </a:fontRef>
+        </p:style>
+        <p:txBody>
+          <a:bodyPr rtlCol="0" anchor="ctr"/>
+          <a:lstStyle/>
+          <a:p>
+            <a:pPr algn="ctr"/>
+          </a:p>
+        </p:txBody>
+      </p:sp>
+      <p:sp>
+        <p:nvSpPr>
+          <p:cNvPr id="12" name="TextBox 11"/>
+          <p:cNvSpPr txBox="1"/>
+          <p:nvPr/>
+        </p:nvSpPr>
+        <p:spPr>
+          <a:xfrm>
+            <a:off x="4604000" y="2880000"/>
+            <a:ext cx="3084000" cy="890000"/>
+          </a:xfrm>
+          <a:prstGeom prst="rect">
+            <a:avLst/>
+          </a:prstGeom>
+          <a:noFill/>
+        </p:spPr>
+        <p:txBody>
+          <a:bodyPr wrap="square" anchor="ctr">
+            <a:spAutoFit/>
+          </a:bodyPr>
+          <a:lstStyle/>
+          <a:p>
+            <a:pPr algn="l">
+              <a:spcAft>
+                <a:spcPts val="400"/>
+              </a:spcAft>
             </a:pPr>
-          </a:p>
-          <a:p>
-            <a:pPr>
-              <a:defRPr sz="1800"/>
+            <a:r>
+              <a:rPr sz="1500" b="1">
+                <a:solidFill>
+                  <a:srgbClr val="0F1E3D"/>
+                </a:solidFill>
+                <a:latin typeface="Calibri"/>
+              </a:rPr>
+              <a:t>active_construction</a:t>
+            </a:r>
+          </a:p>
+          <a:p>
+            <a:r>
+              <a:rPr sz="1300">
+                <a:solidFill>
+                  <a:srgbClr val="5B6672"/>
+                </a:solidFill>
+                <a:latin typeface="Calibri"/>
+              </a:rPr>
+              <a:t>активная стройка</a:t>
+            </a:r>
+          </a:p>
+        </p:txBody>
+      </p:sp>
+      <p:sp>
+        <p:nvSpPr>
+          <p:cNvPr id="13" name="Rectangle 12"/>
+          <p:cNvSpPr/>
+          <p:nvPr/>
+        </p:nvSpPr>
+        <p:spPr>
+          <a:xfrm>
+            <a:off x="8028000" y="2700000"/>
+            <a:ext cx="3464000" cy="1250000"/>
+          </a:xfrm>
+          <a:prstGeom prst="rect">
+            <a:avLst/>
+          </a:prstGeom>
+          <a:solidFill>
+            <a:srgbClr val="F3F5F7"/>
+          </a:solidFill>
+          <a:ln w="12700">
+            <a:solidFill>
+              <a:srgbClr val="DDE3EA"/>
+            </a:solidFill>
+          </a:ln>
+          <a:effectLst/>
+        </p:spPr>
+        <p:style>
+          <a:lnRef idx="1">
+            <a:schemeClr val="accent1"/>
+          </a:lnRef>
+          <a:fillRef idx="3">
+            <a:schemeClr val="accent1"/>
+          </a:fillRef>
+          <a:effectRef idx="2">
+            <a:schemeClr val="accent1"/>
+          </a:effectRef>
+          <a:fontRef idx="minor">
+            <a:schemeClr val="lt1"/>
+          </a:fontRef>
+        </p:style>
+        <p:txBody>
+          <a:bodyPr rtlCol="0" anchor="ctr"/>
+          <a:lstStyle/>
+          <a:p>
+            <a:pPr algn="ctr"/>
+          </a:p>
+        </p:txBody>
+      </p:sp>
+      <p:sp>
+        <p:nvSpPr>
+          <p:cNvPr id="14" name="Rectangle 13"/>
+          <p:cNvSpPr/>
+          <p:nvPr/>
+        </p:nvSpPr>
+        <p:spPr>
+          <a:xfrm>
+            <a:off x="8028000" y="2700000"/>
+            <a:ext cx="120000" cy="1250000"/>
+          </a:xfrm>
+          <a:prstGeom prst="rect">
+            <a:avLst/>
+          </a:prstGeom>
+          <a:solidFill>
+            <a:srgbClr val="14A08F"/>
+          </a:solidFill>
+          <a:ln>
+            <a:noFill/>
+          </a:ln>
+          <a:effectLst/>
+        </p:spPr>
+        <p:style>
+          <a:lnRef idx="1">
+            <a:schemeClr val="accent1"/>
+          </a:lnRef>
+          <a:fillRef idx="3">
+            <a:schemeClr val="accent1"/>
+          </a:fillRef>
+          <a:effectRef idx="2">
+            <a:schemeClr val="accent1"/>
+          </a:effectRef>
+          <a:fontRef idx="minor">
+            <a:schemeClr val="lt1"/>
+          </a:fontRef>
+        </p:style>
+        <p:txBody>
+          <a:bodyPr rtlCol="0" anchor="ctr"/>
+          <a:lstStyle/>
+          <a:p>
+            <a:pPr algn="ctr"/>
+          </a:p>
+        </p:txBody>
+      </p:sp>
+      <p:sp>
+        <p:nvSpPr>
+          <p:cNvPr id="15" name="TextBox 14"/>
+          <p:cNvSpPr txBox="1"/>
+          <p:nvPr/>
+        </p:nvSpPr>
+        <p:spPr>
+          <a:xfrm>
+            <a:off x="8268000" y="2880000"/>
+            <a:ext cx="3084000" cy="890000"/>
+          </a:xfrm>
+          <a:prstGeom prst="rect">
+            <a:avLst/>
+          </a:prstGeom>
+          <a:noFill/>
+        </p:spPr>
+        <p:txBody>
+          <a:bodyPr wrap="square" anchor="ctr">
+            <a:spAutoFit/>
+          </a:bodyPr>
+          <a:lstStyle/>
+          <a:p>
+            <a:pPr algn="l">
+              <a:spcAft>
+                <a:spcPts val="400"/>
+              </a:spcAft>
             </a:pPr>
             <a:r>
-              <a:t>Веб-пилот: карта, правки аналитика, экспорт GPKG</a:t>
-            </a:r>
-          </a:p>
-          <a:p>
-            <a:pPr>
-              <a:defRPr sz="1800"/>
+              <a:rPr sz="1500" b="1">
+                <a:solidFill>
+                  <a:srgbClr val="0F1E3D"/>
+                </a:solidFill>
+                <a:latin typeface="Calibri"/>
+              </a:rPr>
+              <a:t>frozen_construction</a:t>
+            </a:r>
+          </a:p>
+          <a:p>
+            <a:r>
+              <a:rPr sz="1300">
+                <a:solidFill>
+                  <a:srgbClr val="5B6672"/>
+                </a:solidFill>
+                <a:latin typeface="Calibri"/>
+              </a:rPr>
+              <a:t>замороженная стройка</a:t>
+            </a:r>
+          </a:p>
+        </p:txBody>
+      </p:sp>
+      <p:sp>
+        <p:nvSpPr>
+          <p:cNvPr id="16" name="Rectangle 15"/>
+          <p:cNvSpPr/>
+          <p:nvPr/>
+        </p:nvSpPr>
+        <p:spPr>
+          <a:xfrm>
+            <a:off x="700000" y="4200000"/>
+            <a:ext cx="3464000" cy="1250000"/>
+          </a:xfrm>
+          <a:prstGeom prst="rect">
+            <a:avLst/>
+          </a:prstGeom>
+          <a:solidFill>
+            <a:srgbClr val="F3F5F7"/>
+          </a:solidFill>
+          <a:ln w="12700">
+            <a:solidFill>
+              <a:srgbClr val="DDE3EA"/>
+            </a:solidFill>
+          </a:ln>
+          <a:effectLst/>
+        </p:spPr>
+        <p:style>
+          <a:lnRef idx="1">
+            <a:schemeClr val="accent1"/>
+          </a:lnRef>
+          <a:fillRef idx="3">
+            <a:schemeClr val="accent1"/>
+          </a:fillRef>
+          <a:effectRef idx="2">
+            <a:schemeClr val="accent1"/>
+          </a:effectRef>
+          <a:fontRef idx="minor">
+            <a:schemeClr val="lt1"/>
+          </a:fontRef>
+        </p:style>
+        <p:txBody>
+          <a:bodyPr rtlCol="0" anchor="ctr"/>
+          <a:lstStyle/>
+          <a:p>
+            <a:pPr algn="ctr"/>
+          </a:p>
+        </p:txBody>
+      </p:sp>
+      <p:sp>
+        <p:nvSpPr>
+          <p:cNvPr id="17" name="Rectangle 16"/>
+          <p:cNvSpPr/>
+          <p:nvPr/>
+        </p:nvSpPr>
+        <p:spPr>
+          <a:xfrm>
+            <a:off x="700000" y="4200000"/>
+            <a:ext cx="120000" cy="1250000"/>
+          </a:xfrm>
+          <a:prstGeom prst="rect">
+            <a:avLst/>
+          </a:prstGeom>
+          <a:solidFill>
+            <a:srgbClr val="14A08F"/>
+          </a:solidFill>
+          <a:ln>
+            <a:noFill/>
+          </a:ln>
+          <a:effectLst/>
+        </p:spPr>
+        <p:style>
+          <a:lnRef idx="1">
+            <a:schemeClr val="accent1"/>
+          </a:lnRef>
+          <a:fillRef idx="3">
+            <a:schemeClr val="accent1"/>
+          </a:fillRef>
+          <a:effectRef idx="2">
+            <a:schemeClr val="accent1"/>
+          </a:effectRef>
+          <a:fontRef idx="minor">
+            <a:schemeClr val="lt1"/>
+          </a:fontRef>
+        </p:style>
+        <p:txBody>
+          <a:bodyPr rtlCol="0" anchor="ctr"/>
+          <a:lstStyle/>
+          <a:p>
+            <a:pPr algn="ctr"/>
+          </a:p>
+        </p:txBody>
+      </p:sp>
+      <p:sp>
+        <p:nvSpPr>
+          <p:cNvPr id="18" name="TextBox 17"/>
+          <p:cNvSpPr txBox="1"/>
+          <p:nvPr/>
+        </p:nvSpPr>
+        <p:spPr>
+          <a:xfrm>
+            <a:off x="940000" y="4380000"/>
+            <a:ext cx="3084000" cy="890000"/>
+          </a:xfrm>
+          <a:prstGeom prst="rect">
+            <a:avLst/>
+          </a:prstGeom>
+          <a:noFill/>
+        </p:spPr>
+        <p:txBody>
+          <a:bodyPr wrap="square" anchor="ctr">
+            <a:spAutoFit/>
+          </a:bodyPr>
+          <a:lstStyle/>
+          <a:p>
+            <a:pPr algn="l">
+              <a:spcAft>
+                <a:spcPts val="400"/>
+              </a:spcAft>
             </a:pPr>
             <a:r>
-              <a:t>Desktop-клиент для офлайн-работы</a:t>
+              <a:rPr sz="1500" b="1">
+                <a:solidFill>
+                  <a:srgbClr val="0F1E3D"/>
+                </a:solidFill>
+                <a:latin typeface="Calibri"/>
+              </a:rPr>
+              <a:t>low_density_degraded</a:t>
+            </a:r>
+          </a:p>
+          <a:p>
+            <a:r>
+              <a:rPr sz="1300">
+                <a:solidFill>
+                  <a:srgbClr val="5B6672"/>
+                </a:solidFill>
+                <a:latin typeface="Calibri"/>
+              </a:rPr>
+              <a:t>малоэтажная / деградирующая</a:t>
+            </a:r>
+          </a:p>
+        </p:txBody>
+      </p:sp>
+      <p:sp>
+        <p:nvSpPr>
+          <p:cNvPr id="19" name="Rectangle 18"/>
+          <p:cNvSpPr/>
+          <p:nvPr/>
+        </p:nvSpPr>
+        <p:spPr>
+          <a:xfrm>
+            <a:off x="4364000" y="4200000"/>
+            <a:ext cx="3464000" cy="1250000"/>
+          </a:xfrm>
+          <a:prstGeom prst="rect">
+            <a:avLst/>
+          </a:prstGeom>
+          <a:solidFill>
+            <a:srgbClr val="F3F5F7"/>
+          </a:solidFill>
+          <a:ln w="12700">
+            <a:solidFill>
+              <a:srgbClr val="DDE3EA"/>
+            </a:solidFill>
+          </a:ln>
+          <a:effectLst/>
+        </p:spPr>
+        <p:style>
+          <a:lnRef idx="1">
+            <a:schemeClr val="accent1"/>
+          </a:lnRef>
+          <a:fillRef idx="3">
+            <a:schemeClr val="accent1"/>
+          </a:fillRef>
+          <a:effectRef idx="2">
+            <a:schemeClr val="accent1"/>
+          </a:effectRef>
+          <a:fontRef idx="minor">
+            <a:schemeClr val="lt1"/>
+          </a:fontRef>
+        </p:style>
+        <p:txBody>
+          <a:bodyPr rtlCol="0" anchor="ctr"/>
+          <a:lstStyle/>
+          <a:p>
+            <a:pPr algn="ctr"/>
+          </a:p>
+        </p:txBody>
+      </p:sp>
+      <p:sp>
+        <p:nvSpPr>
+          <p:cNvPr id="20" name="Rectangle 19"/>
+          <p:cNvSpPr/>
+          <p:nvPr/>
+        </p:nvSpPr>
+        <p:spPr>
+          <a:xfrm>
+            <a:off x="4364000" y="4200000"/>
+            <a:ext cx="120000" cy="1250000"/>
+          </a:xfrm>
+          <a:prstGeom prst="rect">
+            <a:avLst/>
+          </a:prstGeom>
+          <a:solidFill>
+            <a:srgbClr val="14A08F"/>
+          </a:solidFill>
+          <a:ln>
+            <a:noFill/>
+          </a:ln>
+          <a:effectLst/>
+        </p:spPr>
+        <p:style>
+          <a:lnRef idx="1">
+            <a:schemeClr val="accent1"/>
+          </a:lnRef>
+          <a:fillRef idx="3">
+            <a:schemeClr val="accent1"/>
+          </a:fillRef>
+          <a:effectRef idx="2">
+            <a:schemeClr val="accent1"/>
+          </a:effectRef>
+          <a:fontRef idx="minor">
+            <a:schemeClr val="lt1"/>
+          </a:fontRef>
+        </p:style>
+        <p:txBody>
+          <a:bodyPr rtlCol="0" anchor="ctr"/>
+          <a:lstStyle/>
+          <a:p>
+            <a:pPr algn="ctr"/>
+          </a:p>
+        </p:txBody>
+      </p:sp>
+      <p:sp>
+        <p:nvSpPr>
+          <p:cNvPr id="21" name="TextBox 20"/>
+          <p:cNvSpPr txBox="1"/>
+          <p:nvPr/>
+        </p:nvSpPr>
+        <p:spPr>
+          <a:xfrm>
+            <a:off x="4604000" y="4380000"/>
+            <a:ext cx="3084000" cy="890000"/>
+          </a:xfrm>
+          <a:prstGeom prst="rect">
+            <a:avLst/>
+          </a:prstGeom>
+          <a:noFill/>
+        </p:spPr>
+        <p:txBody>
+          <a:bodyPr wrap="square" anchor="ctr">
+            <a:spAutoFit/>
+          </a:bodyPr>
+          <a:lstStyle/>
+          <a:p>
+            <a:pPr algn="l">
+              <a:spcAft>
+                <a:spcPts val="400"/>
+              </a:spcAft>
+            </a:pPr>
+            <a:r>
+              <a:rPr sz="1500" b="1">
+                <a:solidFill>
+                  <a:srgbClr val="0F1E3D"/>
+                </a:solidFill>
+                <a:latin typeface="Calibri"/>
+              </a:rPr>
+              <a:t>underused_infrastructure</a:t>
+            </a:r>
+          </a:p>
+          <a:p>
+            <a:r>
+              <a:rPr sz="1300">
+                <a:solidFill>
+                  <a:srgbClr val="5B6672"/>
+                </a:solidFill>
+                <a:latin typeface="Calibri"/>
+              </a:rPr>
+              <a:t>недоиспользуемая инфра</a:t>
+            </a:r>
+          </a:p>
+        </p:txBody>
+      </p:sp>
+      <p:sp>
+        <p:nvSpPr>
+          <p:cNvPr id="22" name="Rectangle 21"/>
+          <p:cNvSpPr/>
+          <p:nvPr/>
+        </p:nvSpPr>
+        <p:spPr>
+          <a:xfrm>
+            <a:off x="8028000" y="4200000"/>
+            <a:ext cx="3464000" cy="1250000"/>
+          </a:xfrm>
+          <a:prstGeom prst="rect">
+            <a:avLst/>
+          </a:prstGeom>
+          <a:solidFill>
+            <a:srgbClr val="F3F5F7"/>
+          </a:solidFill>
+          <a:ln w="12700">
+            <a:solidFill>
+              <a:srgbClr val="DDE3EA"/>
+            </a:solidFill>
+          </a:ln>
+          <a:effectLst/>
+        </p:spPr>
+        <p:style>
+          <a:lnRef idx="1">
+            <a:schemeClr val="accent1"/>
+          </a:lnRef>
+          <a:fillRef idx="3">
+            <a:schemeClr val="accent1"/>
+          </a:fillRef>
+          <a:effectRef idx="2">
+            <a:schemeClr val="accent1"/>
+          </a:effectRef>
+          <a:fontRef idx="minor">
+            <a:schemeClr val="lt1"/>
+          </a:fontRef>
+        </p:style>
+        <p:txBody>
+          <a:bodyPr rtlCol="0" anchor="ctr"/>
+          <a:lstStyle/>
+          <a:p>
+            <a:pPr algn="ctr"/>
+          </a:p>
+        </p:txBody>
+      </p:sp>
+      <p:sp>
+        <p:nvSpPr>
+          <p:cNvPr id="23" name="Rectangle 22"/>
+          <p:cNvSpPr/>
+          <p:nvPr/>
+        </p:nvSpPr>
+        <p:spPr>
+          <a:xfrm>
+            <a:off x="8028000" y="4200000"/>
+            <a:ext cx="120000" cy="1250000"/>
+          </a:xfrm>
+          <a:prstGeom prst="rect">
+            <a:avLst/>
+          </a:prstGeom>
+          <a:solidFill>
+            <a:srgbClr val="14A08F"/>
+          </a:solidFill>
+          <a:ln>
+            <a:noFill/>
+          </a:ln>
+          <a:effectLst/>
+        </p:spPr>
+        <p:style>
+          <a:lnRef idx="1">
+            <a:schemeClr val="accent1"/>
+          </a:lnRef>
+          <a:fillRef idx="3">
+            <a:schemeClr val="accent1"/>
+          </a:fillRef>
+          <a:effectRef idx="2">
+            <a:schemeClr val="accent1"/>
+          </a:effectRef>
+          <a:fontRef idx="minor">
+            <a:schemeClr val="lt1"/>
+          </a:fontRef>
+        </p:style>
+        <p:txBody>
+          <a:bodyPr rtlCol="0" anchor="ctr"/>
+          <a:lstStyle/>
+          <a:p>
+            <a:pPr algn="ctr"/>
+          </a:p>
+        </p:txBody>
+      </p:sp>
+      <p:sp>
+        <p:nvSpPr>
+          <p:cNvPr id="24" name="TextBox 23"/>
+          <p:cNvSpPr txBox="1"/>
+          <p:nvPr/>
+        </p:nvSpPr>
+        <p:spPr>
+          <a:xfrm>
+            <a:off x="8268000" y="4380000"/>
+            <a:ext cx="3084000" cy="890000"/>
+          </a:xfrm>
+          <a:prstGeom prst="rect">
+            <a:avLst/>
+          </a:prstGeom>
+          <a:noFill/>
+        </p:spPr>
+        <p:txBody>
+          <a:bodyPr wrap="square" anchor="ctr">
+            <a:spAutoFit/>
+          </a:bodyPr>
+          <a:lstStyle/>
+          <a:p>
+            <a:pPr algn="l">
+              <a:spcAft>
+                <a:spcPts val="400"/>
+              </a:spcAft>
+            </a:pPr>
+            <a:r>
+              <a:rPr sz="1500" b="1">
+                <a:solidFill>
+                  <a:srgbClr val="0F1E3D"/>
+                </a:solidFill>
+                <a:latin typeface="Calibri"/>
+              </a:rPr>
+              <a:t>natural_areas</a:t>
+            </a:r>
+          </a:p>
+          <a:p>
+            <a:r>
+              <a:rPr sz="1300">
+                <a:solidFill>
+                  <a:srgbClr val="5B6672"/>
+                </a:solidFill>
+                <a:latin typeface="Calibri"/>
+              </a:rPr>
+              <a:t>природные территории</a:t>
+            </a:r>
+          </a:p>
+        </p:txBody>
+      </p:sp>
+      <p:sp>
+        <p:nvSpPr>
+          <p:cNvPr id="25" name="TextBox 24"/>
+          <p:cNvSpPr txBox="1"/>
+          <p:nvPr/>
+        </p:nvSpPr>
+        <p:spPr>
+          <a:xfrm>
+            <a:off x="11292000" y="6358000"/>
+            <a:ext cx="700000" cy="350000"/>
+          </a:xfrm>
+          <a:prstGeom prst="rect">
+            <a:avLst/>
+          </a:prstGeom>
+          <a:noFill/>
+        </p:spPr>
+        <p:txBody>
+          <a:bodyPr wrap="square" anchor="t">
+            <a:spAutoFit/>
+          </a:bodyPr>
+          <a:lstStyle/>
+          <a:p>
+            <a:pPr algn="r">
+              <a:spcAft>
+                <a:spcPts val="600"/>
+              </a:spcAft>
+            </a:pPr>
+            <a:r>
+              <a:rPr sz="1100" b="0">
+                <a:solidFill>
+                  <a:srgbClr val="5B6672"/>
+                </a:solidFill>
+                <a:latin typeface="Calibri"/>
+              </a:rPr>
+              <a:t>3/10</a:t>
             </a:r>
           </a:p>
         </p:txBody>
@@ -3721,14 +6308,146 @@
       <p:grpSpPr/>
       <p:sp>
         <p:nvSpPr>
-          <p:cNvPr id="2" name="TextBox 1"/>
+          <p:cNvPr id="2" name="Rectangle 1"/>
+          <p:cNvSpPr/>
+          <p:nvPr/>
+        </p:nvSpPr>
+        <p:spPr>
+          <a:xfrm>
+            <a:off x="0" y="0"/>
+            <a:ext cx="12192000" cy="6858000"/>
+          </a:xfrm>
+          <a:prstGeom prst="rect">
+            <a:avLst/>
+          </a:prstGeom>
+          <a:solidFill>
+            <a:srgbClr val="FFFFFF"/>
+          </a:solidFill>
+          <a:ln>
+            <a:noFill/>
+          </a:ln>
+          <a:effectLst/>
+        </p:spPr>
+        <p:style>
+          <a:lnRef idx="1">
+            <a:schemeClr val="accent1"/>
+          </a:lnRef>
+          <a:fillRef idx="3">
+            <a:schemeClr val="accent1"/>
+          </a:fillRef>
+          <a:effectRef idx="2">
+            <a:schemeClr val="accent1"/>
+          </a:effectRef>
+          <a:fontRef idx="minor">
+            <a:schemeClr val="lt1"/>
+          </a:fontRef>
+        </p:style>
+        <p:txBody>
+          <a:bodyPr rtlCol="0" anchor="ctr"/>
+          <a:lstStyle/>
+          <a:p>
+            <a:pPr algn="ctr"/>
+          </a:p>
+        </p:txBody>
+      </p:sp>
+      <p:sp>
+        <p:nvSpPr>
+          <p:cNvPr id="3" name="Rectangle 2"/>
+          <p:cNvSpPr/>
+          <p:nvPr/>
+        </p:nvSpPr>
+        <p:spPr>
+          <a:xfrm>
+            <a:off x="0" y="0"/>
+            <a:ext cx="12192000" cy="1500000"/>
+          </a:xfrm>
+          <a:prstGeom prst="rect">
+            <a:avLst/>
+          </a:prstGeom>
+          <a:solidFill>
+            <a:srgbClr val="0F1E3D"/>
+          </a:solidFill>
+          <a:ln>
+            <a:noFill/>
+          </a:ln>
+          <a:effectLst/>
+        </p:spPr>
+        <p:style>
+          <a:lnRef idx="1">
+            <a:schemeClr val="accent1"/>
+          </a:lnRef>
+          <a:fillRef idx="3">
+            <a:schemeClr val="accent1"/>
+          </a:fillRef>
+          <a:effectRef idx="2">
+            <a:schemeClr val="accent1"/>
+          </a:effectRef>
+          <a:fontRef idx="minor">
+            <a:schemeClr val="lt1"/>
+          </a:fontRef>
+        </p:style>
+        <p:txBody>
+          <a:bodyPr rtlCol="0" anchor="ctr"/>
+          <a:lstStyle/>
+          <a:p>
+            <a:pPr algn="ctr"/>
+          </a:p>
+        </p:txBody>
+      </p:sp>
+      <p:sp>
+        <p:nvSpPr>
+          <p:cNvPr id="4" name="Rectangle 3"/>
+          <p:cNvSpPr/>
+          <p:nvPr/>
+        </p:nvSpPr>
+        <p:spPr>
+          <a:xfrm>
+            <a:off x="700000" y="560000"/>
+            <a:ext cx="180000" cy="560000"/>
+          </a:xfrm>
+          <a:prstGeom prst="rect">
+            <a:avLst/>
+          </a:prstGeom>
+          <a:solidFill>
+            <a:srgbClr val="E87A22"/>
+          </a:solidFill>
+          <a:ln>
+            <a:noFill/>
+          </a:ln>
+          <a:effectLst/>
+        </p:spPr>
+        <p:style>
+          <a:lnRef idx="1">
+            <a:schemeClr val="accent1"/>
+          </a:lnRef>
+          <a:fillRef idx="3">
+            <a:schemeClr val="accent1"/>
+          </a:fillRef>
+          <a:effectRef idx="2">
+            <a:schemeClr val="accent1"/>
+          </a:effectRef>
+          <a:fontRef idx="minor">
+            <a:schemeClr val="lt1"/>
+          </a:fontRef>
+        </p:style>
+        <p:txBody>
+          <a:bodyPr rtlCol="0" anchor="ctr"/>
+          <a:lstStyle/>
+          <a:p>
+            <a:pPr algn="ctr"/>
+          </a:p>
+        </p:txBody>
+      </p:sp>
+      <p:sp>
+        <p:nvSpPr>
+          <p:cNvPr id="5" name="TextBox 4"/>
           <p:cNvSpPr txBox="1"/>
           <p:nvPr/>
         </p:nvSpPr>
         <p:spPr>
           <a:xfrm>
-            <a:off x="548640" y="457200"/>
-            <a:ext cx="10972800" cy="1097280"/>
+            <a:off x="1000000" y="360000"/>
+            <a:ext cx="10492000" cy="900000"/>
           </a:xfrm>
           <a:prstGeom prst="rect">
             <a:avLst/>
@@ -3736,30 +6455,49 @@
           <a:noFill/>
         </p:spPr>
         <p:txBody>
-          <a:bodyPr wrap="none">
+          <a:bodyPr wrap="square" anchor="ctr">
             <a:spAutoFit/>
           </a:bodyPr>
           <a:lstStyle/>
           <a:p>
-            <a:pPr>
-              <a:defRPr sz="3200" b="1"/>
+            <a:pPr algn="l">
+              <a:spcAft>
+                <a:spcPts val="200"/>
+              </a:spcAft>
             </a:pPr>
             <a:r>
-              <a:t>Данные</a:t>
-            </a:r>
-          </a:p>
-        </p:txBody>
-      </p:sp>
-      <p:sp>
-        <p:nvSpPr>
-          <p:cNvPr id="3" name="TextBox 2"/>
+              <a:rPr sz="1300" b="1">
+                <a:solidFill>
+                  <a:srgbClr val="14A08F"/>
+                </a:solidFill>
+                <a:latin typeface="Calibri"/>
+              </a:rPr>
+              <a:t>ДАННЫЕ И EDA</a:t>
+            </a:r>
+          </a:p>
+          <a:p>
+            <a:r>
+              <a:rPr sz="3000" b="1">
+                <a:solidFill>
+                  <a:srgbClr val="FFFFFF"/>
+                </a:solidFill>
+                <a:latin typeface="Calibri"/>
+              </a:rPr>
+              <a:t>Главный рычаг качества — чистота меток</a:t>
+            </a:r>
+          </a:p>
+        </p:txBody>
+      </p:sp>
+      <p:sp>
+        <p:nvSpPr>
+          <p:cNvPr id="6" name="TextBox 5"/>
           <p:cNvSpPr txBox="1"/>
           <p:nvPr/>
         </p:nvSpPr>
         <p:spPr>
           <a:xfrm>
-            <a:off x="548640" y="1645920"/>
-            <a:ext cx="10972800" cy="4754880"/>
+            <a:off x="700000" y="1850000"/>
+            <a:ext cx="6259360" cy="4000000"/>
           </a:xfrm>
           <a:prstGeom prst="rect">
             <a:avLst/>
@@ -3767,40 +6505,441 @@
           <a:noFill/>
         </p:spPr>
         <p:txBody>
-          <a:bodyPr wrap="square">
+          <a:bodyPr wrap="square" anchor="t">
             <a:spAutoFit/>
           </a:bodyPr>
           <a:lstStyle/>
           <a:p>
             <a:pPr>
-              <a:defRPr sz="2000"/>
+              <a:spcAft>
+                <a:spcPts val="1400"/>
+              </a:spcAft>
             </a:pPr>
             <a:r>
-              <a:t>• OSM + Яндекс Street View, ~13k перспективных кропов</a:t>
+              <a:rPr sz="1800" b="1">
+                <a:solidFill>
+                  <a:srgbClr val="E87A22"/>
+                </a:solidFill>
+                <a:latin typeface="Calibri"/>
+              </a:rPr>
+              <a:t>29% кропов</a:t>
+            </a:r>
+            <a:r>
+              <a:rPr sz="1800" b="0">
+                <a:solidFill>
+                  <a:srgbClr val="1B2538"/>
+                </a:solidFill>
+                <a:latin typeface="Calibri"/>
+              </a:rPr>
+              <a:t> смотрели «мимо» участка (bearing≈0) — чиним мульти-азимутом 0/90/180/270.</a:t>
             </a:r>
           </a:p>
           <a:p>
             <a:pPr>
-              <a:defRPr sz="1800"/>
+              <a:spcAft>
+                <a:spcPts val="1400"/>
+              </a:spcAft>
             </a:pPr>
             <a:r>
-              <a:t>• GPKG аналитиков: 7535 участков с правками</a:t>
+              <a:rPr sz="1800" b="0">
+                <a:solidFill>
+                  <a:srgbClr val="1B2538"/>
+                </a:solidFill>
+                <a:latin typeface="Calibri"/>
+              </a:rPr>
+              <a:t>Согласие OSM-меток с содержимым кадра — </a:t>
+            </a:r>
+            <a:r>
+              <a:rPr sz="1800" b="1">
+                <a:solidFill>
+                  <a:srgbClr val="E87A22"/>
+                </a:solidFill>
+                <a:latin typeface="Calibri"/>
+              </a:rPr>
+              <a:t>~20%</a:t>
+            </a:r>
+            <a:r>
+              <a:rPr sz="1800" b="0">
+                <a:solidFill>
+                  <a:srgbClr val="1B2538"/>
+                </a:solidFill>
+                <a:latin typeface="Calibri"/>
+              </a:rPr>
+              <a:t>. Переразметили VLM-судьёй (Qwen) + ручная вычитка.</a:t>
             </a:r>
           </a:p>
           <a:p>
             <a:pPr>
-              <a:defRPr sz="1800"/>
+              <a:spcAft>
+                <a:spcPts val="1400"/>
+              </a:spcAft>
             </a:pPr>
             <a:r>
-              <a:t>• VLM weak supervision для переразметки</a:t>
+              <a:rPr sz="1800" b="0">
+                <a:solidFill>
+                  <a:srgbClr val="1B2538"/>
+                </a:solidFill>
+                <a:latin typeface="Calibri"/>
+              </a:rPr>
+              <a:t>Чистка: дубли, размытые, нерелевантные ракурсы (perceptual hash + CLIP).</a:t>
             </a:r>
           </a:p>
           <a:p>
             <a:pPr>
-              <a:defRPr sz="1800"/>
+              <a:spcAft>
+                <a:spcPts val="1400"/>
+              </a:spcAft>
             </a:pPr>
             <a:r>
-              <a:t>• Аудит: 29% кропов с неверным азимутом → multi-heading</a:t>
+              <a:rPr sz="1800" b="0">
+                <a:solidFill>
+                  <a:srgbClr val="1B2538"/>
+                </a:solidFill>
+                <a:latin typeface="Calibri"/>
+              </a:rPr>
+              <a:t>Сплит по </a:t>
+            </a:r>
+            <a:r>
+              <a:rPr sz="1800" b="1">
+                <a:solidFill>
+                  <a:srgbClr val="1B2538"/>
+                </a:solidFill>
+                <a:latin typeface="Calibri"/>
+              </a:rPr>
+              <a:t>object_id</a:t>
+            </a:r>
+            <a:r>
+              <a:rPr sz="1800" b="0">
+                <a:solidFill>
+                  <a:srgbClr val="1B2538"/>
+                </a:solidFill>
+                <a:latin typeface="Calibri"/>
+              </a:rPr>
+              <a:t> — без утечки сезонов между train и val.</a:t>
+            </a:r>
+          </a:p>
+        </p:txBody>
+      </p:sp>
+      <p:sp>
+        <p:nvSpPr>
+          <p:cNvPr id="7" name="Rectangle 6"/>
+          <p:cNvSpPr/>
+          <p:nvPr/>
+        </p:nvSpPr>
+        <p:spPr>
+          <a:xfrm>
+            <a:off x="7391040" y="1850000"/>
+            <a:ext cx="4100960" cy="1000000"/>
+          </a:xfrm>
+          <a:prstGeom prst="rect">
+            <a:avLst/>
+          </a:prstGeom>
+          <a:solidFill>
+            <a:srgbClr val="0F1E3D"/>
+          </a:solidFill>
+          <a:ln>
+            <a:noFill/>
+          </a:ln>
+          <a:effectLst/>
+        </p:spPr>
+        <p:style>
+          <a:lnRef idx="1">
+            <a:schemeClr val="accent1"/>
+          </a:lnRef>
+          <a:fillRef idx="3">
+            <a:schemeClr val="accent1"/>
+          </a:fillRef>
+          <a:effectRef idx="2">
+            <a:schemeClr val="accent1"/>
+          </a:effectRef>
+          <a:fontRef idx="minor">
+            <a:schemeClr val="lt1"/>
+          </a:fontRef>
+        </p:style>
+        <p:txBody>
+          <a:bodyPr rtlCol="0" anchor="ctr"/>
+          <a:lstStyle/>
+          <a:p>
+            <a:pPr algn="ctr"/>
+          </a:p>
+        </p:txBody>
+      </p:sp>
+      <p:sp>
+        <p:nvSpPr>
+          <p:cNvPr id="8" name="TextBox 7"/>
+          <p:cNvSpPr txBox="1"/>
+          <p:nvPr/>
+        </p:nvSpPr>
+        <p:spPr>
+          <a:xfrm>
+            <a:off x="7651040" y="1970000"/>
+            <a:ext cx="3700960" cy="760000"/>
+          </a:xfrm>
+          <a:prstGeom prst="rect">
+            <a:avLst/>
+          </a:prstGeom>
+          <a:noFill/>
+        </p:spPr>
+        <p:txBody>
+          <a:bodyPr wrap="square" anchor="ctr">
+            <a:spAutoFit/>
+          </a:bodyPr>
+          <a:lstStyle/>
+          <a:p>
+            <a:pPr algn="l">
+              <a:spcAft>
+                <a:spcPts val="200"/>
+              </a:spcAft>
+            </a:pPr>
+            <a:r>
+              <a:rPr sz="3000" b="1">
+                <a:solidFill>
+                  <a:srgbClr val="E87A22"/>
+                </a:solidFill>
+                <a:latin typeface="Calibri"/>
+              </a:rPr>
+              <a:t>7535</a:t>
+            </a:r>
+          </a:p>
+          <a:p>
+            <a:r>
+              <a:rPr sz="1200">
+                <a:solidFill>
+                  <a:srgbClr val="FFFFFF"/>
+                </a:solidFill>
+                <a:latin typeface="Calibri"/>
+              </a:rPr>
+              <a:t>участков GPKG
+(валидация продукта)</a:t>
+            </a:r>
+          </a:p>
+        </p:txBody>
+      </p:sp>
+      <p:sp>
+        <p:nvSpPr>
+          <p:cNvPr id="9" name="Rectangle 8"/>
+          <p:cNvSpPr/>
+          <p:nvPr/>
+        </p:nvSpPr>
+        <p:spPr>
+          <a:xfrm>
+            <a:off x="7391040" y="3000000"/>
+            <a:ext cx="4100960" cy="1000000"/>
+          </a:xfrm>
+          <a:prstGeom prst="rect">
+            <a:avLst/>
+          </a:prstGeom>
+          <a:solidFill>
+            <a:srgbClr val="0F1E3D"/>
+          </a:solidFill>
+          <a:ln>
+            <a:noFill/>
+          </a:ln>
+          <a:effectLst/>
+        </p:spPr>
+        <p:style>
+          <a:lnRef idx="1">
+            <a:schemeClr val="accent1"/>
+          </a:lnRef>
+          <a:fillRef idx="3">
+            <a:schemeClr val="accent1"/>
+          </a:fillRef>
+          <a:effectRef idx="2">
+            <a:schemeClr val="accent1"/>
+          </a:effectRef>
+          <a:fontRef idx="minor">
+            <a:schemeClr val="lt1"/>
+          </a:fontRef>
+        </p:style>
+        <p:txBody>
+          <a:bodyPr rtlCol="0" anchor="ctr"/>
+          <a:lstStyle/>
+          <a:p>
+            <a:pPr algn="ctr"/>
+          </a:p>
+        </p:txBody>
+      </p:sp>
+      <p:sp>
+        <p:nvSpPr>
+          <p:cNvPr id="10" name="TextBox 9"/>
+          <p:cNvSpPr txBox="1"/>
+          <p:nvPr/>
+        </p:nvSpPr>
+        <p:spPr>
+          <a:xfrm>
+            <a:off x="7651040" y="3120000"/>
+            <a:ext cx="3700960" cy="760000"/>
+          </a:xfrm>
+          <a:prstGeom prst="rect">
+            <a:avLst/>
+          </a:prstGeom>
+          <a:noFill/>
+        </p:spPr>
+        <p:txBody>
+          <a:bodyPr wrap="square" anchor="ctr">
+            <a:spAutoFit/>
+          </a:bodyPr>
+          <a:lstStyle/>
+          <a:p>
+            <a:pPr algn="l">
+              <a:spcAft>
+                <a:spcPts val="200"/>
+              </a:spcAft>
+            </a:pPr>
+            <a:r>
+              <a:rPr sz="3000" b="1">
+                <a:solidFill>
+                  <a:srgbClr val="E87A22"/>
+                </a:solidFill>
+                <a:latin typeface="Calibri"/>
+              </a:rPr>
+              <a:t>~600</a:t>
+            </a:r>
+          </a:p>
+          <a:p>
+            <a:r>
+              <a:rPr sz="1200">
+                <a:solidFill>
+                  <a:srgbClr val="FFFFFF"/>
+                </a:solidFill>
+                <a:latin typeface="Calibri"/>
+              </a:rPr>
+              <a:t>объектов собрано
+по 6 классам</a:t>
+            </a:r>
+          </a:p>
+        </p:txBody>
+      </p:sp>
+      <p:sp>
+        <p:nvSpPr>
+          <p:cNvPr id="11" name="Rectangle 10"/>
+          <p:cNvSpPr/>
+          <p:nvPr/>
+        </p:nvSpPr>
+        <p:spPr>
+          <a:xfrm>
+            <a:off x="7391040" y="4150000"/>
+            <a:ext cx="4100960" cy="1000000"/>
+          </a:xfrm>
+          <a:prstGeom prst="rect">
+            <a:avLst/>
+          </a:prstGeom>
+          <a:solidFill>
+            <a:srgbClr val="0F1E3D"/>
+          </a:solidFill>
+          <a:ln>
+            <a:noFill/>
+          </a:ln>
+          <a:effectLst/>
+        </p:spPr>
+        <p:style>
+          <a:lnRef idx="1">
+            <a:schemeClr val="accent1"/>
+          </a:lnRef>
+          <a:fillRef idx="3">
+            <a:schemeClr val="accent1"/>
+          </a:fillRef>
+          <a:effectRef idx="2">
+            <a:schemeClr val="accent1"/>
+          </a:effectRef>
+          <a:fontRef idx="minor">
+            <a:schemeClr val="lt1"/>
+          </a:fontRef>
+        </p:style>
+        <p:txBody>
+          <a:bodyPr rtlCol="0" anchor="ctr"/>
+          <a:lstStyle/>
+          <a:p>
+            <a:pPr algn="ctr"/>
+          </a:p>
+        </p:txBody>
+      </p:sp>
+      <p:sp>
+        <p:nvSpPr>
+          <p:cNvPr id="12" name="TextBox 11"/>
+          <p:cNvSpPr txBox="1"/>
+          <p:nvPr/>
+        </p:nvSpPr>
+        <p:spPr>
+          <a:xfrm>
+            <a:off x="7651040" y="4270000"/>
+            <a:ext cx="3700960" cy="760000"/>
+          </a:xfrm>
+          <a:prstGeom prst="rect">
+            <a:avLst/>
+          </a:prstGeom>
+          <a:noFill/>
+        </p:spPr>
+        <p:txBody>
+          <a:bodyPr wrap="square" anchor="ctr">
+            <a:spAutoFit/>
+          </a:bodyPr>
+          <a:lstStyle/>
+          <a:p>
+            <a:pPr algn="l">
+              <a:spcAft>
+                <a:spcPts val="200"/>
+              </a:spcAft>
+            </a:pPr>
+            <a:r>
+              <a:rPr sz="3000" b="1">
+                <a:solidFill>
+                  <a:srgbClr val="E87A22"/>
+                </a:solidFill>
+                <a:latin typeface="Calibri"/>
+              </a:rPr>
+              <a:t>~2.4k</a:t>
+            </a:r>
+          </a:p>
+          <a:p>
+            <a:r>
+              <a:rPr sz="1200">
+                <a:solidFill>
+                  <a:srgbClr val="FFFFFF"/>
+                </a:solidFill>
+                <a:latin typeface="Calibri"/>
+              </a:rPr>
+              <a:t>кропов после
+мульти-хединга и чистки</a:t>
+            </a:r>
+          </a:p>
+        </p:txBody>
+      </p:sp>
+      <p:sp>
+        <p:nvSpPr>
+          <p:cNvPr id="13" name="TextBox 12"/>
+          <p:cNvSpPr txBox="1"/>
+          <p:nvPr/>
+        </p:nvSpPr>
+        <p:spPr>
+          <a:xfrm>
+            <a:off x="11292000" y="6358000"/>
+            <a:ext cx="700000" cy="350000"/>
+          </a:xfrm>
+          <a:prstGeom prst="rect">
+            <a:avLst/>
+          </a:prstGeom>
+          <a:noFill/>
+        </p:spPr>
+        <p:txBody>
+          <a:bodyPr wrap="square" anchor="t">
+            <a:spAutoFit/>
+          </a:bodyPr>
+          <a:lstStyle/>
+          <a:p>
+            <a:pPr algn="r">
+              <a:spcAft>
+                <a:spcPts val="600"/>
+              </a:spcAft>
+            </a:pPr>
+            <a:r>
+              <a:rPr sz="1100" b="0">
+                <a:solidFill>
+                  <a:srgbClr val="5B6672"/>
+                </a:solidFill>
+                <a:latin typeface="Calibri"/>
+              </a:rPr>
+              <a:t>4/10</a:t>
             </a:r>
           </a:p>
         </p:txBody>
@@ -3825,14 +6964,146 @@
       <p:grpSpPr/>
       <p:sp>
         <p:nvSpPr>
-          <p:cNvPr id="2" name="TextBox 1"/>
+          <p:cNvPr id="2" name="Rectangle 1"/>
+          <p:cNvSpPr/>
+          <p:nvPr/>
+        </p:nvSpPr>
+        <p:spPr>
+          <a:xfrm>
+            <a:off x="0" y="0"/>
+            <a:ext cx="12192000" cy="6858000"/>
+          </a:xfrm>
+          <a:prstGeom prst="rect">
+            <a:avLst/>
+          </a:prstGeom>
+          <a:solidFill>
+            <a:srgbClr val="FFFFFF"/>
+          </a:solidFill>
+          <a:ln>
+            <a:noFill/>
+          </a:ln>
+          <a:effectLst/>
+        </p:spPr>
+        <p:style>
+          <a:lnRef idx="1">
+            <a:schemeClr val="accent1"/>
+          </a:lnRef>
+          <a:fillRef idx="3">
+            <a:schemeClr val="accent1"/>
+          </a:fillRef>
+          <a:effectRef idx="2">
+            <a:schemeClr val="accent1"/>
+          </a:effectRef>
+          <a:fontRef idx="minor">
+            <a:schemeClr val="lt1"/>
+          </a:fontRef>
+        </p:style>
+        <p:txBody>
+          <a:bodyPr rtlCol="0" anchor="ctr"/>
+          <a:lstStyle/>
+          <a:p>
+            <a:pPr algn="ctr"/>
+          </a:p>
+        </p:txBody>
+      </p:sp>
+      <p:sp>
+        <p:nvSpPr>
+          <p:cNvPr id="3" name="Rectangle 2"/>
+          <p:cNvSpPr/>
+          <p:nvPr/>
+        </p:nvSpPr>
+        <p:spPr>
+          <a:xfrm>
+            <a:off x="0" y="0"/>
+            <a:ext cx="12192000" cy="1500000"/>
+          </a:xfrm>
+          <a:prstGeom prst="rect">
+            <a:avLst/>
+          </a:prstGeom>
+          <a:solidFill>
+            <a:srgbClr val="0F1E3D"/>
+          </a:solidFill>
+          <a:ln>
+            <a:noFill/>
+          </a:ln>
+          <a:effectLst/>
+        </p:spPr>
+        <p:style>
+          <a:lnRef idx="1">
+            <a:schemeClr val="accent1"/>
+          </a:lnRef>
+          <a:fillRef idx="3">
+            <a:schemeClr val="accent1"/>
+          </a:fillRef>
+          <a:effectRef idx="2">
+            <a:schemeClr val="accent1"/>
+          </a:effectRef>
+          <a:fontRef idx="minor">
+            <a:schemeClr val="lt1"/>
+          </a:fontRef>
+        </p:style>
+        <p:txBody>
+          <a:bodyPr rtlCol="0" anchor="ctr"/>
+          <a:lstStyle/>
+          <a:p>
+            <a:pPr algn="ctr"/>
+          </a:p>
+        </p:txBody>
+      </p:sp>
+      <p:sp>
+        <p:nvSpPr>
+          <p:cNvPr id="4" name="Rectangle 3"/>
+          <p:cNvSpPr/>
+          <p:nvPr/>
+        </p:nvSpPr>
+        <p:spPr>
+          <a:xfrm>
+            <a:off x="700000" y="560000"/>
+            <a:ext cx="180000" cy="560000"/>
+          </a:xfrm>
+          <a:prstGeom prst="rect">
+            <a:avLst/>
+          </a:prstGeom>
+          <a:solidFill>
+            <a:srgbClr val="E87A22"/>
+          </a:solidFill>
+          <a:ln>
+            <a:noFill/>
+          </a:ln>
+          <a:effectLst/>
+        </p:spPr>
+        <p:style>
+          <a:lnRef idx="1">
+            <a:schemeClr val="accent1"/>
+          </a:lnRef>
+          <a:fillRef idx="3">
+            <a:schemeClr val="accent1"/>
+          </a:fillRef>
+          <a:effectRef idx="2">
+            <a:schemeClr val="accent1"/>
+          </a:effectRef>
+          <a:fontRef idx="minor">
+            <a:schemeClr val="lt1"/>
+          </a:fontRef>
+        </p:style>
+        <p:txBody>
+          <a:bodyPr rtlCol="0" anchor="ctr"/>
+          <a:lstStyle/>
+          <a:p>
+            <a:pPr algn="ctr"/>
+          </a:p>
+        </p:txBody>
+      </p:sp>
+      <p:sp>
+        <p:nvSpPr>
+          <p:cNvPr id="5" name="TextBox 4"/>
           <p:cNvSpPr txBox="1"/>
           <p:nvPr/>
         </p:nvSpPr>
         <p:spPr>
           <a:xfrm>
-            <a:off x="548640" y="457200"/>
-            <a:ext cx="10972800" cy="1097280"/>
+            <a:off x="1000000" y="360000"/>
+            <a:ext cx="10492000" cy="900000"/>
           </a:xfrm>
           <a:prstGeom prst="rect">
             <a:avLst/>
@@ -3840,30 +7111,93 @@
           <a:noFill/>
         </p:spPr>
         <p:txBody>
-          <a:bodyPr wrap="none">
+          <a:bodyPr wrap="square" anchor="ctr">
             <a:spAutoFit/>
           </a:bodyPr>
           <a:lstStyle/>
           <a:p>
-            <a:pPr>
-              <a:defRPr sz="3200" b="1"/>
+            <a:pPr algn="l">
+              <a:spcAft>
+                <a:spcPts val="200"/>
+              </a:spcAft>
             </a:pPr>
             <a:r>
-              <a:t>Пайплайн</a:t>
-            </a:r>
-          </a:p>
-        </p:txBody>
-      </p:sp>
-      <p:sp>
-        <p:nvSpPr>
-          <p:cNvPr id="3" name="TextBox 2"/>
+              <a:rPr sz="1300" b="1">
+                <a:solidFill>
+                  <a:srgbClr val="14A08F"/>
+                </a:solidFill>
+                <a:latin typeface="Calibri"/>
+              </a:rPr>
+              <a:t>КАК РАБОТАЕТ</a:t>
+            </a:r>
+          </a:p>
+          <a:p>
+            <a:r>
+              <a:rPr sz="3000" b="1">
+                <a:solidFill>
+                  <a:srgbClr val="FFFFFF"/>
+                </a:solidFill>
+                <a:latin typeface="Calibri"/>
+              </a:rPr>
+              <a:t>Замороженный CLIP + линейный пробинг</a:t>
+            </a:r>
+          </a:p>
+        </p:txBody>
+      </p:sp>
+      <p:sp>
+        <p:nvSpPr>
+          <p:cNvPr id="6" name="Rectangle 5"/>
+          <p:cNvSpPr/>
+          <p:nvPr/>
+        </p:nvSpPr>
+        <p:spPr>
+          <a:xfrm>
+            <a:off x="700000" y="2550000"/>
+            <a:ext cx="1673666" cy="1300000"/>
+          </a:xfrm>
+          <a:prstGeom prst="rect">
+            <a:avLst/>
+          </a:prstGeom>
+          <a:solidFill>
+            <a:srgbClr val="0F1E3D"/>
+          </a:solidFill>
+          <a:ln>
+            <a:noFill/>
+          </a:ln>
+          <a:effectLst/>
+        </p:spPr>
+        <p:style>
+          <a:lnRef idx="1">
+            <a:schemeClr val="accent1"/>
+          </a:lnRef>
+          <a:fillRef idx="3">
+            <a:schemeClr val="accent1"/>
+          </a:fillRef>
+          <a:effectRef idx="2">
+            <a:schemeClr val="accent1"/>
+          </a:effectRef>
+          <a:fontRef idx="minor">
+            <a:schemeClr val="lt1"/>
+          </a:fontRef>
+        </p:style>
+        <p:txBody>
+          <a:bodyPr rtlCol="0" anchor="ctr"/>
+          <a:lstStyle/>
+          <a:p>
+            <a:pPr algn="ctr"/>
+          </a:p>
+        </p:txBody>
+      </p:sp>
+      <p:sp>
+        <p:nvSpPr>
+          <p:cNvPr id="7" name="TextBox 6"/>
           <p:cNvSpPr txBox="1"/>
           <p:nvPr/>
         </p:nvSpPr>
         <p:spPr>
           <a:xfrm>
-            <a:off x="548640" y="1645920"/>
-            <a:ext cx="10972800" cy="4754880"/>
+            <a:off x="780000" y="2550000"/>
+            <a:ext cx="1513666" cy="1300000"/>
           </a:xfrm>
           <a:prstGeom prst="rect">
             <a:avLst/>
@@ -3871,45 +7205,718 @@
           <a:noFill/>
         </p:spPr>
         <p:txBody>
-          <a:bodyPr wrap="square">
+          <a:bodyPr wrap="square" anchor="ctr">
             <a:spAutoFit/>
           </a:bodyPr>
           <a:lstStyle/>
           <a:p>
-            <a:pPr>
-              <a:defRPr sz="2000"/>
+            <a:pPr algn="ctr">
+              <a:spcAft>
+                <a:spcPts val="600"/>
+              </a:spcAft>
             </a:pPr>
             <a:r>
-              <a:t>Контур участка → точки панорам (URL / грани полигона)</a:t>
-            </a:r>
-          </a:p>
-          <a:p>
-            <a:pPr>
-              <a:defRPr sz="1800"/>
+              <a:rPr sz="1300" b="1">
+                <a:solidFill>
+                  <a:srgbClr val="FFFFFF"/>
+                </a:solidFill>
+                <a:latin typeface="Calibri"/>
+              </a:rPr>
+              <a:t>Контур участка
+(GeoPackage)</a:t>
+            </a:r>
+          </a:p>
+        </p:txBody>
+      </p:sp>
+      <p:sp>
+        <p:nvSpPr>
+          <p:cNvPr id="8" name="TextBox 7"/>
+          <p:cNvSpPr txBox="1"/>
+          <p:nvPr/>
+        </p:nvSpPr>
+        <p:spPr>
+          <a:xfrm>
+            <a:off x="2333666" y="3030000"/>
+            <a:ext cx="220000" cy="350000"/>
+          </a:xfrm>
+          <a:prstGeom prst="rect">
+            <a:avLst/>
+          </a:prstGeom>
+          <a:noFill/>
+        </p:spPr>
+        <p:txBody>
+          <a:bodyPr wrap="square" anchor="ctr">
+            <a:spAutoFit/>
+          </a:bodyPr>
+          <a:lstStyle/>
+          <a:p>
+            <a:pPr algn="ctr">
+              <a:spcAft>
+                <a:spcPts val="600"/>
+              </a:spcAft>
             </a:pPr>
             <a:r>
-              <a:t>→ кроп 896×672 → CLIP ViT-L-14 → linear probe</a:t>
-            </a:r>
-          </a:p>
-          <a:p>
-            <a:pPr>
-              <a:defRPr sz="1800"/>
+              <a:rPr sz="2600" b="1">
+                <a:solidFill>
+                  <a:srgbClr val="E87A22"/>
+                </a:solidFill>
+                <a:latin typeface="Calibri"/>
+              </a:rPr>
+              <a:t>›</a:t>
+            </a:r>
+          </a:p>
+        </p:txBody>
+      </p:sp>
+      <p:sp>
+        <p:nvSpPr>
+          <p:cNvPr id="9" name="Rectangle 8"/>
+          <p:cNvSpPr/>
+          <p:nvPr/>
+        </p:nvSpPr>
+        <p:spPr>
+          <a:xfrm>
+            <a:off x="2523666" y="2550000"/>
+            <a:ext cx="1673666" cy="1300000"/>
+          </a:xfrm>
+          <a:prstGeom prst="rect">
+            <a:avLst/>
+          </a:prstGeom>
+          <a:solidFill>
+            <a:srgbClr val="0F1E3D"/>
+          </a:solidFill>
+          <a:ln>
+            <a:noFill/>
+          </a:ln>
+          <a:effectLst/>
+        </p:spPr>
+        <p:style>
+          <a:lnRef idx="1">
+            <a:schemeClr val="accent1"/>
+          </a:lnRef>
+          <a:fillRef idx="3">
+            <a:schemeClr val="accent1"/>
+          </a:fillRef>
+          <a:effectRef idx="2">
+            <a:schemeClr val="accent1"/>
+          </a:effectRef>
+          <a:fontRef idx="minor">
+            <a:schemeClr val="lt1"/>
+          </a:fontRef>
+        </p:style>
+        <p:txBody>
+          <a:bodyPr rtlCol="0" anchor="ctr"/>
+          <a:lstStyle/>
+          <a:p>
+            <a:pPr algn="ctr"/>
+          </a:p>
+        </p:txBody>
+      </p:sp>
+      <p:sp>
+        <p:nvSpPr>
+          <p:cNvPr id="10" name="TextBox 9"/>
+          <p:cNvSpPr txBox="1"/>
+          <p:nvPr/>
+        </p:nvSpPr>
+        <p:spPr>
+          <a:xfrm>
+            <a:off x="2603666" y="2550000"/>
+            <a:ext cx="1513666" cy="1300000"/>
+          </a:xfrm>
+          <a:prstGeom prst="rect">
+            <a:avLst/>
+          </a:prstGeom>
+          <a:noFill/>
+        </p:spPr>
+        <p:txBody>
+          <a:bodyPr wrap="square" anchor="ctr">
+            <a:spAutoFit/>
+          </a:bodyPr>
+          <a:lstStyle/>
+          <a:p>
+            <a:pPr algn="ctr">
+              <a:spcAft>
+                <a:spcPts val="600"/>
+              </a:spcAft>
             </a:pPr>
             <a:r>
-              <a:t>→ голосование по 5 ракурсам</a:t>
-            </a:r>
-          </a:p>
-          <a:p>
-            <a:pPr>
-              <a:defRPr sz="1800"/>
+              <a:rPr sz="1300" b="1">
+                <a:solidFill>
+                  <a:srgbClr val="FFFFFF"/>
+                </a:solidFill>
+                <a:latin typeface="Calibri"/>
+              </a:rPr>
+              <a:t>Точки панорам
+URL / грани полигона</a:t>
+            </a:r>
+          </a:p>
+        </p:txBody>
+      </p:sp>
+      <p:sp>
+        <p:nvSpPr>
+          <p:cNvPr id="11" name="TextBox 10"/>
+          <p:cNvSpPr txBox="1"/>
+          <p:nvPr/>
+        </p:nvSpPr>
+        <p:spPr>
+          <a:xfrm>
+            <a:off x="4157332" y="3030000"/>
+            <a:ext cx="220000" cy="350000"/>
+          </a:xfrm>
+          <a:prstGeom prst="rect">
+            <a:avLst/>
+          </a:prstGeom>
+          <a:noFill/>
+        </p:spPr>
+        <p:txBody>
+          <a:bodyPr wrap="square" anchor="ctr">
+            <a:spAutoFit/>
+          </a:bodyPr>
+          <a:lstStyle/>
+          <a:p>
+            <a:pPr algn="ctr">
+              <a:spcAft>
+                <a:spcPts val="600"/>
+              </a:spcAft>
             </a:pPr>
-          </a:p>
-          <a:p>
-            <a:pPr>
-              <a:defRPr sz="1800"/>
+            <a:r>
+              <a:rPr sz="2600" b="1">
+                <a:solidFill>
+                  <a:srgbClr val="E87A22"/>
+                </a:solidFill>
+                <a:latin typeface="Calibri"/>
+              </a:rPr>
+              <a:t>›</a:t>
+            </a:r>
+          </a:p>
+        </p:txBody>
+      </p:sp>
+      <p:sp>
+        <p:nvSpPr>
+          <p:cNvPr id="12" name="Rectangle 11"/>
+          <p:cNvSpPr/>
+          <p:nvPr/>
+        </p:nvSpPr>
+        <p:spPr>
+          <a:xfrm>
+            <a:off x="4347332" y="2550000"/>
+            <a:ext cx="1673666" cy="1300000"/>
+          </a:xfrm>
+          <a:prstGeom prst="rect">
+            <a:avLst/>
+          </a:prstGeom>
+          <a:solidFill>
+            <a:srgbClr val="0F1E3D"/>
+          </a:solidFill>
+          <a:ln>
+            <a:noFill/>
+          </a:ln>
+          <a:effectLst/>
+        </p:spPr>
+        <p:style>
+          <a:lnRef idx="1">
+            <a:schemeClr val="accent1"/>
+          </a:lnRef>
+          <a:fillRef idx="3">
+            <a:schemeClr val="accent1"/>
+          </a:fillRef>
+          <a:effectRef idx="2">
+            <a:schemeClr val="accent1"/>
+          </a:effectRef>
+          <a:fontRef idx="minor">
+            <a:schemeClr val="lt1"/>
+          </a:fontRef>
+        </p:style>
+        <p:txBody>
+          <a:bodyPr rtlCol="0" anchor="ctr"/>
+          <a:lstStyle/>
+          <a:p>
+            <a:pPr algn="ctr"/>
+          </a:p>
+        </p:txBody>
+      </p:sp>
+      <p:sp>
+        <p:nvSpPr>
+          <p:cNvPr id="13" name="TextBox 12"/>
+          <p:cNvSpPr txBox="1"/>
+          <p:nvPr/>
+        </p:nvSpPr>
+        <p:spPr>
+          <a:xfrm>
+            <a:off x="4427332" y="2550000"/>
+            <a:ext cx="1513666" cy="1300000"/>
+          </a:xfrm>
+          <a:prstGeom prst="rect">
+            <a:avLst/>
+          </a:prstGeom>
+          <a:noFill/>
+        </p:spPr>
+        <p:txBody>
+          <a:bodyPr wrap="square" anchor="ctr">
+            <a:spAutoFit/>
+          </a:bodyPr>
+          <a:lstStyle/>
+          <a:p>
+            <a:pPr algn="ctr">
+              <a:spcAft>
+                <a:spcPts val="600"/>
+              </a:spcAft>
             </a:pPr>
             <a:r>
-              <a:t>Продакшен: mode=ml, без текстовой эвристики</a:t>
+              <a:rPr sz="1300" b="1">
+                <a:solidFill>
+                  <a:srgbClr val="FFFFFF"/>
+                </a:solidFill>
+                <a:latin typeface="Calibri"/>
+              </a:rPr>
+              <a:t>Кроп 896×672
+4 азимута</a:t>
+            </a:r>
+          </a:p>
+        </p:txBody>
+      </p:sp>
+      <p:sp>
+        <p:nvSpPr>
+          <p:cNvPr id="14" name="TextBox 13"/>
+          <p:cNvSpPr txBox="1"/>
+          <p:nvPr/>
+        </p:nvSpPr>
+        <p:spPr>
+          <a:xfrm>
+            <a:off x="5980998" y="3030000"/>
+            <a:ext cx="220000" cy="350000"/>
+          </a:xfrm>
+          <a:prstGeom prst="rect">
+            <a:avLst/>
+          </a:prstGeom>
+          <a:noFill/>
+        </p:spPr>
+        <p:txBody>
+          <a:bodyPr wrap="square" anchor="ctr">
+            <a:spAutoFit/>
+          </a:bodyPr>
+          <a:lstStyle/>
+          <a:p>
+            <a:pPr algn="ctr">
+              <a:spcAft>
+                <a:spcPts val="600"/>
+              </a:spcAft>
+            </a:pPr>
+            <a:r>
+              <a:rPr sz="2600" b="1">
+                <a:solidFill>
+                  <a:srgbClr val="E87A22"/>
+                </a:solidFill>
+                <a:latin typeface="Calibri"/>
+              </a:rPr>
+              <a:t>›</a:t>
+            </a:r>
+          </a:p>
+        </p:txBody>
+      </p:sp>
+      <p:sp>
+        <p:nvSpPr>
+          <p:cNvPr id="15" name="Rectangle 14"/>
+          <p:cNvSpPr/>
+          <p:nvPr/>
+        </p:nvSpPr>
+        <p:spPr>
+          <a:xfrm>
+            <a:off x="6170998" y="2550000"/>
+            <a:ext cx="1673666" cy="1300000"/>
+          </a:xfrm>
+          <a:prstGeom prst="rect">
+            <a:avLst/>
+          </a:prstGeom>
+          <a:solidFill>
+            <a:srgbClr val="14A08F"/>
+          </a:solidFill>
+          <a:ln>
+            <a:noFill/>
+          </a:ln>
+          <a:effectLst/>
+        </p:spPr>
+        <p:style>
+          <a:lnRef idx="1">
+            <a:schemeClr val="accent1"/>
+          </a:lnRef>
+          <a:fillRef idx="3">
+            <a:schemeClr val="accent1"/>
+          </a:fillRef>
+          <a:effectRef idx="2">
+            <a:schemeClr val="accent1"/>
+          </a:effectRef>
+          <a:fontRef idx="minor">
+            <a:schemeClr val="lt1"/>
+          </a:fontRef>
+        </p:style>
+        <p:txBody>
+          <a:bodyPr rtlCol="0" anchor="ctr"/>
+          <a:lstStyle/>
+          <a:p>
+            <a:pPr algn="ctr"/>
+          </a:p>
+        </p:txBody>
+      </p:sp>
+      <p:sp>
+        <p:nvSpPr>
+          <p:cNvPr id="16" name="TextBox 15"/>
+          <p:cNvSpPr txBox="1"/>
+          <p:nvPr/>
+        </p:nvSpPr>
+        <p:spPr>
+          <a:xfrm>
+            <a:off x="6250998" y="2550000"/>
+            <a:ext cx="1513666" cy="1300000"/>
+          </a:xfrm>
+          <a:prstGeom prst="rect">
+            <a:avLst/>
+          </a:prstGeom>
+          <a:noFill/>
+        </p:spPr>
+        <p:txBody>
+          <a:bodyPr wrap="square" anchor="ctr">
+            <a:spAutoFit/>
+          </a:bodyPr>
+          <a:lstStyle/>
+          <a:p>
+            <a:pPr algn="ctr">
+              <a:spcAft>
+                <a:spcPts val="600"/>
+              </a:spcAft>
+            </a:pPr>
+            <a:r>
+              <a:rPr sz="1300" b="1">
+                <a:solidFill>
+                  <a:srgbClr val="FFFFFF"/>
+                </a:solidFill>
+                <a:latin typeface="Calibri"/>
+              </a:rPr>
+              <a:t>CLIP ViT-L-14
+(заморожен)</a:t>
+            </a:r>
+          </a:p>
+        </p:txBody>
+      </p:sp>
+      <p:sp>
+        <p:nvSpPr>
+          <p:cNvPr id="17" name="TextBox 16"/>
+          <p:cNvSpPr txBox="1"/>
+          <p:nvPr/>
+        </p:nvSpPr>
+        <p:spPr>
+          <a:xfrm>
+            <a:off x="7804664" y="3030000"/>
+            <a:ext cx="220000" cy="350000"/>
+          </a:xfrm>
+          <a:prstGeom prst="rect">
+            <a:avLst/>
+          </a:prstGeom>
+          <a:noFill/>
+        </p:spPr>
+        <p:txBody>
+          <a:bodyPr wrap="square" anchor="ctr">
+            <a:spAutoFit/>
+          </a:bodyPr>
+          <a:lstStyle/>
+          <a:p>
+            <a:pPr algn="ctr">
+              <a:spcAft>
+                <a:spcPts val="600"/>
+              </a:spcAft>
+            </a:pPr>
+            <a:r>
+              <a:rPr sz="2600" b="1">
+                <a:solidFill>
+                  <a:srgbClr val="E87A22"/>
+                </a:solidFill>
+                <a:latin typeface="Calibri"/>
+              </a:rPr>
+              <a:t>›</a:t>
+            </a:r>
+          </a:p>
+        </p:txBody>
+      </p:sp>
+      <p:sp>
+        <p:nvSpPr>
+          <p:cNvPr id="18" name="Rectangle 17"/>
+          <p:cNvSpPr/>
+          <p:nvPr/>
+        </p:nvSpPr>
+        <p:spPr>
+          <a:xfrm>
+            <a:off x="7994664" y="2550000"/>
+            <a:ext cx="1673666" cy="1300000"/>
+          </a:xfrm>
+          <a:prstGeom prst="rect">
+            <a:avLst/>
+          </a:prstGeom>
+          <a:solidFill>
+            <a:srgbClr val="14A08F"/>
+          </a:solidFill>
+          <a:ln>
+            <a:noFill/>
+          </a:ln>
+          <a:effectLst/>
+        </p:spPr>
+        <p:style>
+          <a:lnRef idx="1">
+            <a:schemeClr val="accent1"/>
+          </a:lnRef>
+          <a:fillRef idx="3">
+            <a:schemeClr val="accent1"/>
+          </a:fillRef>
+          <a:effectRef idx="2">
+            <a:schemeClr val="accent1"/>
+          </a:effectRef>
+          <a:fontRef idx="minor">
+            <a:schemeClr val="lt1"/>
+          </a:fontRef>
+        </p:style>
+        <p:txBody>
+          <a:bodyPr rtlCol="0" anchor="ctr"/>
+          <a:lstStyle/>
+          <a:p>
+            <a:pPr algn="ctr"/>
+          </a:p>
+        </p:txBody>
+      </p:sp>
+      <p:sp>
+        <p:nvSpPr>
+          <p:cNvPr id="19" name="TextBox 18"/>
+          <p:cNvSpPr txBox="1"/>
+          <p:nvPr/>
+        </p:nvSpPr>
+        <p:spPr>
+          <a:xfrm>
+            <a:off x="8074664" y="2550000"/>
+            <a:ext cx="1513666" cy="1300000"/>
+          </a:xfrm>
+          <a:prstGeom prst="rect">
+            <a:avLst/>
+          </a:prstGeom>
+          <a:noFill/>
+        </p:spPr>
+        <p:txBody>
+          <a:bodyPr wrap="square" anchor="ctr">
+            <a:spAutoFit/>
+          </a:bodyPr>
+          <a:lstStyle/>
+          <a:p>
+            <a:pPr algn="ctr">
+              <a:spcAft>
+                <a:spcPts val="600"/>
+              </a:spcAft>
+            </a:pPr>
+            <a:r>
+              <a:rPr sz="1300" b="1">
+                <a:solidFill>
+                  <a:srgbClr val="FFFFFF"/>
+                </a:solidFill>
+                <a:latin typeface="Calibri"/>
+              </a:rPr>
+              <a:t>Linear probe
+6 классов</a:t>
+            </a:r>
+          </a:p>
+        </p:txBody>
+      </p:sp>
+      <p:sp>
+        <p:nvSpPr>
+          <p:cNvPr id="20" name="TextBox 19"/>
+          <p:cNvSpPr txBox="1"/>
+          <p:nvPr/>
+        </p:nvSpPr>
+        <p:spPr>
+          <a:xfrm>
+            <a:off x="9628330" y="3030000"/>
+            <a:ext cx="220000" cy="350000"/>
+          </a:xfrm>
+          <a:prstGeom prst="rect">
+            <a:avLst/>
+          </a:prstGeom>
+          <a:noFill/>
+        </p:spPr>
+        <p:txBody>
+          <a:bodyPr wrap="square" anchor="ctr">
+            <a:spAutoFit/>
+          </a:bodyPr>
+          <a:lstStyle/>
+          <a:p>
+            <a:pPr algn="ctr">
+              <a:spcAft>
+                <a:spcPts val="600"/>
+              </a:spcAft>
+            </a:pPr>
+            <a:r>
+              <a:rPr sz="2600" b="1">
+                <a:solidFill>
+                  <a:srgbClr val="E87A22"/>
+                </a:solidFill>
+                <a:latin typeface="Calibri"/>
+              </a:rPr>
+              <a:t>›</a:t>
+            </a:r>
+          </a:p>
+        </p:txBody>
+      </p:sp>
+      <p:sp>
+        <p:nvSpPr>
+          <p:cNvPr id="21" name="Rectangle 20"/>
+          <p:cNvSpPr/>
+          <p:nvPr/>
+        </p:nvSpPr>
+        <p:spPr>
+          <a:xfrm>
+            <a:off x="9818330" y="2550000"/>
+            <a:ext cx="1673666" cy="1300000"/>
+          </a:xfrm>
+          <a:prstGeom prst="rect">
+            <a:avLst/>
+          </a:prstGeom>
+          <a:solidFill>
+            <a:srgbClr val="0F1E3D"/>
+          </a:solidFill>
+          <a:ln>
+            <a:noFill/>
+          </a:ln>
+          <a:effectLst/>
+        </p:spPr>
+        <p:style>
+          <a:lnRef idx="1">
+            <a:schemeClr val="accent1"/>
+          </a:lnRef>
+          <a:fillRef idx="3">
+            <a:schemeClr val="accent1"/>
+          </a:fillRef>
+          <a:effectRef idx="2">
+            <a:schemeClr val="accent1"/>
+          </a:effectRef>
+          <a:fontRef idx="minor">
+            <a:schemeClr val="lt1"/>
+          </a:fontRef>
+        </p:style>
+        <p:txBody>
+          <a:bodyPr rtlCol="0" anchor="ctr"/>
+          <a:lstStyle/>
+          <a:p>
+            <a:pPr algn="ctr"/>
+          </a:p>
+        </p:txBody>
+      </p:sp>
+      <p:sp>
+        <p:nvSpPr>
+          <p:cNvPr id="22" name="TextBox 21"/>
+          <p:cNvSpPr txBox="1"/>
+          <p:nvPr/>
+        </p:nvSpPr>
+        <p:spPr>
+          <a:xfrm>
+            <a:off x="9898330" y="2550000"/>
+            <a:ext cx="1513666" cy="1300000"/>
+          </a:xfrm>
+          <a:prstGeom prst="rect">
+            <a:avLst/>
+          </a:prstGeom>
+          <a:noFill/>
+        </p:spPr>
+        <p:txBody>
+          <a:bodyPr wrap="square" anchor="ctr">
+            <a:spAutoFit/>
+          </a:bodyPr>
+          <a:lstStyle/>
+          <a:p>
+            <a:pPr algn="ctr">
+              <a:spcAft>
+                <a:spcPts val="600"/>
+              </a:spcAft>
+            </a:pPr>
+            <a:r>
+              <a:rPr sz="1300" b="1">
+                <a:solidFill>
+                  <a:srgbClr val="FFFFFF"/>
+                </a:solidFill>
+                <a:latin typeface="Calibri"/>
+              </a:rPr>
+              <a:t>Голосование
+по ракурсам</a:t>
+            </a:r>
+          </a:p>
+        </p:txBody>
+      </p:sp>
+      <p:sp>
+        <p:nvSpPr>
+          <p:cNvPr id="23" name="TextBox 22"/>
+          <p:cNvSpPr txBox="1"/>
+          <p:nvPr/>
+        </p:nvSpPr>
+        <p:spPr>
+          <a:xfrm>
+            <a:off x="700000" y="4400000"/>
+            <a:ext cx="10792000" cy="900000"/>
+          </a:xfrm>
+          <a:prstGeom prst="rect">
+            <a:avLst/>
+          </a:prstGeom>
+          <a:noFill/>
+        </p:spPr>
+        <p:txBody>
+          <a:bodyPr wrap="square" anchor="t">
+            <a:spAutoFit/>
+          </a:bodyPr>
+          <a:lstStyle/>
+          <a:p>
+            <a:pPr algn="l">
+              <a:spcAft>
+                <a:spcPts val="600"/>
+              </a:spcAft>
+            </a:pPr>
+            <a:r>
+              <a:rPr sz="1600" b="0">
+                <a:solidFill>
+                  <a:srgbClr val="5B6672"/>
+                </a:solidFill>
+                <a:latin typeface="Calibri"/>
+              </a:rPr>
+              <a:t>Пробинг поверх замороженного CLIP устойчив к переобучению на малых данных; у участка несколько ракурсов — класс выбирается взвешенным голосованием по уверенности.</a:t>
+            </a:r>
+          </a:p>
+        </p:txBody>
+      </p:sp>
+      <p:sp>
+        <p:nvSpPr>
+          <p:cNvPr id="24" name="TextBox 23"/>
+          <p:cNvSpPr txBox="1"/>
+          <p:nvPr/>
+        </p:nvSpPr>
+        <p:spPr>
+          <a:xfrm>
+            <a:off x="11292000" y="6358000"/>
+            <a:ext cx="700000" cy="350000"/>
+          </a:xfrm>
+          <a:prstGeom prst="rect">
+            <a:avLst/>
+          </a:prstGeom>
+          <a:noFill/>
+        </p:spPr>
+        <p:txBody>
+          <a:bodyPr wrap="square" anchor="t">
+            <a:spAutoFit/>
+          </a:bodyPr>
+          <a:lstStyle/>
+          <a:p>
+            <a:pPr algn="r">
+              <a:spcAft>
+                <a:spcPts val="600"/>
+              </a:spcAft>
+            </a:pPr>
+            <a:r>
+              <a:rPr sz="1100" b="0">
+                <a:solidFill>
+                  <a:srgbClr val="5B6672"/>
+                </a:solidFill>
+                <a:latin typeface="Calibri"/>
+              </a:rPr>
+              <a:t>5/10</a:t>
             </a:r>
           </a:p>
         </p:txBody>
@@ -3934,14 +7941,146 @@
       <p:grpSpPr/>
       <p:sp>
         <p:nvSpPr>
-          <p:cNvPr id="2" name="TextBox 1"/>
+          <p:cNvPr id="2" name="Rectangle 1"/>
+          <p:cNvSpPr/>
+          <p:nvPr/>
+        </p:nvSpPr>
+        <p:spPr>
+          <a:xfrm>
+            <a:off x="0" y="0"/>
+            <a:ext cx="12192000" cy="6858000"/>
+          </a:xfrm>
+          <a:prstGeom prst="rect">
+            <a:avLst/>
+          </a:prstGeom>
+          <a:solidFill>
+            <a:srgbClr val="FFFFFF"/>
+          </a:solidFill>
+          <a:ln>
+            <a:noFill/>
+          </a:ln>
+          <a:effectLst/>
+        </p:spPr>
+        <p:style>
+          <a:lnRef idx="1">
+            <a:schemeClr val="accent1"/>
+          </a:lnRef>
+          <a:fillRef idx="3">
+            <a:schemeClr val="accent1"/>
+          </a:fillRef>
+          <a:effectRef idx="2">
+            <a:schemeClr val="accent1"/>
+          </a:effectRef>
+          <a:fontRef idx="minor">
+            <a:schemeClr val="lt1"/>
+          </a:fontRef>
+        </p:style>
+        <p:txBody>
+          <a:bodyPr rtlCol="0" anchor="ctr"/>
+          <a:lstStyle/>
+          <a:p>
+            <a:pPr algn="ctr"/>
+          </a:p>
+        </p:txBody>
+      </p:sp>
+      <p:sp>
+        <p:nvSpPr>
+          <p:cNvPr id="3" name="Rectangle 2"/>
+          <p:cNvSpPr/>
+          <p:nvPr/>
+        </p:nvSpPr>
+        <p:spPr>
+          <a:xfrm>
+            <a:off x="0" y="0"/>
+            <a:ext cx="12192000" cy="1500000"/>
+          </a:xfrm>
+          <a:prstGeom prst="rect">
+            <a:avLst/>
+          </a:prstGeom>
+          <a:solidFill>
+            <a:srgbClr val="0F1E3D"/>
+          </a:solidFill>
+          <a:ln>
+            <a:noFill/>
+          </a:ln>
+          <a:effectLst/>
+        </p:spPr>
+        <p:style>
+          <a:lnRef idx="1">
+            <a:schemeClr val="accent1"/>
+          </a:lnRef>
+          <a:fillRef idx="3">
+            <a:schemeClr val="accent1"/>
+          </a:fillRef>
+          <a:effectRef idx="2">
+            <a:schemeClr val="accent1"/>
+          </a:effectRef>
+          <a:fontRef idx="minor">
+            <a:schemeClr val="lt1"/>
+          </a:fontRef>
+        </p:style>
+        <p:txBody>
+          <a:bodyPr rtlCol="0" anchor="ctr"/>
+          <a:lstStyle/>
+          <a:p>
+            <a:pPr algn="ctr"/>
+          </a:p>
+        </p:txBody>
+      </p:sp>
+      <p:sp>
+        <p:nvSpPr>
+          <p:cNvPr id="4" name="Rectangle 3"/>
+          <p:cNvSpPr/>
+          <p:nvPr/>
+        </p:nvSpPr>
+        <p:spPr>
+          <a:xfrm>
+            <a:off x="700000" y="560000"/>
+            <a:ext cx="180000" cy="560000"/>
+          </a:xfrm>
+          <a:prstGeom prst="rect">
+            <a:avLst/>
+          </a:prstGeom>
+          <a:solidFill>
+            <a:srgbClr val="E87A22"/>
+          </a:solidFill>
+          <a:ln>
+            <a:noFill/>
+          </a:ln>
+          <a:effectLst/>
+        </p:spPr>
+        <p:style>
+          <a:lnRef idx="1">
+            <a:schemeClr val="accent1"/>
+          </a:lnRef>
+          <a:fillRef idx="3">
+            <a:schemeClr val="accent1"/>
+          </a:fillRef>
+          <a:effectRef idx="2">
+            <a:schemeClr val="accent1"/>
+          </a:effectRef>
+          <a:fontRef idx="minor">
+            <a:schemeClr val="lt1"/>
+          </a:fontRef>
+        </p:style>
+        <p:txBody>
+          <a:bodyPr rtlCol="0" anchor="ctr"/>
+          <a:lstStyle/>
+          <a:p>
+            <a:pPr algn="ctr"/>
+          </a:p>
+        </p:txBody>
+      </p:sp>
+      <p:sp>
+        <p:nvSpPr>
+          <p:cNvPr id="5" name="TextBox 4"/>
           <p:cNvSpPr txBox="1"/>
           <p:nvPr/>
         </p:nvSpPr>
         <p:spPr>
           <a:xfrm>
-            <a:off x="548640" y="457200"/>
-            <a:ext cx="10972800" cy="1097280"/>
+            <a:off x="1000000" y="360000"/>
+            <a:ext cx="10492000" cy="900000"/>
           </a:xfrm>
           <a:prstGeom prst="rect">
             <a:avLst/>
@@ -3949,30 +8088,95 @@
           <a:noFill/>
         </p:spPr>
         <p:txBody>
-          <a:bodyPr wrap="none">
+          <a:bodyPr wrap="square" anchor="ctr">
             <a:spAutoFit/>
           </a:bodyPr>
           <a:lstStyle/>
           <a:p>
-            <a:pPr>
-              <a:defRPr sz="3200" b="1"/>
+            <a:pPr algn="l">
+              <a:spcAft>
+                <a:spcPts val="200"/>
+              </a:spcAft>
             </a:pPr>
             <a:r>
-              <a:t>Метрики (research val)</a:t>
-            </a:r>
-          </a:p>
-        </p:txBody>
-      </p:sp>
-      <p:sp>
-        <p:nvSpPr>
-          <p:cNvPr id="3" name="TextBox 2"/>
+              <a:rPr sz="1300" b="1">
+                <a:solidFill>
+                  <a:srgbClr val="14A08F"/>
+                </a:solidFill>
+                <a:latin typeface="Calibri"/>
+              </a:rPr>
+              <a:t>РЕЗУЛЬТАТЫ</a:t>
+            </a:r>
+          </a:p>
+          <a:p>
+            <a:r>
+              <a:rPr sz="3000" b="1">
+                <a:solidFill>
+                  <a:srgbClr val="FFFFFF"/>
+                </a:solidFill>
+                <a:latin typeface="Calibri"/>
+              </a:rPr>
+              <a:t>Продакшен-модель на честной валидации</a:t>
+            </a:r>
+          </a:p>
+        </p:txBody>
+      </p:sp>
+      <p:sp>
+        <p:nvSpPr>
+          <p:cNvPr id="6" name="Rectangle 5"/>
+          <p:cNvSpPr/>
+          <p:nvPr/>
+        </p:nvSpPr>
+        <p:spPr>
+          <a:xfrm>
+            <a:off x="700000" y="1850000"/>
+            <a:ext cx="3464000" cy="1350000"/>
+          </a:xfrm>
+          <a:prstGeom prst="rect">
+            <a:avLst/>
+          </a:prstGeom>
+          <a:solidFill>
+            <a:srgbClr val="F3F5F7"/>
+          </a:solidFill>
+          <a:ln w="12700">
+            <a:solidFill>
+              <a:srgbClr val="DDE3EA"/>
+            </a:solidFill>
+          </a:ln>
+          <a:effectLst/>
+        </p:spPr>
+        <p:style>
+          <a:lnRef idx="1">
+            <a:schemeClr val="accent1"/>
+          </a:lnRef>
+          <a:fillRef idx="3">
+            <a:schemeClr val="accent1"/>
+          </a:fillRef>
+          <a:effectRef idx="2">
+            <a:schemeClr val="accent1"/>
+          </a:effectRef>
+          <a:fontRef idx="minor">
+            <a:schemeClr val="lt1"/>
+          </a:fontRef>
+        </p:style>
+        <p:txBody>
+          <a:bodyPr rtlCol="0" anchor="ctr"/>
+          <a:lstStyle/>
+          <a:p>
+            <a:pPr algn="ctr"/>
+          </a:p>
+        </p:txBody>
+      </p:sp>
+      <p:sp>
+        <p:nvSpPr>
+          <p:cNvPr id="7" name="TextBox 6"/>
           <p:cNvSpPr txBox="1"/>
           <p:nvPr/>
         </p:nvSpPr>
         <p:spPr>
           <a:xfrm>
-            <a:off x="548640" y="1645920"/>
-            <a:ext cx="10972800" cy="4754880"/>
+            <a:off x="700000" y="1850000"/>
+            <a:ext cx="3464000" cy="1350000"/>
           </a:xfrm>
           <a:prstGeom prst="rect">
             <a:avLst/>
@@ -3980,50 +8184,762 @@
           <a:noFill/>
         </p:spPr>
         <p:txBody>
-          <a:bodyPr wrap="square">
+          <a:bodyPr wrap="square" anchor="ctr">
             <a:spAutoFit/>
           </a:bodyPr>
           <a:lstStyle/>
           <a:p>
-            <a:pPr>
-              <a:defRPr sz="2000"/>
+            <a:pPr algn="ctr">
+              <a:spcAft>
+                <a:spcPts val="200"/>
+              </a:spcAft>
             </a:pPr>
             <a:r>
-              <a:t>CLIP probe vlm6_oss · n_val=239 · 6 классов UTT</a:t>
-            </a:r>
-          </a:p>
-          <a:p>
-            <a:pPr>
-              <a:defRPr sz="1800"/>
+              <a:rPr sz="4000" b="1">
+                <a:solidFill>
+                  <a:srgbClr val="14A08F"/>
+                </a:solidFill>
+                <a:latin typeface="Calibri"/>
+              </a:rPr>
+              <a:t>76.2%</a:t>
+            </a:r>
+          </a:p>
+          <a:p>
+            <a:pPr algn="ctr"/>
+            <a:r>
+              <a:rPr sz="1500">
+                <a:solidFill>
+                  <a:srgbClr val="5B6672"/>
+                </a:solidFill>
+                <a:latin typeface="Calibri"/>
+              </a:rPr>
+              <a:t>Accuracy</a:t>
+            </a:r>
+          </a:p>
+        </p:txBody>
+      </p:sp>
+      <p:sp>
+        <p:nvSpPr>
+          <p:cNvPr id="8" name="Rectangle 7"/>
+          <p:cNvSpPr/>
+          <p:nvPr/>
+        </p:nvSpPr>
+        <p:spPr>
+          <a:xfrm>
+            <a:off x="4364000" y="1850000"/>
+            <a:ext cx="3464000" cy="1350000"/>
+          </a:xfrm>
+          <a:prstGeom prst="rect">
+            <a:avLst/>
+          </a:prstGeom>
+          <a:solidFill>
+            <a:srgbClr val="F3F5F7"/>
+          </a:solidFill>
+          <a:ln w="12700">
+            <a:solidFill>
+              <a:srgbClr val="DDE3EA"/>
+            </a:solidFill>
+          </a:ln>
+          <a:effectLst/>
+        </p:spPr>
+        <p:style>
+          <a:lnRef idx="1">
+            <a:schemeClr val="accent1"/>
+          </a:lnRef>
+          <a:fillRef idx="3">
+            <a:schemeClr val="accent1"/>
+          </a:fillRef>
+          <a:effectRef idx="2">
+            <a:schemeClr val="accent1"/>
+          </a:effectRef>
+          <a:fontRef idx="minor">
+            <a:schemeClr val="lt1"/>
+          </a:fontRef>
+        </p:style>
+        <p:txBody>
+          <a:bodyPr rtlCol="0" anchor="ctr"/>
+          <a:lstStyle/>
+          <a:p>
+            <a:pPr algn="ctr"/>
+          </a:p>
+        </p:txBody>
+      </p:sp>
+      <p:sp>
+        <p:nvSpPr>
+          <p:cNvPr id="9" name="TextBox 8"/>
+          <p:cNvSpPr txBox="1"/>
+          <p:nvPr/>
+        </p:nvSpPr>
+        <p:spPr>
+          <a:xfrm>
+            <a:off x="4364000" y="1850000"/>
+            <a:ext cx="3464000" cy="1350000"/>
+          </a:xfrm>
+          <a:prstGeom prst="rect">
+            <a:avLst/>
+          </a:prstGeom>
+          <a:noFill/>
+        </p:spPr>
+        <p:txBody>
+          <a:bodyPr wrap="square" anchor="ctr">
+            <a:spAutoFit/>
+          </a:bodyPr>
+          <a:lstStyle/>
+          <a:p>
+            <a:pPr algn="ctr">
+              <a:spcAft>
+                <a:spcPts val="200"/>
+              </a:spcAft>
             </a:pPr>
-          </a:p>
-          <a:p>
-            <a:pPr>
-              <a:defRPr sz="1800"/>
+            <a:r>
+              <a:rPr sz="4000" b="1">
+                <a:solidFill>
+                  <a:srgbClr val="14A08F"/>
+                </a:solidFill>
+                <a:latin typeface="Calibri"/>
+              </a:rPr>
+              <a:t>61.0%</a:t>
+            </a:r>
+          </a:p>
+          <a:p>
+            <a:pPr algn="ctr"/>
+            <a:r>
+              <a:rPr sz="1500">
+                <a:solidFill>
+                  <a:srgbClr val="5B6672"/>
+                </a:solidFill>
+                <a:latin typeface="Calibri"/>
+              </a:rPr>
+              <a:t>macro-F1</a:t>
+            </a:r>
+          </a:p>
+        </p:txBody>
+      </p:sp>
+      <p:sp>
+        <p:nvSpPr>
+          <p:cNvPr id="10" name="Rectangle 9"/>
+          <p:cNvSpPr/>
+          <p:nvPr/>
+        </p:nvSpPr>
+        <p:spPr>
+          <a:xfrm>
+            <a:off x="8028000" y="1850000"/>
+            <a:ext cx="3464000" cy="1350000"/>
+          </a:xfrm>
+          <a:prstGeom prst="rect">
+            <a:avLst/>
+          </a:prstGeom>
+          <a:solidFill>
+            <a:srgbClr val="F3F5F7"/>
+          </a:solidFill>
+          <a:ln w="12700">
+            <a:solidFill>
+              <a:srgbClr val="DDE3EA"/>
+            </a:solidFill>
+          </a:ln>
+          <a:effectLst/>
+        </p:spPr>
+        <p:style>
+          <a:lnRef idx="1">
+            <a:schemeClr val="accent1"/>
+          </a:lnRef>
+          <a:fillRef idx="3">
+            <a:schemeClr val="accent1"/>
+          </a:fillRef>
+          <a:effectRef idx="2">
+            <a:schemeClr val="accent1"/>
+          </a:effectRef>
+          <a:fontRef idx="minor">
+            <a:schemeClr val="lt1"/>
+          </a:fontRef>
+        </p:style>
+        <p:txBody>
+          <a:bodyPr rtlCol="0" anchor="ctr"/>
+          <a:lstStyle/>
+          <a:p>
+            <a:pPr algn="ctr"/>
+          </a:p>
+        </p:txBody>
+      </p:sp>
+      <p:sp>
+        <p:nvSpPr>
+          <p:cNvPr id="11" name="TextBox 10"/>
+          <p:cNvSpPr txBox="1"/>
+          <p:nvPr/>
+        </p:nvSpPr>
+        <p:spPr>
+          <a:xfrm>
+            <a:off x="8028000" y="1850000"/>
+            <a:ext cx="3464000" cy="1350000"/>
+          </a:xfrm>
+          <a:prstGeom prst="rect">
+            <a:avLst/>
+          </a:prstGeom>
+          <a:noFill/>
+        </p:spPr>
+        <p:txBody>
+          <a:bodyPr wrap="square" anchor="ctr">
+            <a:spAutoFit/>
+          </a:bodyPr>
+          <a:lstStyle/>
+          <a:p>
+            <a:pPr algn="ctr">
+              <a:spcAft>
+                <a:spcPts val="200"/>
+              </a:spcAft>
             </a:pPr>
             <a:r>
-              <a:t>Accuracy: 76.2%</a:t>
-            </a:r>
-          </a:p>
-          <a:p>
-            <a:pPr>
-              <a:defRPr sz="1800"/>
+              <a:rPr sz="4000" b="1">
+                <a:solidFill>
+                  <a:srgbClr val="14A08F"/>
+                </a:solidFill>
+                <a:latin typeface="Calibri"/>
+              </a:rPr>
+              <a:t>73.8%</a:t>
+            </a:r>
+          </a:p>
+          <a:p>
+            <a:pPr algn="ctr"/>
+            <a:r>
+              <a:rPr sz="1500">
+                <a:solidFill>
+                  <a:srgbClr val="5B6672"/>
+                </a:solidFill>
+                <a:latin typeface="Calibri"/>
+              </a:rPr>
+              <a:t>balanced F1</a:t>
+            </a:r>
+          </a:p>
+        </p:txBody>
+      </p:sp>
+      <p:sp>
+        <p:nvSpPr>
+          <p:cNvPr id="12" name="TextBox 11"/>
+          <p:cNvSpPr txBox="1"/>
+          <p:nvPr/>
+        </p:nvSpPr>
+        <p:spPr>
+          <a:xfrm>
+            <a:off x="700000" y="3450000"/>
+            <a:ext cx="10792000" cy="500000"/>
+          </a:xfrm>
+          <a:prstGeom prst="rect">
+            <a:avLst/>
+          </a:prstGeom>
+          <a:noFill/>
+        </p:spPr>
+        <p:txBody>
+          <a:bodyPr wrap="square" anchor="t">
+            <a:spAutoFit/>
+          </a:bodyPr>
+          <a:lstStyle/>
+          <a:p>
+            <a:pPr algn="l">
+              <a:spcAft>
+                <a:spcPts val="600"/>
+              </a:spcAft>
             </a:pPr>
             <a:r>
-              <a:t>macro-F1: 61.0% · balanced-F1: 73.8%</a:t>
-            </a:r>
-          </a:p>
-          <a:p>
-            <a:pPr>
-              <a:defRPr sz="1800"/>
+              <a:rPr sz="1400" b="0">
+                <a:solidFill>
+                  <a:srgbClr val="5B6672"/>
+                </a:solidFill>
+                <a:latin typeface="Calibri"/>
+              </a:rPr>
+              <a:t>CLIP ViT-L-14 probe · n_val = 239 · сплит по object_id · все 6 классов</a:t>
+            </a:r>
+          </a:p>
+        </p:txBody>
+      </p:sp>
+      <p:sp>
+        <p:nvSpPr>
+          <p:cNvPr id="13" name="TextBox 12"/>
+          <p:cNvSpPr txBox="1"/>
+          <p:nvPr/>
+        </p:nvSpPr>
+        <p:spPr>
+          <a:xfrm>
+            <a:off x="700000" y="4050000"/>
+            <a:ext cx="10792000" cy="400000"/>
+          </a:xfrm>
+          <a:prstGeom prst="rect">
+            <a:avLst/>
+          </a:prstGeom>
+          <a:noFill/>
+        </p:spPr>
+        <p:txBody>
+          <a:bodyPr wrap="square" anchor="t">
+            <a:spAutoFit/>
+          </a:bodyPr>
+          <a:lstStyle/>
+          <a:p>
+            <a:pPr algn="l">
+              <a:spcAft>
+                <a:spcPts val="600"/>
+              </a:spcAft>
             </a:pPr>
-          </a:p>
-          <a:p>
-            <a:pPr>
-              <a:defRPr sz="1800"/>
+            <a:r>
+              <a:rPr sz="1600" b="1">
+                <a:solidFill>
+                  <a:srgbClr val="0F1E3D"/>
+                </a:solidFill>
+                <a:latin typeface="Calibri"/>
+              </a:rPr>
+              <a:t>Путь к результату (рычаг — метки, не архитектура):</a:t>
+            </a:r>
+          </a:p>
+        </p:txBody>
+      </p:sp>
+      <p:sp>
+        <p:nvSpPr>
+          <p:cNvPr id="14" name="Rectangle 13"/>
+          <p:cNvSpPr/>
+          <p:nvPr/>
+        </p:nvSpPr>
+        <p:spPr>
+          <a:xfrm>
+            <a:off x="700000" y="4600000"/>
+            <a:ext cx="2094400" cy="720000"/>
+          </a:xfrm>
+          <a:prstGeom prst="rect">
+            <a:avLst/>
+          </a:prstGeom>
+          <a:solidFill>
+            <a:srgbClr val="0F1E3D"/>
+          </a:solidFill>
+          <a:ln>
+            <a:noFill/>
+          </a:ln>
+          <a:effectLst/>
+        </p:spPr>
+        <p:style>
+          <a:lnRef idx="1">
+            <a:schemeClr val="accent1"/>
+          </a:lnRef>
+          <a:fillRef idx="3">
+            <a:schemeClr val="accent1"/>
+          </a:fillRef>
+          <a:effectRef idx="2">
+            <a:schemeClr val="accent1"/>
+          </a:effectRef>
+          <a:fontRef idx="minor">
+            <a:schemeClr val="lt1"/>
+          </a:fontRef>
+        </p:style>
+        <p:txBody>
+          <a:bodyPr rtlCol="0" anchor="ctr"/>
+          <a:lstStyle/>
+          <a:p>
+            <a:pPr algn="ctr"/>
+          </a:p>
+        </p:txBody>
+      </p:sp>
+      <p:sp>
+        <p:nvSpPr>
+          <p:cNvPr id="15" name="TextBox 14"/>
+          <p:cNvSpPr txBox="1"/>
+          <p:nvPr/>
+        </p:nvSpPr>
+        <p:spPr>
+          <a:xfrm>
+            <a:off x="760000" y="4600000"/>
+            <a:ext cx="1974400" cy="720000"/>
+          </a:xfrm>
+          <a:prstGeom prst="rect">
+            <a:avLst/>
+          </a:prstGeom>
+          <a:noFill/>
+        </p:spPr>
+        <p:txBody>
+          <a:bodyPr wrap="square" anchor="ctr">
+            <a:spAutoFit/>
+          </a:bodyPr>
+          <a:lstStyle/>
+          <a:p>
+            <a:pPr algn="ctr">
+              <a:spcAft>
+                <a:spcPts val="600"/>
+              </a:spcAft>
             </a:pPr>
             <a:r>
-              <a:t>Все 6 классов в confusion matrix</a:t>
+              <a:rPr sz="1300" b="0">
+                <a:solidFill>
+                  <a:srgbClr val="FFFFFF"/>
+                </a:solidFill>
+                <a:latin typeface="Calibri"/>
+              </a:rPr>
+              <a:t>zero-shot 0.20</a:t>
+            </a:r>
+          </a:p>
+        </p:txBody>
+      </p:sp>
+      <p:sp>
+        <p:nvSpPr>
+          <p:cNvPr id="16" name="Rectangle 15"/>
+          <p:cNvSpPr/>
+          <p:nvPr/>
+        </p:nvSpPr>
+        <p:spPr>
+          <a:xfrm>
+            <a:off x="2874400" y="4600000"/>
+            <a:ext cx="2094400" cy="720000"/>
+          </a:xfrm>
+          <a:prstGeom prst="rect">
+            <a:avLst/>
+          </a:prstGeom>
+          <a:solidFill>
+            <a:srgbClr val="0F1E3D"/>
+          </a:solidFill>
+          <a:ln>
+            <a:noFill/>
+          </a:ln>
+          <a:effectLst/>
+        </p:spPr>
+        <p:style>
+          <a:lnRef idx="1">
+            <a:schemeClr val="accent1"/>
+          </a:lnRef>
+          <a:fillRef idx="3">
+            <a:schemeClr val="accent1"/>
+          </a:fillRef>
+          <a:effectRef idx="2">
+            <a:schemeClr val="accent1"/>
+          </a:effectRef>
+          <a:fontRef idx="minor">
+            <a:schemeClr val="lt1"/>
+          </a:fontRef>
+        </p:style>
+        <p:txBody>
+          <a:bodyPr rtlCol="0" anchor="ctr"/>
+          <a:lstStyle/>
+          <a:p>
+            <a:pPr algn="ctr"/>
+          </a:p>
+        </p:txBody>
+      </p:sp>
+      <p:sp>
+        <p:nvSpPr>
+          <p:cNvPr id="17" name="TextBox 16"/>
+          <p:cNvSpPr txBox="1"/>
+          <p:nvPr/>
+        </p:nvSpPr>
+        <p:spPr>
+          <a:xfrm>
+            <a:off x="2934400" y="4600000"/>
+            <a:ext cx="1974400" cy="720000"/>
+          </a:xfrm>
+          <a:prstGeom prst="rect">
+            <a:avLst/>
+          </a:prstGeom>
+          <a:noFill/>
+        </p:spPr>
+        <p:txBody>
+          <a:bodyPr wrap="square" anchor="ctr">
+            <a:spAutoFit/>
+          </a:bodyPr>
+          <a:lstStyle/>
+          <a:p>
+            <a:pPr algn="ctr">
+              <a:spcAft>
+                <a:spcPts val="600"/>
+              </a:spcAft>
+            </a:pPr>
+            <a:r>
+              <a:rPr sz="1300" b="0">
+                <a:solidFill>
+                  <a:srgbClr val="FFFFFF"/>
+                </a:solidFill>
+                <a:latin typeface="Calibri"/>
+              </a:rPr>
+              <a:t>fine-tune 0.40</a:t>
+            </a:r>
+          </a:p>
+        </p:txBody>
+      </p:sp>
+      <p:sp>
+        <p:nvSpPr>
+          <p:cNvPr id="18" name="Rectangle 17"/>
+          <p:cNvSpPr/>
+          <p:nvPr/>
+        </p:nvSpPr>
+        <p:spPr>
+          <a:xfrm>
+            <a:off x="5048800" y="4600000"/>
+            <a:ext cx="2094400" cy="720000"/>
+          </a:xfrm>
+          <a:prstGeom prst="rect">
+            <a:avLst/>
+          </a:prstGeom>
+          <a:solidFill>
+            <a:srgbClr val="0F1E3D"/>
+          </a:solidFill>
+          <a:ln>
+            <a:noFill/>
+          </a:ln>
+          <a:effectLst/>
+        </p:spPr>
+        <p:style>
+          <a:lnRef idx="1">
+            <a:schemeClr val="accent1"/>
+          </a:lnRef>
+          <a:fillRef idx="3">
+            <a:schemeClr val="accent1"/>
+          </a:fillRef>
+          <a:effectRef idx="2">
+            <a:schemeClr val="accent1"/>
+          </a:effectRef>
+          <a:fontRef idx="minor">
+            <a:schemeClr val="lt1"/>
+          </a:fontRef>
+        </p:style>
+        <p:txBody>
+          <a:bodyPr rtlCol="0" anchor="ctr"/>
+          <a:lstStyle/>
+          <a:p>
+            <a:pPr algn="ctr"/>
+          </a:p>
+        </p:txBody>
+      </p:sp>
+      <p:sp>
+        <p:nvSpPr>
+          <p:cNvPr id="19" name="TextBox 18"/>
+          <p:cNvSpPr txBox="1"/>
+          <p:nvPr/>
+        </p:nvSpPr>
+        <p:spPr>
+          <a:xfrm>
+            <a:off x="5108800" y="4600000"/>
+            <a:ext cx="1974400" cy="720000"/>
+          </a:xfrm>
+          <a:prstGeom prst="rect">
+            <a:avLst/>
+          </a:prstGeom>
+          <a:noFill/>
+        </p:spPr>
+        <p:txBody>
+          <a:bodyPr wrap="square" anchor="ctr">
+            <a:spAutoFit/>
+          </a:bodyPr>
+          <a:lstStyle/>
+          <a:p>
+            <a:pPr algn="ctr">
+              <a:spcAft>
+                <a:spcPts val="600"/>
+              </a:spcAft>
+            </a:pPr>
+            <a:r>
+              <a:rPr sz="1300" b="0">
+                <a:solidFill>
+                  <a:srgbClr val="FFFFFF"/>
+                </a:solidFill>
+                <a:latin typeface="Calibri"/>
+              </a:rPr>
+              <a:t>OSM-probe 0.27</a:t>
+            </a:r>
+          </a:p>
+        </p:txBody>
+      </p:sp>
+      <p:sp>
+        <p:nvSpPr>
+          <p:cNvPr id="20" name="Rectangle 19"/>
+          <p:cNvSpPr/>
+          <p:nvPr/>
+        </p:nvSpPr>
+        <p:spPr>
+          <a:xfrm>
+            <a:off x="7223200" y="4600000"/>
+            <a:ext cx="2094400" cy="720000"/>
+          </a:xfrm>
+          <a:prstGeom prst="rect">
+            <a:avLst/>
+          </a:prstGeom>
+          <a:solidFill>
+            <a:srgbClr val="E87A22"/>
+          </a:solidFill>
+          <a:ln>
+            <a:noFill/>
+          </a:ln>
+          <a:effectLst/>
+        </p:spPr>
+        <p:style>
+          <a:lnRef idx="1">
+            <a:schemeClr val="accent1"/>
+          </a:lnRef>
+          <a:fillRef idx="3">
+            <a:schemeClr val="accent1"/>
+          </a:fillRef>
+          <a:effectRef idx="2">
+            <a:schemeClr val="accent1"/>
+          </a:effectRef>
+          <a:fontRef idx="minor">
+            <a:schemeClr val="lt1"/>
+          </a:fontRef>
+        </p:style>
+        <p:txBody>
+          <a:bodyPr rtlCol="0" anchor="ctr"/>
+          <a:lstStyle/>
+          <a:p>
+            <a:pPr algn="ctr"/>
+          </a:p>
+        </p:txBody>
+      </p:sp>
+      <p:sp>
+        <p:nvSpPr>
+          <p:cNvPr id="21" name="TextBox 20"/>
+          <p:cNvSpPr txBox="1"/>
+          <p:nvPr/>
+        </p:nvSpPr>
+        <p:spPr>
+          <a:xfrm>
+            <a:off x="7283200" y="4600000"/>
+            <a:ext cx="1974400" cy="720000"/>
+          </a:xfrm>
+          <a:prstGeom prst="rect">
+            <a:avLst/>
+          </a:prstGeom>
+          <a:noFill/>
+        </p:spPr>
+        <p:txBody>
+          <a:bodyPr wrap="square" anchor="ctr">
+            <a:spAutoFit/>
+          </a:bodyPr>
+          <a:lstStyle/>
+          <a:p>
+            <a:pPr algn="ctr">
+              <a:spcAft>
+                <a:spcPts val="600"/>
+              </a:spcAft>
+            </a:pPr>
+            <a:r>
+              <a:rPr sz="1300" b="1">
+                <a:solidFill>
+                  <a:srgbClr val="FFFFFF"/>
+                </a:solidFill>
+                <a:latin typeface="Calibri"/>
+              </a:rPr>
+              <a:t>VLM-probe 0.76</a:t>
+            </a:r>
+          </a:p>
+        </p:txBody>
+      </p:sp>
+      <p:sp>
+        <p:nvSpPr>
+          <p:cNvPr id="22" name="Rectangle 21"/>
+          <p:cNvSpPr/>
+          <p:nvPr/>
+        </p:nvSpPr>
+        <p:spPr>
+          <a:xfrm>
+            <a:off x="9397600" y="4600000"/>
+            <a:ext cx="2094400" cy="720000"/>
+          </a:xfrm>
+          <a:prstGeom prst="rect">
+            <a:avLst/>
+          </a:prstGeom>
+          <a:solidFill>
+            <a:srgbClr val="0F1E3D"/>
+          </a:solidFill>
+          <a:ln>
+            <a:noFill/>
+          </a:ln>
+          <a:effectLst/>
+        </p:spPr>
+        <p:style>
+          <a:lnRef idx="1">
+            <a:schemeClr val="accent1"/>
+          </a:lnRef>
+          <a:fillRef idx="3">
+            <a:schemeClr val="accent1"/>
+          </a:fillRef>
+          <a:effectRef idx="2">
+            <a:schemeClr val="accent1"/>
+          </a:effectRef>
+          <a:fontRef idx="minor">
+            <a:schemeClr val="lt1"/>
+          </a:fontRef>
+        </p:style>
+        <p:txBody>
+          <a:bodyPr rtlCol="0" anchor="ctr"/>
+          <a:lstStyle/>
+          <a:p>
+            <a:pPr algn="ctr"/>
+          </a:p>
+        </p:txBody>
+      </p:sp>
+      <p:sp>
+        <p:nvSpPr>
+          <p:cNvPr id="23" name="TextBox 22"/>
+          <p:cNvSpPr txBox="1"/>
+          <p:nvPr/>
+        </p:nvSpPr>
+        <p:spPr>
+          <a:xfrm>
+            <a:off x="9457600" y="4600000"/>
+            <a:ext cx="1974400" cy="720000"/>
+          </a:xfrm>
+          <a:prstGeom prst="rect">
+            <a:avLst/>
+          </a:prstGeom>
+          <a:noFill/>
+        </p:spPr>
+        <p:txBody>
+          <a:bodyPr wrap="square" anchor="ctr">
+            <a:spAutoFit/>
+          </a:bodyPr>
+          <a:lstStyle/>
+          <a:p>
+            <a:pPr algn="ctr">
+              <a:spcAft>
+                <a:spcPts val="600"/>
+              </a:spcAft>
+            </a:pPr>
+            <a:r>
+              <a:rPr sz="1300" b="0">
+                <a:solidFill>
+                  <a:srgbClr val="FFFFFF"/>
+                </a:solidFill>
+                <a:latin typeface="Calibri"/>
+              </a:rPr>
+              <a:t>3 класса 0.82</a:t>
+            </a:r>
+          </a:p>
+        </p:txBody>
+      </p:sp>
+      <p:sp>
+        <p:nvSpPr>
+          <p:cNvPr id="24" name="TextBox 23"/>
+          <p:cNvSpPr txBox="1"/>
+          <p:nvPr/>
+        </p:nvSpPr>
+        <p:spPr>
+          <a:xfrm>
+            <a:off x="11292000" y="6358000"/>
+            <a:ext cx="700000" cy="350000"/>
+          </a:xfrm>
+          <a:prstGeom prst="rect">
+            <a:avLst/>
+          </a:prstGeom>
+          <a:noFill/>
+        </p:spPr>
+        <p:txBody>
+          <a:bodyPr wrap="square" anchor="t">
+            <a:spAutoFit/>
+          </a:bodyPr>
+          <a:lstStyle/>
+          <a:p>
+            <a:pPr algn="r">
+              <a:spcAft>
+                <a:spcPts val="600"/>
+              </a:spcAft>
+            </a:pPr>
+            <a:r>
+              <a:rPr sz="1100" b="0">
+                <a:solidFill>
+                  <a:srgbClr val="5B6672"/>
+                </a:solidFill>
+                <a:latin typeface="Calibri"/>
+              </a:rPr>
+              <a:t>6/10</a:t>
             </a:r>
           </a:p>
         </p:txBody>
@@ -4048,14 +8964,146 @@
       <p:grpSpPr/>
       <p:sp>
         <p:nvSpPr>
-          <p:cNvPr id="2" name="TextBox 1"/>
+          <p:cNvPr id="2" name="Rectangle 1"/>
+          <p:cNvSpPr/>
+          <p:nvPr/>
+        </p:nvSpPr>
+        <p:spPr>
+          <a:xfrm>
+            <a:off x="0" y="0"/>
+            <a:ext cx="12192000" cy="6858000"/>
+          </a:xfrm>
+          <a:prstGeom prst="rect">
+            <a:avLst/>
+          </a:prstGeom>
+          <a:solidFill>
+            <a:srgbClr val="FFFFFF"/>
+          </a:solidFill>
+          <a:ln>
+            <a:noFill/>
+          </a:ln>
+          <a:effectLst/>
+        </p:spPr>
+        <p:style>
+          <a:lnRef idx="1">
+            <a:schemeClr val="accent1"/>
+          </a:lnRef>
+          <a:fillRef idx="3">
+            <a:schemeClr val="accent1"/>
+          </a:fillRef>
+          <a:effectRef idx="2">
+            <a:schemeClr val="accent1"/>
+          </a:effectRef>
+          <a:fontRef idx="minor">
+            <a:schemeClr val="lt1"/>
+          </a:fontRef>
+        </p:style>
+        <p:txBody>
+          <a:bodyPr rtlCol="0" anchor="ctr"/>
+          <a:lstStyle/>
+          <a:p>
+            <a:pPr algn="ctr"/>
+          </a:p>
+        </p:txBody>
+      </p:sp>
+      <p:sp>
+        <p:nvSpPr>
+          <p:cNvPr id="3" name="Rectangle 2"/>
+          <p:cNvSpPr/>
+          <p:nvPr/>
+        </p:nvSpPr>
+        <p:spPr>
+          <a:xfrm>
+            <a:off x="0" y="0"/>
+            <a:ext cx="12192000" cy="1500000"/>
+          </a:xfrm>
+          <a:prstGeom prst="rect">
+            <a:avLst/>
+          </a:prstGeom>
+          <a:solidFill>
+            <a:srgbClr val="0F1E3D"/>
+          </a:solidFill>
+          <a:ln>
+            <a:noFill/>
+          </a:ln>
+          <a:effectLst/>
+        </p:spPr>
+        <p:style>
+          <a:lnRef idx="1">
+            <a:schemeClr val="accent1"/>
+          </a:lnRef>
+          <a:fillRef idx="3">
+            <a:schemeClr val="accent1"/>
+          </a:fillRef>
+          <a:effectRef idx="2">
+            <a:schemeClr val="accent1"/>
+          </a:effectRef>
+          <a:fontRef idx="minor">
+            <a:schemeClr val="lt1"/>
+          </a:fontRef>
+        </p:style>
+        <p:txBody>
+          <a:bodyPr rtlCol="0" anchor="ctr"/>
+          <a:lstStyle/>
+          <a:p>
+            <a:pPr algn="ctr"/>
+          </a:p>
+        </p:txBody>
+      </p:sp>
+      <p:sp>
+        <p:nvSpPr>
+          <p:cNvPr id="4" name="Rectangle 3"/>
+          <p:cNvSpPr/>
+          <p:nvPr/>
+        </p:nvSpPr>
+        <p:spPr>
+          <a:xfrm>
+            <a:off x="700000" y="560000"/>
+            <a:ext cx="180000" cy="560000"/>
+          </a:xfrm>
+          <a:prstGeom prst="rect">
+            <a:avLst/>
+          </a:prstGeom>
+          <a:solidFill>
+            <a:srgbClr val="E87A22"/>
+          </a:solidFill>
+          <a:ln>
+            <a:noFill/>
+          </a:ln>
+          <a:effectLst/>
+        </p:spPr>
+        <p:style>
+          <a:lnRef idx="1">
+            <a:schemeClr val="accent1"/>
+          </a:lnRef>
+          <a:fillRef idx="3">
+            <a:schemeClr val="accent1"/>
+          </a:fillRef>
+          <a:effectRef idx="2">
+            <a:schemeClr val="accent1"/>
+          </a:effectRef>
+          <a:fontRef idx="minor">
+            <a:schemeClr val="lt1"/>
+          </a:fontRef>
+        </p:style>
+        <p:txBody>
+          <a:bodyPr rtlCol="0" anchor="ctr"/>
+          <a:lstStyle/>
+          <a:p>
+            <a:pPr algn="ctr"/>
+          </a:p>
+        </p:txBody>
+      </p:sp>
+      <p:sp>
+        <p:nvSpPr>
+          <p:cNvPr id="5" name="TextBox 4"/>
           <p:cNvSpPr txBox="1"/>
           <p:nvPr/>
         </p:nvSpPr>
         <p:spPr>
           <a:xfrm>
-            <a:off x="548640" y="457200"/>
-            <a:ext cx="10972800" cy="1097280"/>
+            <a:off x="1000000" y="360000"/>
+            <a:ext cx="10492000" cy="900000"/>
           </a:xfrm>
           <a:prstGeom prst="rect">
             <a:avLst/>
@@ -4063,30 +9111,49 @@
           <a:noFill/>
         </p:spPr>
         <p:txBody>
-          <a:bodyPr wrap="none">
+          <a:bodyPr wrap="square" anchor="ctr">
             <a:spAutoFit/>
           </a:bodyPr>
           <a:lstStyle/>
           <a:p>
-            <a:pPr>
-              <a:defRPr sz="3200" b="1"/>
+            <a:pPr algn="l">
+              <a:spcAft>
+                <a:spcPts val="200"/>
+              </a:spcAft>
             </a:pPr>
             <a:r>
-              <a:t>Per-class и честность</a:t>
-            </a:r>
-          </a:p>
-        </p:txBody>
-      </p:sp>
-      <p:sp>
-        <p:nvSpPr>
-          <p:cNvPr id="3" name="TextBox 2"/>
+              <a:rPr sz="1300" b="1">
+                <a:solidFill>
+                  <a:srgbClr val="14A08F"/>
+                </a:solidFill>
+                <a:latin typeface="Calibri"/>
+              </a:rPr>
+              <a:t>ЧЕСТНО ОБ ОГРАНИЧЕНИЯХ</a:t>
+            </a:r>
+          </a:p>
+          <a:p>
+            <a:r>
+              <a:rPr sz="3000" b="1">
+                <a:solidFill>
+                  <a:srgbClr val="FFFFFF"/>
+                </a:solidFill>
+                <a:latin typeface="Calibri"/>
+              </a:rPr>
+              <a:t>Где ML сильнее текста, а где — нет</a:t>
+            </a:r>
+          </a:p>
+        </p:txBody>
+      </p:sp>
+      <p:sp>
+        <p:nvSpPr>
+          <p:cNvPr id="6" name="TextBox 5"/>
           <p:cNvSpPr txBox="1"/>
           <p:nvPr/>
         </p:nvSpPr>
         <p:spPr>
           <a:xfrm>
-            <a:off x="548640" y="1645920"/>
-            <a:ext cx="10972800" cy="4754880"/>
+            <a:off x="700000" y="1900000"/>
+            <a:ext cx="10792000" cy="3800000"/>
           </a:xfrm>
           <a:prstGeom prst="rect">
             <a:avLst/>
@@ -4094,45 +9161,129 @@
           <a:noFill/>
         </p:spPr>
         <p:txBody>
-          <a:bodyPr wrap="square">
+          <a:bodyPr wrap="square" anchor="t">
             <a:spAutoFit/>
           </a:bodyPr>
           <a:lstStyle/>
           <a:p>
             <a:pPr>
-              <a:defRPr sz="2000"/>
+              <a:spcAft>
+                <a:spcPts val="1600"/>
+              </a:spcAft>
             </a:pPr>
             <a:r>
-              <a:t>Лучшие: active_urban F1=0.85, frozen_construction=0.80</a:t>
+              <a:rPr sz="1900" b="0">
+                <a:solidFill>
+                  <a:srgbClr val="1B2538"/>
+                </a:solidFill>
+                <a:latin typeface="Calibri"/>
+              </a:rPr>
+              <a:t>На всём GPKG текстовая эвристика даёт </a:t>
+            </a:r>
+            <a:r>
+              <a:rPr sz="1900" b="1">
+                <a:solidFill>
+                  <a:srgbClr val="E87A22"/>
+                </a:solidFill>
+                <a:latin typeface="Calibri"/>
+              </a:rPr>
+              <a:t>87.6%</a:t>
+            </a:r>
+            <a:r>
+              <a:rPr sz="1900" b="0">
+                <a:solidFill>
+                  <a:srgbClr val="1B2538"/>
+                </a:solidFill>
+                <a:latin typeface="Calibri"/>
+              </a:rPr>
+              <a:t> — выше ML. И это ожидаемо: текст кадастра уже содержит сильные подсказки.</a:t>
             </a:r>
           </a:p>
           <a:p>
             <a:pPr>
-              <a:defRPr sz="1800"/>
+              <a:spcAft>
+                <a:spcPts val="1600"/>
+              </a:spcAft>
             </a:pPr>
             <a:r>
-              <a:t>Сложные: underused, low_density_degraded</a:t>
+              <a:rPr sz="1900" b="1">
+                <a:solidFill>
+                  <a:srgbClr val="14A08F"/>
+                </a:solidFill>
+                <a:latin typeface="Calibri"/>
+              </a:rPr>
+              <a:t>Но на кластере «зелень во дворах» текст бессилен — там класс различает только панорама. Это и есть ниша ML.</a:t>
             </a:r>
           </a:p>
           <a:p>
             <a:pPr>
-              <a:defRPr sz="1800"/>
+              <a:spcAft>
+                <a:spcPts val="1600"/>
+              </a:spcAft>
             </a:pPr>
+            <a:r>
+              <a:rPr sz="1900" b="0">
+                <a:solidFill>
+                  <a:srgbClr val="1B2538"/>
+                </a:solidFill>
+                <a:latin typeface="Calibri"/>
+              </a:rPr>
+              <a:t>Ограничения честно задокументированы: domain shift (обучение на research-домене), малые выборки с панорамой (25–75 объектов).</a:t>
+            </a:r>
           </a:p>
           <a:p>
             <a:pPr>
-              <a:defRPr sz="1800"/>
+              <a:spcAft>
+                <a:spcPts val="1600"/>
+              </a:spcAft>
             </a:pPr>
             <a:r>
-              <a:t>OSM-метки согласны с VLM ~20% — чистка данных</a:t>
-            </a:r>
-          </a:p>
-          <a:p>
-            <a:pPr>
-              <a:defRPr sz="1800"/>
+              <a:rPr sz="1900" b="1">
+                <a:solidFill>
+                  <a:srgbClr val="1B2538"/>
+                </a:solidFill>
+                <a:latin typeface="Calibri"/>
+              </a:rPr>
+              <a:t>Вывод: ML — дополнение к тексту на трудных кластерах, а не замена эвристики.</a:t>
+            </a:r>
+          </a:p>
+        </p:txBody>
+      </p:sp>
+      <p:sp>
+        <p:nvSpPr>
+          <p:cNvPr id="7" name="TextBox 6"/>
+          <p:cNvSpPr txBox="1"/>
+          <p:nvPr/>
+        </p:nvSpPr>
+        <p:spPr>
+          <a:xfrm>
+            <a:off x="11292000" y="6358000"/>
+            <a:ext cx="700000" cy="350000"/>
+          </a:xfrm>
+          <a:prstGeom prst="rect">
+            <a:avLst/>
+          </a:prstGeom>
+          <a:noFill/>
+        </p:spPr>
+        <p:txBody>
+          <a:bodyPr wrap="square" anchor="t">
+            <a:spAutoFit/>
+          </a:bodyPr>
+          <a:lstStyle/>
+          <a:p>
+            <a:pPr algn="r">
+              <a:spcAft>
+                <a:spcPts val="600"/>
+              </a:spcAft>
             </a:pPr>
             <a:r>
-              <a:t>GPKG: эвристика 87.6%, ML 44–80% (domain shift)</a:t>
+              <a:rPr sz="1100" b="0">
+                <a:solidFill>
+                  <a:srgbClr val="5B6672"/>
+                </a:solidFill>
+                <a:latin typeface="Calibri"/>
+              </a:rPr>
+              <a:t>7/10</a:t>
             </a:r>
           </a:p>
         </p:txBody>
@@ -4157,14 +9308,146 @@
       <p:grpSpPr/>
       <p:sp>
         <p:nvSpPr>
-          <p:cNvPr id="2" name="TextBox 1"/>
+          <p:cNvPr id="2" name="Rectangle 1"/>
+          <p:cNvSpPr/>
+          <p:nvPr/>
+        </p:nvSpPr>
+        <p:spPr>
+          <a:xfrm>
+            <a:off x="0" y="0"/>
+            <a:ext cx="12192000" cy="6858000"/>
+          </a:xfrm>
+          <a:prstGeom prst="rect">
+            <a:avLst/>
+          </a:prstGeom>
+          <a:solidFill>
+            <a:srgbClr val="FFFFFF"/>
+          </a:solidFill>
+          <a:ln>
+            <a:noFill/>
+          </a:ln>
+          <a:effectLst/>
+        </p:spPr>
+        <p:style>
+          <a:lnRef idx="1">
+            <a:schemeClr val="accent1"/>
+          </a:lnRef>
+          <a:fillRef idx="3">
+            <a:schemeClr val="accent1"/>
+          </a:fillRef>
+          <a:effectRef idx="2">
+            <a:schemeClr val="accent1"/>
+          </a:effectRef>
+          <a:fontRef idx="minor">
+            <a:schemeClr val="lt1"/>
+          </a:fontRef>
+        </p:style>
+        <p:txBody>
+          <a:bodyPr rtlCol="0" anchor="ctr"/>
+          <a:lstStyle/>
+          <a:p>
+            <a:pPr algn="ctr"/>
+          </a:p>
+        </p:txBody>
+      </p:sp>
+      <p:sp>
+        <p:nvSpPr>
+          <p:cNvPr id="3" name="Rectangle 2"/>
+          <p:cNvSpPr/>
+          <p:nvPr/>
+        </p:nvSpPr>
+        <p:spPr>
+          <a:xfrm>
+            <a:off x="0" y="0"/>
+            <a:ext cx="12192000" cy="1500000"/>
+          </a:xfrm>
+          <a:prstGeom prst="rect">
+            <a:avLst/>
+          </a:prstGeom>
+          <a:solidFill>
+            <a:srgbClr val="0F1E3D"/>
+          </a:solidFill>
+          <a:ln>
+            <a:noFill/>
+          </a:ln>
+          <a:effectLst/>
+        </p:spPr>
+        <p:style>
+          <a:lnRef idx="1">
+            <a:schemeClr val="accent1"/>
+          </a:lnRef>
+          <a:fillRef idx="3">
+            <a:schemeClr val="accent1"/>
+          </a:fillRef>
+          <a:effectRef idx="2">
+            <a:schemeClr val="accent1"/>
+          </a:effectRef>
+          <a:fontRef idx="minor">
+            <a:schemeClr val="lt1"/>
+          </a:fontRef>
+        </p:style>
+        <p:txBody>
+          <a:bodyPr rtlCol="0" anchor="ctr"/>
+          <a:lstStyle/>
+          <a:p>
+            <a:pPr algn="ctr"/>
+          </a:p>
+        </p:txBody>
+      </p:sp>
+      <p:sp>
+        <p:nvSpPr>
+          <p:cNvPr id="4" name="Rectangle 3"/>
+          <p:cNvSpPr/>
+          <p:nvPr/>
+        </p:nvSpPr>
+        <p:spPr>
+          <a:xfrm>
+            <a:off x="700000" y="560000"/>
+            <a:ext cx="180000" cy="560000"/>
+          </a:xfrm>
+          <a:prstGeom prst="rect">
+            <a:avLst/>
+          </a:prstGeom>
+          <a:solidFill>
+            <a:srgbClr val="E87A22"/>
+          </a:solidFill>
+          <a:ln>
+            <a:noFill/>
+          </a:ln>
+          <a:effectLst/>
+        </p:spPr>
+        <p:style>
+          <a:lnRef idx="1">
+            <a:schemeClr val="accent1"/>
+          </a:lnRef>
+          <a:fillRef idx="3">
+            <a:schemeClr val="accent1"/>
+          </a:fillRef>
+          <a:effectRef idx="2">
+            <a:schemeClr val="accent1"/>
+          </a:effectRef>
+          <a:fontRef idx="minor">
+            <a:schemeClr val="lt1"/>
+          </a:fontRef>
+        </p:style>
+        <p:txBody>
+          <a:bodyPr rtlCol="0" anchor="ctr"/>
+          <a:lstStyle/>
+          <a:p>
+            <a:pPr algn="ctr"/>
+          </a:p>
+        </p:txBody>
+      </p:sp>
+      <p:sp>
+        <p:nvSpPr>
+          <p:cNvPr id="5" name="TextBox 4"/>
           <p:cNvSpPr txBox="1"/>
           <p:nvPr/>
         </p:nvSpPr>
         <p:spPr>
           <a:xfrm>
-            <a:off x="548640" y="457200"/>
-            <a:ext cx="10972800" cy="1097280"/>
+            <a:off x="1000000" y="360000"/>
+            <a:ext cx="10492000" cy="900000"/>
           </a:xfrm>
           <a:prstGeom prst="rect">
             <a:avLst/>
@@ -4172,30 +9455,93 @@
           <a:noFill/>
         </p:spPr>
         <p:txBody>
-          <a:bodyPr wrap="none">
+          <a:bodyPr wrap="square" anchor="ctr">
             <a:spAutoFit/>
           </a:bodyPr>
           <a:lstStyle/>
           <a:p>
-            <a:pPr>
-              <a:defRPr sz="3200" b="1"/>
+            <a:pPr algn="l">
+              <a:spcAft>
+                <a:spcPts val="200"/>
+              </a:spcAft>
             </a:pPr>
             <a:r>
-              <a:t>VLM и объяснимость</a:t>
-            </a:r>
-          </a:p>
-        </p:txBody>
-      </p:sp>
-      <p:sp>
-        <p:nvSpPr>
-          <p:cNvPr id="3" name="TextBox 2"/>
+              <a:rPr sz="1300" b="1">
+                <a:solidFill>
+                  <a:srgbClr val="14A08F"/>
+                </a:solidFill>
+                <a:latin typeface="Calibri"/>
+              </a:rPr>
+              <a:t>ПРОДУКТ</a:t>
+            </a:r>
+          </a:p>
+          <a:p>
+            <a:r>
+              <a:rPr sz="3000" b="1">
+                <a:solidFill>
+                  <a:srgbClr val="FFFFFF"/>
+                </a:solidFill>
+                <a:latin typeface="Calibri"/>
+              </a:rPr>
+              <a:t>Веб-инструмент аналитика с обратной связью</a:t>
+            </a:r>
+          </a:p>
+        </p:txBody>
+      </p:sp>
+      <p:sp>
+        <p:nvSpPr>
+          <p:cNvPr id="6" name="Rectangle 5"/>
+          <p:cNvSpPr/>
+          <p:nvPr/>
+        </p:nvSpPr>
+        <p:spPr>
+          <a:xfrm>
+            <a:off x="700000" y="1900000"/>
+            <a:ext cx="560000" cy="600000"/>
+          </a:xfrm>
+          <a:prstGeom prst="rect">
+            <a:avLst/>
+          </a:prstGeom>
+          <a:solidFill>
+            <a:srgbClr val="14A08F"/>
+          </a:solidFill>
+          <a:ln>
+            <a:noFill/>
+          </a:ln>
+          <a:effectLst/>
+        </p:spPr>
+        <p:style>
+          <a:lnRef idx="1">
+            <a:schemeClr val="accent1"/>
+          </a:lnRef>
+          <a:fillRef idx="3">
+            <a:schemeClr val="accent1"/>
+          </a:fillRef>
+          <a:effectRef idx="2">
+            <a:schemeClr val="accent1"/>
+          </a:effectRef>
+          <a:fontRef idx="minor">
+            <a:schemeClr val="lt1"/>
+          </a:fontRef>
+        </p:style>
+        <p:txBody>
+          <a:bodyPr rtlCol="0" anchor="ctr"/>
+          <a:lstStyle/>
+          <a:p>
+            <a:pPr algn="ctr"/>
+          </a:p>
+        </p:txBody>
+      </p:sp>
+      <p:sp>
+        <p:nvSpPr>
+          <p:cNvPr id="7" name="TextBox 6"/>
           <p:cNvSpPr txBox="1"/>
           <p:nvPr/>
         </p:nvSpPr>
         <p:spPr>
           <a:xfrm>
-            <a:off x="548640" y="1645920"/>
-            <a:ext cx="10972800" cy="4754880"/>
+            <a:off x="700000" y="1900000"/>
+            <a:ext cx="560000" cy="600000"/>
           </a:xfrm>
           <a:prstGeom prst="rect">
             <a:avLst/>
@@ -4203,37 +9549,739 @@
           <a:noFill/>
         </p:spPr>
         <p:txBody>
-          <a:bodyPr wrap="square">
+          <a:bodyPr wrap="square" anchor="ctr">
             <a:spAutoFit/>
           </a:bodyPr>
           <a:lstStyle/>
           <a:p>
+            <a:pPr algn="ctr">
+              <a:spcAft>
+                <a:spcPts val="600"/>
+              </a:spcAft>
+            </a:pPr>
+            <a:r>
+              <a:rPr sz="2200" b="1">
+                <a:solidFill>
+                  <a:srgbClr val="FFFFFF"/>
+                </a:solidFill>
+                <a:latin typeface="Calibri"/>
+              </a:rPr>
+              <a:t>1</a:t>
+            </a:r>
+          </a:p>
+        </p:txBody>
+      </p:sp>
+      <p:sp>
+        <p:nvSpPr>
+          <p:cNvPr id="8" name="TextBox 7"/>
+          <p:cNvSpPr txBox="1"/>
+          <p:nvPr/>
+        </p:nvSpPr>
+        <p:spPr>
+          <a:xfrm>
+            <a:off x="1460000" y="1900000"/>
+            <a:ext cx="5935600" cy="600000"/>
+          </a:xfrm>
+          <a:prstGeom prst="rect">
+            <a:avLst/>
+          </a:prstGeom>
+          <a:noFill/>
+        </p:spPr>
+        <p:txBody>
+          <a:bodyPr wrap="square" anchor="ctr">
+            <a:spAutoFit/>
+          </a:bodyPr>
+          <a:lstStyle/>
+          <a:p>
+            <a:pPr algn="l">
+              <a:spcAft>
+                <a:spcPts val="600"/>
+              </a:spcAft>
+            </a:pPr>
+            <a:r>
+              <a:rPr sz="1900" b="1">
+                <a:solidFill>
+                  <a:srgbClr val="1B2538"/>
+                </a:solidFill>
+                <a:latin typeface="Calibri"/>
+              </a:rPr>
+              <a:t>Загрузка GPKG</a:t>
+            </a:r>
+          </a:p>
+        </p:txBody>
+      </p:sp>
+      <p:sp>
+        <p:nvSpPr>
+          <p:cNvPr id="9" name="Rectangle 8"/>
+          <p:cNvSpPr/>
+          <p:nvPr/>
+        </p:nvSpPr>
+        <p:spPr>
+          <a:xfrm>
+            <a:off x="700000" y="2660000"/>
+            <a:ext cx="560000" cy="600000"/>
+          </a:xfrm>
+          <a:prstGeom prst="rect">
+            <a:avLst/>
+          </a:prstGeom>
+          <a:solidFill>
+            <a:srgbClr val="14A08F"/>
+          </a:solidFill>
+          <a:ln>
+            <a:noFill/>
+          </a:ln>
+          <a:effectLst/>
+        </p:spPr>
+        <p:style>
+          <a:lnRef idx="1">
+            <a:schemeClr val="accent1"/>
+          </a:lnRef>
+          <a:fillRef idx="3">
+            <a:schemeClr val="accent1"/>
+          </a:fillRef>
+          <a:effectRef idx="2">
+            <a:schemeClr val="accent1"/>
+          </a:effectRef>
+          <a:fontRef idx="minor">
+            <a:schemeClr val="lt1"/>
+          </a:fontRef>
+        </p:style>
+        <p:txBody>
+          <a:bodyPr rtlCol="0" anchor="ctr"/>
+          <a:lstStyle/>
+          <a:p>
+            <a:pPr algn="ctr"/>
+          </a:p>
+        </p:txBody>
+      </p:sp>
+      <p:sp>
+        <p:nvSpPr>
+          <p:cNvPr id="10" name="TextBox 9"/>
+          <p:cNvSpPr txBox="1"/>
+          <p:nvPr/>
+        </p:nvSpPr>
+        <p:spPr>
+          <a:xfrm>
+            <a:off x="700000" y="2660000"/>
+            <a:ext cx="560000" cy="600000"/>
+          </a:xfrm>
+          <a:prstGeom prst="rect">
+            <a:avLst/>
+          </a:prstGeom>
+          <a:noFill/>
+        </p:spPr>
+        <p:txBody>
+          <a:bodyPr wrap="square" anchor="ctr">
+            <a:spAutoFit/>
+          </a:bodyPr>
+          <a:lstStyle/>
+          <a:p>
+            <a:pPr algn="ctr">
+              <a:spcAft>
+                <a:spcPts val="600"/>
+              </a:spcAft>
+            </a:pPr>
+            <a:r>
+              <a:rPr sz="2200" b="1">
+                <a:solidFill>
+                  <a:srgbClr val="FFFFFF"/>
+                </a:solidFill>
+                <a:latin typeface="Calibri"/>
+              </a:rPr>
+              <a:t>2</a:t>
+            </a:r>
+          </a:p>
+        </p:txBody>
+      </p:sp>
+      <p:sp>
+        <p:nvSpPr>
+          <p:cNvPr id="11" name="TextBox 10"/>
+          <p:cNvSpPr txBox="1"/>
+          <p:nvPr/>
+        </p:nvSpPr>
+        <p:spPr>
+          <a:xfrm>
+            <a:off x="1460000" y="2660000"/>
+            <a:ext cx="5935600" cy="600000"/>
+          </a:xfrm>
+          <a:prstGeom prst="rect">
+            <a:avLst/>
+          </a:prstGeom>
+          <a:noFill/>
+        </p:spPr>
+        <p:txBody>
+          <a:bodyPr wrap="square" anchor="ctr">
+            <a:spAutoFit/>
+          </a:bodyPr>
+          <a:lstStyle/>
+          <a:p>
+            <a:pPr algn="l">
+              <a:spcAft>
+                <a:spcPts val="600"/>
+              </a:spcAft>
+            </a:pPr>
+            <a:r>
+              <a:rPr sz="1900" b="1">
+                <a:solidFill>
+                  <a:srgbClr val="1B2538"/>
+                </a:solidFill>
+                <a:latin typeface="Calibri"/>
+              </a:rPr>
+              <a:t>Автокласс по панораме</a:t>
+            </a:r>
+          </a:p>
+        </p:txBody>
+      </p:sp>
+      <p:sp>
+        <p:nvSpPr>
+          <p:cNvPr id="12" name="Rectangle 11"/>
+          <p:cNvSpPr/>
+          <p:nvPr/>
+        </p:nvSpPr>
+        <p:spPr>
+          <a:xfrm>
+            <a:off x="700000" y="3420000"/>
+            <a:ext cx="560000" cy="600000"/>
+          </a:xfrm>
+          <a:prstGeom prst="rect">
+            <a:avLst/>
+          </a:prstGeom>
+          <a:solidFill>
+            <a:srgbClr val="14A08F"/>
+          </a:solidFill>
+          <a:ln>
+            <a:noFill/>
+          </a:ln>
+          <a:effectLst/>
+        </p:spPr>
+        <p:style>
+          <a:lnRef idx="1">
+            <a:schemeClr val="accent1"/>
+          </a:lnRef>
+          <a:fillRef idx="3">
+            <a:schemeClr val="accent1"/>
+          </a:fillRef>
+          <a:effectRef idx="2">
+            <a:schemeClr val="accent1"/>
+          </a:effectRef>
+          <a:fontRef idx="minor">
+            <a:schemeClr val="lt1"/>
+          </a:fontRef>
+        </p:style>
+        <p:txBody>
+          <a:bodyPr rtlCol="0" anchor="ctr"/>
+          <a:lstStyle/>
+          <a:p>
+            <a:pPr algn="ctr"/>
+          </a:p>
+        </p:txBody>
+      </p:sp>
+      <p:sp>
+        <p:nvSpPr>
+          <p:cNvPr id="13" name="TextBox 12"/>
+          <p:cNvSpPr txBox="1"/>
+          <p:nvPr/>
+        </p:nvSpPr>
+        <p:spPr>
+          <a:xfrm>
+            <a:off x="700000" y="3420000"/>
+            <a:ext cx="560000" cy="600000"/>
+          </a:xfrm>
+          <a:prstGeom prst="rect">
+            <a:avLst/>
+          </a:prstGeom>
+          <a:noFill/>
+        </p:spPr>
+        <p:txBody>
+          <a:bodyPr wrap="square" anchor="ctr">
+            <a:spAutoFit/>
+          </a:bodyPr>
+          <a:lstStyle/>
+          <a:p>
+            <a:pPr algn="ctr">
+              <a:spcAft>
+                <a:spcPts val="600"/>
+              </a:spcAft>
+            </a:pPr>
+            <a:r>
+              <a:rPr sz="2200" b="1">
+                <a:solidFill>
+                  <a:srgbClr val="FFFFFF"/>
+                </a:solidFill>
+                <a:latin typeface="Calibri"/>
+              </a:rPr>
+              <a:t>3</a:t>
+            </a:r>
+          </a:p>
+        </p:txBody>
+      </p:sp>
+      <p:sp>
+        <p:nvSpPr>
+          <p:cNvPr id="14" name="TextBox 13"/>
+          <p:cNvSpPr txBox="1"/>
+          <p:nvPr/>
+        </p:nvSpPr>
+        <p:spPr>
+          <a:xfrm>
+            <a:off x="1460000" y="3420000"/>
+            <a:ext cx="5935600" cy="600000"/>
+          </a:xfrm>
+          <a:prstGeom prst="rect">
+            <a:avLst/>
+          </a:prstGeom>
+          <a:noFill/>
+        </p:spPr>
+        <p:txBody>
+          <a:bodyPr wrap="square" anchor="ctr">
+            <a:spAutoFit/>
+          </a:bodyPr>
+          <a:lstStyle/>
+          <a:p>
+            <a:pPr algn="l">
+              <a:spcAft>
+                <a:spcPts val="600"/>
+              </a:spcAft>
+            </a:pPr>
+            <a:r>
+              <a:rPr sz="1900" b="1">
+                <a:solidFill>
+                  <a:srgbClr val="1B2538"/>
+                </a:solidFill>
+                <a:latin typeface="Calibri"/>
+              </a:rPr>
+              <a:t>Карта + галерея ракурсов</a:t>
+            </a:r>
+          </a:p>
+        </p:txBody>
+      </p:sp>
+      <p:sp>
+        <p:nvSpPr>
+          <p:cNvPr id="15" name="Rectangle 14"/>
+          <p:cNvSpPr/>
+          <p:nvPr/>
+        </p:nvSpPr>
+        <p:spPr>
+          <a:xfrm>
+            <a:off x="700000" y="4180000"/>
+            <a:ext cx="560000" cy="600000"/>
+          </a:xfrm>
+          <a:prstGeom prst="rect">
+            <a:avLst/>
+          </a:prstGeom>
+          <a:solidFill>
+            <a:srgbClr val="14A08F"/>
+          </a:solidFill>
+          <a:ln>
+            <a:noFill/>
+          </a:ln>
+          <a:effectLst/>
+        </p:spPr>
+        <p:style>
+          <a:lnRef idx="1">
+            <a:schemeClr val="accent1"/>
+          </a:lnRef>
+          <a:fillRef idx="3">
+            <a:schemeClr val="accent1"/>
+          </a:fillRef>
+          <a:effectRef idx="2">
+            <a:schemeClr val="accent1"/>
+          </a:effectRef>
+          <a:fontRef idx="minor">
+            <a:schemeClr val="lt1"/>
+          </a:fontRef>
+        </p:style>
+        <p:txBody>
+          <a:bodyPr rtlCol="0" anchor="ctr"/>
+          <a:lstStyle/>
+          <a:p>
+            <a:pPr algn="ctr"/>
+          </a:p>
+        </p:txBody>
+      </p:sp>
+      <p:sp>
+        <p:nvSpPr>
+          <p:cNvPr id="16" name="TextBox 15"/>
+          <p:cNvSpPr txBox="1"/>
+          <p:nvPr/>
+        </p:nvSpPr>
+        <p:spPr>
+          <a:xfrm>
+            <a:off x="700000" y="4180000"/>
+            <a:ext cx="560000" cy="600000"/>
+          </a:xfrm>
+          <a:prstGeom prst="rect">
+            <a:avLst/>
+          </a:prstGeom>
+          <a:noFill/>
+        </p:spPr>
+        <p:txBody>
+          <a:bodyPr wrap="square" anchor="ctr">
+            <a:spAutoFit/>
+          </a:bodyPr>
+          <a:lstStyle/>
+          <a:p>
+            <a:pPr algn="ctr">
+              <a:spcAft>
+                <a:spcPts val="600"/>
+              </a:spcAft>
+            </a:pPr>
+            <a:r>
+              <a:rPr sz="2200" b="1">
+                <a:solidFill>
+                  <a:srgbClr val="FFFFFF"/>
+                </a:solidFill>
+                <a:latin typeface="Calibri"/>
+              </a:rPr>
+              <a:t>4</a:t>
+            </a:r>
+          </a:p>
+        </p:txBody>
+      </p:sp>
+      <p:sp>
+        <p:nvSpPr>
+          <p:cNvPr id="17" name="TextBox 16"/>
+          <p:cNvSpPr txBox="1"/>
+          <p:nvPr/>
+        </p:nvSpPr>
+        <p:spPr>
+          <a:xfrm>
+            <a:off x="1460000" y="4180000"/>
+            <a:ext cx="5935600" cy="600000"/>
+          </a:xfrm>
+          <a:prstGeom prst="rect">
+            <a:avLst/>
+          </a:prstGeom>
+          <a:noFill/>
+        </p:spPr>
+        <p:txBody>
+          <a:bodyPr wrap="square" anchor="ctr">
+            <a:spAutoFit/>
+          </a:bodyPr>
+          <a:lstStyle/>
+          <a:p>
+            <a:pPr algn="l">
+              <a:spcAft>
+                <a:spcPts val="600"/>
+              </a:spcAft>
+            </a:pPr>
+            <a:r>
+              <a:rPr sz="1900" b="1">
+                <a:solidFill>
+                  <a:srgbClr val="1B2538"/>
+                </a:solidFill>
+                <a:latin typeface="Calibri"/>
+              </a:rPr>
+              <a:t>Правка аналитиком</a:t>
+            </a:r>
+          </a:p>
+        </p:txBody>
+      </p:sp>
+      <p:sp>
+        <p:nvSpPr>
+          <p:cNvPr id="18" name="Rectangle 17"/>
+          <p:cNvSpPr/>
+          <p:nvPr/>
+        </p:nvSpPr>
+        <p:spPr>
+          <a:xfrm>
+            <a:off x="700000" y="4940000"/>
+            <a:ext cx="560000" cy="600000"/>
+          </a:xfrm>
+          <a:prstGeom prst="rect">
+            <a:avLst/>
+          </a:prstGeom>
+          <a:solidFill>
+            <a:srgbClr val="14A08F"/>
+          </a:solidFill>
+          <a:ln>
+            <a:noFill/>
+          </a:ln>
+          <a:effectLst/>
+        </p:spPr>
+        <p:style>
+          <a:lnRef idx="1">
+            <a:schemeClr val="accent1"/>
+          </a:lnRef>
+          <a:fillRef idx="3">
+            <a:schemeClr val="accent1"/>
+          </a:fillRef>
+          <a:effectRef idx="2">
+            <a:schemeClr val="accent1"/>
+          </a:effectRef>
+          <a:fontRef idx="minor">
+            <a:schemeClr val="lt1"/>
+          </a:fontRef>
+        </p:style>
+        <p:txBody>
+          <a:bodyPr rtlCol="0" anchor="ctr"/>
+          <a:lstStyle/>
+          <a:p>
+            <a:pPr algn="ctr"/>
+          </a:p>
+        </p:txBody>
+      </p:sp>
+      <p:sp>
+        <p:nvSpPr>
+          <p:cNvPr id="19" name="TextBox 18"/>
+          <p:cNvSpPr txBox="1"/>
+          <p:nvPr/>
+        </p:nvSpPr>
+        <p:spPr>
+          <a:xfrm>
+            <a:off x="700000" y="4940000"/>
+            <a:ext cx="560000" cy="600000"/>
+          </a:xfrm>
+          <a:prstGeom prst="rect">
+            <a:avLst/>
+          </a:prstGeom>
+          <a:noFill/>
+        </p:spPr>
+        <p:txBody>
+          <a:bodyPr wrap="square" anchor="ctr">
+            <a:spAutoFit/>
+          </a:bodyPr>
+          <a:lstStyle/>
+          <a:p>
+            <a:pPr algn="ctr">
+              <a:spcAft>
+                <a:spcPts val="600"/>
+              </a:spcAft>
+            </a:pPr>
+            <a:r>
+              <a:rPr sz="2200" b="1">
+                <a:solidFill>
+                  <a:srgbClr val="FFFFFF"/>
+                </a:solidFill>
+                <a:latin typeface="Calibri"/>
+              </a:rPr>
+              <a:t>5</a:t>
+            </a:r>
+          </a:p>
+        </p:txBody>
+      </p:sp>
+      <p:sp>
+        <p:nvSpPr>
+          <p:cNvPr id="20" name="TextBox 19"/>
+          <p:cNvSpPr txBox="1"/>
+          <p:nvPr/>
+        </p:nvSpPr>
+        <p:spPr>
+          <a:xfrm>
+            <a:off x="1460000" y="4940000"/>
+            <a:ext cx="5935600" cy="600000"/>
+          </a:xfrm>
+          <a:prstGeom prst="rect">
+            <a:avLst/>
+          </a:prstGeom>
+          <a:noFill/>
+        </p:spPr>
+        <p:txBody>
+          <a:bodyPr wrap="square" anchor="ctr">
+            <a:spAutoFit/>
+          </a:bodyPr>
+          <a:lstStyle/>
+          <a:p>
+            <a:pPr algn="l">
+              <a:spcAft>
+                <a:spcPts val="600"/>
+              </a:spcAft>
+            </a:pPr>
+            <a:r>
+              <a:rPr sz="1900" b="1">
+                <a:solidFill>
+                  <a:srgbClr val="1B2538"/>
+                </a:solidFill>
+                <a:latin typeface="Calibri"/>
+              </a:rPr>
+              <a:t>Экспорт GPKG</a:t>
+            </a:r>
+          </a:p>
+        </p:txBody>
+      </p:sp>
+      <p:sp>
+        <p:nvSpPr>
+          <p:cNvPr id="21" name="Rectangle 20"/>
+          <p:cNvSpPr/>
+          <p:nvPr/>
+        </p:nvSpPr>
+        <p:spPr>
+          <a:xfrm>
+            <a:off x="7606880" y="1900000"/>
+            <a:ext cx="3885120" cy="3400000"/>
+          </a:xfrm>
+          <a:prstGeom prst="rect">
+            <a:avLst/>
+          </a:prstGeom>
+          <a:solidFill>
+            <a:srgbClr val="0F1E3D"/>
+          </a:solidFill>
+          <a:ln>
+            <a:noFill/>
+          </a:ln>
+          <a:effectLst/>
+        </p:spPr>
+        <p:style>
+          <a:lnRef idx="1">
+            <a:schemeClr val="accent1"/>
+          </a:lnRef>
+          <a:fillRef idx="3">
+            <a:schemeClr val="accent1"/>
+          </a:fillRef>
+          <a:effectRef idx="2">
+            <a:schemeClr val="accent1"/>
+          </a:effectRef>
+          <a:fontRef idx="minor">
+            <a:schemeClr val="lt1"/>
+          </a:fontRef>
+        </p:style>
+        <p:txBody>
+          <a:bodyPr rtlCol="0" anchor="ctr"/>
+          <a:lstStyle/>
+          <a:p>
+            <a:pPr algn="ctr"/>
+          </a:p>
+        </p:txBody>
+      </p:sp>
+      <p:sp>
+        <p:nvSpPr>
+          <p:cNvPr id="22" name="TextBox 21"/>
+          <p:cNvSpPr txBox="1"/>
+          <p:nvPr/>
+        </p:nvSpPr>
+        <p:spPr>
+          <a:xfrm>
+            <a:off x="7886880" y="2150000"/>
+            <a:ext cx="3385120" cy="3000000"/>
+          </a:xfrm>
+          <a:prstGeom prst="rect">
+            <a:avLst/>
+          </a:prstGeom>
+          <a:noFill/>
+        </p:spPr>
+        <p:txBody>
+          <a:bodyPr wrap="square" anchor="t">
+            <a:spAutoFit/>
+          </a:bodyPr>
+          <a:lstStyle/>
+          <a:p>
+            <a:pPr algn="l">
+              <a:spcAft>
+                <a:spcPts val="1200"/>
+              </a:spcAft>
+            </a:pPr>
+            <a:r>
+              <a:rPr sz="1400" b="1">
+                <a:solidFill>
+                  <a:srgbClr val="E87A22"/>
+                </a:solidFill>
+                <a:latin typeface="Calibri"/>
+              </a:rPr>
+              <a:t>ПЕТЛЯ ОБРАТНОЙ СВЯЗИ</a:t>
+            </a:r>
+            <a:r>
+              <a:rPr sz="1600" b="0">
+                <a:solidFill>
+                  <a:srgbClr val="FFFFFF"/>
+                </a:solidFill>
+                <a:latin typeface="Calibri"/>
+              </a:rPr>
+              <a:t>Правки аналитиков = gold-метки</a:t>
+            </a:r>
+          </a:p>
+          <a:p>
             <a:pPr>
-              <a:defRPr sz="2000"/>
+              <a:spcAft>
+                <a:spcPts val="1200"/>
+              </a:spcAft>
             </a:pPr>
             <a:r>
-              <a:t>PaliGemma 3B + LoRA: класс + bbox на кадре</a:t>
+              <a:rPr sz="1600" b="1">
+                <a:solidFill>
+                  <a:srgbClr val="E87A22"/>
+                </a:solidFill>
+                <a:latin typeface="Calibri"/>
+              </a:rPr>
+              <a:t>7535 участков</a:t>
+            </a:r>
+            <a:r>
+              <a:rPr sz="1600" b="0">
+                <a:solidFill>
+                  <a:srgbClr val="FFFFFF"/>
+                </a:solidFill>
+                <a:latin typeface="Calibri"/>
+              </a:rPr>
+              <a:t> с корректировками</a:t>
             </a:r>
           </a:p>
           <a:p>
             <a:pPr>
-              <a:defRPr sz="1800"/>
+              <a:spcAft>
+                <a:spcPts val="1200"/>
+              </a:spcAft>
             </a:pPr>
             <a:r>
-              <a:t>Qwen zero-shot macro IoU ~0.34 → roadmap fine-tune</a:t>
+              <a:rPr sz="1600" b="0">
+                <a:solidFill>
+                  <a:srgbClr val="FFFFFF"/>
+                </a:solidFill>
+                <a:latin typeface="Calibri"/>
+              </a:rPr>
+              <a:t>→ дообучение модели</a:t>
             </a:r>
           </a:p>
           <a:p>
             <a:pPr>
-              <a:defRPr sz="1800"/>
+              <a:spcAft>
+                <a:spcPts val="1200"/>
+              </a:spcAft>
             </a:pPr>
-          </a:p>
-          <a:p>
-            <a:pPr>
-              <a:defRPr sz="1800"/>
+            <a:r>
+              <a:rPr sz="1400" b="0">
+                <a:solidFill>
+                  <a:srgbClr val="C7D0DC"/>
+                </a:solidFill>
+                <a:latin typeface="Calibri"/>
+              </a:rPr>
+              <a:t>Flask + Leaflet, экспорт в GeoPackage</a:t>
+            </a:r>
+          </a:p>
+        </p:txBody>
+      </p:sp>
+      <p:sp>
+        <p:nvSpPr>
+          <p:cNvPr id="23" name="TextBox 22"/>
+          <p:cNvSpPr txBox="1"/>
+          <p:nvPr/>
+        </p:nvSpPr>
+        <p:spPr>
+          <a:xfrm>
+            <a:off x="11292000" y="6358000"/>
+            <a:ext cx="700000" cy="350000"/>
+          </a:xfrm>
+          <a:prstGeom prst="rect">
+            <a:avLst/>
+          </a:prstGeom>
+          <a:noFill/>
+        </p:spPr>
+        <p:txBody>
+          <a:bodyPr wrap="square" anchor="t">
+            <a:spAutoFit/>
+          </a:bodyPr>
+          <a:lstStyle/>
+          <a:p>
+            <a:pPr algn="r">
+              <a:spcAft>
+                <a:spcPts val="600"/>
+              </a:spcAft>
             </a:pPr>
             <a:r>
-              <a:t>Цель: аналитик видит НЕ только метку, но и «где на фото»</a:t>
+              <a:rPr sz="1100" b="0">
+                <a:solidFill>
+                  <a:srgbClr val="5B6672"/>
+                </a:solidFill>
+                <a:latin typeface="Calibri"/>
+              </a:rPr>
+              <a:t>8/10</a:t>
             </a:r>
           </a:p>
         </p:txBody>
@@ -4258,14 +10306,146 @@
       <p:grpSpPr/>
       <p:sp>
         <p:nvSpPr>
-          <p:cNvPr id="2" name="TextBox 1"/>
+          <p:cNvPr id="2" name="Rectangle 1"/>
+          <p:cNvSpPr/>
+          <p:nvPr/>
+        </p:nvSpPr>
+        <p:spPr>
+          <a:xfrm>
+            <a:off x="0" y="0"/>
+            <a:ext cx="12192000" cy="6858000"/>
+          </a:xfrm>
+          <a:prstGeom prst="rect">
+            <a:avLst/>
+          </a:prstGeom>
+          <a:solidFill>
+            <a:srgbClr val="FFFFFF"/>
+          </a:solidFill>
+          <a:ln>
+            <a:noFill/>
+          </a:ln>
+          <a:effectLst/>
+        </p:spPr>
+        <p:style>
+          <a:lnRef idx="1">
+            <a:schemeClr val="accent1"/>
+          </a:lnRef>
+          <a:fillRef idx="3">
+            <a:schemeClr val="accent1"/>
+          </a:fillRef>
+          <a:effectRef idx="2">
+            <a:schemeClr val="accent1"/>
+          </a:effectRef>
+          <a:fontRef idx="minor">
+            <a:schemeClr val="lt1"/>
+          </a:fontRef>
+        </p:style>
+        <p:txBody>
+          <a:bodyPr rtlCol="0" anchor="ctr"/>
+          <a:lstStyle/>
+          <a:p>
+            <a:pPr algn="ctr"/>
+          </a:p>
+        </p:txBody>
+      </p:sp>
+      <p:sp>
+        <p:nvSpPr>
+          <p:cNvPr id="3" name="Rectangle 2"/>
+          <p:cNvSpPr/>
+          <p:nvPr/>
+        </p:nvSpPr>
+        <p:spPr>
+          <a:xfrm>
+            <a:off x="0" y="0"/>
+            <a:ext cx="12192000" cy="1500000"/>
+          </a:xfrm>
+          <a:prstGeom prst="rect">
+            <a:avLst/>
+          </a:prstGeom>
+          <a:solidFill>
+            <a:srgbClr val="0F1E3D"/>
+          </a:solidFill>
+          <a:ln>
+            <a:noFill/>
+          </a:ln>
+          <a:effectLst/>
+        </p:spPr>
+        <p:style>
+          <a:lnRef idx="1">
+            <a:schemeClr val="accent1"/>
+          </a:lnRef>
+          <a:fillRef idx="3">
+            <a:schemeClr val="accent1"/>
+          </a:fillRef>
+          <a:effectRef idx="2">
+            <a:schemeClr val="accent1"/>
+          </a:effectRef>
+          <a:fontRef idx="minor">
+            <a:schemeClr val="lt1"/>
+          </a:fontRef>
+        </p:style>
+        <p:txBody>
+          <a:bodyPr rtlCol="0" anchor="ctr"/>
+          <a:lstStyle/>
+          <a:p>
+            <a:pPr algn="ctr"/>
+          </a:p>
+        </p:txBody>
+      </p:sp>
+      <p:sp>
+        <p:nvSpPr>
+          <p:cNvPr id="4" name="Rectangle 3"/>
+          <p:cNvSpPr/>
+          <p:nvPr/>
+        </p:nvSpPr>
+        <p:spPr>
+          <a:xfrm>
+            <a:off x="700000" y="560000"/>
+            <a:ext cx="180000" cy="560000"/>
+          </a:xfrm>
+          <a:prstGeom prst="rect">
+            <a:avLst/>
+          </a:prstGeom>
+          <a:solidFill>
+            <a:srgbClr val="E87A22"/>
+          </a:solidFill>
+          <a:ln>
+            <a:noFill/>
+          </a:ln>
+          <a:effectLst/>
+        </p:spPr>
+        <p:style>
+          <a:lnRef idx="1">
+            <a:schemeClr val="accent1"/>
+          </a:lnRef>
+          <a:fillRef idx="3">
+            <a:schemeClr val="accent1"/>
+          </a:fillRef>
+          <a:effectRef idx="2">
+            <a:schemeClr val="accent1"/>
+          </a:effectRef>
+          <a:fontRef idx="minor">
+            <a:schemeClr val="lt1"/>
+          </a:fontRef>
+        </p:style>
+        <p:txBody>
+          <a:bodyPr rtlCol="0" anchor="ctr"/>
+          <a:lstStyle/>
+          <a:p>
+            <a:pPr algn="ctr"/>
+          </a:p>
+        </p:txBody>
+      </p:sp>
+      <p:sp>
+        <p:nvSpPr>
+          <p:cNvPr id="5" name="TextBox 4"/>
           <p:cNvSpPr txBox="1"/>
           <p:nvPr/>
         </p:nvSpPr>
         <p:spPr>
           <a:xfrm>
-            <a:off x="548640" y="457200"/>
-            <a:ext cx="10972800" cy="1097280"/>
+            <a:off x="1000000" y="360000"/>
+            <a:ext cx="10492000" cy="900000"/>
           </a:xfrm>
           <a:prstGeom prst="rect">
             <a:avLst/>
@@ -4273,30 +10453,139 @@
           <a:noFill/>
         </p:spPr>
         <p:txBody>
-          <a:bodyPr wrap="none">
+          <a:bodyPr wrap="square" anchor="ctr">
             <a:spAutoFit/>
           </a:bodyPr>
           <a:lstStyle/>
           <a:p>
-            <a:pPr>
-              <a:defRPr sz="3200" b="1"/>
+            <a:pPr algn="l">
+              <a:spcAft>
+                <a:spcPts val="200"/>
+              </a:spcAft>
             </a:pPr>
             <a:r>
-              <a:t>AI-агенты</a:t>
-            </a:r>
-          </a:p>
-        </p:txBody>
-      </p:sp>
-      <p:sp>
-        <p:nvSpPr>
-          <p:cNvPr id="3" name="TextBox 2"/>
+              <a:rPr sz="1300" b="1">
+                <a:solidFill>
+                  <a:srgbClr val="14A08F"/>
+                </a:solidFill>
+                <a:latin typeface="Calibri"/>
+              </a:rPr>
+              <a:t>ИНЖЕНЕРИЯ И MLOPS</a:t>
+            </a:r>
+          </a:p>
+          <a:p>
+            <a:r>
+              <a:rPr sz="3000" b="1">
+                <a:solidFill>
+                  <a:srgbClr val="FFFFFF"/>
+                </a:solidFill>
+                <a:latin typeface="Calibri"/>
+              </a:rPr>
+              <a:t>Воспроизводимо и по-взрослому</a:t>
+            </a:r>
+          </a:p>
+        </p:txBody>
+      </p:sp>
+      <p:sp>
+        <p:nvSpPr>
+          <p:cNvPr id="6" name="Rectangle 5"/>
+          <p:cNvSpPr/>
+          <p:nvPr/>
+        </p:nvSpPr>
+        <p:spPr>
+          <a:xfrm>
+            <a:off x="700000" y="1900000"/>
+            <a:ext cx="3464000" cy="1350000"/>
+          </a:xfrm>
+          <a:prstGeom prst="rect">
+            <a:avLst/>
+          </a:prstGeom>
+          <a:solidFill>
+            <a:srgbClr val="F3F5F7"/>
+          </a:solidFill>
+          <a:ln w="12700">
+            <a:solidFill>
+              <a:srgbClr val="DDE3EA"/>
+            </a:solidFill>
+          </a:ln>
+          <a:effectLst/>
+        </p:spPr>
+        <p:style>
+          <a:lnRef idx="1">
+            <a:schemeClr val="accent1"/>
+          </a:lnRef>
+          <a:fillRef idx="3">
+            <a:schemeClr val="accent1"/>
+          </a:fillRef>
+          <a:effectRef idx="2">
+            <a:schemeClr val="accent1"/>
+          </a:effectRef>
+          <a:fontRef idx="minor">
+            <a:schemeClr val="lt1"/>
+          </a:fontRef>
+        </p:style>
+        <p:txBody>
+          <a:bodyPr rtlCol="0" anchor="ctr"/>
+          <a:lstStyle/>
+          <a:p>
+            <a:pPr algn="ctr"/>
+          </a:p>
+        </p:txBody>
+      </p:sp>
+      <p:sp>
+        <p:nvSpPr>
+          <p:cNvPr id="7" name="Rectangle 6"/>
+          <p:cNvSpPr/>
+          <p:nvPr/>
+        </p:nvSpPr>
+        <p:spPr>
+          <a:xfrm>
+            <a:off x="700000" y="1900000"/>
+            <a:ext cx="3464000" cy="140000"/>
+          </a:xfrm>
+          <a:prstGeom prst="rect">
+            <a:avLst/>
+          </a:prstGeom>
+          <a:solidFill>
+            <a:srgbClr val="14A08F"/>
+          </a:solidFill>
+          <a:ln>
+            <a:noFill/>
+          </a:ln>
+          <a:effectLst/>
+        </p:spPr>
+        <p:style>
+          <a:lnRef idx="1">
+            <a:schemeClr val="accent1"/>
+          </a:lnRef>
+          <a:fillRef idx="3">
+            <a:schemeClr val="accent1"/>
+          </a:fillRef>
+          <a:effectRef idx="2">
+            <a:schemeClr val="accent1"/>
+          </a:effectRef>
+          <a:fontRef idx="minor">
+            <a:schemeClr val="lt1"/>
+          </a:fontRef>
+        </p:style>
+        <p:txBody>
+          <a:bodyPr rtlCol="0" anchor="ctr"/>
+          <a:lstStyle/>
+          <a:p>
+            <a:pPr algn="ctr"/>
+          </a:p>
+        </p:txBody>
+      </p:sp>
+      <p:sp>
+        <p:nvSpPr>
+          <p:cNvPr id="8" name="TextBox 7"/>
           <p:cNvSpPr txBox="1"/>
           <p:nvPr/>
         </p:nvSpPr>
         <p:spPr>
           <a:xfrm>
-            <a:off x="548640" y="1645920"/>
-            <a:ext cx="10972800" cy="4754880"/>
+            <a:off x="940000" y="2160000"/>
+            <a:ext cx="3064000" cy="950000"/>
           </a:xfrm>
           <a:prstGeom prst="rect">
             <a:avLst/>
@@ -4304,45 +10593,780 @@
           <a:noFill/>
         </p:spPr>
         <p:txBody>
-          <a:bodyPr wrap="square">
+          <a:bodyPr wrap="square" anchor="t">
             <a:spAutoFit/>
           </a:bodyPr>
           <a:lstStyle/>
           <a:p>
-            <a:pPr>
-              <a:defRPr sz="2000"/>
+            <a:pPr algn="l">
+              <a:spcAft>
+                <a:spcPts val="600"/>
+              </a:spcAft>
             </a:pPr>
             <a:r>
-              <a:t>LangGraph autonomous agent:</a:t>
-            </a:r>
-          </a:p>
-          <a:p>
-            <a:pPr>
-              <a:defRPr sz="1800"/>
+              <a:rPr sz="1600" b="1">
+                <a:solidFill>
+                  <a:srgbClr val="0F1E3D"/>
+                </a:solidFill>
+                <a:latin typeface="Calibri"/>
+              </a:rPr>
+              <a:t>Стек</a:t>
+            </a:r>
+          </a:p>
+          <a:p>
+            <a:r>
+              <a:rPr sz="1300">
+                <a:solidFill>
+                  <a:srgbClr val="5B6672"/>
+                </a:solidFill>
+                <a:latin typeface="Calibri"/>
+              </a:rPr>
+              <a:t>Python · PyTorch · OpenCLIP
+Flask · GeoPandas</a:t>
+            </a:r>
+          </a:p>
+        </p:txBody>
+      </p:sp>
+      <p:sp>
+        <p:nvSpPr>
+          <p:cNvPr id="9" name="Rectangle 8"/>
+          <p:cNvSpPr/>
+          <p:nvPr/>
+        </p:nvSpPr>
+        <p:spPr>
+          <a:xfrm>
+            <a:off x="4364000" y="1900000"/>
+            <a:ext cx="3464000" cy="1350000"/>
+          </a:xfrm>
+          <a:prstGeom prst="rect">
+            <a:avLst/>
+          </a:prstGeom>
+          <a:solidFill>
+            <a:srgbClr val="F3F5F7"/>
+          </a:solidFill>
+          <a:ln w="12700">
+            <a:solidFill>
+              <a:srgbClr val="DDE3EA"/>
+            </a:solidFill>
+          </a:ln>
+          <a:effectLst/>
+        </p:spPr>
+        <p:style>
+          <a:lnRef idx="1">
+            <a:schemeClr val="accent1"/>
+          </a:lnRef>
+          <a:fillRef idx="3">
+            <a:schemeClr val="accent1"/>
+          </a:fillRef>
+          <a:effectRef idx="2">
+            <a:schemeClr val="accent1"/>
+          </a:effectRef>
+          <a:fontRef idx="minor">
+            <a:schemeClr val="lt1"/>
+          </a:fontRef>
+        </p:style>
+        <p:txBody>
+          <a:bodyPr rtlCol="0" anchor="ctr"/>
+          <a:lstStyle/>
+          <a:p>
+            <a:pPr algn="ctr"/>
+          </a:p>
+        </p:txBody>
+      </p:sp>
+      <p:sp>
+        <p:nvSpPr>
+          <p:cNvPr id="10" name="Rectangle 9"/>
+          <p:cNvSpPr/>
+          <p:nvPr/>
+        </p:nvSpPr>
+        <p:spPr>
+          <a:xfrm>
+            <a:off x="4364000" y="1900000"/>
+            <a:ext cx="3464000" cy="140000"/>
+          </a:xfrm>
+          <a:prstGeom prst="rect">
+            <a:avLst/>
+          </a:prstGeom>
+          <a:solidFill>
+            <a:srgbClr val="14A08F"/>
+          </a:solidFill>
+          <a:ln>
+            <a:noFill/>
+          </a:ln>
+          <a:effectLst/>
+        </p:spPr>
+        <p:style>
+          <a:lnRef idx="1">
+            <a:schemeClr val="accent1"/>
+          </a:lnRef>
+          <a:fillRef idx="3">
+            <a:schemeClr val="accent1"/>
+          </a:fillRef>
+          <a:effectRef idx="2">
+            <a:schemeClr val="accent1"/>
+          </a:effectRef>
+          <a:fontRef idx="minor">
+            <a:schemeClr val="lt1"/>
+          </a:fontRef>
+        </p:style>
+        <p:txBody>
+          <a:bodyPr rtlCol="0" anchor="ctr"/>
+          <a:lstStyle/>
+          <a:p>
+            <a:pPr algn="ctr"/>
+          </a:p>
+        </p:txBody>
+      </p:sp>
+      <p:sp>
+        <p:nvSpPr>
+          <p:cNvPr id="11" name="TextBox 10"/>
+          <p:cNvSpPr txBox="1"/>
+          <p:nvPr/>
+        </p:nvSpPr>
+        <p:spPr>
+          <a:xfrm>
+            <a:off x="4604000" y="2160000"/>
+            <a:ext cx="3064000" cy="950000"/>
+          </a:xfrm>
+          <a:prstGeom prst="rect">
+            <a:avLst/>
+          </a:prstGeom>
+          <a:noFill/>
+        </p:spPr>
+        <p:txBody>
+          <a:bodyPr wrap="square" anchor="t">
+            <a:spAutoFit/>
+          </a:bodyPr>
+          <a:lstStyle/>
+          <a:p>
+            <a:pPr algn="l">
+              <a:spcAft>
+                <a:spcPts val="600"/>
+              </a:spcAft>
             </a:pPr>
             <a:r>
-              <a:t>чистка → VLM labels → train probe → eval</a:t>
-            </a:r>
-          </a:p>
-          <a:p>
-            <a:pPr>
-              <a:defRPr sz="1800"/>
+              <a:rPr sz="1600" b="1">
+                <a:solidFill>
+                  <a:srgbClr val="0F1E3D"/>
+                </a:solidFill>
+                <a:latin typeface="Calibri"/>
+              </a:rPr>
+              <a:t>Конфиги и трекинг</a:t>
+            </a:r>
+          </a:p>
+          <a:p>
+            <a:r>
+              <a:rPr sz="1300">
+                <a:solidFill>
+                  <a:srgbClr val="5B6672"/>
+                </a:solidFill>
+                <a:latin typeface="Calibri"/>
+              </a:rPr>
+              <a:t>Hydra · TensorBoard
+W&amp;B · MLflow</a:t>
+            </a:r>
+          </a:p>
+        </p:txBody>
+      </p:sp>
+      <p:sp>
+        <p:nvSpPr>
+          <p:cNvPr id="12" name="Rectangle 11"/>
+          <p:cNvSpPr/>
+          <p:nvPr/>
+        </p:nvSpPr>
+        <p:spPr>
+          <a:xfrm>
+            <a:off x="8028000" y="1900000"/>
+            <a:ext cx="3464000" cy="1350000"/>
+          </a:xfrm>
+          <a:prstGeom prst="rect">
+            <a:avLst/>
+          </a:prstGeom>
+          <a:solidFill>
+            <a:srgbClr val="F3F5F7"/>
+          </a:solidFill>
+          <a:ln w="12700">
+            <a:solidFill>
+              <a:srgbClr val="DDE3EA"/>
+            </a:solidFill>
+          </a:ln>
+          <a:effectLst/>
+        </p:spPr>
+        <p:style>
+          <a:lnRef idx="1">
+            <a:schemeClr val="accent1"/>
+          </a:lnRef>
+          <a:fillRef idx="3">
+            <a:schemeClr val="accent1"/>
+          </a:fillRef>
+          <a:effectRef idx="2">
+            <a:schemeClr val="accent1"/>
+          </a:effectRef>
+          <a:fontRef idx="minor">
+            <a:schemeClr val="lt1"/>
+          </a:fontRef>
+        </p:style>
+        <p:txBody>
+          <a:bodyPr rtlCol="0" anchor="ctr"/>
+          <a:lstStyle/>
+          <a:p>
+            <a:pPr algn="ctr"/>
+          </a:p>
+        </p:txBody>
+      </p:sp>
+      <p:sp>
+        <p:nvSpPr>
+          <p:cNvPr id="13" name="Rectangle 12"/>
+          <p:cNvSpPr/>
+          <p:nvPr/>
+        </p:nvSpPr>
+        <p:spPr>
+          <a:xfrm>
+            <a:off x="8028000" y="1900000"/>
+            <a:ext cx="3464000" cy="140000"/>
+          </a:xfrm>
+          <a:prstGeom prst="rect">
+            <a:avLst/>
+          </a:prstGeom>
+          <a:solidFill>
+            <a:srgbClr val="14A08F"/>
+          </a:solidFill>
+          <a:ln>
+            <a:noFill/>
+          </a:ln>
+          <a:effectLst/>
+        </p:spPr>
+        <p:style>
+          <a:lnRef idx="1">
+            <a:schemeClr val="accent1"/>
+          </a:lnRef>
+          <a:fillRef idx="3">
+            <a:schemeClr val="accent1"/>
+          </a:fillRef>
+          <a:effectRef idx="2">
+            <a:schemeClr val="accent1"/>
+          </a:effectRef>
+          <a:fontRef idx="minor">
+            <a:schemeClr val="lt1"/>
+          </a:fontRef>
+        </p:style>
+        <p:txBody>
+          <a:bodyPr rtlCol="0" anchor="ctr"/>
+          <a:lstStyle/>
+          <a:p>
+            <a:pPr algn="ctr"/>
+          </a:p>
+        </p:txBody>
+      </p:sp>
+      <p:sp>
+        <p:nvSpPr>
+          <p:cNvPr id="14" name="TextBox 13"/>
+          <p:cNvSpPr txBox="1"/>
+          <p:nvPr/>
+        </p:nvSpPr>
+        <p:spPr>
+          <a:xfrm>
+            <a:off x="8268000" y="2160000"/>
+            <a:ext cx="3064000" cy="950000"/>
+          </a:xfrm>
+          <a:prstGeom prst="rect">
+            <a:avLst/>
+          </a:prstGeom>
+          <a:noFill/>
+        </p:spPr>
+        <p:txBody>
+          <a:bodyPr wrap="square" anchor="t">
+            <a:spAutoFit/>
+          </a:bodyPr>
+          <a:lstStyle/>
+          <a:p>
+            <a:pPr algn="l">
+              <a:spcAft>
+                <a:spcPts val="600"/>
+              </a:spcAft>
             </a:pPr>
-          </a:p>
-          <a:p>
-            <a:pPr>
-              <a:defRPr sz="1800"/>
+            <a:r>
+              <a:rPr sz="1600" b="1">
+                <a:solidFill>
+                  <a:srgbClr val="0F1E3D"/>
+                </a:solidFill>
+                <a:latin typeface="Calibri"/>
+              </a:rPr>
+              <a:t>Пайплайн</a:t>
+            </a:r>
+          </a:p>
+          <a:p>
+            <a:r>
+              <a:rPr sz="1300">
+                <a:solidFill>
+                  <a:srgbClr val="5B6672"/>
+                </a:solidFill>
+                <a:latin typeface="Calibri"/>
+              </a:rPr>
+              <a:t>DVC · Makefile
+7 модульных шагов</a:t>
+            </a:r>
+          </a:p>
+        </p:txBody>
+      </p:sp>
+      <p:sp>
+        <p:nvSpPr>
+          <p:cNvPr id="15" name="Rectangle 14"/>
+          <p:cNvSpPr/>
+          <p:nvPr/>
+        </p:nvSpPr>
+        <p:spPr>
+          <a:xfrm>
+            <a:off x="700000" y="3500000"/>
+            <a:ext cx="3464000" cy="1350000"/>
+          </a:xfrm>
+          <a:prstGeom prst="rect">
+            <a:avLst/>
+          </a:prstGeom>
+          <a:solidFill>
+            <a:srgbClr val="F3F5F7"/>
+          </a:solidFill>
+          <a:ln w="12700">
+            <a:solidFill>
+              <a:srgbClr val="DDE3EA"/>
+            </a:solidFill>
+          </a:ln>
+          <a:effectLst/>
+        </p:spPr>
+        <p:style>
+          <a:lnRef idx="1">
+            <a:schemeClr val="accent1"/>
+          </a:lnRef>
+          <a:fillRef idx="3">
+            <a:schemeClr val="accent1"/>
+          </a:fillRef>
+          <a:effectRef idx="2">
+            <a:schemeClr val="accent1"/>
+          </a:effectRef>
+          <a:fontRef idx="minor">
+            <a:schemeClr val="lt1"/>
+          </a:fontRef>
+        </p:style>
+        <p:txBody>
+          <a:bodyPr rtlCol="0" anchor="ctr"/>
+          <a:lstStyle/>
+          <a:p>
+            <a:pPr algn="ctr"/>
+          </a:p>
+        </p:txBody>
+      </p:sp>
+      <p:sp>
+        <p:nvSpPr>
+          <p:cNvPr id="16" name="Rectangle 15"/>
+          <p:cNvSpPr/>
+          <p:nvPr/>
+        </p:nvSpPr>
+        <p:spPr>
+          <a:xfrm>
+            <a:off x="700000" y="3500000"/>
+            <a:ext cx="3464000" cy="140000"/>
+          </a:xfrm>
+          <a:prstGeom prst="rect">
+            <a:avLst/>
+          </a:prstGeom>
+          <a:solidFill>
+            <a:srgbClr val="14A08F"/>
+          </a:solidFill>
+          <a:ln>
+            <a:noFill/>
+          </a:ln>
+          <a:effectLst/>
+        </p:spPr>
+        <p:style>
+          <a:lnRef idx="1">
+            <a:schemeClr val="accent1"/>
+          </a:lnRef>
+          <a:fillRef idx="3">
+            <a:schemeClr val="accent1"/>
+          </a:fillRef>
+          <a:effectRef idx="2">
+            <a:schemeClr val="accent1"/>
+          </a:effectRef>
+          <a:fontRef idx="minor">
+            <a:schemeClr val="lt1"/>
+          </a:fontRef>
+        </p:style>
+        <p:txBody>
+          <a:bodyPr rtlCol="0" anchor="ctr"/>
+          <a:lstStyle/>
+          <a:p>
+            <a:pPr algn="ctr"/>
+          </a:p>
+        </p:txBody>
+      </p:sp>
+      <p:sp>
+        <p:nvSpPr>
+          <p:cNvPr id="17" name="TextBox 16"/>
+          <p:cNvSpPr txBox="1"/>
+          <p:nvPr/>
+        </p:nvSpPr>
+        <p:spPr>
+          <a:xfrm>
+            <a:off x="940000" y="3760000"/>
+            <a:ext cx="3064000" cy="950000"/>
+          </a:xfrm>
+          <a:prstGeom prst="rect">
+            <a:avLst/>
+          </a:prstGeom>
+          <a:noFill/>
+        </p:spPr>
+        <p:txBody>
+          <a:bodyPr wrap="square" anchor="t">
+            <a:spAutoFit/>
+          </a:bodyPr>
+          <a:lstStyle/>
+          <a:p>
+            <a:pPr algn="l">
+              <a:spcAft>
+                <a:spcPts val="600"/>
+              </a:spcAft>
             </a:pPr>
             <a:r>
-              <a:t>Metric agent: автоматическая проверка целевых порогов</a:t>
-            </a:r>
-          </a:p>
-          <a:p>
-            <a:pPr>
-              <a:defRPr sz="1800"/>
+              <a:rPr sz="1600" b="1">
+                <a:solidFill>
+                  <a:srgbClr val="0F1E3D"/>
+                </a:solidFill>
+                <a:latin typeface="Calibri"/>
+              </a:rPr>
+              <a:t>Качество</a:t>
+            </a:r>
+          </a:p>
+          <a:p>
+            <a:r>
+              <a:rPr sz="1300">
+                <a:solidFill>
+                  <a:srgbClr val="5B6672"/>
+                </a:solidFill>
+                <a:latin typeface="Calibri"/>
+              </a:rPr>
+              <a:t>pytest · ruff · black
+pre-commit</a:t>
+            </a:r>
+          </a:p>
+        </p:txBody>
+      </p:sp>
+      <p:sp>
+        <p:nvSpPr>
+          <p:cNvPr id="18" name="Rectangle 17"/>
+          <p:cNvSpPr/>
+          <p:nvPr/>
+        </p:nvSpPr>
+        <p:spPr>
+          <a:xfrm>
+            <a:off x="4364000" y="3500000"/>
+            <a:ext cx="3464000" cy="1350000"/>
+          </a:xfrm>
+          <a:prstGeom prst="rect">
+            <a:avLst/>
+          </a:prstGeom>
+          <a:solidFill>
+            <a:srgbClr val="F3F5F7"/>
+          </a:solidFill>
+          <a:ln w="12700">
+            <a:solidFill>
+              <a:srgbClr val="DDE3EA"/>
+            </a:solidFill>
+          </a:ln>
+          <a:effectLst/>
+        </p:spPr>
+        <p:style>
+          <a:lnRef idx="1">
+            <a:schemeClr val="accent1"/>
+          </a:lnRef>
+          <a:fillRef idx="3">
+            <a:schemeClr val="accent1"/>
+          </a:fillRef>
+          <a:effectRef idx="2">
+            <a:schemeClr val="accent1"/>
+          </a:effectRef>
+          <a:fontRef idx="minor">
+            <a:schemeClr val="lt1"/>
+          </a:fontRef>
+        </p:style>
+        <p:txBody>
+          <a:bodyPr rtlCol="0" anchor="ctr"/>
+          <a:lstStyle/>
+          <a:p>
+            <a:pPr algn="ctr"/>
+          </a:p>
+        </p:txBody>
+      </p:sp>
+      <p:sp>
+        <p:nvSpPr>
+          <p:cNvPr id="19" name="Rectangle 18"/>
+          <p:cNvSpPr/>
+          <p:nvPr/>
+        </p:nvSpPr>
+        <p:spPr>
+          <a:xfrm>
+            <a:off x="4364000" y="3500000"/>
+            <a:ext cx="3464000" cy="140000"/>
+          </a:xfrm>
+          <a:prstGeom prst="rect">
+            <a:avLst/>
+          </a:prstGeom>
+          <a:solidFill>
+            <a:srgbClr val="14A08F"/>
+          </a:solidFill>
+          <a:ln>
+            <a:noFill/>
+          </a:ln>
+          <a:effectLst/>
+        </p:spPr>
+        <p:style>
+          <a:lnRef idx="1">
+            <a:schemeClr val="accent1"/>
+          </a:lnRef>
+          <a:fillRef idx="3">
+            <a:schemeClr val="accent1"/>
+          </a:fillRef>
+          <a:effectRef idx="2">
+            <a:schemeClr val="accent1"/>
+          </a:effectRef>
+          <a:fontRef idx="minor">
+            <a:schemeClr val="lt1"/>
+          </a:fontRef>
+        </p:style>
+        <p:txBody>
+          <a:bodyPr rtlCol="0" anchor="ctr"/>
+          <a:lstStyle/>
+          <a:p>
+            <a:pPr algn="ctr"/>
+          </a:p>
+        </p:txBody>
+      </p:sp>
+      <p:sp>
+        <p:nvSpPr>
+          <p:cNvPr id="20" name="TextBox 19"/>
+          <p:cNvSpPr txBox="1"/>
+          <p:nvPr/>
+        </p:nvSpPr>
+        <p:spPr>
+          <a:xfrm>
+            <a:off x="4604000" y="3760000"/>
+            <a:ext cx="3064000" cy="950000"/>
+          </a:xfrm>
+          <a:prstGeom prst="rect">
+            <a:avLst/>
+          </a:prstGeom>
+          <a:noFill/>
+        </p:spPr>
+        <p:txBody>
+          <a:bodyPr wrap="square" anchor="t">
+            <a:spAutoFit/>
+          </a:bodyPr>
+          <a:lstStyle/>
+          <a:p>
+            <a:pPr algn="l">
+              <a:spcAft>
+                <a:spcPts val="600"/>
+              </a:spcAft>
             </a:pPr>
             <a:r>
-              <a:t>SUCCESS на research val для vlm6_oss</a:t>
+              <a:rPr sz="1600" b="1">
+                <a:solidFill>
+                  <a:srgbClr val="0F1E3D"/>
+                </a:solidFill>
+                <a:latin typeface="Calibri"/>
+              </a:rPr>
+              <a:t>Доставка</a:t>
+            </a:r>
+          </a:p>
+          <a:p>
+            <a:r>
+              <a:rPr sz="1300">
+                <a:solidFill>
+                  <a:srgbClr val="5B6672"/>
+                </a:solidFill>
+                <a:latin typeface="Calibri"/>
+              </a:rPr>
+              <a:t>Docker · GitHub Actions CI
+demo-данные для CI</a:t>
+            </a:r>
+          </a:p>
+        </p:txBody>
+      </p:sp>
+      <p:sp>
+        <p:nvSpPr>
+          <p:cNvPr id="21" name="Rectangle 20"/>
+          <p:cNvSpPr/>
+          <p:nvPr/>
+        </p:nvSpPr>
+        <p:spPr>
+          <a:xfrm>
+            <a:off x="8028000" y="3500000"/>
+            <a:ext cx="3464000" cy="1350000"/>
+          </a:xfrm>
+          <a:prstGeom prst="rect">
+            <a:avLst/>
+          </a:prstGeom>
+          <a:solidFill>
+            <a:srgbClr val="F3F5F7"/>
+          </a:solidFill>
+          <a:ln w="12700">
+            <a:solidFill>
+              <a:srgbClr val="DDE3EA"/>
+            </a:solidFill>
+          </a:ln>
+          <a:effectLst/>
+        </p:spPr>
+        <p:style>
+          <a:lnRef idx="1">
+            <a:schemeClr val="accent1"/>
+          </a:lnRef>
+          <a:fillRef idx="3">
+            <a:schemeClr val="accent1"/>
+          </a:fillRef>
+          <a:effectRef idx="2">
+            <a:schemeClr val="accent1"/>
+          </a:effectRef>
+          <a:fontRef idx="minor">
+            <a:schemeClr val="lt1"/>
+          </a:fontRef>
+        </p:style>
+        <p:txBody>
+          <a:bodyPr rtlCol="0" anchor="ctr"/>
+          <a:lstStyle/>
+          <a:p>
+            <a:pPr algn="ctr"/>
+          </a:p>
+        </p:txBody>
+      </p:sp>
+      <p:sp>
+        <p:nvSpPr>
+          <p:cNvPr id="22" name="Rectangle 21"/>
+          <p:cNvSpPr/>
+          <p:nvPr/>
+        </p:nvSpPr>
+        <p:spPr>
+          <a:xfrm>
+            <a:off x="8028000" y="3500000"/>
+            <a:ext cx="3464000" cy="140000"/>
+          </a:xfrm>
+          <a:prstGeom prst="rect">
+            <a:avLst/>
+          </a:prstGeom>
+          <a:solidFill>
+            <a:srgbClr val="E87A22"/>
+          </a:solidFill>
+          <a:ln>
+            <a:noFill/>
+          </a:ln>
+          <a:effectLst/>
+        </p:spPr>
+        <p:style>
+          <a:lnRef idx="1">
+            <a:schemeClr val="accent1"/>
+          </a:lnRef>
+          <a:fillRef idx="3">
+            <a:schemeClr val="accent1"/>
+          </a:fillRef>
+          <a:effectRef idx="2">
+            <a:schemeClr val="accent1"/>
+          </a:effectRef>
+          <a:fontRef idx="minor">
+            <a:schemeClr val="lt1"/>
+          </a:fontRef>
+        </p:style>
+        <p:txBody>
+          <a:bodyPr rtlCol="0" anchor="ctr"/>
+          <a:lstStyle/>
+          <a:p>
+            <a:pPr algn="ctr"/>
+          </a:p>
+        </p:txBody>
+      </p:sp>
+      <p:sp>
+        <p:nvSpPr>
+          <p:cNvPr id="23" name="TextBox 22"/>
+          <p:cNvSpPr txBox="1"/>
+          <p:nvPr/>
+        </p:nvSpPr>
+        <p:spPr>
+          <a:xfrm>
+            <a:off x="8268000" y="3760000"/>
+            <a:ext cx="3064000" cy="950000"/>
+          </a:xfrm>
+          <a:prstGeom prst="rect">
+            <a:avLst/>
+          </a:prstGeom>
+          <a:noFill/>
+        </p:spPr>
+        <p:txBody>
+          <a:bodyPr wrap="square" anchor="t">
+            <a:spAutoFit/>
+          </a:bodyPr>
+          <a:lstStyle/>
+          <a:p>
+            <a:pPr algn="l">
+              <a:spcAft>
+                <a:spcPts val="600"/>
+              </a:spcAft>
+            </a:pPr>
+            <a:r>
+              <a:rPr sz="1600" b="1">
+                <a:solidFill>
+                  <a:srgbClr val="0F1E3D"/>
+                </a:solidFill>
+                <a:latin typeface="Calibri"/>
+              </a:rPr>
+              <a:t>AI-агент</a:t>
+            </a:r>
+          </a:p>
+          <a:p>
+            <a:r>
+              <a:rPr sz="1300">
+                <a:solidFill>
+                  <a:srgbClr val="5B6672"/>
+                </a:solidFill>
+                <a:latin typeface="Calibri"/>
+              </a:rPr>
+              <a:t>LangGraph: evaluate →
+plan → act до цели</a:t>
+            </a:r>
+          </a:p>
+        </p:txBody>
+      </p:sp>
+      <p:sp>
+        <p:nvSpPr>
+          <p:cNvPr id="24" name="TextBox 23"/>
+          <p:cNvSpPr txBox="1"/>
+          <p:nvPr/>
+        </p:nvSpPr>
+        <p:spPr>
+          <a:xfrm>
+            <a:off x="11292000" y="6358000"/>
+            <a:ext cx="700000" cy="350000"/>
+          </a:xfrm>
+          <a:prstGeom prst="rect">
+            <a:avLst/>
+          </a:prstGeom>
+          <a:noFill/>
+        </p:spPr>
+        <p:txBody>
+          <a:bodyPr wrap="square" anchor="t">
+            <a:spAutoFit/>
+          </a:bodyPr>
+          <a:lstStyle/>
+          <a:p>
+            <a:pPr algn="r">
+              <a:spcAft>
+                <a:spcPts val="600"/>
+              </a:spcAft>
+            </a:pPr>
+            <a:r>
+              <a:rPr sz="1100" b="0">
+                <a:solidFill>
+                  <a:srgbClr val="5B6672"/>
+                </a:solidFill>
+                <a:latin typeface="Calibri"/>
+              </a:rPr>
+              <a:t>9/10</a:t>
             </a:r>
           </a:p>
         </p:txBody>
@@ -4673,4 +11697,324 @@
   </a:objectDefaults>
   <a:extraClrSchemeLst/>
 </a:theme>
+</file>
+
+<file path=ppt/theme/theme2.xml><?xml version="1.0" encoding="utf-8"?>
+<a:theme xmlns:a="http://schemas.openxmlformats.org/drawingml/2006/main" name="Office Theme">
+  <a:themeElements>
+    <a:clrScheme name="Office">
+      <a:dk1>
+        <a:sysClr val="windowText" lastClr="000000"/>
+      </a:dk1>
+      <a:lt1>
+        <a:sysClr val="window" lastClr="FFFFFF"/>
+      </a:lt1>
+      <a:dk2>
+        <a:srgbClr val="1F497D"/>
+      </a:dk2>
+      <a:lt2>
+        <a:srgbClr val="EEECE1"/>
+      </a:lt2>
+      <a:accent1>
+        <a:srgbClr val="4F81BD"/>
+      </a:accent1>
+      <a:accent2>
+        <a:srgbClr val="C0504D"/>
+      </a:accent2>
+      <a:accent3>
+        <a:srgbClr val="9BBB59"/>
+      </a:accent3>
+      <a:accent4>
+        <a:srgbClr val="8064A2"/>
+      </a:accent4>
+      <a:accent5>
+        <a:srgbClr val="4BACC6"/>
+      </a:accent5>
+      <a:accent6>
+        <a:srgbClr val="F79646"/>
+      </a:accent6>
+      <a:hlink>
+        <a:srgbClr val="0000FF"/>
+      </a:hlink>
+      <a:folHlink>
+        <a:srgbClr val="800080"/>
+      </a:folHlink>
+    </a:clrScheme>
+    <a:fontScheme name="Office">
+      <a:majorFont>
+        <a:latin typeface="Calibri"/>
+        <a:ea typeface=""/>
+        <a:cs typeface=""/>
+        <a:font script="Jpan" typeface="ＭＳ Ｐゴシック"/>
+        <a:font script="Hang" typeface="맑은 고딕"/>
+        <a:font script="Hans" typeface="宋体"/>
+        <a:font script="Hant" typeface="新細明體"/>
+        <a:font script="Arab" typeface="Times New Roman"/>
+        <a:font script="Hebr" typeface="Times New Roman"/>
+        <a:font script="Thai" typeface="Angsana New"/>
+        <a:font script="Ethi" typeface="Nyala"/>
+        <a:font script="Beng" typeface="Vrinda"/>
+        <a:font script="Gujr" typeface="Shruti"/>
+        <a:font script="Khmr" typeface="MoolBoran"/>
+        <a:font script="Knda" typeface="Tunga"/>
+        <a:font script="Guru" typeface="Raavi"/>
+        <a:font script="Cans" typeface="Euphemia"/>
+        <a:font script="Cher" typeface="Plantagenet Cherokee"/>
+        <a:font script="Yiii" typeface="Microsoft Yi Baiti"/>
+        <a:font script="Tibt" typeface="Microsoft Himalaya"/>
+        <a:font script="Thaa" typeface="MV Boli"/>
+        <a:font script="Deva" typeface="Mangal"/>
+        <a:font script="Telu" typeface="Gautami"/>
+        <a:font script="Taml" typeface="Latha"/>
+        <a:font script="Syrc" typeface="Estrangelo Edessa"/>
+        <a:font script="Orya" typeface="Kalinga"/>
+        <a:font script="Mlym" typeface="Kartika"/>
+        <a:font script="Laoo" typeface="DokChampa"/>
+        <a:font script="Sinh" typeface="Iskoola Pota"/>
+        <a:font script="Mong" typeface="Mongolian Baiti"/>
+        <a:font script="Viet" typeface="Times New Roman"/>
+        <a:font script="Uigh" typeface="Microsoft Uighur"/>
+        <a:font script="Geor" typeface="Sylfaen"/>
+      </a:majorFont>
+      <a:minorFont>
+        <a:latin typeface="Calibri"/>
+        <a:ea typeface=""/>
+        <a:cs typeface=""/>
+        <a:font script="Jpan" typeface="ＭＳ Ｐゴシック"/>
+        <a:font script="Hang" typeface="맑은 고딕"/>
+        <a:font script="Hans" typeface="宋体"/>
+        <a:font script="Hant" typeface="新細明體"/>
+        <a:font script="Arab" typeface="Arial"/>
+        <a:font script="Hebr" typeface="Arial"/>
+        <a:font script="Thai" typeface="Cordia New"/>
+        <a:font script="Ethi" typeface="Nyala"/>
+        <a:font script="Beng" typeface="Vrinda"/>
+        <a:font script="Gujr" typeface="Shruti"/>
+        <a:font script="Khmr" typeface="DaunPenh"/>
+        <a:font script="Knda" typeface="Tunga"/>
+        <a:font script="Guru" typeface="Raavi"/>
+        <a:font script="Cans" typeface="Euphemia"/>
+        <a:font script="Cher" typeface="Plantagenet Cherokee"/>
+        <a:font script="Yiii" typeface="Microsoft Yi Baiti"/>
+        <a:font script="Tibt" typeface="Microsoft Himalaya"/>
+        <a:font script="Thaa" typeface="MV Boli"/>
+        <a:font script="Deva" typeface="Mangal"/>
+        <a:font script="Telu" typeface="Gautami"/>
+        <a:font script="Taml" typeface="Latha"/>
+        <a:font script="Syrc" typeface="Estrangelo Edessa"/>
+        <a:font script="Orya" typeface="Kalinga"/>
+        <a:font script="Mlym" typeface="Kartika"/>
+        <a:font script="Laoo" typeface="DokChampa"/>
+        <a:font script="Sinh" typeface="Iskoola Pota"/>
+        <a:font script="Mong" typeface="Mongolian Baiti"/>
+        <a:font script="Viet" typeface="Arial"/>
+        <a:font script="Uigh" typeface="Microsoft Uighur"/>
+        <a:font script="Geor" typeface="Sylfaen"/>
+      </a:minorFont>
+    </a:fontScheme>
+    <a:fmtScheme name="Office">
+      <a:fillStyleLst>
+        <a:solidFill>
+          <a:schemeClr val="phClr"/>
+        </a:solidFill>
+        <a:gradFill rotWithShape="1">
+          <a:gsLst>
+            <a:gs pos="0">
+              <a:schemeClr val="phClr">
+                <a:tint val="50000"/>
+                <a:satMod val="300000"/>
+              </a:schemeClr>
+            </a:gs>
+            <a:gs pos="35000">
+              <a:schemeClr val="phClr">
+                <a:tint val="37000"/>
+                <a:satMod val="300000"/>
+              </a:schemeClr>
+            </a:gs>
+            <a:gs pos="100000">
+              <a:schemeClr val="phClr">
+                <a:tint val="15000"/>
+                <a:satMod val="350000"/>
+              </a:schemeClr>
+            </a:gs>
+          </a:gsLst>
+          <a:lin ang="16200000" scaled="1"/>
+        </a:gradFill>
+        <a:gradFill rotWithShape="1">
+          <a:gsLst>
+            <a:gs pos="0">
+              <a:schemeClr val="phClr">
+                <a:tint val="100000"/>
+                <a:shade val="100000"/>
+                <a:satMod val="130000"/>
+              </a:schemeClr>
+            </a:gs>
+            <a:gs pos="100000">
+              <a:schemeClr val="phClr">
+                <a:tint val="50000"/>
+                <a:shade val="100000"/>
+                <a:satMod val="350000"/>
+              </a:schemeClr>
+            </a:gs>
+          </a:gsLst>
+          <a:lin ang="16200000" scaled="0"/>
+        </a:gradFill>
+      </a:fillStyleLst>
+      <a:lnStyleLst>
+        <a:ln w="9525" cap="flat" cmpd="sng" algn="ctr">
+          <a:solidFill>
+            <a:schemeClr val="phClr">
+              <a:shade val="95000"/>
+              <a:satMod val="105000"/>
+            </a:schemeClr>
+          </a:solidFill>
+          <a:prstDash val="solid"/>
+        </a:ln>
+        <a:ln w="25400" cap="flat" cmpd="sng" algn="ctr">
+          <a:solidFill>
+            <a:schemeClr val="phClr"/>
+          </a:solidFill>
+          <a:prstDash val="solid"/>
+        </a:ln>
+        <a:ln w="38100" cap="flat" cmpd="sng" algn="ctr">
+          <a:solidFill>
+            <a:schemeClr val="phClr"/>
+          </a:solidFill>
+          <a:prstDash val="solid"/>
+        </a:ln>
+      </a:lnStyleLst>
+      <a:effectStyleLst>
+        <a:effectStyle>
+          <a:effectLst>
+            <a:outerShdw blurRad="40000" dist="20000" dir="5400000" rotWithShape="0">
+              <a:srgbClr val="000000">
+                <a:alpha val="38000"/>
+              </a:srgbClr>
+            </a:outerShdw>
+          </a:effectLst>
+        </a:effectStyle>
+        <a:effectStyle>
+          <a:effectLst>
+            <a:outerShdw blurRad="40000" dist="23000" dir="5400000" rotWithShape="0">
+              <a:srgbClr val="000000">
+                <a:alpha val="35000"/>
+              </a:srgbClr>
+            </a:outerShdw>
+          </a:effectLst>
+        </a:effectStyle>
+        <a:effectStyle>
+          <a:effectLst>
+            <a:outerShdw blurRad="40000" dist="23000" dir="5400000" rotWithShape="0">
+              <a:srgbClr val="000000">
+                <a:alpha val="35000"/>
+              </a:srgbClr>
+            </a:outerShdw>
+          </a:effectLst>
+          <a:scene3d>
+            <a:camera prst="orthographicFront">
+              <a:rot lat="0" lon="0" rev="0"/>
+            </a:camera>
+            <a:lightRig rig="threePt" dir="t">
+              <a:rot lat="0" lon="0" rev="1200000"/>
+            </a:lightRig>
+          </a:scene3d>
+          <a:sp3d>
+            <a:bevelT w="63500" h="25400"/>
+          </a:sp3d>
+        </a:effectStyle>
+      </a:effectStyleLst>
+      <a:bgFillStyleLst>
+        <a:solidFill>
+          <a:schemeClr val="phClr"/>
+        </a:solidFill>
+        <a:gradFill rotWithShape="1">
+          <a:gsLst>
+            <a:gs pos="0">
+              <a:schemeClr val="phClr">
+                <a:tint val="40000"/>
+                <a:satMod val="350000"/>
+              </a:schemeClr>
+            </a:gs>
+            <a:gs pos="40000">
+              <a:schemeClr val="phClr">
+                <a:tint val="45000"/>
+                <a:shade val="99000"/>
+                <a:satMod val="350000"/>
+              </a:schemeClr>
+            </a:gs>
+            <a:gs pos="100000">
+              <a:schemeClr val="phClr">
+                <a:shade val="20000"/>
+                <a:satMod val="255000"/>
+              </a:schemeClr>
+            </a:gs>
+          </a:gsLst>
+          <a:path path="circle">
+            <a:fillToRect l="50000" t="-80000" r="50000" b="180000"/>
+          </a:path>
+        </a:gradFill>
+        <a:gradFill rotWithShape="1">
+          <a:gsLst>
+            <a:gs pos="0">
+              <a:schemeClr val="phClr">
+                <a:tint val="80000"/>
+                <a:satMod val="300000"/>
+              </a:schemeClr>
+            </a:gs>
+            <a:gs pos="100000">
+              <a:schemeClr val="phClr">
+                <a:shade val="30000"/>
+                <a:satMod val="200000"/>
+              </a:schemeClr>
+            </a:gs>
+          </a:gsLst>
+          <a:path path="circle">
+            <a:fillToRect l="50000" t="50000" r="50000" b="50000"/>
+          </a:path>
+        </a:gradFill>
+      </a:bgFillStyleLst>
+    </a:fmtScheme>
+  </a:themeElements>
+  <a:objectDefaults>
+    <a:spDef>
+      <a:spPr/>
+      <a:bodyPr/>
+      <a:lstStyle/>
+      <a:style>
+        <a:lnRef idx="1">
+          <a:schemeClr val="accent1"/>
+        </a:lnRef>
+        <a:fillRef idx="3">
+          <a:schemeClr val="accent1"/>
+        </a:fillRef>
+        <a:effectRef idx="2">
+          <a:schemeClr val="accent1"/>
+        </a:effectRef>
+        <a:fontRef idx="minor">
+          <a:schemeClr val="lt1"/>
+        </a:fontRef>
+      </a:style>
+    </a:spDef>
+    <a:lnDef>
+      <a:spPr/>
+      <a:bodyPr/>
+      <a:lstStyle/>
+      <a:style>
+        <a:lnRef idx="2">
+          <a:schemeClr val="accent1"/>
+        </a:lnRef>
+        <a:fillRef idx="0">
+          <a:schemeClr val="accent1"/>
+        </a:fillRef>
+        <a:effectRef idx="1">
+          <a:schemeClr val="accent1"/>
+        </a:effectRef>
+        <a:fontRef idx="minor">
+          <a:schemeClr val="tx1"/>
+        </a:fontRef>
+      </a:style>
+    </a:lnDef>
+  </a:objectDefaults>
+  <a:extraClrSchemeLst/>
+</a:theme>
 </file>
--- a/presentation/JMLC_pitch.pptx
+++ b/presentation/JMLC_pitch.pptx
@@ -15,6 +15,7 @@
     <p:sldId id="263" r:id="rId15"/>
     <p:sldId id="264" r:id="rId16"/>
     <p:sldId id="265" r:id="rId17"/>
+    <p:sldId id="266" r:id="rId18"/>
   </p:sldIdLst>
   <p:sldSz cx="12192000" cy="6858000" type="screen4x3"/>
   <p:notesSz cx="6858000" cy="9144000"/>
@@ -591,6 +592,96 @@
           <a:lstStyle/>
           <a:p>
             <a:r>
+              <a:t>[4:30–4:50] Инженерно всё сделано по-взрослому и воспроизводимо:</a:t>
+            </a:r>
+          </a:p>
+          <a:p>
+            <a:r>
+              <a:t>конфигурация на Hydra, трекинг экспериментов в TensorBoard, W&amp;B и MLflow, стадии</a:t>
+            </a:r>
+          </a:p>
+          <a:p>
+            <a:r>
+              <a:t>пайплайна в DVC, тесты и линтеры на pre-commit, Docker и CI на каждый коммит.</a:t>
+            </a:r>
+          </a:p>
+          <a:p>
+            <a:r>
+              <a:t>Отдельно — автономный LangGraph-агент, который сам гоняет цикл «оцени — спланируй —</a:t>
+            </a:r>
+          </a:p>
+          <a:p>
+            <a:r>
+              <a:t>обучи» до целевых метрик.</a:t>
+            </a:r>
+          </a:p>
+        </p:txBody>
+      </p:sp>
+      <p:sp>
+        <p:nvSpPr>
+          <p:cNvPr id="4" name="Slide Number Placeholder 3"/>
+          <p:cNvSpPr>
+            <a:spLocks noGrp="1"/>
+          </p:cNvSpPr>
+          <p:nvPr>
+            <p:ph type="sldNum" idx="5" sz="quarter"/>
+          </p:nvPr>
+        </p:nvSpPr>
+        <p:spPr/>
+      </p:sp>
+    </p:spTree>
+  </p:cSld>
+  <p:clrMapOvr>
+    <a:masterClrMapping/>
+  </p:clrMapOvr>
+</p:notes>
+</file>
+
+<file path=ppt/notesSlides/notesSlide11.xml><?xml version="1.0" encoding="utf-8"?>
+<p:notes xmlns:a="http://schemas.openxmlformats.org/drawingml/2006/main" xmlns:p="http://schemas.openxmlformats.org/presentationml/2006/main" xmlns:r="http://schemas.openxmlformats.org/officeDocument/2006/relationships">
+  <p:cSld>
+    <p:spTree>
+      <p:nvGrpSpPr>
+        <p:cNvPr id="1" name=""/>
+        <p:cNvGrpSpPr/>
+        <p:nvPr/>
+      </p:nvGrpSpPr>
+      <p:grpSpPr>
+        <a:xfrm>
+          <a:off x="0" y="0"/>
+          <a:ext cx="0" cy="0"/>
+          <a:chOff x="0" y="0"/>
+          <a:chExt cx="0" cy="0"/>
+        </a:xfrm>
+      </p:grpSpPr>
+      <p:sp>
+        <p:nvSpPr>
+          <p:cNvPr id="2" name="Slide Image Placeholder 1"/>
+          <p:cNvSpPr>
+            <a:spLocks noGrp="1"/>
+          </p:cNvSpPr>
+          <p:nvPr>
+            <p:ph type="sldImg" idx="2"/>
+          </p:nvPr>
+        </p:nvSpPr>
+        <p:spPr/>
+      </p:sp>
+      <p:sp>
+        <p:nvSpPr>
+          <p:cNvPr id="3" name="Notes Placeholder 2"/>
+          <p:cNvSpPr>
+            <a:spLocks noGrp="1"/>
+          </p:cNvSpPr>
+          <p:nvPr>
+            <p:ph type="body" idx="3" sz="quarter"/>
+          </p:nvPr>
+        </p:nvSpPr>
+        <p:spPr/>
+        <p:txBody>
+          <a:bodyPr/>
+          <a:lstStyle/>
+          <a:p>
+            <a:r>
               <a:t>[4:50–5:00] Итог: это полный цикл от сбора данных до продукта и</a:t>
             </a:r>
           </a:p>
@@ -671,7 +762,7 @@
           <a:lstStyle/>
           <a:p>
             <a:r>
-              <a:t>[0:15–0:50] Проблема простая и реальная. Аналитики вручную относят</a:t>
+              <a:t>[0:15–0:45] Проблема простая и реальная. Аналитики вручную относят</a:t>
             </a:r>
           </a:p>
           <a:p>
@@ -761,7 +852,7 @@
           <a:lstStyle/>
           <a:p>
             <a:r>
-              <a:t>[0:50–1:25] Решение: берём координаты участка из GeoPackage, находим</a:t>
+              <a:t>[0:45–1:15] Решение: берём координаты участка из GeoPackage, находим</a:t>
             </a:r>
           </a:p>
           <a:p>
@@ -846,7 +937,7 @@
           <a:lstStyle/>
           <a:p>
             <a:r>
-              <a:t>[1:25–2:05] Про данные — здесь была основная работа. Первое: почти</a:t>
+              <a:t>[1:15–1:55] Про данные — здесь была основная работа. Первое: почти</a:t>
             </a:r>
           </a:p>
           <a:p>
@@ -941,27 +1032,42 @@
           <a:lstStyle/>
           <a:p>
             <a:r>
-              <a:t>[2:05–2:45] Как это работает под капотом. По контуру участка находим</a:t>
-            </a:r>
-          </a:p>
-          <a:p>
-            <a:r>
-              <a:t>точки панорам, вырезаем кадры в четырёх направлениях, прогоняем через замороженный</a:t>
-            </a:r>
-          </a:p>
-          <a:p>
-            <a:r>
-              <a:t>CLIP и обучаем поверх него лёгкий линейный классификатор. Заморозка важна: данных</a:t>
-            </a:r>
-          </a:p>
-          <a:p>
-            <a:r>
-              <a:t>немного, а так модель не переобучается. У участка обычно несколько ракурсов —</a:t>
-            </a:r>
-          </a:p>
-          <a:p>
-            <a:r>
-              <a:t>финальный класс выбираем голосованием с весом по уверенности.</a:t>
+              <a:t>[1:55–2:30] Отдельно про VLM — у него в проекте две роли. Первая:</a:t>
+            </a:r>
+          </a:p>
+          <a:p>
+            <a:r>
+              <a:t>VLM-судья на базе Qwen переразмечает кадры по их реальному содержимому вместо шумных</a:t>
+            </a:r>
+          </a:p>
+          <a:p>
+            <a:r>
+              <a:t>OSM-меток — это weak supervision, спорное я вычитывал руками. Именно это подняло</a:t>
+            </a:r>
+          </a:p>
+          <a:p>
+            <a:r>
+              <a:t>точность с 0.27 до 0.76. Вторая роль — объяснимость: дообученная LoRA поверх</a:t>
+            </a:r>
+          </a:p>
+          <a:p>
+            <a:r>
+              <a:t>PaliGemma выдаёт не только класс, но и рамку-доказательство на кадре, почему так.</a:t>
+            </a:r>
+          </a:p>
+          <a:p>
+            <a:r>
+              <a:t>Как самостоятельный классификатор генеративный VLM слабее probe, и я это честно</a:t>
+            </a:r>
+          </a:p>
+          <a:p>
+            <a:r>
+              <a:t>показываю; его ценность — интерпретируемость. В проде классифицирует лёгкий</a:t>
+            </a:r>
+          </a:p>
+          <a:p>
+            <a:r>
+              <a:t>CLIP-probe, а VLM работает на качество данных и объяснения.</a:t>
             </a:r>
           </a:p>
         </p:txBody>
@@ -1031,27 +1137,27 @@
           <a:lstStyle/>
           <a:p>
             <a:r>
-              <a:t>[2:45–3:30] Результаты. Продакшен-модель на честной валидации со</a:t>
-            </a:r>
-          </a:p>
-          <a:p>
-            <a:r>
-              <a:t>сплитом по объектам: точность 76%, macro-F1 61%, а сбалансированный F1 — почти 74%.</a:t>
-            </a:r>
-          </a:p>
-          <a:p>
-            <a:r>
-              <a:t>В валидации есть все шесть классов. Посмотрите на нижнюю ленту: мы начинали с</a:t>
-            </a:r>
-          </a:p>
-          <a:p>
-            <a:r>
-              <a:t>zero-shot CLIP на уровне 20%, fine-tune на шумных метках упирался в 40%, а переход на</a:t>
-            </a:r>
-          </a:p>
-          <a:p>
-            <a:r>
-              <a:t>VLM-метки поднял точность до 76%. То есть главный рычаг — качество данных.</a:t>
+              <a:t>[2:30–3:00] Как это работает под капотом. По контуру участка находим</a:t>
+            </a:r>
+          </a:p>
+          <a:p>
+            <a:r>
+              <a:t>точки панорам, вырезаем кадры в четырёх направлениях, прогоняем через замороженный</a:t>
+            </a:r>
+          </a:p>
+          <a:p>
+            <a:r>
+              <a:t>CLIP и обучаем поверх него лёгкий линейный классификатор. Заморозка важна: данных</a:t>
+            </a:r>
+          </a:p>
+          <a:p>
+            <a:r>
+              <a:t>немного, а так модель не переобучается. У участка обычно несколько ракурсов —</a:t>
+            </a:r>
+          </a:p>
+          <a:p>
+            <a:r>
+              <a:t>финальный класс выбираем голосованием с весом по уверенности.</a:t>
             </a:r>
           </a:p>
         </p:txBody>
@@ -1121,27 +1227,27 @@
           <a:lstStyle/>
           <a:p>
             <a:r>
-              <a:t>[3:30–4:00] Важно быть честным. Если сравнивать в лоб на всём GPKG,</a:t>
-            </a:r>
-          </a:p>
-          <a:p>
-            <a:r>
-              <a:t>простая текстовая эвристика даёт 88% — выше нашей модели. Это нормально: в тексте</a:t>
-            </a:r>
-          </a:p>
-          <a:p>
-            <a:r>
-              <a:t>кадастра уже зашиты подсказки. Ценность ML в другом — там, где текст одинаковый, как</a:t>
-            </a:r>
-          </a:p>
-          <a:p>
-            <a:r>
-              <a:t>на «зелени во дворах», решает только картинка. Я явно документирую ограничения:</a:t>
-            </a:r>
-          </a:p>
-          <a:p>
-            <a:r>
-              <a:t>сдвиг домена и маленькие выборки. ML — это дополнение к тексту на сложных случаях.</a:t>
+              <a:t>[3:00–3:40] Результаты. Продакшен-модель на честной валидации со</a:t>
+            </a:r>
+          </a:p>
+          <a:p>
+            <a:r>
+              <a:t>сплитом по объектам: точность 76%, macro-F1 61%, а сбалансированный F1 — почти 74%.</a:t>
+            </a:r>
+          </a:p>
+          <a:p>
+            <a:r>
+              <a:t>В валидации есть все шесть классов. Посмотрите на нижнюю ленту: мы начинали с</a:t>
+            </a:r>
+          </a:p>
+          <a:p>
+            <a:r>
+              <a:t>zero-shot CLIP на уровне 20%, fine-tune на шумных метках упирался в 40%, а переход на</a:t>
+            </a:r>
+          </a:p>
+          <a:p>
+            <a:r>
+              <a:t>VLM-метки поднял точность до 76%. То есть главный рычаг — качество данных.</a:t>
             </a:r>
           </a:p>
         </p:txBody>
@@ -1211,27 +1317,27 @@
           <a:lstStyle/>
           <a:p>
             <a:r>
-              <a:t>[4:00–4:30] Теперь продукт. Аналитик загружает GeoPackage, видит</a:t>
-            </a:r>
-          </a:p>
-          <a:p>
-            <a:r>
-              <a:t>автоклассификацию по панораме, карту и все ракурсы, правит класс и выгружает</a:t>
-            </a:r>
-          </a:p>
-          <a:p>
-            <a:r>
-              <a:t>результат обратно. Ключевое — правки не пропадают: это готовые gold-метки. Уже есть</a:t>
-            </a:r>
-          </a:p>
-          <a:p>
-            <a:r>
-              <a:t>7535 скорректированных участков, которые возвращаются в дообучение. Получается</a:t>
-            </a:r>
-          </a:p>
-          <a:p>
-            <a:r>
-              <a:t>замкнутый цикл: продукт улучшает модель.</a:t>
+              <a:t>[3:40–4:05] Важно быть честным. Если сравнивать в лоб на всём GPKG,</a:t>
+            </a:r>
+          </a:p>
+          <a:p>
+            <a:r>
+              <a:t>простая текстовая эвристика даёт 88% — выше нашей модели. Это нормально: в тексте</a:t>
+            </a:r>
+          </a:p>
+          <a:p>
+            <a:r>
+              <a:t>кадастра уже зашиты подсказки. Ценность ML в другом — там, где текст одинаковый, как</a:t>
+            </a:r>
+          </a:p>
+          <a:p>
+            <a:r>
+              <a:t>на «зелени во дворах», решает только картинка. Я явно документирую ограничения:</a:t>
+            </a:r>
+          </a:p>
+          <a:p>
+            <a:r>
+              <a:t>сдвиг домена и маленькие выборки. ML — это дополнение к тексту на сложных случаях.</a:t>
             </a:r>
           </a:p>
         </p:txBody>
@@ -1301,27 +1407,27 @@
           <a:lstStyle/>
           <a:p>
             <a:r>
-              <a:t>[4:30–4:50] Инженерно всё сделано по-взрослому и воспроизводимо:</a:t>
-            </a:r>
-          </a:p>
-          <a:p>
-            <a:r>
-              <a:t>конфигурация на Hydra, трекинг экспериментов в TensorBoard, W&amp;B и MLflow, стадии</a:t>
-            </a:r>
-          </a:p>
-          <a:p>
-            <a:r>
-              <a:t>пайплайна в DVC, тесты и линтеры на pre-commit, Docker и CI на каждый коммит.</a:t>
-            </a:r>
-          </a:p>
-          <a:p>
-            <a:r>
-              <a:t>Отдельно — автономный LangGraph-агент, который сам гоняет цикл «оцени — спланируй —</a:t>
-            </a:r>
-          </a:p>
-          <a:p>
-            <a:r>
-              <a:t>обучи» до целевых метрик.</a:t>
+              <a:t>[4:05–4:30] Теперь продукт. Аналитик загружает GeoPackage, видит</a:t>
+            </a:r>
+          </a:p>
+          <a:p>
+            <a:r>
+              <a:t>автоклассификацию по панораме, карту и все ракурсы, правит класс и выгружает</a:t>
+            </a:r>
+          </a:p>
+          <a:p>
+            <a:r>
+              <a:t>результат обратно. Ключевое — правки не пропадают: это готовые gold-метки. Уже есть</a:t>
+            </a:r>
+          </a:p>
+          <a:p>
+            <a:r>
+              <a:t>7535 скорректированных участков, которые возвращаются в дообучение. Получается</a:t>
+            </a:r>
+          </a:p>
+          <a:p>
+            <a:r>
+              <a:t>замкнутый цикл: продукт улучшает модель.</a:t>
             </a:r>
           </a:p>
         </p:txBody>
@@ -4515,6 +4621,1091 @@
             <a:avLst/>
           </a:prstGeom>
           <a:solidFill>
+            <a:srgbClr val="FFFFFF"/>
+          </a:solidFill>
+          <a:ln>
+            <a:noFill/>
+          </a:ln>
+          <a:effectLst/>
+        </p:spPr>
+        <p:style>
+          <a:lnRef idx="1">
+            <a:schemeClr val="accent1"/>
+          </a:lnRef>
+          <a:fillRef idx="3">
+            <a:schemeClr val="accent1"/>
+          </a:fillRef>
+          <a:effectRef idx="2">
+            <a:schemeClr val="accent1"/>
+          </a:effectRef>
+          <a:fontRef idx="minor">
+            <a:schemeClr val="lt1"/>
+          </a:fontRef>
+        </p:style>
+        <p:txBody>
+          <a:bodyPr rtlCol="0" anchor="ctr"/>
+          <a:lstStyle/>
+          <a:p>
+            <a:pPr algn="ctr"/>
+          </a:p>
+        </p:txBody>
+      </p:sp>
+      <p:sp>
+        <p:nvSpPr>
+          <p:cNvPr id="3" name="Rectangle 2"/>
+          <p:cNvSpPr/>
+          <p:nvPr/>
+        </p:nvSpPr>
+        <p:spPr>
+          <a:xfrm>
+            <a:off x="0" y="0"/>
+            <a:ext cx="12192000" cy="1500000"/>
+          </a:xfrm>
+          <a:prstGeom prst="rect">
+            <a:avLst/>
+          </a:prstGeom>
+          <a:solidFill>
+            <a:srgbClr val="0F1E3D"/>
+          </a:solidFill>
+          <a:ln>
+            <a:noFill/>
+          </a:ln>
+          <a:effectLst/>
+        </p:spPr>
+        <p:style>
+          <a:lnRef idx="1">
+            <a:schemeClr val="accent1"/>
+          </a:lnRef>
+          <a:fillRef idx="3">
+            <a:schemeClr val="accent1"/>
+          </a:fillRef>
+          <a:effectRef idx="2">
+            <a:schemeClr val="accent1"/>
+          </a:effectRef>
+          <a:fontRef idx="minor">
+            <a:schemeClr val="lt1"/>
+          </a:fontRef>
+        </p:style>
+        <p:txBody>
+          <a:bodyPr rtlCol="0" anchor="ctr"/>
+          <a:lstStyle/>
+          <a:p>
+            <a:pPr algn="ctr"/>
+          </a:p>
+        </p:txBody>
+      </p:sp>
+      <p:sp>
+        <p:nvSpPr>
+          <p:cNvPr id="4" name="Rectangle 3"/>
+          <p:cNvSpPr/>
+          <p:nvPr/>
+        </p:nvSpPr>
+        <p:spPr>
+          <a:xfrm>
+            <a:off x="700000" y="560000"/>
+            <a:ext cx="180000" cy="560000"/>
+          </a:xfrm>
+          <a:prstGeom prst="rect">
+            <a:avLst/>
+          </a:prstGeom>
+          <a:solidFill>
+            <a:srgbClr val="E87A22"/>
+          </a:solidFill>
+          <a:ln>
+            <a:noFill/>
+          </a:ln>
+          <a:effectLst/>
+        </p:spPr>
+        <p:style>
+          <a:lnRef idx="1">
+            <a:schemeClr val="accent1"/>
+          </a:lnRef>
+          <a:fillRef idx="3">
+            <a:schemeClr val="accent1"/>
+          </a:fillRef>
+          <a:effectRef idx="2">
+            <a:schemeClr val="accent1"/>
+          </a:effectRef>
+          <a:fontRef idx="minor">
+            <a:schemeClr val="lt1"/>
+          </a:fontRef>
+        </p:style>
+        <p:txBody>
+          <a:bodyPr rtlCol="0" anchor="ctr"/>
+          <a:lstStyle/>
+          <a:p>
+            <a:pPr algn="ctr"/>
+          </a:p>
+        </p:txBody>
+      </p:sp>
+      <p:sp>
+        <p:nvSpPr>
+          <p:cNvPr id="5" name="TextBox 4"/>
+          <p:cNvSpPr txBox="1"/>
+          <p:nvPr/>
+        </p:nvSpPr>
+        <p:spPr>
+          <a:xfrm>
+            <a:off x="1000000" y="360000"/>
+            <a:ext cx="10492000" cy="900000"/>
+          </a:xfrm>
+          <a:prstGeom prst="rect">
+            <a:avLst/>
+          </a:prstGeom>
+          <a:noFill/>
+        </p:spPr>
+        <p:txBody>
+          <a:bodyPr wrap="square" anchor="ctr">
+            <a:spAutoFit/>
+          </a:bodyPr>
+          <a:lstStyle/>
+          <a:p>
+            <a:pPr algn="l">
+              <a:spcAft>
+                <a:spcPts val="200"/>
+              </a:spcAft>
+            </a:pPr>
+            <a:r>
+              <a:rPr sz="1300" b="1">
+                <a:solidFill>
+                  <a:srgbClr val="14A08F"/>
+                </a:solidFill>
+                <a:latin typeface="Calibri"/>
+              </a:rPr>
+              <a:t>ИНЖЕНЕРИЯ И MLOPS</a:t>
+            </a:r>
+          </a:p>
+          <a:p>
+            <a:r>
+              <a:rPr sz="3000" b="1">
+                <a:solidFill>
+                  <a:srgbClr val="FFFFFF"/>
+                </a:solidFill>
+                <a:latin typeface="Calibri"/>
+              </a:rPr>
+              <a:t>Воспроизводимо и по-взрослому</a:t>
+            </a:r>
+          </a:p>
+        </p:txBody>
+      </p:sp>
+      <p:sp>
+        <p:nvSpPr>
+          <p:cNvPr id="6" name="Rectangle 5"/>
+          <p:cNvSpPr/>
+          <p:nvPr/>
+        </p:nvSpPr>
+        <p:spPr>
+          <a:xfrm>
+            <a:off x="700000" y="1900000"/>
+            <a:ext cx="3464000" cy="1350000"/>
+          </a:xfrm>
+          <a:prstGeom prst="rect">
+            <a:avLst/>
+          </a:prstGeom>
+          <a:solidFill>
+            <a:srgbClr val="F3F5F7"/>
+          </a:solidFill>
+          <a:ln w="12700">
+            <a:solidFill>
+              <a:srgbClr val="DDE3EA"/>
+            </a:solidFill>
+          </a:ln>
+          <a:effectLst/>
+        </p:spPr>
+        <p:style>
+          <a:lnRef idx="1">
+            <a:schemeClr val="accent1"/>
+          </a:lnRef>
+          <a:fillRef idx="3">
+            <a:schemeClr val="accent1"/>
+          </a:fillRef>
+          <a:effectRef idx="2">
+            <a:schemeClr val="accent1"/>
+          </a:effectRef>
+          <a:fontRef idx="minor">
+            <a:schemeClr val="lt1"/>
+          </a:fontRef>
+        </p:style>
+        <p:txBody>
+          <a:bodyPr rtlCol="0" anchor="ctr"/>
+          <a:lstStyle/>
+          <a:p>
+            <a:pPr algn="ctr"/>
+          </a:p>
+        </p:txBody>
+      </p:sp>
+      <p:sp>
+        <p:nvSpPr>
+          <p:cNvPr id="7" name="Rectangle 6"/>
+          <p:cNvSpPr/>
+          <p:nvPr/>
+        </p:nvSpPr>
+        <p:spPr>
+          <a:xfrm>
+            <a:off x="700000" y="1900000"/>
+            <a:ext cx="3464000" cy="140000"/>
+          </a:xfrm>
+          <a:prstGeom prst="rect">
+            <a:avLst/>
+          </a:prstGeom>
+          <a:solidFill>
+            <a:srgbClr val="14A08F"/>
+          </a:solidFill>
+          <a:ln>
+            <a:noFill/>
+          </a:ln>
+          <a:effectLst/>
+        </p:spPr>
+        <p:style>
+          <a:lnRef idx="1">
+            <a:schemeClr val="accent1"/>
+          </a:lnRef>
+          <a:fillRef idx="3">
+            <a:schemeClr val="accent1"/>
+          </a:fillRef>
+          <a:effectRef idx="2">
+            <a:schemeClr val="accent1"/>
+          </a:effectRef>
+          <a:fontRef idx="minor">
+            <a:schemeClr val="lt1"/>
+          </a:fontRef>
+        </p:style>
+        <p:txBody>
+          <a:bodyPr rtlCol="0" anchor="ctr"/>
+          <a:lstStyle/>
+          <a:p>
+            <a:pPr algn="ctr"/>
+          </a:p>
+        </p:txBody>
+      </p:sp>
+      <p:sp>
+        <p:nvSpPr>
+          <p:cNvPr id="8" name="TextBox 7"/>
+          <p:cNvSpPr txBox="1"/>
+          <p:nvPr/>
+        </p:nvSpPr>
+        <p:spPr>
+          <a:xfrm>
+            <a:off x="940000" y="2160000"/>
+            <a:ext cx="3064000" cy="950000"/>
+          </a:xfrm>
+          <a:prstGeom prst="rect">
+            <a:avLst/>
+          </a:prstGeom>
+          <a:noFill/>
+        </p:spPr>
+        <p:txBody>
+          <a:bodyPr wrap="square" anchor="t">
+            <a:spAutoFit/>
+          </a:bodyPr>
+          <a:lstStyle/>
+          <a:p>
+            <a:pPr algn="l">
+              <a:spcAft>
+                <a:spcPts val="600"/>
+              </a:spcAft>
+            </a:pPr>
+            <a:r>
+              <a:rPr sz="1600" b="1">
+                <a:solidFill>
+                  <a:srgbClr val="0F1E3D"/>
+                </a:solidFill>
+                <a:latin typeface="Calibri"/>
+              </a:rPr>
+              <a:t>Стек</a:t>
+            </a:r>
+          </a:p>
+          <a:p>
+            <a:r>
+              <a:rPr sz="1300">
+                <a:solidFill>
+                  <a:srgbClr val="5B6672"/>
+                </a:solidFill>
+                <a:latin typeface="Calibri"/>
+              </a:rPr>
+              <a:t>Python · PyTorch · OpenCLIP
+Flask · GeoPandas</a:t>
+            </a:r>
+          </a:p>
+        </p:txBody>
+      </p:sp>
+      <p:sp>
+        <p:nvSpPr>
+          <p:cNvPr id="9" name="Rectangle 8"/>
+          <p:cNvSpPr/>
+          <p:nvPr/>
+        </p:nvSpPr>
+        <p:spPr>
+          <a:xfrm>
+            <a:off x="4364000" y="1900000"/>
+            <a:ext cx="3464000" cy="1350000"/>
+          </a:xfrm>
+          <a:prstGeom prst="rect">
+            <a:avLst/>
+          </a:prstGeom>
+          <a:solidFill>
+            <a:srgbClr val="F3F5F7"/>
+          </a:solidFill>
+          <a:ln w="12700">
+            <a:solidFill>
+              <a:srgbClr val="DDE3EA"/>
+            </a:solidFill>
+          </a:ln>
+          <a:effectLst/>
+        </p:spPr>
+        <p:style>
+          <a:lnRef idx="1">
+            <a:schemeClr val="accent1"/>
+          </a:lnRef>
+          <a:fillRef idx="3">
+            <a:schemeClr val="accent1"/>
+          </a:fillRef>
+          <a:effectRef idx="2">
+            <a:schemeClr val="accent1"/>
+          </a:effectRef>
+          <a:fontRef idx="minor">
+            <a:schemeClr val="lt1"/>
+          </a:fontRef>
+        </p:style>
+        <p:txBody>
+          <a:bodyPr rtlCol="0" anchor="ctr"/>
+          <a:lstStyle/>
+          <a:p>
+            <a:pPr algn="ctr"/>
+          </a:p>
+        </p:txBody>
+      </p:sp>
+      <p:sp>
+        <p:nvSpPr>
+          <p:cNvPr id="10" name="Rectangle 9"/>
+          <p:cNvSpPr/>
+          <p:nvPr/>
+        </p:nvSpPr>
+        <p:spPr>
+          <a:xfrm>
+            <a:off x="4364000" y="1900000"/>
+            <a:ext cx="3464000" cy="140000"/>
+          </a:xfrm>
+          <a:prstGeom prst="rect">
+            <a:avLst/>
+          </a:prstGeom>
+          <a:solidFill>
+            <a:srgbClr val="14A08F"/>
+          </a:solidFill>
+          <a:ln>
+            <a:noFill/>
+          </a:ln>
+          <a:effectLst/>
+        </p:spPr>
+        <p:style>
+          <a:lnRef idx="1">
+            <a:schemeClr val="accent1"/>
+          </a:lnRef>
+          <a:fillRef idx="3">
+            <a:schemeClr val="accent1"/>
+          </a:fillRef>
+          <a:effectRef idx="2">
+            <a:schemeClr val="accent1"/>
+          </a:effectRef>
+          <a:fontRef idx="minor">
+            <a:schemeClr val="lt1"/>
+          </a:fontRef>
+        </p:style>
+        <p:txBody>
+          <a:bodyPr rtlCol="0" anchor="ctr"/>
+          <a:lstStyle/>
+          <a:p>
+            <a:pPr algn="ctr"/>
+          </a:p>
+        </p:txBody>
+      </p:sp>
+      <p:sp>
+        <p:nvSpPr>
+          <p:cNvPr id="11" name="TextBox 10"/>
+          <p:cNvSpPr txBox="1"/>
+          <p:nvPr/>
+        </p:nvSpPr>
+        <p:spPr>
+          <a:xfrm>
+            <a:off x="4604000" y="2160000"/>
+            <a:ext cx="3064000" cy="950000"/>
+          </a:xfrm>
+          <a:prstGeom prst="rect">
+            <a:avLst/>
+          </a:prstGeom>
+          <a:noFill/>
+        </p:spPr>
+        <p:txBody>
+          <a:bodyPr wrap="square" anchor="t">
+            <a:spAutoFit/>
+          </a:bodyPr>
+          <a:lstStyle/>
+          <a:p>
+            <a:pPr algn="l">
+              <a:spcAft>
+                <a:spcPts val="600"/>
+              </a:spcAft>
+            </a:pPr>
+            <a:r>
+              <a:rPr sz="1600" b="1">
+                <a:solidFill>
+                  <a:srgbClr val="0F1E3D"/>
+                </a:solidFill>
+                <a:latin typeface="Calibri"/>
+              </a:rPr>
+              <a:t>Конфиги и трекинг</a:t>
+            </a:r>
+          </a:p>
+          <a:p>
+            <a:r>
+              <a:rPr sz="1300">
+                <a:solidFill>
+                  <a:srgbClr val="5B6672"/>
+                </a:solidFill>
+                <a:latin typeface="Calibri"/>
+              </a:rPr>
+              <a:t>Hydra · TensorBoard
+W&amp;B · MLflow</a:t>
+            </a:r>
+          </a:p>
+        </p:txBody>
+      </p:sp>
+      <p:sp>
+        <p:nvSpPr>
+          <p:cNvPr id="12" name="Rectangle 11"/>
+          <p:cNvSpPr/>
+          <p:nvPr/>
+        </p:nvSpPr>
+        <p:spPr>
+          <a:xfrm>
+            <a:off x="8028000" y="1900000"/>
+            <a:ext cx="3464000" cy="1350000"/>
+          </a:xfrm>
+          <a:prstGeom prst="rect">
+            <a:avLst/>
+          </a:prstGeom>
+          <a:solidFill>
+            <a:srgbClr val="F3F5F7"/>
+          </a:solidFill>
+          <a:ln w="12700">
+            <a:solidFill>
+              <a:srgbClr val="DDE3EA"/>
+            </a:solidFill>
+          </a:ln>
+          <a:effectLst/>
+        </p:spPr>
+        <p:style>
+          <a:lnRef idx="1">
+            <a:schemeClr val="accent1"/>
+          </a:lnRef>
+          <a:fillRef idx="3">
+            <a:schemeClr val="accent1"/>
+          </a:fillRef>
+          <a:effectRef idx="2">
+            <a:schemeClr val="accent1"/>
+          </a:effectRef>
+          <a:fontRef idx="minor">
+            <a:schemeClr val="lt1"/>
+          </a:fontRef>
+        </p:style>
+        <p:txBody>
+          <a:bodyPr rtlCol="0" anchor="ctr"/>
+          <a:lstStyle/>
+          <a:p>
+            <a:pPr algn="ctr"/>
+          </a:p>
+        </p:txBody>
+      </p:sp>
+      <p:sp>
+        <p:nvSpPr>
+          <p:cNvPr id="13" name="Rectangle 12"/>
+          <p:cNvSpPr/>
+          <p:nvPr/>
+        </p:nvSpPr>
+        <p:spPr>
+          <a:xfrm>
+            <a:off x="8028000" y="1900000"/>
+            <a:ext cx="3464000" cy="140000"/>
+          </a:xfrm>
+          <a:prstGeom prst="rect">
+            <a:avLst/>
+          </a:prstGeom>
+          <a:solidFill>
+            <a:srgbClr val="14A08F"/>
+          </a:solidFill>
+          <a:ln>
+            <a:noFill/>
+          </a:ln>
+          <a:effectLst/>
+        </p:spPr>
+        <p:style>
+          <a:lnRef idx="1">
+            <a:schemeClr val="accent1"/>
+          </a:lnRef>
+          <a:fillRef idx="3">
+            <a:schemeClr val="accent1"/>
+          </a:fillRef>
+          <a:effectRef idx="2">
+            <a:schemeClr val="accent1"/>
+          </a:effectRef>
+          <a:fontRef idx="minor">
+            <a:schemeClr val="lt1"/>
+          </a:fontRef>
+        </p:style>
+        <p:txBody>
+          <a:bodyPr rtlCol="0" anchor="ctr"/>
+          <a:lstStyle/>
+          <a:p>
+            <a:pPr algn="ctr"/>
+          </a:p>
+        </p:txBody>
+      </p:sp>
+      <p:sp>
+        <p:nvSpPr>
+          <p:cNvPr id="14" name="TextBox 13"/>
+          <p:cNvSpPr txBox="1"/>
+          <p:nvPr/>
+        </p:nvSpPr>
+        <p:spPr>
+          <a:xfrm>
+            <a:off x="8268000" y="2160000"/>
+            <a:ext cx="3064000" cy="950000"/>
+          </a:xfrm>
+          <a:prstGeom prst="rect">
+            <a:avLst/>
+          </a:prstGeom>
+          <a:noFill/>
+        </p:spPr>
+        <p:txBody>
+          <a:bodyPr wrap="square" anchor="t">
+            <a:spAutoFit/>
+          </a:bodyPr>
+          <a:lstStyle/>
+          <a:p>
+            <a:pPr algn="l">
+              <a:spcAft>
+                <a:spcPts val="600"/>
+              </a:spcAft>
+            </a:pPr>
+            <a:r>
+              <a:rPr sz="1600" b="1">
+                <a:solidFill>
+                  <a:srgbClr val="0F1E3D"/>
+                </a:solidFill>
+                <a:latin typeface="Calibri"/>
+              </a:rPr>
+              <a:t>Пайплайн</a:t>
+            </a:r>
+          </a:p>
+          <a:p>
+            <a:r>
+              <a:rPr sz="1300">
+                <a:solidFill>
+                  <a:srgbClr val="5B6672"/>
+                </a:solidFill>
+                <a:latin typeface="Calibri"/>
+              </a:rPr>
+              <a:t>DVC · Makefile
+7 модульных шагов</a:t>
+            </a:r>
+          </a:p>
+        </p:txBody>
+      </p:sp>
+      <p:sp>
+        <p:nvSpPr>
+          <p:cNvPr id="15" name="Rectangle 14"/>
+          <p:cNvSpPr/>
+          <p:nvPr/>
+        </p:nvSpPr>
+        <p:spPr>
+          <a:xfrm>
+            <a:off x="700000" y="3500000"/>
+            <a:ext cx="3464000" cy="1350000"/>
+          </a:xfrm>
+          <a:prstGeom prst="rect">
+            <a:avLst/>
+          </a:prstGeom>
+          <a:solidFill>
+            <a:srgbClr val="F3F5F7"/>
+          </a:solidFill>
+          <a:ln w="12700">
+            <a:solidFill>
+              <a:srgbClr val="DDE3EA"/>
+            </a:solidFill>
+          </a:ln>
+          <a:effectLst/>
+        </p:spPr>
+        <p:style>
+          <a:lnRef idx="1">
+            <a:schemeClr val="accent1"/>
+          </a:lnRef>
+          <a:fillRef idx="3">
+            <a:schemeClr val="accent1"/>
+          </a:fillRef>
+          <a:effectRef idx="2">
+            <a:schemeClr val="accent1"/>
+          </a:effectRef>
+          <a:fontRef idx="minor">
+            <a:schemeClr val="lt1"/>
+          </a:fontRef>
+        </p:style>
+        <p:txBody>
+          <a:bodyPr rtlCol="0" anchor="ctr"/>
+          <a:lstStyle/>
+          <a:p>
+            <a:pPr algn="ctr"/>
+          </a:p>
+        </p:txBody>
+      </p:sp>
+      <p:sp>
+        <p:nvSpPr>
+          <p:cNvPr id="16" name="Rectangle 15"/>
+          <p:cNvSpPr/>
+          <p:nvPr/>
+        </p:nvSpPr>
+        <p:spPr>
+          <a:xfrm>
+            <a:off x="700000" y="3500000"/>
+            <a:ext cx="3464000" cy="140000"/>
+          </a:xfrm>
+          <a:prstGeom prst="rect">
+            <a:avLst/>
+          </a:prstGeom>
+          <a:solidFill>
+            <a:srgbClr val="14A08F"/>
+          </a:solidFill>
+          <a:ln>
+            <a:noFill/>
+          </a:ln>
+          <a:effectLst/>
+        </p:spPr>
+        <p:style>
+          <a:lnRef idx="1">
+            <a:schemeClr val="accent1"/>
+          </a:lnRef>
+          <a:fillRef idx="3">
+            <a:schemeClr val="accent1"/>
+          </a:fillRef>
+          <a:effectRef idx="2">
+            <a:schemeClr val="accent1"/>
+          </a:effectRef>
+          <a:fontRef idx="minor">
+            <a:schemeClr val="lt1"/>
+          </a:fontRef>
+        </p:style>
+        <p:txBody>
+          <a:bodyPr rtlCol="0" anchor="ctr"/>
+          <a:lstStyle/>
+          <a:p>
+            <a:pPr algn="ctr"/>
+          </a:p>
+        </p:txBody>
+      </p:sp>
+      <p:sp>
+        <p:nvSpPr>
+          <p:cNvPr id="17" name="TextBox 16"/>
+          <p:cNvSpPr txBox="1"/>
+          <p:nvPr/>
+        </p:nvSpPr>
+        <p:spPr>
+          <a:xfrm>
+            <a:off x="940000" y="3760000"/>
+            <a:ext cx="3064000" cy="950000"/>
+          </a:xfrm>
+          <a:prstGeom prst="rect">
+            <a:avLst/>
+          </a:prstGeom>
+          <a:noFill/>
+        </p:spPr>
+        <p:txBody>
+          <a:bodyPr wrap="square" anchor="t">
+            <a:spAutoFit/>
+          </a:bodyPr>
+          <a:lstStyle/>
+          <a:p>
+            <a:pPr algn="l">
+              <a:spcAft>
+                <a:spcPts val="600"/>
+              </a:spcAft>
+            </a:pPr>
+            <a:r>
+              <a:rPr sz="1600" b="1">
+                <a:solidFill>
+                  <a:srgbClr val="0F1E3D"/>
+                </a:solidFill>
+                <a:latin typeface="Calibri"/>
+              </a:rPr>
+              <a:t>Качество</a:t>
+            </a:r>
+          </a:p>
+          <a:p>
+            <a:r>
+              <a:rPr sz="1300">
+                <a:solidFill>
+                  <a:srgbClr val="5B6672"/>
+                </a:solidFill>
+                <a:latin typeface="Calibri"/>
+              </a:rPr>
+              <a:t>pytest · ruff · black
+pre-commit</a:t>
+            </a:r>
+          </a:p>
+        </p:txBody>
+      </p:sp>
+      <p:sp>
+        <p:nvSpPr>
+          <p:cNvPr id="18" name="Rectangle 17"/>
+          <p:cNvSpPr/>
+          <p:nvPr/>
+        </p:nvSpPr>
+        <p:spPr>
+          <a:xfrm>
+            <a:off x="4364000" y="3500000"/>
+            <a:ext cx="3464000" cy="1350000"/>
+          </a:xfrm>
+          <a:prstGeom prst="rect">
+            <a:avLst/>
+          </a:prstGeom>
+          <a:solidFill>
+            <a:srgbClr val="F3F5F7"/>
+          </a:solidFill>
+          <a:ln w="12700">
+            <a:solidFill>
+              <a:srgbClr val="DDE3EA"/>
+            </a:solidFill>
+          </a:ln>
+          <a:effectLst/>
+        </p:spPr>
+        <p:style>
+          <a:lnRef idx="1">
+            <a:schemeClr val="accent1"/>
+          </a:lnRef>
+          <a:fillRef idx="3">
+            <a:schemeClr val="accent1"/>
+          </a:fillRef>
+          <a:effectRef idx="2">
+            <a:schemeClr val="accent1"/>
+          </a:effectRef>
+          <a:fontRef idx="minor">
+            <a:schemeClr val="lt1"/>
+          </a:fontRef>
+        </p:style>
+        <p:txBody>
+          <a:bodyPr rtlCol="0" anchor="ctr"/>
+          <a:lstStyle/>
+          <a:p>
+            <a:pPr algn="ctr"/>
+          </a:p>
+        </p:txBody>
+      </p:sp>
+      <p:sp>
+        <p:nvSpPr>
+          <p:cNvPr id="19" name="Rectangle 18"/>
+          <p:cNvSpPr/>
+          <p:nvPr/>
+        </p:nvSpPr>
+        <p:spPr>
+          <a:xfrm>
+            <a:off x="4364000" y="3500000"/>
+            <a:ext cx="3464000" cy="140000"/>
+          </a:xfrm>
+          <a:prstGeom prst="rect">
+            <a:avLst/>
+          </a:prstGeom>
+          <a:solidFill>
+            <a:srgbClr val="14A08F"/>
+          </a:solidFill>
+          <a:ln>
+            <a:noFill/>
+          </a:ln>
+          <a:effectLst/>
+        </p:spPr>
+        <p:style>
+          <a:lnRef idx="1">
+            <a:schemeClr val="accent1"/>
+          </a:lnRef>
+          <a:fillRef idx="3">
+            <a:schemeClr val="accent1"/>
+          </a:fillRef>
+          <a:effectRef idx="2">
+            <a:schemeClr val="accent1"/>
+          </a:effectRef>
+          <a:fontRef idx="minor">
+            <a:schemeClr val="lt1"/>
+          </a:fontRef>
+        </p:style>
+        <p:txBody>
+          <a:bodyPr rtlCol="0" anchor="ctr"/>
+          <a:lstStyle/>
+          <a:p>
+            <a:pPr algn="ctr"/>
+          </a:p>
+        </p:txBody>
+      </p:sp>
+      <p:sp>
+        <p:nvSpPr>
+          <p:cNvPr id="20" name="TextBox 19"/>
+          <p:cNvSpPr txBox="1"/>
+          <p:nvPr/>
+        </p:nvSpPr>
+        <p:spPr>
+          <a:xfrm>
+            <a:off x="4604000" y="3760000"/>
+            <a:ext cx="3064000" cy="950000"/>
+          </a:xfrm>
+          <a:prstGeom prst="rect">
+            <a:avLst/>
+          </a:prstGeom>
+          <a:noFill/>
+        </p:spPr>
+        <p:txBody>
+          <a:bodyPr wrap="square" anchor="t">
+            <a:spAutoFit/>
+          </a:bodyPr>
+          <a:lstStyle/>
+          <a:p>
+            <a:pPr algn="l">
+              <a:spcAft>
+                <a:spcPts val="600"/>
+              </a:spcAft>
+            </a:pPr>
+            <a:r>
+              <a:rPr sz="1600" b="1">
+                <a:solidFill>
+                  <a:srgbClr val="0F1E3D"/>
+                </a:solidFill>
+                <a:latin typeface="Calibri"/>
+              </a:rPr>
+              <a:t>Доставка</a:t>
+            </a:r>
+          </a:p>
+          <a:p>
+            <a:r>
+              <a:rPr sz="1300">
+                <a:solidFill>
+                  <a:srgbClr val="5B6672"/>
+                </a:solidFill>
+                <a:latin typeface="Calibri"/>
+              </a:rPr>
+              <a:t>Docker · GitHub Actions CI
+demo-данные для CI</a:t>
+            </a:r>
+          </a:p>
+        </p:txBody>
+      </p:sp>
+      <p:sp>
+        <p:nvSpPr>
+          <p:cNvPr id="21" name="Rectangle 20"/>
+          <p:cNvSpPr/>
+          <p:nvPr/>
+        </p:nvSpPr>
+        <p:spPr>
+          <a:xfrm>
+            <a:off x="8028000" y="3500000"/>
+            <a:ext cx="3464000" cy="1350000"/>
+          </a:xfrm>
+          <a:prstGeom prst="rect">
+            <a:avLst/>
+          </a:prstGeom>
+          <a:solidFill>
+            <a:srgbClr val="F3F5F7"/>
+          </a:solidFill>
+          <a:ln w="12700">
+            <a:solidFill>
+              <a:srgbClr val="DDE3EA"/>
+            </a:solidFill>
+          </a:ln>
+          <a:effectLst/>
+        </p:spPr>
+        <p:style>
+          <a:lnRef idx="1">
+            <a:schemeClr val="accent1"/>
+          </a:lnRef>
+          <a:fillRef idx="3">
+            <a:schemeClr val="accent1"/>
+          </a:fillRef>
+          <a:effectRef idx="2">
+            <a:schemeClr val="accent1"/>
+          </a:effectRef>
+          <a:fontRef idx="minor">
+            <a:schemeClr val="lt1"/>
+          </a:fontRef>
+        </p:style>
+        <p:txBody>
+          <a:bodyPr rtlCol="0" anchor="ctr"/>
+          <a:lstStyle/>
+          <a:p>
+            <a:pPr algn="ctr"/>
+          </a:p>
+        </p:txBody>
+      </p:sp>
+      <p:sp>
+        <p:nvSpPr>
+          <p:cNvPr id="22" name="Rectangle 21"/>
+          <p:cNvSpPr/>
+          <p:nvPr/>
+        </p:nvSpPr>
+        <p:spPr>
+          <a:xfrm>
+            <a:off x="8028000" y="3500000"/>
+            <a:ext cx="3464000" cy="140000"/>
+          </a:xfrm>
+          <a:prstGeom prst="rect">
+            <a:avLst/>
+          </a:prstGeom>
+          <a:solidFill>
+            <a:srgbClr val="E87A22"/>
+          </a:solidFill>
+          <a:ln>
+            <a:noFill/>
+          </a:ln>
+          <a:effectLst/>
+        </p:spPr>
+        <p:style>
+          <a:lnRef idx="1">
+            <a:schemeClr val="accent1"/>
+          </a:lnRef>
+          <a:fillRef idx="3">
+            <a:schemeClr val="accent1"/>
+          </a:fillRef>
+          <a:effectRef idx="2">
+            <a:schemeClr val="accent1"/>
+          </a:effectRef>
+          <a:fontRef idx="minor">
+            <a:schemeClr val="lt1"/>
+          </a:fontRef>
+        </p:style>
+        <p:txBody>
+          <a:bodyPr rtlCol="0" anchor="ctr"/>
+          <a:lstStyle/>
+          <a:p>
+            <a:pPr algn="ctr"/>
+          </a:p>
+        </p:txBody>
+      </p:sp>
+      <p:sp>
+        <p:nvSpPr>
+          <p:cNvPr id="23" name="TextBox 22"/>
+          <p:cNvSpPr txBox="1"/>
+          <p:nvPr/>
+        </p:nvSpPr>
+        <p:spPr>
+          <a:xfrm>
+            <a:off x="8268000" y="3760000"/>
+            <a:ext cx="3064000" cy="950000"/>
+          </a:xfrm>
+          <a:prstGeom prst="rect">
+            <a:avLst/>
+          </a:prstGeom>
+          <a:noFill/>
+        </p:spPr>
+        <p:txBody>
+          <a:bodyPr wrap="square" anchor="t">
+            <a:spAutoFit/>
+          </a:bodyPr>
+          <a:lstStyle/>
+          <a:p>
+            <a:pPr algn="l">
+              <a:spcAft>
+                <a:spcPts val="600"/>
+              </a:spcAft>
+            </a:pPr>
+            <a:r>
+              <a:rPr sz="1600" b="1">
+                <a:solidFill>
+                  <a:srgbClr val="0F1E3D"/>
+                </a:solidFill>
+                <a:latin typeface="Calibri"/>
+              </a:rPr>
+              <a:t>AI-агент</a:t>
+            </a:r>
+          </a:p>
+          <a:p>
+            <a:r>
+              <a:rPr sz="1300">
+                <a:solidFill>
+                  <a:srgbClr val="5B6672"/>
+                </a:solidFill>
+                <a:latin typeface="Calibri"/>
+              </a:rPr>
+              <a:t>LangGraph: evaluate →
+plan → act до цели</a:t>
+            </a:r>
+          </a:p>
+        </p:txBody>
+      </p:sp>
+      <p:sp>
+        <p:nvSpPr>
+          <p:cNvPr id="24" name="TextBox 23"/>
+          <p:cNvSpPr txBox="1"/>
+          <p:nvPr/>
+        </p:nvSpPr>
+        <p:spPr>
+          <a:xfrm>
+            <a:off x="11292000" y="6358000"/>
+            <a:ext cx="700000" cy="350000"/>
+          </a:xfrm>
+          <a:prstGeom prst="rect">
+            <a:avLst/>
+          </a:prstGeom>
+          <a:noFill/>
+        </p:spPr>
+        <p:txBody>
+          <a:bodyPr wrap="square" anchor="t">
+            <a:spAutoFit/>
+          </a:bodyPr>
+          <a:lstStyle/>
+          <a:p>
+            <a:pPr algn="r">
+              <a:spcAft>
+                <a:spcPts val="600"/>
+              </a:spcAft>
+            </a:pPr>
+            <a:r>
+              <a:rPr sz="1100" b="0">
+                <a:solidFill>
+                  <a:srgbClr val="5B6672"/>
+                </a:solidFill>
+                <a:latin typeface="Calibri"/>
+              </a:rPr>
+              <a:t>10/11</a:t>
+            </a:r>
+          </a:p>
+        </p:txBody>
+      </p:sp>
+    </p:spTree>
+  </p:cSld>
+  <p:clrMapOvr>
+    <a:masterClrMapping/>
+  </p:clrMapOvr>
+</p:sld>
+</file>
+
+<file path=ppt/slides/slide11.xml><?xml version="1.0" encoding="utf-8"?>
+<p:sld xmlns:a="http://schemas.openxmlformats.org/drawingml/2006/main" xmlns:p="http://schemas.openxmlformats.org/presentationml/2006/main" xmlns:r="http://schemas.openxmlformats.org/officeDocument/2006/relationships">
+  <p:cSld>
+    <p:spTree>
+      <p:nvGrpSpPr>
+        <p:cNvPr id="1" name=""/>
+        <p:cNvGrpSpPr/>
+        <p:nvPr/>
+      </p:nvGrpSpPr>
+      <p:grpSpPr/>
+      <p:sp>
+        <p:nvSpPr>
+          <p:cNvPr id="2" name="Rectangle 1"/>
+          <p:cNvSpPr/>
+          <p:nvPr/>
+        </p:nvSpPr>
+        <p:spPr>
+          <a:xfrm>
+            <a:off x="0" y="0"/>
+            <a:ext cx="12192000" cy="6858000"/>
+          </a:xfrm>
+          <a:prstGeom prst="rect">
+            <a:avLst/>
+          </a:prstGeom>
+          <a:solidFill>
             <a:srgbClr val="0F1E3D"/>
           </a:solidFill>
           <a:ln>
@@ -5147,7 +6338,7 @@
                 </a:solidFill>
                 <a:latin typeface="Calibri"/>
               </a:rPr>
-              <a:t>2/10</a:t>
+              <a:t>2/11</a:t>
             </a:r>
           </a:p>
         </p:txBody>
@@ -6283,7 +7474,7 @@
                 </a:solidFill>
                 <a:latin typeface="Calibri"/>
               </a:rPr>
-              <a:t>3/10</a:t>
+              <a:t>3/11</a:t>
             </a:r>
           </a:p>
         </p:txBody>
@@ -6939,7 +8130,7 @@
                 </a:solidFill>
                 <a:latin typeface="Calibri"/>
               </a:rPr>
-              <a:t>4/10</a:t>
+              <a:t>4/11</a:t>
             </a:r>
           </a:p>
         </p:txBody>
@@ -7128,7 +8319,7 @@
                 </a:solidFill>
                 <a:latin typeface="Calibri"/>
               </a:rPr>
-              <a:t>КАК РАБОТАЕТ</a:t>
+              <a:t>РОЛЬ VLM</a:t>
             </a:r>
           </a:p>
           <a:p>
@@ -7139,7 +8330,7 @@
                 </a:solidFill>
                 <a:latin typeface="Calibri"/>
               </a:rPr>
-              <a:t>Замороженный CLIP + линейный пробинг</a:t>
+              <a:t>Разметка данных и объяснимость</a:t>
             </a:r>
           </a:p>
         </p:txBody>
@@ -7152,17 +8343,19 @@
         </p:nvSpPr>
         <p:spPr>
           <a:xfrm>
-            <a:off x="700000" y="2550000"/>
-            <a:ext cx="1673666" cy="1300000"/>
+            <a:off x="700000" y="1850000"/>
+            <a:ext cx="5246000" cy="3600000"/>
           </a:xfrm>
           <a:prstGeom prst="rect">
             <a:avLst/>
           </a:prstGeom>
           <a:solidFill>
-            <a:srgbClr val="0F1E3D"/>
+            <a:srgbClr val="F3F5F7"/>
           </a:solidFill>
-          <a:ln>
-            <a:noFill/>
+          <a:ln w="12700">
+            <a:solidFill>
+              <a:srgbClr val="DDE3EA"/>
+            </a:solidFill>
           </a:ln>
           <a:effectLst/>
         </p:spPr>
@@ -7190,339 +8383,14 @@
       </p:sp>
       <p:sp>
         <p:nvSpPr>
-          <p:cNvPr id="7" name="TextBox 6"/>
-          <p:cNvSpPr txBox="1"/>
-          <p:nvPr/>
-        </p:nvSpPr>
-        <p:spPr>
-          <a:xfrm>
-            <a:off x="780000" y="2550000"/>
-            <a:ext cx="1513666" cy="1300000"/>
-          </a:xfrm>
-          <a:prstGeom prst="rect">
-            <a:avLst/>
-          </a:prstGeom>
-          <a:noFill/>
-        </p:spPr>
-        <p:txBody>
-          <a:bodyPr wrap="square" anchor="ctr">
-            <a:spAutoFit/>
-          </a:bodyPr>
-          <a:lstStyle/>
-          <a:p>
-            <a:pPr algn="ctr">
-              <a:spcAft>
-                <a:spcPts val="600"/>
-              </a:spcAft>
-            </a:pPr>
-            <a:r>
-              <a:rPr sz="1300" b="1">
-                <a:solidFill>
-                  <a:srgbClr val="FFFFFF"/>
-                </a:solidFill>
-                <a:latin typeface="Calibri"/>
-              </a:rPr>
-              <a:t>Контур участка
-(GeoPackage)</a:t>
-            </a:r>
-          </a:p>
-        </p:txBody>
-      </p:sp>
-      <p:sp>
-        <p:nvSpPr>
-          <p:cNvPr id="8" name="TextBox 7"/>
-          <p:cNvSpPr txBox="1"/>
-          <p:nvPr/>
-        </p:nvSpPr>
-        <p:spPr>
-          <a:xfrm>
-            <a:off x="2333666" y="3030000"/>
-            <a:ext cx="220000" cy="350000"/>
-          </a:xfrm>
-          <a:prstGeom prst="rect">
-            <a:avLst/>
-          </a:prstGeom>
-          <a:noFill/>
-        </p:spPr>
-        <p:txBody>
-          <a:bodyPr wrap="square" anchor="ctr">
-            <a:spAutoFit/>
-          </a:bodyPr>
-          <a:lstStyle/>
-          <a:p>
-            <a:pPr algn="ctr">
-              <a:spcAft>
-                <a:spcPts val="600"/>
-              </a:spcAft>
-            </a:pPr>
-            <a:r>
-              <a:rPr sz="2600" b="1">
-                <a:solidFill>
-                  <a:srgbClr val="E87A22"/>
-                </a:solidFill>
-                <a:latin typeface="Calibri"/>
-              </a:rPr>
-              <a:t>›</a:t>
-            </a:r>
-          </a:p>
-        </p:txBody>
-      </p:sp>
-      <p:sp>
-        <p:nvSpPr>
-          <p:cNvPr id="9" name="Rectangle 8"/>
+          <p:cNvPr id="7" name="Rectangle 6"/>
           <p:cNvSpPr/>
           <p:nvPr/>
         </p:nvSpPr>
         <p:spPr>
           <a:xfrm>
-            <a:off x="2523666" y="2550000"/>
-            <a:ext cx="1673666" cy="1300000"/>
-          </a:xfrm>
-          <a:prstGeom prst="rect">
-            <a:avLst/>
-          </a:prstGeom>
-          <a:solidFill>
-            <a:srgbClr val="0F1E3D"/>
-          </a:solidFill>
-          <a:ln>
-            <a:noFill/>
-          </a:ln>
-          <a:effectLst/>
-        </p:spPr>
-        <p:style>
-          <a:lnRef idx="1">
-            <a:schemeClr val="accent1"/>
-          </a:lnRef>
-          <a:fillRef idx="3">
-            <a:schemeClr val="accent1"/>
-          </a:fillRef>
-          <a:effectRef idx="2">
-            <a:schemeClr val="accent1"/>
-          </a:effectRef>
-          <a:fontRef idx="minor">
-            <a:schemeClr val="lt1"/>
-          </a:fontRef>
-        </p:style>
-        <p:txBody>
-          <a:bodyPr rtlCol="0" anchor="ctr"/>
-          <a:lstStyle/>
-          <a:p>
-            <a:pPr algn="ctr"/>
-          </a:p>
-        </p:txBody>
-      </p:sp>
-      <p:sp>
-        <p:nvSpPr>
-          <p:cNvPr id="10" name="TextBox 9"/>
-          <p:cNvSpPr txBox="1"/>
-          <p:nvPr/>
-        </p:nvSpPr>
-        <p:spPr>
-          <a:xfrm>
-            <a:off x="2603666" y="2550000"/>
-            <a:ext cx="1513666" cy="1300000"/>
-          </a:xfrm>
-          <a:prstGeom prst="rect">
-            <a:avLst/>
-          </a:prstGeom>
-          <a:noFill/>
-        </p:spPr>
-        <p:txBody>
-          <a:bodyPr wrap="square" anchor="ctr">
-            <a:spAutoFit/>
-          </a:bodyPr>
-          <a:lstStyle/>
-          <a:p>
-            <a:pPr algn="ctr">
-              <a:spcAft>
-                <a:spcPts val="600"/>
-              </a:spcAft>
-            </a:pPr>
-            <a:r>
-              <a:rPr sz="1300" b="1">
-                <a:solidFill>
-                  <a:srgbClr val="FFFFFF"/>
-                </a:solidFill>
-                <a:latin typeface="Calibri"/>
-              </a:rPr>
-              <a:t>Точки панорам
-URL / грани полигона</a:t>
-            </a:r>
-          </a:p>
-        </p:txBody>
-      </p:sp>
-      <p:sp>
-        <p:nvSpPr>
-          <p:cNvPr id="11" name="TextBox 10"/>
-          <p:cNvSpPr txBox="1"/>
-          <p:nvPr/>
-        </p:nvSpPr>
-        <p:spPr>
-          <a:xfrm>
-            <a:off x="4157332" y="3030000"/>
-            <a:ext cx="220000" cy="350000"/>
-          </a:xfrm>
-          <a:prstGeom prst="rect">
-            <a:avLst/>
-          </a:prstGeom>
-          <a:noFill/>
-        </p:spPr>
-        <p:txBody>
-          <a:bodyPr wrap="square" anchor="ctr">
-            <a:spAutoFit/>
-          </a:bodyPr>
-          <a:lstStyle/>
-          <a:p>
-            <a:pPr algn="ctr">
-              <a:spcAft>
-                <a:spcPts val="600"/>
-              </a:spcAft>
-            </a:pPr>
-            <a:r>
-              <a:rPr sz="2600" b="1">
-                <a:solidFill>
-                  <a:srgbClr val="E87A22"/>
-                </a:solidFill>
-                <a:latin typeface="Calibri"/>
-              </a:rPr>
-              <a:t>›</a:t>
-            </a:r>
-          </a:p>
-        </p:txBody>
-      </p:sp>
-      <p:sp>
-        <p:nvSpPr>
-          <p:cNvPr id="12" name="Rectangle 11"/>
-          <p:cNvSpPr/>
-          <p:nvPr/>
-        </p:nvSpPr>
-        <p:spPr>
-          <a:xfrm>
-            <a:off x="4347332" y="2550000"/>
-            <a:ext cx="1673666" cy="1300000"/>
-          </a:xfrm>
-          <a:prstGeom prst="rect">
-            <a:avLst/>
-          </a:prstGeom>
-          <a:solidFill>
-            <a:srgbClr val="0F1E3D"/>
-          </a:solidFill>
-          <a:ln>
-            <a:noFill/>
-          </a:ln>
-          <a:effectLst/>
-        </p:spPr>
-        <p:style>
-          <a:lnRef idx="1">
-            <a:schemeClr val="accent1"/>
-          </a:lnRef>
-          <a:fillRef idx="3">
-            <a:schemeClr val="accent1"/>
-          </a:fillRef>
-          <a:effectRef idx="2">
-            <a:schemeClr val="accent1"/>
-          </a:effectRef>
-          <a:fontRef idx="minor">
-            <a:schemeClr val="lt1"/>
-          </a:fontRef>
-        </p:style>
-        <p:txBody>
-          <a:bodyPr rtlCol="0" anchor="ctr"/>
-          <a:lstStyle/>
-          <a:p>
-            <a:pPr algn="ctr"/>
-          </a:p>
-        </p:txBody>
-      </p:sp>
-      <p:sp>
-        <p:nvSpPr>
-          <p:cNvPr id="13" name="TextBox 12"/>
-          <p:cNvSpPr txBox="1"/>
-          <p:nvPr/>
-        </p:nvSpPr>
-        <p:spPr>
-          <a:xfrm>
-            <a:off x="4427332" y="2550000"/>
-            <a:ext cx="1513666" cy="1300000"/>
-          </a:xfrm>
-          <a:prstGeom prst="rect">
-            <a:avLst/>
-          </a:prstGeom>
-          <a:noFill/>
-        </p:spPr>
-        <p:txBody>
-          <a:bodyPr wrap="square" anchor="ctr">
-            <a:spAutoFit/>
-          </a:bodyPr>
-          <a:lstStyle/>
-          <a:p>
-            <a:pPr algn="ctr">
-              <a:spcAft>
-                <a:spcPts val="600"/>
-              </a:spcAft>
-            </a:pPr>
-            <a:r>
-              <a:rPr sz="1300" b="1">
-                <a:solidFill>
-                  <a:srgbClr val="FFFFFF"/>
-                </a:solidFill>
-                <a:latin typeface="Calibri"/>
-              </a:rPr>
-              <a:t>Кроп 896×672
-4 азимута</a:t>
-            </a:r>
-          </a:p>
-        </p:txBody>
-      </p:sp>
-      <p:sp>
-        <p:nvSpPr>
-          <p:cNvPr id="14" name="TextBox 13"/>
-          <p:cNvSpPr txBox="1"/>
-          <p:nvPr/>
-        </p:nvSpPr>
-        <p:spPr>
-          <a:xfrm>
-            <a:off x="5980998" y="3030000"/>
-            <a:ext cx="220000" cy="350000"/>
-          </a:xfrm>
-          <a:prstGeom prst="rect">
-            <a:avLst/>
-          </a:prstGeom>
-          <a:noFill/>
-        </p:spPr>
-        <p:txBody>
-          <a:bodyPr wrap="square" anchor="ctr">
-            <a:spAutoFit/>
-          </a:bodyPr>
-          <a:lstStyle/>
-          <a:p>
-            <a:pPr algn="ctr">
-              <a:spcAft>
-                <a:spcPts val="600"/>
-              </a:spcAft>
-            </a:pPr>
-            <a:r>
-              <a:rPr sz="2600" b="1">
-                <a:solidFill>
-                  <a:srgbClr val="E87A22"/>
-                </a:solidFill>
-                <a:latin typeface="Calibri"/>
-              </a:rPr>
-              <a:t>›</a:t>
-            </a:r>
-          </a:p>
-        </p:txBody>
-      </p:sp>
-      <p:sp>
-        <p:nvSpPr>
-          <p:cNvPr id="15" name="Rectangle 14"/>
-          <p:cNvSpPr/>
-          <p:nvPr/>
-        </p:nvSpPr>
-        <p:spPr>
-          <a:xfrm>
-            <a:off x="6170998" y="2550000"/>
-            <a:ext cx="1673666" cy="1300000"/>
+            <a:off x="700000" y="1850000"/>
+            <a:ext cx="5246000" cy="150000"/>
           </a:xfrm>
           <a:prstGeom prst="rect">
             <a:avLst/>
@@ -7559,14 +8427,14 @@
       </p:sp>
       <p:sp>
         <p:nvSpPr>
-          <p:cNvPr id="16" name="TextBox 15"/>
+          <p:cNvPr id="8" name="TextBox 7"/>
           <p:cNvSpPr txBox="1"/>
           <p:nvPr/>
         </p:nvSpPr>
         <p:spPr>
           <a:xfrm>
-            <a:off x="6250998" y="2550000"/>
-            <a:ext cx="1513666" cy="1300000"/>
+            <a:off x="960000" y="2150000"/>
+            <a:ext cx="4746000" cy="3150000"/>
           </a:xfrm>
           <a:prstGeom prst="rect">
             <a:avLst/>
@@ -7574,84 +8442,174 @@
           <a:noFill/>
         </p:spPr>
         <p:txBody>
-          <a:bodyPr wrap="square" anchor="ctr">
+          <a:bodyPr wrap="square" anchor="t">
             <a:spAutoFit/>
           </a:bodyPr>
           <a:lstStyle/>
           <a:p>
-            <a:pPr algn="ctr">
+            <a:pPr algn="l">
               <a:spcAft>
-                <a:spcPts val="600"/>
+                <a:spcPts val="1100"/>
               </a:spcAft>
             </a:pPr>
             <a:r>
-              <a:rPr sz="1300" b="1">
-                <a:solidFill>
-                  <a:srgbClr val="FFFFFF"/>
-                </a:solidFill>
-                <a:latin typeface="Calibri"/>
-              </a:rPr>
-              <a:t>CLIP ViT-L-14
-(заморожен)</a:t>
-            </a:r>
-          </a:p>
-        </p:txBody>
-      </p:sp>
-      <p:sp>
-        <p:nvSpPr>
-          <p:cNvPr id="17" name="TextBox 16"/>
-          <p:cNvSpPr txBox="1"/>
-          <p:nvPr/>
-        </p:nvSpPr>
-        <p:spPr>
-          <a:xfrm>
-            <a:off x="7804664" y="3030000"/>
-            <a:ext cx="220000" cy="350000"/>
-          </a:xfrm>
-          <a:prstGeom prst="rect">
-            <a:avLst/>
-          </a:prstGeom>
-          <a:noFill/>
-        </p:spPr>
-        <p:txBody>
-          <a:bodyPr wrap="square" anchor="ctr">
-            <a:spAutoFit/>
-          </a:bodyPr>
-          <a:lstStyle/>
-          <a:p>
-            <a:pPr algn="ctr">
+              <a:rPr sz="1800" b="1">
+                <a:solidFill>
+                  <a:srgbClr val="0F1E3D"/>
+                </a:solidFill>
+                <a:latin typeface="Calibri"/>
+              </a:rPr>
+              <a:t>1 · VLM-судья для разметки</a:t>
+            </a:r>
+            <a:r>
+              <a:rPr sz="1500" b="0">
+                <a:solidFill>
+                  <a:srgbClr val="1B2538"/>
+                </a:solidFill>
+                <a:latin typeface="Calibri"/>
+              </a:rPr>
+              <a:t>OSM-метки ненадёжны (согласие с кадром </a:t>
+            </a:r>
+            <a:r>
+              <a:rPr sz="1500" b="1">
+                <a:solidFill>
+                  <a:srgbClr val="E87A22"/>
+                </a:solidFill>
+                <a:latin typeface="Calibri"/>
+              </a:rPr>
+              <a:t>~20%</a:t>
+            </a:r>
+            <a:r>
+              <a:rPr sz="1500" b="0">
+                <a:solidFill>
+                  <a:srgbClr val="1B2538"/>
+                </a:solidFill>
+                <a:latin typeface="Calibri"/>
+              </a:rPr>
+              <a:t>)</a:t>
+            </a:r>
+          </a:p>
+          <a:p>
+            <a:pPr>
               <a:spcAft>
-                <a:spcPts val="600"/>
+                <a:spcPts val="1100"/>
               </a:spcAft>
             </a:pPr>
             <a:r>
-              <a:rPr sz="2600" b="1">
-                <a:solidFill>
-                  <a:srgbClr val="E87A22"/>
-                </a:solidFill>
-                <a:latin typeface="Calibri"/>
-              </a:rPr>
-              <a:t>›</a:t>
-            </a:r>
-          </a:p>
-        </p:txBody>
-      </p:sp>
-      <p:sp>
-        <p:nvSpPr>
-          <p:cNvPr id="18" name="Rectangle 17"/>
+              <a:rPr sz="1500" b="0">
+                <a:solidFill>
+                  <a:srgbClr val="1B2538"/>
+                </a:solidFill>
+                <a:latin typeface="Calibri"/>
+              </a:rPr>
+              <a:t>Qwen-VL переразмечает кроп по содержимому — weak supervision</a:t>
+            </a:r>
+          </a:p>
+          <a:p>
+            <a:pPr>
+              <a:spcAft>
+                <a:spcPts val="1100"/>
+              </a:spcAft>
+            </a:pPr>
+            <a:r>
+              <a:rPr sz="1500" b="0">
+                <a:solidFill>
+                  <a:srgbClr val="1B2538"/>
+                </a:solidFill>
+                <a:latin typeface="Calibri"/>
+              </a:rPr>
+              <a:t>Спорные случаи — ручная вычитка</a:t>
+            </a:r>
+          </a:p>
+          <a:p>
+            <a:pPr>
+              <a:spcAft>
+                <a:spcPts val="1100"/>
+              </a:spcAft>
+            </a:pPr>
+            <a:r>
+              <a:rPr sz="1500" b="0">
+                <a:solidFill>
+                  <a:srgbClr val="1B2538"/>
+                </a:solidFill>
+                <a:latin typeface="Calibri"/>
+              </a:rPr>
+              <a:t>Итог: accuracy </a:t>
+            </a:r>
+            <a:r>
+              <a:rPr sz="1500" b="1">
+                <a:solidFill>
+                  <a:srgbClr val="14A08F"/>
+                </a:solidFill>
+                <a:latin typeface="Calibri"/>
+              </a:rPr>
+              <a:t>0.27 → 0.76</a:t>
+            </a:r>
+          </a:p>
+        </p:txBody>
+      </p:sp>
+      <p:sp>
+        <p:nvSpPr>
+          <p:cNvPr id="9" name="Rectangle 8"/>
           <p:cNvSpPr/>
           <p:nvPr/>
         </p:nvSpPr>
         <p:spPr>
           <a:xfrm>
-            <a:off x="7994664" y="2550000"/>
-            <a:ext cx="1673666" cy="1300000"/>
+            <a:off x="6246000" y="1850000"/>
+            <a:ext cx="5246000" cy="3600000"/>
           </a:xfrm>
           <a:prstGeom prst="rect">
             <a:avLst/>
           </a:prstGeom>
           <a:solidFill>
-            <a:srgbClr val="14A08F"/>
+            <a:srgbClr val="F3F5F7"/>
+          </a:solidFill>
+          <a:ln w="12700">
+            <a:solidFill>
+              <a:srgbClr val="DDE3EA"/>
+            </a:solidFill>
+          </a:ln>
+          <a:effectLst/>
+        </p:spPr>
+        <p:style>
+          <a:lnRef idx="1">
+            <a:schemeClr val="accent1"/>
+          </a:lnRef>
+          <a:fillRef idx="3">
+            <a:schemeClr val="accent1"/>
+          </a:fillRef>
+          <a:effectRef idx="2">
+            <a:schemeClr val="accent1"/>
+          </a:effectRef>
+          <a:fontRef idx="minor">
+            <a:schemeClr val="lt1"/>
+          </a:fontRef>
+        </p:style>
+        <p:txBody>
+          <a:bodyPr rtlCol="0" anchor="ctr"/>
+          <a:lstStyle/>
+          <a:p>
+            <a:pPr algn="ctr"/>
+          </a:p>
+        </p:txBody>
+      </p:sp>
+      <p:sp>
+        <p:nvSpPr>
+          <p:cNvPr id="10" name="Rectangle 9"/>
+          <p:cNvSpPr/>
+          <p:nvPr/>
+        </p:nvSpPr>
+        <p:spPr>
+          <a:xfrm>
+            <a:off x="6246000" y="1850000"/>
+            <a:ext cx="5246000" cy="150000"/>
+          </a:xfrm>
+          <a:prstGeom prst="rect">
+            <a:avLst/>
+          </a:prstGeom>
+          <a:solidFill>
+            <a:srgbClr val="E87A22"/>
           </a:solidFill>
           <a:ln>
             <a:noFill/>
@@ -7682,14 +8640,14 @@
       </p:sp>
       <p:sp>
         <p:nvSpPr>
-          <p:cNvPr id="19" name="TextBox 18"/>
+          <p:cNvPr id="11" name="TextBox 10"/>
           <p:cNvSpPr txBox="1"/>
           <p:nvPr/>
         </p:nvSpPr>
         <p:spPr>
           <a:xfrm>
-            <a:off x="8074664" y="2550000"/>
-            <a:ext cx="1513666" cy="1300000"/>
+            <a:off x="6506000" y="2150000"/>
+            <a:ext cx="4746000" cy="3150000"/>
           </a:xfrm>
           <a:prstGeom prst="rect">
             <a:avLst/>
@@ -7697,162 +8655,131 @@
           <a:noFill/>
         </p:spPr>
         <p:txBody>
-          <a:bodyPr wrap="square" anchor="ctr">
+          <a:bodyPr wrap="square" anchor="t">
             <a:spAutoFit/>
           </a:bodyPr>
           <a:lstStyle/>
           <a:p>
-            <a:pPr algn="ctr">
+            <a:pPr algn="l">
               <a:spcAft>
-                <a:spcPts val="600"/>
+                <a:spcPts val="1100"/>
               </a:spcAft>
             </a:pPr>
             <a:r>
-              <a:rPr sz="1300" b="1">
-                <a:solidFill>
-                  <a:srgbClr val="FFFFFF"/>
-                </a:solidFill>
-                <a:latin typeface="Calibri"/>
-              </a:rPr>
-              <a:t>Linear probe
-6 классов</a:t>
-            </a:r>
-          </a:p>
-        </p:txBody>
-      </p:sp>
-      <p:sp>
-        <p:nvSpPr>
-          <p:cNvPr id="20" name="TextBox 19"/>
-          <p:cNvSpPr txBox="1"/>
-          <p:nvPr/>
-        </p:nvSpPr>
-        <p:spPr>
-          <a:xfrm>
-            <a:off x="9628330" y="3030000"/>
-            <a:ext cx="220000" cy="350000"/>
-          </a:xfrm>
-          <a:prstGeom prst="rect">
-            <a:avLst/>
-          </a:prstGeom>
-          <a:noFill/>
-        </p:spPr>
-        <p:txBody>
-          <a:bodyPr wrap="square" anchor="ctr">
-            <a:spAutoFit/>
-          </a:bodyPr>
-          <a:lstStyle/>
-          <a:p>
-            <a:pPr algn="ctr">
+              <a:rPr sz="1800" b="1">
+                <a:solidFill>
+                  <a:srgbClr val="0F1E3D"/>
+                </a:solidFill>
+                <a:latin typeface="Calibri"/>
+              </a:rPr>
+              <a:t>2 · Генеративный VLM (объяснимость)</a:t>
+            </a:r>
+            <a:r>
+              <a:rPr sz="1500" b="0">
+                <a:solidFill>
+                  <a:srgbClr val="1B2538"/>
+                </a:solidFill>
+                <a:latin typeface="Calibri"/>
+              </a:rPr>
+              <a:t>PaliGemma 3B + LoRA: класс </a:t>
+            </a:r>
+            <a:r>
+              <a:rPr sz="1500" b="1">
+                <a:solidFill>
+                  <a:srgbClr val="E87A22"/>
+                </a:solidFill>
+                <a:latin typeface="Calibri"/>
+              </a:rPr>
+              <a:t>+ bbox-доказательство</a:t>
+            </a:r>
+            <a:r>
+              <a:rPr sz="1500" b="0">
+                <a:solidFill>
+                  <a:srgbClr val="1B2538"/>
+                </a:solidFill>
+                <a:latin typeface="Calibri"/>
+              </a:rPr>
+              <a:t> на кадре</a:t>
+            </a:r>
+          </a:p>
+          <a:p>
+            <a:pPr>
               <a:spcAft>
-                <a:spcPts val="600"/>
+                <a:spcPts val="1100"/>
               </a:spcAft>
             </a:pPr>
             <a:r>
-              <a:rPr sz="2600" b="1">
-                <a:solidFill>
-                  <a:srgbClr val="E87A22"/>
-                </a:solidFill>
-                <a:latin typeface="Calibri"/>
-              </a:rPr>
-              <a:t>›</a:t>
-            </a:r>
-          </a:p>
-        </p:txBody>
-      </p:sp>
-      <p:sp>
-        <p:nvSpPr>
-          <p:cNvPr id="21" name="Rectangle 20"/>
-          <p:cNvSpPr/>
-          <p:nvPr/>
-        </p:nvSpPr>
-        <p:spPr>
-          <a:xfrm>
-            <a:off x="9818330" y="2550000"/>
-            <a:ext cx="1673666" cy="1300000"/>
-          </a:xfrm>
-          <a:prstGeom prst="rect">
-            <a:avLst/>
-          </a:prstGeom>
-          <a:solidFill>
-            <a:srgbClr val="0F1E3D"/>
-          </a:solidFill>
-          <a:ln>
-            <a:noFill/>
-          </a:ln>
-          <a:effectLst/>
-        </p:spPr>
-        <p:style>
-          <a:lnRef idx="1">
-            <a:schemeClr val="accent1"/>
-          </a:lnRef>
-          <a:fillRef idx="3">
-            <a:schemeClr val="accent1"/>
-          </a:fillRef>
-          <a:effectRef idx="2">
-            <a:schemeClr val="accent1"/>
-          </a:effectRef>
-          <a:fontRef idx="minor">
-            <a:schemeClr val="lt1"/>
-          </a:fontRef>
-        </p:style>
-        <p:txBody>
-          <a:bodyPr rtlCol="0" anchor="ctr"/>
-          <a:lstStyle/>
-          <a:p>
-            <a:pPr algn="ctr"/>
-          </a:p>
-        </p:txBody>
-      </p:sp>
-      <p:sp>
-        <p:nvSpPr>
-          <p:cNvPr id="22" name="TextBox 21"/>
-          <p:cNvSpPr txBox="1"/>
-          <p:nvPr/>
-        </p:nvSpPr>
-        <p:spPr>
-          <a:xfrm>
-            <a:off x="9898330" y="2550000"/>
-            <a:ext cx="1513666" cy="1300000"/>
-          </a:xfrm>
-          <a:prstGeom prst="rect">
-            <a:avLst/>
-          </a:prstGeom>
-          <a:noFill/>
-        </p:spPr>
-        <p:txBody>
-          <a:bodyPr wrap="square" anchor="ctr">
-            <a:spAutoFit/>
-          </a:bodyPr>
-          <a:lstStyle/>
-          <a:p>
-            <a:pPr algn="ctr">
+              <a:rPr sz="1500" b="0">
+                <a:solidFill>
+                  <a:srgbClr val="1B2538"/>
+                </a:solidFill>
+                <a:latin typeface="Calibri"/>
+              </a:rPr>
+              <a:t>Evidence IoU </a:t>
+            </a:r>
+            <a:r>
+              <a:rPr sz="1500" b="1">
+                <a:solidFill>
+                  <a:srgbClr val="1B2538"/>
+                </a:solidFill>
+                <a:latin typeface="Calibri"/>
+              </a:rPr>
+              <a:t>0.26</a:t>
+            </a:r>
+            <a:r>
+              <a:rPr sz="1500" b="0">
+                <a:solidFill>
+                  <a:srgbClr val="1B2538"/>
+                </a:solidFill>
+                <a:latin typeface="Calibri"/>
+              </a:rPr>
+              <a:t> — показывает, «почему» такой класс</a:t>
+            </a:r>
+          </a:p>
+          <a:p>
+            <a:pPr>
               <a:spcAft>
-                <a:spcPts val="600"/>
+                <a:spcPts val="1100"/>
               </a:spcAft>
             </a:pPr>
             <a:r>
-              <a:rPr sz="1300" b="1">
-                <a:solidFill>
-                  <a:srgbClr val="FFFFFF"/>
-                </a:solidFill>
-                <a:latin typeface="Calibri"/>
-              </a:rPr>
-              <a:t>Голосование
-по ракурсам</a:t>
-            </a:r>
-          </a:p>
-        </p:txBody>
-      </p:sp>
-      <p:sp>
-        <p:nvSpPr>
-          <p:cNvPr id="23" name="TextBox 22"/>
+              <a:rPr sz="1500" b="0">
+                <a:solidFill>
+                  <a:srgbClr val="1B2538"/>
+                </a:solidFill>
+                <a:latin typeface="Calibri"/>
+              </a:rPr>
+              <a:t>Как классификатор слабее probe (acc 0.21) — честно</a:t>
+            </a:r>
+          </a:p>
+          <a:p>
+            <a:pPr>
+              <a:spcAft>
+                <a:spcPts val="1100"/>
+              </a:spcAft>
+            </a:pPr>
+            <a:r>
+              <a:rPr sz="1500" b="0">
+                <a:solidFill>
+                  <a:srgbClr val="1B2538"/>
+                </a:solidFill>
+                <a:latin typeface="Calibri"/>
+              </a:rPr>
+              <a:t>Ценность — интерпретируемость для аналитика</a:t>
+            </a:r>
+          </a:p>
+        </p:txBody>
+      </p:sp>
+      <p:sp>
+        <p:nvSpPr>
+          <p:cNvPr id="12" name="TextBox 11"/>
           <p:cNvSpPr txBox="1"/>
           <p:nvPr/>
         </p:nvSpPr>
         <p:spPr>
           <a:xfrm>
-            <a:off x="700000" y="4400000"/>
-            <a:ext cx="10792000" cy="900000"/>
+            <a:off x="700000" y="5550000"/>
+            <a:ext cx="10792000" cy="700000"/>
           </a:xfrm>
           <a:prstGeom prst="rect">
             <a:avLst/>
@@ -7877,14 +8804,14 @@
                 </a:solidFill>
                 <a:latin typeface="Calibri"/>
               </a:rPr>
-              <a:t>Пробинг поверх замороженного CLIP устойчив к переобучению на малых данных; у участка несколько ракурсов — класс выбирается взвешенным голосованием по уверенности.</a:t>
-            </a:r>
-          </a:p>
-        </p:txBody>
-      </p:sp>
-      <p:sp>
-        <p:nvSpPr>
-          <p:cNvPr id="24" name="TextBox 23"/>
+              <a:t>Вывод: VLM отвечает за качество меток и объяснимость, а продакшен-классификатор — лёгкий CLIP-probe.</a:t>
+            </a:r>
+          </a:p>
+        </p:txBody>
+      </p:sp>
+      <p:sp>
+        <p:nvSpPr>
+          <p:cNvPr id="13" name="TextBox 12"/>
           <p:cNvSpPr txBox="1"/>
           <p:nvPr/>
         </p:nvSpPr>
@@ -7916,7 +8843,7 @@
                 </a:solidFill>
                 <a:latin typeface="Calibri"/>
               </a:rPr>
-              <a:t>5/10</a:t>
+              <a:t>5/11</a:t>
             </a:r>
           </a:p>
         </p:txBody>
@@ -8105,7 +9032,7 @@
                 </a:solidFill>
                 <a:latin typeface="Calibri"/>
               </a:rPr>
-              <a:t>РЕЗУЛЬТАТЫ</a:t>
+              <a:t>КАК РАБОТАЕТ</a:t>
             </a:r>
           </a:p>
           <a:p>
@@ -8116,7 +9043,7 @@
                 </a:solidFill>
                 <a:latin typeface="Calibri"/>
               </a:rPr>
-              <a:t>Продакшен-модель на честной валидации</a:t>
+              <a:t>Замороженный CLIP + линейный пробинг</a:t>
             </a:r>
           </a:p>
         </p:txBody>
@@ -8129,377 +9056,8 @@
         </p:nvSpPr>
         <p:spPr>
           <a:xfrm>
-            <a:off x="700000" y="1850000"/>
-            <a:ext cx="3464000" cy="1350000"/>
-          </a:xfrm>
-          <a:prstGeom prst="rect">
-            <a:avLst/>
-          </a:prstGeom>
-          <a:solidFill>
-            <a:srgbClr val="F3F5F7"/>
-          </a:solidFill>
-          <a:ln w="12700">
-            <a:solidFill>
-              <a:srgbClr val="DDE3EA"/>
-            </a:solidFill>
-          </a:ln>
-          <a:effectLst/>
-        </p:spPr>
-        <p:style>
-          <a:lnRef idx="1">
-            <a:schemeClr val="accent1"/>
-          </a:lnRef>
-          <a:fillRef idx="3">
-            <a:schemeClr val="accent1"/>
-          </a:fillRef>
-          <a:effectRef idx="2">
-            <a:schemeClr val="accent1"/>
-          </a:effectRef>
-          <a:fontRef idx="minor">
-            <a:schemeClr val="lt1"/>
-          </a:fontRef>
-        </p:style>
-        <p:txBody>
-          <a:bodyPr rtlCol="0" anchor="ctr"/>
-          <a:lstStyle/>
-          <a:p>
-            <a:pPr algn="ctr"/>
-          </a:p>
-        </p:txBody>
-      </p:sp>
-      <p:sp>
-        <p:nvSpPr>
-          <p:cNvPr id="7" name="TextBox 6"/>
-          <p:cNvSpPr txBox="1"/>
-          <p:nvPr/>
-        </p:nvSpPr>
-        <p:spPr>
-          <a:xfrm>
-            <a:off x="700000" y="1850000"/>
-            <a:ext cx="3464000" cy="1350000"/>
-          </a:xfrm>
-          <a:prstGeom prst="rect">
-            <a:avLst/>
-          </a:prstGeom>
-          <a:noFill/>
-        </p:spPr>
-        <p:txBody>
-          <a:bodyPr wrap="square" anchor="ctr">
-            <a:spAutoFit/>
-          </a:bodyPr>
-          <a:lstStyle/>
-          <a:p>
-            <a:pPr algn="ctr">
-              <a:spcAft>
-                <a:spcPts val="200"/>
-              </a:spcAft>
-            </a:pPr>
-            <a:r>
-              <a:rPr sz="4000" b="1">
-                <a:solidFill>
-                  <a:srgbClr val="14A08F"/>
-                </a:solidFill>
-                <a:latin typeface="Calibri"/>
-              </a:rPr>
-              <a:t>76.2%</a:t>
-            </a:r>
-          </a:p>
-          <a:p>
-            <a:pPr algn="ctr"/>
-            <a:r>
-              <a:rPr sz="1500">
-                <a:solidFill>
-                  <a:srgbClr val="5B6672"/>
-                </a:solidFill>
-                <a:latin typeface="Calibri"/>
-              </a:rPr>
-              <a:t>Accuracy</a:t>
-            </a:r>
-          </a:p>
-        </p:txBody>
-      </p:sp>
-      <p:sp>
-        <p:nvSpPr>
-          <p:cNvPr id="8" name="Rectangle 7"/>
-          <p:cNvSpPr/>
-          <p:nvPr/>
-        </p:nvSpPr>
-        <p:spPr>
-          <a:xfrm>
-            <a:off x="4364000" y="1850000"/>
-            <a:ext cx="3464000" cy="1350000"/>
-          </a:xfrm>
-          <a:prstGeom prst="rect">
-            <a:avLst/>
-          </a:prstGeom>
-          <a:solidFill>
-            <a:srgbClr val="F3F5F7"/>
-          </a:solidFill>
-          <a:ln w="12700">
-            <a:solidFill>
-              <a:srgbClr val="DDE3EA"/>
-            </a:solidFill>
-          </a:ln>
-          <a:effectLst/>
-        </p:spPr>
-        <p:style>
-          <a:lnRef idx="1">
-            <a:schemeClr val="accent1"/>
-          </a:lnRef>
-          <a:fillRef idx="3">
-            <a:schemeClr val="accent1"/>
-          </a:fillRef>
-          <a:effectRef idx="2">
-            <a:schemeClr val="accent1"/>
-          </a:effectRef>
-          <a:fontRef idx="minor">
-            <a:schemeClr val="lt1"/>
-          </a:fontRef>
-        </p:style>
-        <p:txBody>
-          <a:bodyPr rtlCol="0" anchor="ctr"/>
-          <a:lstStyle/>
-          <a:p>
-            <a:pPr algn="ctr"/>
-          </a:p>
-        </p:txBody>
-      </p:sp>
-      <p:sp>
-        <p:nvSpPr>
-          <p:cNvPr id="9" name="TextBox 8"/>
-          <p:cNvSpPr txBox="1"/>
-          <p:nvPr/>
-        </p:nvSpPr>
-        <p:spPr>
-          <a:xfrm>
-            <a:off x="4364000" y="1850000"/>
-            <a:ext cx="3464000" cy="1350000"/>
-          </a:xfrm>
-          <a:prstGeom prst="rect">
-            <a:avLst/>
-          </a:prstGeom>
-          <a:noFill/>
-        </p:spPr>
-        <p:txBody>
-          <a:bodyPr wrap="square" anchor="ctr">
-            <a:spAutoFit/>
-          </a:bodyPr>
-          <a:lstStyle/>
-          <a:p>
-            <a:pPr algn="ctr">
-              <a:spcAft>
-                <a:spcPts val="200"/>
-              </a:spcAft>
-            </a:pPr>
-            <a:r>
-              <a:rPr sz="4000" b="1">
-                <a:solidFill>
-                  <a:srgbClr val="14A08F"/>
-                </a:solidFill>
-                <a:latin typeface="Calibri"/>
-              </a:rPr>
-              <a:t>61.0%</a:t>
-            </a:r>
-          </a:p>
-          <a:p>
-            <a:pPr algn="ctr"/>
-            <a:r>
-              <a:rPr sz="1500">
-                <a:solidFill>
-                  <a:srgbClr val="5B6672"/>
-                </a:solidFill>
-                <a:latin typeface="Calibri"/>
-              </a:rPr>
-              <a:t>macro-F1</a:t>
-            </a:r>
-          </a:p>
-        </p:txBody>
-      </p:sp>
-      <p:sp>
-        <p:nvSpPr>
-          <p:cNvPr id="10" name="Rectangle 9"/>
-          <p:cNvSpPr/>
-          <p:nvPr/>
-        </p:nvSpPr>
-        <p:spPr>
-          <a:xfrm>
-            <a:off x="8028000" y="1850000"/>
-            <a:ext cx="3464000" cy="1350000"/>
-          </a:xfrm>
-          <a:prstGeom prst="rect">
-            <a:avLst/>
-          </a:prstGeom>
-          <a:solidFill>
-            <a:srgbClr val="F3F5F7"/>
-          </a:solidFill>
-          <a:ln w="12700">
-            <a:solidFill>
-              <a:srgbClr val="DDE3EA"/>
-            </a:solidFill>
-          </a:ln>
-          <a:effectLst/>
-        </p:spPr>
-        <p:style>
-          <a:lnRef idx="1">
-            <a:schemeClr val="accent1"/>
-          </a:lnRef>
-          <a:fillRef idx="3">
-            <a:schemeClr val="accent1"/>
-          </a:fillRef>
-          <a:effectRef idx="2">
-            <a:schemeClr val="accent1"/>
-          </a:effectRef>
-          <a:fontRef idx="minor">
-            <a:schemeClr val="lt1"/>
-          </a:fontRef>
-        </p:style>
-        <p:txBody>
-          <a:bodyPr rtlCol="0" anchor="ctr"/>
-          <a:lstStyle/>
-          <a:p>
-            <a:pPr algn="ctr"/>
-          </a:p>
-        </p:txBody>
-      </p:sp>
-      <p:sp>
-        <p:nvSpPr>
-          <p:cNvPr id="11" name="TextBox 10"/>
-          <p:cNvSpPr txBox="1"/>
-          <p:nvPr/>
-        </p:nvSpPr>
-        <p:spPr>
-          <a:xfrm>
-            <a:off x="8028000" y="1850000"/>
-            <a:ext cx="3464000" cy="1350000"/>
-          </a:xfrm>
-          <a:prstGeom prst="rect">
-            <a:avLst/>
-          </a:prstGeom>
-          <a:noFill/>
-        </p:spPr>
-        <p:txBody>
-          <a:bodyPr wrap="square" anchor="ctr">
-            <a:spAutoFit/>
-          </a:bodyPr>
-          <a:lstStyle/>
-          <a:p>
-            <a:pPr algn="ctr">
-              <a:spcAft>
-                <a:spcPts val="200"/>
-              </a:spcAft>
-            </a:pPr>
-            <a:r>
-              <a:rPr sz="4000" b="1">
-                <a:solidFill>
-                  <a:srgbClr val="14A08F"/>
-                </a:solidFill>
-                <a:latin typeface="Calibri"/>
-              </a:rPr>
-              <a:t>73.8%</a:t>
-            </a:r>
-          </a:p>
-          <a:p>
-            <a:pPr algn="ctr"/>
-            <a:r>
-              <a:rPr sz="1500">
-                <a:solidFill>
-                  <a:srgbClr val="5B6672"/>
-                </a:solidFill>
-                <a:latin typeface="Calibri"/>
-              </a:rPr>
-              <a:t>balanced F1</a:t>
-            </a:r>
-          </a:p>
-        </p:txBody>
-      </p:sp>
-      <p:sp>
-        <p:nvSpPr>
-          <p:cNvPr id="12" name="TextBox 11"/>
-          <p:cNvSpPr txBox="1"/>
-          <p:nvPr/>
-        </p:nvSpPr>
-        <p:spPr>
-          <a:xfrm>
-            <a:off x="700000" y="3450000"/>
-            <a:ext cx="10792000" cy="500000"/>
-          </a:xfrm>
-          <a:prstGeom prst="rect">
-            <a:avLst/>
-          </a:prstGeom>
-          <a:noFill/>
-        </p:spPr>
-        <p:txBody>
-          <a:bodyPr wrap="square" anchor="t">
-            <a:spAutoFit/>
-          </a:bodyPr>
-          <a:lstStyle/>
-          <a:p>
-            <a:pPr algn="l">
-              <a:spcAft>
-                <a:spcPts val="600"/>
-              </a:spcAft>
-            </a:pPr>
-            <a:r>
-              <a:rPr sz="1400" b="0">
-                <a:solidFill>
-                  <a:srgbClr val="5B6672"/>
-                </a:solidFill>
-                <a:latin typeface="Calibri"/>
-              </a:rPr>
-              <a:t>CLIP ViT-L-14 probe · n_val = 239 · сплит по object_id · все 6 классов</a:t>
-            </a:r>
-          </a:p>
-        </p:txBody>
-      </p:sp>
-      <p:sp>
-        <p:nvSpPr>
-          <p:cNvPr id="13" name="TextBox 12"/>
-          <p:cNvSpPr txBox="1"/>
-          <p:nvPr/>
-        </p:nvSpPr>
-        <p:spPr>
-          <a:xfrm>
-            <a:off x="700000" y="4050000"/>
-            <a:ext cx="10792000" cy="400000"/>
-          </a:xfrm>
-          <a:prstGeom prst="rect">
-            <a:avLst/>
-          </a:prstGeom>
-          <a:noFill/>
-        </p:spPr>
-        <p:txBody>
-          <a:bodyPr wrap="square" anchor="t">
-            <a:spAutoFit/>
-          </a:bodyPr>
-          <a:lstStyle/>
-          <a:p>
-            <a:pPr algn="l">
-              <a:spcAft>
-                <a:spcPts val="600"/>
-              </a:spcAft>
-            </a:pPr>
-            <a:r>
-              <a:rPr sz="1600" b="1">
-                <a:solidFill>
-                  <a:srgbClr val="0F1E3D"/>
-                </a:solidFill>
-                <a:latin typeface="Calibri"/>
-              </a:rPr>
-              <a:t>Путь к результату (рычаг — метки, не архитектура):</a:t>
-            </a:r>
-          </a:p>
-        </p:txBody>
-      </p:sp>
-      <p:sp>
-        <p:nvSpPr>
-          <p:cNvPr id="14" name="Rectangle 13"/>
-          <p:cNvSpPr/>
-          <p:nvPr/>
-        </p:nvSpPr>
-        <p:spPr>
-          <a:xfrm>
-            <a:off x="700000" y="4600000"/>
-            <a:ext cx="2094400" cy="720000"/>
+            <a:off x="700000" y="2550000"/>
+            <a:ext cx="1673666" cy="1300000"/>
           </a:xfrm>
           <a:prstGeom prst="rect">
             <a:avLst/>
@@ -8536,14 +9094,14 @@
       </p:sp>
       <p:sp>
         <p:nvSpPr>
-          <p:cNvPr id="15" name="TextBox 14"/>
+          <p:cNvPr id="7" name="TextBox 6"/>
           <p:cNvSpPr txBox="1"/>
           <p:nvPr/>
         </p:nvSpPr>
         <p:spPr>
           <a:xfrm>
-            <a:off x="760000" y="4600000"/>
-            <a:ext cx="1974400" cy="720000"/>
+            <a:off x="780000" y="2550000"/>
+            <a:ext cx="1513666" cy="1300000"/>
           </a:xfrm>
           <a:prstGeom prst="rect">
             <a:avLst/>
@@ -8562,27 +9120,67 @@
               </a:spcAft>
             </a:pPr>
             <a:r>
-              <a:rPr sz="1300" b="0">
+              <a:rPr sz="1300" b="1">
                 <a:solidFill>
                   <a:srgbClr val="FFFFFF"/>
                 </a:solidFill>
                 <a:latin typeface="Calibri"/>
               </a:rPr>
-              <a:t>zero-shot 0.20</a:t>
-            </a:r>
-          </a:p>
-        </p:txBody>
-      </p:sp>
-      <p:sp>
-        <p:nvSpPr>
-          <p:cNvPr id="16" name="Rectangle 15"/>
+              <a:t>Контур участка
+(GeoPackage)</a:t>
+            </a:r>
+          </a:p>
+        </p:txBody>
+      </p:sp>
+      <p:sp>
+        <p:nvSpPr>
+          <p:cNvPr id="8" name="TextBox 7"/>
+          <p:cNvSpPr txBox="1"/>
+          <p:nvPr/>
+        </p:nvSpPr>
+        <p:spPr>
+          <a:xfrm>
+            <a:off x="2333666" y="3030000"/>
+            <a:ext cx="220000" cy="350000"/>
+          </a:xfrm>
+          <a:prstGeom prst="rect">
+            <a:avLst/>
+          </a:prstGeom>
+          <a:noFill/>
+        </p:spPr>
+        <p:txBody>
+          <a:bodyPr wrap="square" anchor="ctr">
+            <a:spAutoFit/>
+          </a:bodyPr>
+          <a:lstStyle/>
+          <a:p>
+            <a:pPr algn="ctr">
+              <a:spcAft>
+                <a:spcPts val="600"/>
+              </a:spcAft>
+            </a:pPr>
+            <a:r>
+              <a:rPr sz="2600" b="1">
+                <a:solidFill>
+                  <a:srgbClr val="E87A22"/>
+                </a:solidFill>
+                <a:latin typeface="Calibri"/>
+              </a:rPr>
+              <a:t>›</a:t>
+            </a:r>
+          </a:p>
+        </p:txBody>
+      </p:sp>
+      <p:sp>
+        <p:nvSpPr>
+          <p:cNvPr id="9" name="Rectangle 8"/>
           <p:cNvSpPr/>
           <p:nvPr/>
         </p:nvSpPr>
         <p:spPr>
           <a:xfrm>
-            <a:off x="2874400" y="4600000"/>
-            <a:ext cx="2094400" cy="720000"/>
+            <a:off x="2523666" y="2550000"/>
+            <a:ext cx="1673666" cy="1300000"/>
           </a:xfrm>
           <a:prstGeom prst="rect">
             <a:avLst/>
@@ -8619,14 +9217,14 @@
       </p:sp>
       <p:sp>
         <p:nvSpPr>
-          <p:cNvPr id="17" name="TextBox 16"/>
+          <p:cNvPr id="10" name="TextBox 9"/>
           <p:cNvSpPr txBox="1"/>
           <p:nvPr/>
         </p:nvSpPr>
         <p:spPr>
           <a:xfrm>
-            <a:off x="2934400" y="4600000"/>
-            <a:ext cx="1974400" cy="720000"/>
+            <a:off x="2603666" y="2550000"/>
+            <a:ext cx="1513666" cy="1300000"/>
           </a:xfrm>
           <a:prstGeom prst="rect">
             <a:avLst/>
@@ -8645,27 +9243,67 @@
               </a:spcAft>
             </a:pPr>
             <a:r>
-              <a:rPr sz="1300" b="0">
+              <a:rPr sz="1300" b="1">
                 <a:solidFill>
                   <a:srgbClr val="FFFFFF"/>
                 </a:solidFill>
                 <a:latin typeface="Calibri"/>
               </a:rPr>
-              <a:t>fine-tune 0.40</a:t>
-            </a:r>
-          </a:p>
-        </p:txBody>
-      </p:sp>
-      <p:sp>
-        <p:nvSpPr>
-          <p:cNvPr id="18" name="Rectangle 17"/>
+              <a:t>Точки панорам
+URL / грани полигона</a:t>
+            </a:r>
+          </a:p>
+        </p:txBody>
+      </p:sp>
+      <p:sp>
+        <p:nvSpPr>
+          <p:cNvPr id="11" name="TextBox 10"/>
+          <p:cNvSpPr txBox="1"/>
+          <p:nvPr/>
+        </p:nvSpPr>
+        <p:spPr>
+          <a:xfrm>
+            <a:off x="4157332" y="3030000"/>
+            <a:ext cx="220000" cy="350000"/>
+          </a:xfrm>
+          <a:prstGeom prst="rect">
+            <a:avLst/>
+          </a:prstGeom>
+          <a:noFill/>
+        </p:spPr>
+        <p:txBody>
+          <a:bodyPr wrap="square" anchor="ctr">
+            <a:spAutoFit/>
+          </a:bodyPr>
+          <a:lstStyle/>
+          <a:p>
+            <a:pPr algn="ctr">
+              <a:spcAft>
+                <a:spcPts val="600"/>
+              </a:spcAft>
+            </a:pPr>
+            <a:r>
+              <a:rPr sz="2600" b="1">
+                <a:solidFill>
+                  <a:srgbClr val="E87A22"/>
+                </a:solidFill>
+                <a:latin typeface="Calibri"/>
+              </a:rPr>
+              <a:t>›</a:t>
+            </a:r>
+          </a:p>
+        </p:txBody>
+      </p:sp>
+      <p:sp>
+        <p:nvSpPr>
+          <p:cNvPr id="12" name="Rectangle 11"/>
           <p:cNvSpPr/>
           <p:nvPr/>
         </p:nvSpPr>
         <p:spPr>
           <a:xfrm>
-            <a:off x="5048800" y="4600000"/>
-            <a:ext cx="2094400" cy="720000"/>
+            <a:off x="4347332" y="2550000"/>
+            <a:ext cx="1673666" cy="1300000"/>
           </a:xfrm>
           <a:prstGeom prst="rect">
             <a:avLst/>
@@ -8702,14 +9340,14 @@
       </p:sp>
       <p:sp>
         <p:nvSpPr>
-          <p:cNvPr id="19" name="TextBox 18"/>
+          <p:cNvPr id="13" name="TextBox 12"/>
           <p:cNvSpPr txBox="1"/>
           <p:nvPr/>
         </p:nvSpPr>
         <p:spPr>
           <a:xfrm>
-            <a:off x="5108800" y="4600000"/>
-            <a:ext cx="1974400" cy="720000"/>
+            <a:off x="4427332" y="2550000"/>
+            <a:ext cx="1513666" cy="1300000"/>
           </a:xfrm>
           <a:prstGeom prst="rect">
             <a:avLst/>
@@ -8728,33 +9366,73 @@
               </a:spcAft>
             </a:pPr>
             <a:r>
-              <a:rPr sz="1300" b="0">
+              <a:rPr sz="1300" b="1">
                 <a:solidFill>
                   <a:srgbClr val="FFFFFF"/>
                 </a:solidFill>
                 <a:latin typeface="Calibri"/>
               </a:rPr>
-              <a:t>OSM-probe 0.27</a:t>
-            </a:r>
-          </a:p>
-        </p:txBody>
-      </p:sp>
-      <p:sp>
-        <p:nvSpPr>
-          <p:cNvPr id="20" name="Rectangle 19"/>
+              <a:t>Кроп 896×672
+4 азимута</a:t>
+            </a:r>
+          </a:p>
+        </p:txBody>
+      </p:sp>
+      <p:sp>
+        <p:nvSpPr>
+          <p:cNvPr id="14" name="TextBox 13"/>
+          <p:cNvSpPr txBox="1"/>
+          <p:nvPr/>
+        </p:nvSpPr>
+        <p:spPr>
+          <a:xfrm>
+            <a:off x="5980998" y="3030000"/>
+            <a:ext cx="220000" cy="350000"/>
+          </a:xfrm>
+          <a:prstGeom prst="rect">
+            <a:avLst/>
+          </a:prstGeom>
+          <a:noFill/>
+        </p:spPr>
+        <p:txBody>
+          <a:bodyPr wrap="square" anchor="ctr">
+            <a:spAutoFit/>
+          </a:bodyPr>
+          <a:lstStyle/>
+          <a:p>
+            <a:pPr algn="ctr">
+              <a:spcAft>
+                <a:spcPts val="600"/>
+              </a:spcAft>
+            </a:pPr>
+            <a:r>
+              <a:rPr sz="2600" b="1">
+                <a:solidFill>
+                  <a:srgbClr val="E87A22"/>
+                </a:solidFill>
+                <a:latin typeface="Calibri"/>
+              </a:rPr>
+              <a:t>›</a:t>
+            </a:r>
+          </a:p>
+        </p:txBody>
+      </p:sp>
+      <p:sp>
+        <p:nvSpPr>
+          <p:cNvPr id="15" name="Rectangle 14"/>
           <p:cNvSpPr/>
           <p:nvPr/>
         </p:nvSpPr>
         <p:spPr>
           <a:xfrm>
-            <a:off x="7223200" y="4600000"/>
-            <a:ext cx="2094400" cy="720000"/>
+            <a:off x="6170998" y="2550000"/>
+            <a:ext cx="1673666" cy="1300000"/>
           </a:xfrm>
           <a:prstGeom prst="rect">
             <a:avLst/>
           </a:prstGeom>
           <a:solidFill>
-            <a:srgbClr val="E87A22"/>
+            <a:srgbClr val="14A08F"/>
           </a:solidFill>
           <a:ln>
             <a:noFill/>
@@ -8785,14 +9463,14 @@
       </p:sp>
       <p:sp>
         <p:nvSpPr>
-          <p:cNvPr id="21" name="TextBox 20"/>
+          <p:cNvPr id="16" name="TextBox 15"/>
           <p:cNvSpPr txBox="1"/>
           <p:nvPr/>
         </p:nvSpPr>
         <p:spPr>
           <a:xfrm>
-            <a:off x="7283200" y="4600000"/>
-            <a:ext cx="1974400" cy="720000"/>
+            <a:off x="6250998" y="2550000"/>
+            <a:ext cx="1513666" cy="1300000"/>
           </a:xfrm>
           <a:prstGeom prst="rect">
             <a:avLst/>
@@ -8817,21 +9495,184 @@
                 </a:solidFill>
                 <a:latin typeface="Calibri"/>
               </a:rPr>
-              <a:t>VLM-probe 0.76</a:t>
-            </a:r>
-          </a:p>
-        </p:txBody>
-      </p:sp>
-      <p:sp>
-        <p:nvSpPr>
-          <p:cNvPr id="22" name="Rectangle 21"/>
+              <a:t>CLIP ViT-L-14
+(заморожен)</a:t>
+            </a:r>
+          </a:p>
+        </p:txBody>
+      </p:sp>
+      <p:sp>
+        <p:nvSpPr>
+          <p:cNvPr id="17" name="TextBox 16"/>
+          <p:cNvSpPr txBox="1"/>
+          <p:nvPr/>
+        </p:nvSpPr>
+        <p:spPr>
+          <a:xfrm>
+            <a:off x="7804664" y="3030000"/>
+            <a:ext cx="220000" cy="350000"/>
+          </a:xfrm>
+          <a:prstGeom prst="rect">
+            <a:avLst/>
+          </a:prstGeom>
+          <a:noFill/>
+        </p:spPr>
+        <p:txBody>
+          <a:bodyPr wrap="square" anchor="ctr">
+            <a:spAutoFit/>
+          </a:bodyPr>
+          <a:lstStyle/>
+          <a:p>
+            <a:pPr algn="ctr">
+              <a:spcAft>
+                <a:spcPts val="600"/>
+              </a:spcAft>
+            </a:pPr>
+            <a:r>
+              <a:rPr sz="2600" b="1">
+                <a:solidFill>
+                  <a:srgbClr val="E87A22"/>
+                </a:solidFill>
+                <a:latin typeface="Calibri"/>
+              </a:rPr>
+              <a:t>›</a:t>
+            </a:r>
+          </a:p>
+        </p:txBody>
+      </p:sp>
+      <p:sp>
+        <p:nvSpPr>
+          <p:cNvPr id="18" name="Rectangle 17"/>
           <p:cNvSpPr/>
           <p:nvPr/>
         </p:nvSpPr>
         <p:spPr>
           <a:xfrm>
-            <a:off x="9397600" y="4600000"/>
-            <a:ext cx="2094400" cy="720000"/>
+            <a:off x="7994664" y="2550000"/>
+            <a:ext cx="1673666" cy="1300000"/>
+          </a:xfrm>
+          <a:prstGeom prst="rect">
+            <a:avLst/>
+          </a:prstGeom>
+          <a:solidFill>
+            <a:srgbClr val="14A08F"/>
+          </a:solidFill>
+          <a:ln>
+            <a:noFill/>
+          </a:ln>
+          <a:effectLst/>
+        </p:spPr>
+        <p:style>
+          <a:lnRef idx="1">
+            <a:schemeClr val="accent1"/>
+          </a:lnRef>
+          <a:fillRef idx="3">
+            <a:schemeClr val="accent1"/>
+          </a:fillRef>
+          <a:effectRef idx="2">
+            <a:schemeClr val="accent1"/>
+          </a:effectRef>
+          <a:fontRef idx="minor">
+            <a:schemeClr val="lt1"/>
+          </a:fontRef>
+        </p:style>
+        <p:txBody>
+          <a:bodyPr rtlCol="0" anchor="ctr"/>
+          <a:lstStyle/>
+          <a:p>
+            <a:pPr algn="ctr"/>
+          </a:p>
+        </p:txBody>
+      </p:sp>
+      <p:sp>
+        <p:nvSpPr>
+          <p:cNvPr id="19" name="TextBox 18"/>
+          <p:cNvSpPr txBox="1"/>
+          <p:nvPr/>
+        </p:nvSpPr>
+        <p:spPr>
+          <a:xfrm>
+            <a:off x="8074664" y="2550000"/>
+            <a:ext cx="1513666" cy="1300000"/>
+          </a:xfrm>
+          <a:prstGeom prst="rect">
+            <a:avLst/>
+          </a:prstGeom>
+          <a:noFill/>
+        </p:spPr>
+        <p:txBody>
+          <a:bodyPr wrap="square" anchor="ctr">
+            <a:spAutoFit/>
+          </a:bodyPr>
+          <a:lstStyle/>
+          <a:p>
+            <a:pPr algn="ctr">
+              <a:spcAft>
+                <a:spcPts val="600"/>
+              </a:spcAft>
+            </a:pPr>
+            <a:r>
+              <a:rPr sz="1300" b="1">
+                <a:solidFill>
+                  <a:srgbClr val="FFFFFF"/>
+                </a:solidFill>
+                <a:latin typeface="Calibri"/>
+              </a:rPr>
+              <a:t>Linear probe
+6 классов</a:t>
+            </a:r>
+          </a:p>
+        </p:txBody>
+      </p:sp>
+      <p:sp>
+        <p:nvSpPr>
+          <p:cNvPr id="20" name="TextBox 19"/>
+          <p:cNvSpPr txBox="1"/>
+          <p:nvPr/>
+        </p:nvSpPr>
+        <p:spPr>
+          <a:xfrm>
+            <a:off x="9628330" y="3030000"/>
+            <a:ext cx="220000" cy="350000"/>
+          </a:xfrm>
+          <a:prstGeom prst="rect">
+            <a:avLst/>
+          </a:prstGeom>
+          <a:noFill/>
+        </p:spPr>
+        <p:txBody>
+          <a:bodyPr wrap="square" anchor="ctr">
+            <a:spAutoFit/>
+          </a:bodyPr>
+          <a:lstStyle/>
+          <a:p>
+            <a:pPr algn="ctr">
+              <a:spcAft>
+                <a:spcPts val="600"/>
+              </a:spcAft>
+            </a:pPr>
+            <a:r>
+              <a:rPr sz="2600" b="1">
+                <a:solidFill>
+                  <a:srgbClr val="E87A22"/>
+                </a:solidFill>
+                <a:latin typeface="Calibri"/>
+              </a:rPr>
+              <a:t>›</a:t>
+            </a:r>
+          </a:p>
+        </p:txBody>
+      </p:sp>
+      <p:sp>
+        <p:nvSpPr>
+          <p:cNvPr id="21" name="Rectangle 20"/>
+          <p:cNvSpPr/>
+          <p:nvPr/>
+        </p:nvSpPr>
+        <p:spPr>
+          <a:xfrm>
+            <a:off x="9818330" y="2550000"/>
+            <a:ext cx="1673666" cy="1300000"/>
           </a:xfrm>
           <a:prstGeom prst="rect">
             <a:avLst/>
@@ -8868,14 +9709,14 @@
       </p:sp>
       <p:sp>
         <p:nvSpPr>
-          <p:cNvPr id="23" name="TextBox 22"/>
+          <p:cNvPr id="22" name="TextBox 21"/>
           <p:cNvSpPr txBox="1"/>
           <p:nvPr/>
         </p:nvSpPr>
         <p:spPr>
           <a:xfrm>
-            <a:off x="9457600" y="4600000"/>
-            <a:ext cx="1974400" cy="720000"/>
+            <a:off x="9898330" y="2550000"/>
+            <a:ext cx="1513666" cy="1300000"/>
           </a:xfrm>
           <a:prstGeom prst="rect">
             <a:avLst/>
@@ -8894,13 +9735,53 @@
               </a:spcAft>
             </a:pPr>
             <a:r>
-              <a:rPr sz="1300" b="0">
+              <a:rPr sz="1300" b="1">
                 <a:solidFill>
                   <a:srgbClr val="FFFFFF"/>
                 </a:solidFill>
                 <a:latin typeface="Calibri"/>
               </a:rPr>
-              <a:t>3 класса 0.82</a:t>
+              <a:t>Голосование
+по ракурсам</a:t>
+            </a:r>
+          </a:p>
+        </p:txBody>
+      </p:sp>
+      <p:sp>
+        <p:nvSpPr>
+          <p:cNvPr id="23" name="TextBox 22"/>
+          <p:cNvSpPr txBox="1"/>
+          <p:nvPr/>
+        </p:nvSpPr>
+        <p:spPr>
+          <a:xfrm>
+            <a:off x="700000" y="4400000"/>
+            <a:ext cx="10792000" cy="900000"/>
+          </a:xfrm>
+          <a:prstGeom prst="rect">
+            <a:avLst/>
+          </a:prstGeom>
+          <a:noFill/>
+        </p:spPr>
+        <p:txBody>
+          <a:bodyPr wrap="square" anchor="t">
+            <a:spAutoFit/>
+          </a:bodyPr>
+          <a:lstStyle/>
+          <a:p>
+            <a:pPr algn="l">
+              <a:spcAft>
+                <a:spcPts val="600"/>
+              </a:spcAft>
+            </a:pPr>
+            <a:r>
+              <a:rPr sz="1600" b="0">
+                <a:solidFill>
+                  <a:srgbClr val="5B6672"/>
+                </a:solidFill>
+                <a:latin typeface="Calibri"/>
+              </a:rPr>
+              <a:t>Пробинг поверх замороженного CLIP устойчив к переобучению на малых данных; у участка несколько ракурсов — класс выбирается взвешенным голосованием по уверенности.</a:t>
             </a:r>
           </a:p>
         </p:txBody>
@@ -8939,7 +9820,7 @@
                 </a:solidFill>
                 <a:latin typeface="Calibri"/>
               </a:rPr>
-              <a:t>6/10</a:t>
+              <a:t>6/11</a:t>
             </a:r>
           </a:p>
         </p:txBody>
@@ -9128,7 +10009,7 @@
                 </a:solidFill>
                 <a:latin typeface="Calibri"/>
               </a:rPr>
-              <a:t>ЧЕСТНО ОБ ОГРАНИЧЕНИЯХ</a:t>
+              <a:t>РЕЗУЛЬТАТЫ</a:t>
             </a:r>
           </a:p>
           <a:p>
@@ -9139,21 +10020,312 @@
                 </a:solidFill>
                 <a:latin typeface="Calibri"/>
               </a:rPr>
-              <a:t>Где ML сильнее текста, а где — нет</a:t>
-            </a:r>
-          </a:p>
-        </p:txBody>
-      </p:sp>
-      <p:sp>
-        <p:nvSpPr>
-          <p:cNvPr id="6" name="TextBox 5"/>
+              <a:t>Продакшен-модель на честной валидации</a:t>
+            </a:r>
+          </a:p>
+        </p:txBody>
+      </p:sp>
+      <p:sp>
+        <p:nvSpPr>
+          <p:cNvPr id="6" name="Rectangle 5"/>
+          <p:cNvSpPr/>
+          <p:nvPr/>
+        </p:nvSpPr>
+        <p:spPr>
+          <a:xfrm>
+            <a:off x="700000" y="1850000"/>
+            <a:ext cx="3464000" cy="1350000"/>
+          </a:xfrm>
+          <a:prstGeom prst="rect">
+            <a:avLst/>
+          </a:prstGeom>
+          <a:solidFill>
+            <a:srgbClr val="F3F5F7"/>
+          </a:solidFill>
+          <a:ln w="12700">
+            <a:solidFill>
+              <a:srgbClr val="DDE3EA"/>
+            </a:solidFill>
+          </a:ln>
+          <a:effectLst/>
+        </p:spPr>
+        <p:style>
+          <a:lnRef idx="1">
+            <a:schemeClr val="accent1"/>
+          </a:lnRef>
+          <a:fillRef idx="3">
+            <a:schemeClr val="accent1"/>
+          </a:fillRef>
+          <a:effectRef idx="2">
+            <a:schemeClr val="accent1"/>
+          </a:effectRef>
+          <a:fontRef idx="minor">
+            <a:schemeClr val="lt1"/>
+          </a:fontRef>
+        </p:style>
+        <p:txBody>
+          <a:bodyPr rtlCol="0" anchor="ctr"/>
+          <a:lstStyle/>
+          <a:p>
+            <a:pPr algn="ctr"/>
+          </a:p>
+        </p:txBody>
+      </p:sp>
+      <p:sp>
+        <p:nvSpPr>
+          <p:cNvPr id="7" name="TextBox 6"/>
           <p:cNvSpPr txBox="1"/>
           <p:nvPr/>
         </p:nvSpPr>
         <p:spPr>
           <a:xfrm>
-            <a:off x="700000" y="1900000"/>
-            <a:ext cx="10792000" cy="3800000"/>
+            <a:off x="700000" y="1850000"/>
+            <a:ext cx="3464000" cy="1350000"/>
+          </a:xfrm>
+          <a:prstGeom prst="rect">
+            <a:avLst/>
+          </a:prstGeom>
+          <a:noFill/>
+        </p:spPr>
+        <p:txBody>
+          <a:bodyPr wrap="square" anchor="ctr">
+            <a:spAutoFit/>
+          </a:bodyPr>
+          <a:lstStyle/>
+          <a:p>
+            <a:pPr algn="ctr">
+              <a:spcAft>
+                <a:spcPts val="200"/>
+              </a:spcAft>
+            </a:pPr>
+            <a:r>
+              <a:rPr sz="4000" b="1">
+                <a:solidFill>
+                  <a:srgbClr val="14A08F"/>
+                </a:solidFill>
+                <a:latin typeface="Calibri"/>
+              </a:rPr>
+              <a:t>76.2%</a:t>
+            </a:r>
+          </a:p>
+          <a:p>
+            <a:pPr algn="ctr"/>
+            <a:r>
+              <a:rPr sz="1500">
+                <a:solidFill>
+                  <a:srgbClr val="5B6672"/>
+                </a:solidFill>
+                <a:latin typeface="Calibri"/>
+              </a:rPr>
+              <a:t>Accuracy</a:t>
+            </a:r>
+          </a:p>
+        </p:txBody>
+      </p:sp>
+      <p:sp>
+        <p:nvSpPr>
+          <p:cNvPr id="8" name="Rectangle 7"/>
+          <p:cNvSpPr/>
+          <p:nvPr/>
+        </p:nvSpPr>
+        <p:spPr>
+          <a:xfrm>
+            <a:off x="4364000" y="1850000"/>
+            <a:ext cx="3464000" cy="1350000"/>
+          </a:xfrm>
+          <a:prstGeom prst="rect">
+            <a:avLst/>
+          </a:prstGeom>
+          <a:solidFill>
+            <a:srgbClr val="F3F5F7"/>
+          </a:solidFill>
+          <a:ln w="12700">
+            <a:solidFill>
+              <a:srgbClr val="DDE3EA"/>
+            </a:solidFill>
+          </a:ln>
+          <a:effectLst/>
+        </p:spPr>
+        <p:style>
+          <a:lnRef idx="1">
+            <a:schemeClr val="accent1"/>
+          </a:lnRef>
+          <a:fillRef idx="3">
+            <a:schemeClr val="accent1"/>
+          </a:fillRef>
+          <a:effectRef idx="2">
+            <a:schemeClr val="accent1"/>
+          </a:effectRef>
+          <a:fontRef idx="minor">
+            <a:schemeClr val="lt1"/>
+          </a:fontRef>
+        </p:style>
+        <p:txBody>
+          <a:bodyPr rtlCol="0" anchor="ctr"/>
+          <a:lstStyle/>
+          <a:p>
+            <a:pPr algn="ctr"/>
+          </a:p>
+        </p:txBody>
+      </p:sp>
+      <p:sp>
+        <p:nvSpPr>
+          <p:cNvPr id="9" name="TextBox 8"/>
+          <p:cNvSpPr txBox="1"/>
+          <p:nvPr/>
+        </p:nvSpPr>
+        <p:spPr>
+          <a:xfrm>
+            <a:off x="4364000" y="1850000"/>
+            <a:ext cx="3464000" cy="1350000"/>
+          </a:xfrm>
+          <a:prstGeom prst="rect">
+            <a:avLst/>
+          </a:prstGeom>
+          <a:noFill/>
+        </p:spPr>
+        <p:txBody>
+          <a:bodyPr wrap="square" anchor="ctr">
+            <a:spAutoFit/>
+          </a:bodyPr>
+          <a:lstStyle/>
+          <a:p>
+            <a:pPr algn="ctr">
+              <a:spcAft>
+                <a:spcPts val="200"/>
+              </a:spcAft>
+            </a:pPr>
+            <a:r>
+              <a:rPr sz="4000" b="1">
+                <a:solidFill>
+                  <a:srgbClr val="14A08F"/>
+                </a:solidFill>
+                <a:latin typeface="Calibri"/>
+              </a:rPr>
+              <a:t>61.0%</a:t>
+            </a:r>
+          </a:p>
+          <a:p>
+            <a:pPr algn="ctr"/>
+            <a:r>
+              <a:rPr sz="1500">
+                <a:solidFill>
+                  <a:srgbClr val="5B6672"/>
+                </a:solidFill>
+                <a:latin typeface="Calibri"/>
+              </a:rPr>
+              <a:t>macro-F1</a:t>
+            </a:r>
+          </a:p>
+        </p:txBody>
+      </p:sp>
+      <p:sp>
+        <p:nvSpPr>
+          <p:cNvPr id="10" name="Rectangle 9"/>
+          <p:cNvSpPr/>
+          <p:nvPr/>
+        </p:nvSpPr>
+        <p:spPr>
+          <a:xfrm>
+            <a:off x="8028000" y="1850000"/>
+            <a:ext cx="3464000" cy="1350000"/>
+          </a:xfrm>
+          <a:prstGeom prst="rect">
+            <a:avLst/>
+          </a:prstGeom>
+          <a:solidFill>
+            <a:srgbClr val="F3F5F7"/>
+          </a:solidFill>
+          <a:ln w="12700">
+            <a:solidFill>
+              <a:srgbClr val="DDE3EA"/>
+            </a:solidFill>
+          </a:ln>
+          <a:effectLst/>
+        </p:spPr>
+        <p:style>
+          <a:lnRef idx="1">
+            <a:schemeClr val="accent1"/>
+          </a:lnRef>
+          <a:fillRef idx="3">
+            <a:schemeClr val="accent1"/>
+          </a:fillRef>
+          <a:effectRef idx="2">
+            <a:schemeClr val="accent1"/>
+          </a:effectRef>
+          <a:fontRef idx="minor">
+            <a:schemeClr val="lt1"/>
+          </a:fontRef>
+        </p:style>
+        <p:txBody>
+          <a:bodyPr rtlCol="0" anchor="ctr"/>
+          <a:lstStyle/>
+          <a:p>
+            <a:pPr algn="ctr"/>
+          </a:p>
+        </p:txBody>
+      </p:sp>
+      <p:sp>
+        <p:nvSpPr>
+          <p:cNvPr id="11" name="TextBox 10"/>
+          <p:cNvSpPr txBox="1"/>
+          <p:nvPr/>
+        </p:nvSpPr>
+        <p:spPr>
+          <a:xfrm>
+            <a:off x="8028000" y="1850000"/>
+            <a:ext cx="3464000" cy="1350000"/>
+          </a:xfrm>
+          <a:prstGeom prst="rect">
+            <a:avLst/>
+          </a:prstGeom>
+          <a:noFill/>
+        </p:spPr>
+        <p:txBody>
+          <a:bodyPr wrap="square" anchor="ctr">
+            <a:spAutoFit/>
+          </a:bodyPr>
+          <a:lstStyle/>
+          <a:p>
+            <a:pPr algn="ctr">
+              <a:spcAft>
+                <a:spcPts val="200"/>
+              </a:spcAft>
+            </a:pPr>
+            <a:r>
+              <a:rPr sz="4000" b="1">
+                <a:solidFill>
+                  <a:srgbClr val="14A08F"/>
+                </a:solidFill>
+                <a:latin typeface="Calibri"/>
+              </a:rPr>
+              <a:t>73.8%</a:t>
+            </a:r>
+          </a:p>
+          <a:p>
+            <a:pPr algn="ctr"/>
+            <a:r>
+              <a:rPr sz="1500">
+                <a:solidFill>
+                  <a:srgbClr val="5B6672"/>
+                </a:solidFill>
+                <a:latin typeface="Calibri"/>
+              </a:rPr>
+              <a:t>balanced F1</a:t>
+            </a:r>
+          </a:p>
+        </p:txBody>
+      </p:sp>
+      <p:sp>
+        <p:nvSpPr>
+          <p:cNvPr id="12" name="TextBox 11"/>
+          <p:cNvSpPr txBox="1"/>
+          <p:nvPr/>
+        </p:nvSpPr>
+        <p:spPr>
+          <a:xfrm>
+            <a:off x="700000" y="3450000"/>
+            <a:ext cx="10792000" cy="500000"/>
           </a:xfrm>
           <a:prstGeom prst="rect">
             <a:avLst/>
@@ -9166,92 +10338,480 @@
           </a:bodyPr>
           <a:lstStyle/>
           <a:p>
-            <a:pPr>
+            <a:pPr algn="l">
               <a:spcAft>
-                <a:spcPts val="1600"/>
+                <a:spcPts val="600"/>
               </a:spcAft>
             </a:pPr>
             <a:r>
-              <a:rPr sz="1900" b="0">
-                <a:solidFill>
-                  <a:srgbClr val="1B2538"/>
-                </a:solidFill>
-                <a:latin typeface="Calibri"/>
-              </a:rPr>
-              <a:t>На всём GPKG текстовая эвристика даёт </a:t>
-            </a:r>
-            <a:r>
-              <a:rPr sz="1900" b="1">
-                <a:solidFill>
-                  <a:srgbClr val="E87A22"/>
-                </a:solidFill>
-                <a:latin typeface="Calibri"/>
-              </a:rPr>
-              <a:t>87.6%</a:t>
-            </a:r>
-            <a:r>
-              <a:rPr sz="1900" b="0">
-                <a:solidFill>
-                  <a:srgbClr val="1B2538"/>
-                </a:solidFill>
-                <a:latin typeface="Calibri"/>
-              </a:rPr>
-              <a:t> — выше ML. И это ожидаемо: текст кадастра уже содержит сильные подсказки.</a:t>
-            </a:r>
-          </a:p>
-          <a:p>
-            <a:pPr>
+              <a:rPr sz="1400" b="0">
+                <a:solidFill>
+                  <a:srgbClr val="5B6672"/>
+                </a:solidFill>
+                <a:latin typeface="Calibri"/>
+              </a:rPr>
+              <a:t>CLIP ViT-L-14 probe · n_val = 239 · сплит по object_id · все 6 классов</a:t>
+            </a:r>
+          </a:p>
+        </p:txBody>
+      </p:sp>
+      <p:sp>
+        <p:nvSpPr>
+          <p:cNvPr id="13" name="TextBox 12"/>
+          <p:cNvSpPr txBox="1"/>
+          <p:nvPr/>
+        </p:nvSpPr>
+        <p:spPr>
+          <a:xfrm>
+            <a:off x="700000" y="4050000"/>
+            <a:ext cx="10792000" cy="400000"/>
+          </a:xfrm>
+          <a:prstGeom prst="rect">
+            <a:avLst/>
+          </a:prstGeom>
+          <a:noFill/>
+        </p:spPr>
+        <p:txBody>
+          <a:bodyPr wrap="square" anchor="t">
+            <a:spAutoFit/>
+          </a:bodyPr>
+          <a:lstStyle/>
+          <a:p>
+            <a:pPr algn="l">
               <a:spcAft>
-                <a:spcPts val="1600"/>
+                <a:spcPts val="600"/>
               </a:spcAft>
             </a:pPr>
             <a:r>
-              <a:rPr sz="1900" b="1">
-                <a:solidFill>
-                  <a:srgbClr val="14A08F"/>
-                </a:solidFill>
-                <a:latin typeface="Calibri"/>
-              </a:rPr>
-              <a:t>Но на кластере «зелень во дворах» текст бессилен — там класс различает только панорама. Это и есть ниша ML.</a:t>
-            </a:r>
-          </a:p>
-          <a:p>
-            <a:pPr>
+              <a:rPr sz="1600" b="1">
+                <a:solidFill>
+                  <a:srgbClr val="0F1E3D"/>
+                </a:solidFill>
+                <a:latin typeface="Calibri"/>
+              </a:rPr>
+              <a:t>Путь к результату (рычаг — метки, не архитектура):</a:t>
+            </a:r>
+          </a:p>
+        </p:txBody>
+      </p:sp>
+      <p:sp>
+        <p:nvSpPr>
+          <p:cNvPr id="14" name="Rectangle 13"/>
+          <p:cNvSpPr/>
+          <p:nvPr/>
+        </p:nvSpPr>
+        <p:spPr>
+          <a:xfrm>
+            <a:off x="700000" y="4600000"/>
+            <a:ext cx="2094400" cy="720000"/>
+          </a:xfrm>
+          <a:prstGeom prst="rect">
+            <a:avLst/>
+          </a:prstGeom>
+          <a:solidFill>
+            <a:srgbClr val="0F1E3D"/>
+          </a:solidFill>
+          <a:ln>
+            <a:noFill/>
+          </a:ln>
+          <a:effectLst/>
+        </p:spPr>
+        <p:style>
+          <a:lnRef idx="1">
+            <a:schemeClr val="accent1"/>
+          </a:lnRef>
+          <a:fillRef idx="3">
+            <a:schemeClr val="accent1"/>
+          </a:fillRef>
+          <a:effectRef idx="2">
+            <a:schemeClr val="accent1"/>
+          </a:effectRef>
+          <a:fontRef idx="minor">
+            <a:schemeClr val="lt1"/>
+          </a:fontRef>
+        </p:style>
+        <p:txBody>
+          <a:bodyPr rtlCol="0" anchor="ctr"/>
+          <a:lstStyle/>
+          <a:p>
+            <a:pPr algn="ctr"/>
+          </a:p>
+        </p:txBody>
+      </p:sp>
+      <p:sp>
+        <p:nvSpPr>
+          <p:cNvPr id="15" name="TextBox 14"/>
+          <p:cNvSpPr txBox="1"/>
+          <p:nvPr/>
+        </p:nvSpPr>
+        <p:spPr>
+          <a:xfrm>
+            <a:off x="760000" y="4600000"/>
+            <a:ext cx="1974400" cy="720000"/>
+          </a:xfrm>
+          <a:prstGeom prst="rect">
+            <a:avLst/>
+          </a:prstGeom>
+          <a:noFill/>
+        </p:spPr>
+        <p:txBody>
+          <a:bodyPr wrap="square" anchor="ctr">
+            <a:spAutoFit/>
+          </a:bodyPr>
+          <a:lstStyle/>
+          <a:p>
+            <a:pPr algn="ctr">
               <a:spcAft>
-                <a:spcPts val="1600"/>
+                <a:spcPts val="600"/>
               </a:spcAft>
             </a:pPr>
             <a:r>
-              <a:rPr sz="1900" b="0">
-                <a:solidFill>
-                  <a:srgbClr val="1B2538"/>
-                </a:solidFill>
-                <a:latin typeface="Calibri"/>
-              </a:rPr>
-              <a:t>Ограничения честно задокументированы: domain shift (обучение на research-домене), малые выборки с панорамой (25–75 объектов).</a:t>
-            </a:r>
-          </a:p>
-          <a:p>
-            <a:pPr>
+              <a:rPr sz="1300" b="0">
+                <a:solidFill>
+                  <a:srgbClr val="FFFFFF"/>
+                </a:solidFill>
+                <a:latin typeface="Calibri"/>
+              </a:rPr>
+              <a:t>zero-shot 0.20</a:t>
+            </a:r>
+          </a:p>
+        </p:txBody>
+      </p:sp>
+      <p:sp>
+        <p:nvSpPr>
+          <p:cNvPr id="16" name="Rectangle 15"/>
+          <p:cNvSpPr/>
+          <p:nvPr/>
+        </p:nvSpPr>
+        <p:spPr>
+          <a:xfrm>
+            <a:off x="2874400" y="4600000"/>
+            <a:ext cx="2094400" cy="720000"/>
+          </a:xfrm>
+          <a:prstGeom prst="rect">
+            <a:avLst/>
+          </a:prstGeom>
+          <a:solidFill>
+            <a:srgbClr val="0F1E3D"/>
+          </a:solidFill>
+          <a:ln>
+            <a:noFill/>
+          </a:ln>
+          <a:effectLst/>
+        </p:spPr>
+        <p:style>
+          <a:lnRef idx="1">
+            <a:schemeClr val="accent1"/>
+          </a:lnRef>
+          <a:fillRef idx="3">
+            <a:schemeClr val="accent1"/>
+          </a:fillRef>
+          <a:effectRef idx="2">
+            <a:schemeClr val="accent1"/>
+          </a:effectRef>
+          <a:fontRef idx="minor">
+            <a:schemeClr val="lt1"/>
+          </a:fontRef>
+        </p:style>
+        <p:txBody>
+          <a:bodyPr rtlCol="0" anchor="ctr"/>
+          <a:lstStyle/>
+          <a:p>
+            <a:pPr algn="ctr"/>
+          </a:p>
+        </p:txBody>
+      </p:sp>
+      <p:sp>
+        <p:nvSpPr>
+          <p:cNvPr id="17" name="TextBox 16"/>
+          <p:cNvSpPr txBox="1"/>
+          <p:nvPr/>
+        </p:nvSpPr>
+        <p:spPr>
+          <a:xfrm>
+            <a:off x="2934400" y="4600000"/>
+            <a:ext cx="1974400" cy="720000"/>
+          </a:xfrm>
+          <a:prstGeom prst="rect">
+            <a:avLst/>
+          </a:prstGeom>
+          <a:noFill/>
+        </p:spPr>
+        <p:txBody>
+          <a:bodyPr wrap="square" anchor="ctr">
+            <a:spAutoFit/>
+          </a:bodyPr>
+          <a:lstStyle/>
+          <a:p>
+            <a:pPr algn="ctr">
               <a:spcAft>
-                <a:spcPts val="1600"/>
+                <a:spcPts val="600"/>
               </a:spcAft>
             </a:pPr>
             <a:r>
-              <a:rPr sz="1900" b="1">
-                <a:solidFill>
-                  <a:srgbClr val="1B2538"/>
-                </a:solidFill>
-                <a:latin typeface="Calibri"/>
-              </a:rPr>
-              <a:t>Вывод: ML — дополнение к тексту на трудных кластерах, а не замена эвристики.</a:t>
-            </a:r>
-          </a:p>
-        </p:txBody>
-      </p:sp>
-      <p:sp>
-        <p:nvSpPr>
-          <p:cNvPr id="7" name="TextBox 6"/>
+              <a:rPr sz="1300" b="0">
+                <a:solidFill>
+                  <a:srgbClr val="FFFFFF"/>
+                </a:solidFill>
+                <a:latin typeface="Calibri"/>
+              </a:rPr>
+              <a:t>fine-tune 0.40</a:t>
+            </a:r>
+          </a:p>
+        </p:txBody>
+      </p:sp>
+      <p:sp>
+        <p:nvSpPr>
+          <p:cNvPr id="18" name="Rectangle 17"/>
+          <p:cNvSpPr/>
+          <p:nvPr/>
+        </p:nvSpPr>
+        <p:spPr>
+          <a:xfrm>
+            <a:off x="5048800" y="4600000"/>
+            <a:ext cx="2094400" cy="720000"/>
+          </a:xfrm>
+          <a:prstGeom prst="rect">
+            <a:avLst/>
+          </a:prstGeom>
+          <a:solidFill>
+            <a:srgbClr val="0F1E3D"/>
+          </a:solidFill>
+          <a:ln>
+            <a:noFill/>
+          </a:ln>
+          <a:effectLst/>
+        </p:spPr>
+        <p:style>
+          <a:lnRef idx="1">
+            <a:schemeClr val="accent1"/>
+          </a:lnRef>
+          <a:fillRef idx="3">
+            <a:schemeClr val="accent1"/>
+          </a:fillRef>
+          <a:effectRef idx="2">
+            <a:schemeClr val="accent1"/>
+          </a:effectRef>
+          <a:fontRef idx="minor">
+            <a:schemeClr val="lt1"/>
+          </a:fontRef>
+        </p:style>
+        <p:txBody>
+          <a:bodyPr rtlCol="0" anchor="ctr"/>
+          <a:lstStyle/>
+          <a:p>
+            <a:pPr algn="ctr"/>
+          </a:p>
+        </p:txBody>
+      </p:sp>
+      <p:sp>
+        <p:nvSpPr>
+          <p:cNvPr id="19" name="TextBox 18"/>
+          <p:cNvSpPr txBox="1"/>
+          <p:nvPr/>
+        </p:nvSpPr>
+        <p:spPr>
+          <a:xfrm>
+            <a:off x="5108800" y="4600000"/>
+            <a:ext cx="1974400" cy="720000"/>
+          </a:xfrm>
+          <a:prstGeom prst="rect">
+            <a:avLst/>
+          </a:prstGeom>
+          <a:noFill/>
+        </p:spPr>
+        <p:txBody>
+          <a:bodyPr wrap="square" anchor="ctr">
+            <a:spAutoFit/>
+          </a:bodyPr>
+          <a:lstStyle/>
+          <a:p>
+            <a:pPr algn="ctr">
+              <a:spcAft>
+                <a:spcPts val="600"/>
+              </a:spcAft>
+            </a:pPr>
+            <a:r>
+              <a:rPr sz="1300" b="0">
+                <a:solidFill>
+                  <a:srgbClr val="FFFFFF"/>
+                </a:solidFill>
+                <a:latin typeface="Calibri"/>
+              </a:rPr>
+              <a:t>OSM-probe 0.27</a:t>
+            </a:r>
+          </a:p>
+        </p:txBody>
+      </p:sp>
+      <p:sp>
+        <p:nvSpPr>
+          <p:cNvPr id="20" name="Rectangle 19"/>
+          <p:cNvSpPr/>
+          <p:nvPr/>
+        </p:nvSpPr>
+        <p:spPr>
+          <a:xfrm>
+            <a:off x="7223200" y="4600000"/>
+            <a:ext cx="2094400" cy="720000"/>
+          </a:xfrm>
+          <a:prstGeom prst="rect">
+            <a:avLst/>
+          </a:prstGeom>
+          <a:solidFill>
+            <a:srgbClr val="E87A22"/>
+          </a:solidFill>
+          <a:ln>
+            <a:noFill/>
+          </a:ln>
+          <a:effectLst/>
+        </p:spPr>
+        <p:style>
+          <a:lnRef idx="1">
+            <a:schemeClr val="accent1"/>
+          </a:lnRef>
+          <a:fillRef idx="3">
+            <a:schemeClr val="accent1"/>
+          </a:fillRef>
+          <a:effectRef idx="2">
+            <a:schemeClr val="accent1"/>
+          </a:effectRef>
+          <a:fontRef idx="minor">
+            <a:schemeClr val="lt1"/>
+          </a:fontRef>
+        </p:style>
+        <p:txBody>
+          <a:bodyPr rtlCol="0" anchor="ctr"/>
+          <a:lstStyle/>
+          <a:p>
+            <a:pPr algn="ctr"/>
+          </a:p>
+        </p:txBody>
+      </p:sp>
+      <p:sp>
+        <p:nvSpPr>
+          <p:cNvPr id="21" name="TextBox 20"/>
+          <p:cNvSpPr txBox="1"/>
+          <p:nvPr/>
+        </p:nvSpPr>
+        <p:spPr>
+          <a:xfrm>
+            <a:off x="7283200" y="4600000"/>
+            <a:ext cx="1974400" cy="720000"/>
+          </a:xfrm>
+          <a:prstGeom prst="rect">
+            <a:avLst/>
+          </a:prstGeom>
+          <a:noFill/>
+        </p:spPr>
+        <p:txBody>
+          <a:bodyPr wrap="square" anchor="ctr">
+            <a:spAutoFit/>
+          </a:bodyPr>
+          <a:lstStyle/>
+          <a:p>
+            <a:pPr algn="ctr">
+              <a:spcAft>
+                <a:spcPts val="600"/>
+              </a:spcAft>
+            </a:pPr>
+            <a:r>
+              <a:rPr sz="1300" b="1">
+                <a:solidFill>
+                  <a:srgbClr val="FFFFFF"/>
+                </a:solidFill>
+                <a:latin typeface="Calibri"/>
+              </a:rPr>
+              <a:t>VLM-probe 0.76</a:t>
+            </a:r>
+          </a:p>
+        </p:txBody>
+      </p:sp>
+      <p:sp>
+        <p:nvSpPr>
+          <p:cNvPr id="22" name="Rectangle 21"/>
+          <p:cNvSpPr/>
+          <p:nvPr/>
+        </p:nvSpPr>
+        <p:spPr>
+          <a:xfrm>
+            <a:off x="9397600" y="4600000"/>
+            <a:ext cx="2094400" cy="720000"/>
+          </a:xfrm>
+          <a:prstGeom prst="rect">
+            <a:avLst/>
+          </a:prstGeom>
+          <a:solidFill>
+            <a:srgbClr val="0F1E3D"/>
+          </a:solidFill>
+          <a:ln>
+            <a:noFill/>
+          </a:ln>
+          <a:effectLst/>
+        </p:spPr>
+        <p:style>
+          <a:lnRef idx="1">
+            <a:schemeClr val="accent1"/>
+          </a:lnRef>
+          <a:fillRef idx="3">
+            <a:schemeClr val="accent1"/>
+          </a:fillRef>
+          <a:effectRef idx="2">
+            <a:schemeClr val="accent1"/>
+          </a:effectRef>
+          <a:fontRef idx="minor">
+            <a:schemeClr val="lt1"/>
+          </a:fontRef>
+        </p:style>
+        <p:txBody>
+          <a:bodyPr rtlCol="0" anchor="ctr"/>
+          <a:lstStyle/>
+          <a:p>
+            <a:pPr algn="ctr"/>
+          </a:p>
+        </p:txBody>
+      </p:sp>
+      <p:sp>
+        <p:nvSpPr>
+          <p:cNvPr id="23" name="TextBox 22"/>
+          <p:cNvSpPr txBox="1"/>
+          <p:nvPr/>
+        </p:nvSpPr>
+        <p:spPr>
+          <a:xfrm>
+            <a:off x="9457600" y="4600000"/>
+            <a:ext cx="1974400" cy="720000"/>
+          </a:xfrm>
+          <a:prstGeom prst="rect">
+            <a:avLst/>
+          </a:prstGeom>
+          <a:noFill/>
+        </p:spPr>
+        <p:txBody>
+          <a:bodyPr wrap="square" anchor="ctr">
+            <a:spAutoFit/>
+          </a:bodyPr>
+          <a:lstStyle/>
+          <a:p>
+            <a:pPr algn="ctr">
+              <a:spcAft>
+                <a:spcPts val="600"/>
+              </a:spcAft>
+            </a:pPr>
+            <a:r>
+              <a:rPr sz="1300" b="0">
+                <a:solidFill>
+                  <a:srgbClr val="FFFFFF"/>
+                </a:solidFill>
+                <a:latin typeface="Calibri"/>
+              </a:rPr>
+              <a:t>3 класса 0.82</a:t>
+            </a:r>
+          </a:p>
+        </p:txBody>
+      </p:sp>
+      <p:sp>
+        <p:nvSpPr>
+          <p:cNvPr id="24" name="TextBox 23"/>
           <p:cNvSpPr txBox="1"/>
           <p:nvPr/>
         </p:nvSpPr>
@@ -9283,7 +10843,7 @@
                 </a:solidFill>
                 <a:latin typeface="Calibri"/>
               </a:rPr>
-              <a:t>7/10</a:t>
+              <a:t>7/11</a:t>
             </a:r>
           </a:p>
         </p:txBody>
@@ -9472,7 +11032,7 @@
                 </a:solidFill>
                 <a:latin typeface="Calibri"/>
               </a:rPr>
-              <a:t>ПРОДУКТ</a:t>
+              <a:t>ЧЕСТНО ОБ ОГРАНИЧЕНИЯХ</a:t>
             </a:r>
           </a:p>
           <a:p>
@@ -9483,675 +11043,21 @@
                 </a:solidFill>
                 <a:latin typeface="Calibri"/>
               </a:rPr>
-              <a:t>Веб-инструмент аналитика с обратной связью</a:t>
-            </a:r>
-          </a:p>
-        </p:txBody>
-      </p:sp>
-      <p:sp>
-        <p:nvSpPr>
-          <p:cNvPr id="6" name="Rectangle 5"/>
-          <p:cNvSpPr/>
+              <a:t>Где ML сильнее текста, а где — нет</a:t>
+            </a:r>
+          </a:p>
+        </p:txBody>
+      </p:sp>
+      <p:sp>
+        <p:nvSpPr>
+          <p:cNvPr id="6" name="TextBox 5"/>
+          <p:cNvSpPr txBox="1"/>
           <p:nvPr/>
         </p:nvSpPr>
         <p:spPr>
           <a:xfrm>
             <a:off x="700000" y="1900000"/>
-            <a:ext cx="560000" cy="600000"/>
-          </a:xfrm>
-          <a:prstGeom prst="rect">
-            <a:avLst/>
-          </a:prstGeom>
-          <a:solidFill>
-            <a:srgbClr val="14A08F"/>
-          </a:solidFill>
-          <a:ln>
-            <a:noFill/>
-          </a:ln>
-          <a:effectLst/>
-        </p:spPr>
-        <p:style>
-          <a:lnRef idx="1">
-            <a:schemeClr val="accent1"/>
-          </a:lnRef>
-          <a:fillRef idx="3">
-            <a:schemeClr val="accent1"/>
-          </a:fillRef>
-          <a:effectRef idx="2">
-            <a:schemeClr val="accent1"/>
-          </a:effectRef>
-          <a:fontRef idx="minor">
-            <a:schemeClr val="lt1"/>
-          </a:fontRef>
-        </p:style>
-        <p:txBody>
-          <a:bodyPr rtlCol="0" anchor="ctr"/>
-          <a:lstStyle/>
-          <a:p>
-            <a:pPr algn="ctr"/>
-          </a:p>
-        </p:txBody>
-      </p:sp>
-      <p:sp>
-        <p:nvSpPr>
-          <p:cNvPr id="7" name="TextBox 6"/>
-          <p:cNvSpPr txBox="1"/>
-          <p:nvPr/>
-        </p:nvSpPr>
-        <p:spPr>
-          <a:xfrm>
-            <a:off x="700000" y="1900000"/>
-            <a:ext cx="560000" cy="600000"/>
-          </a:xfrm>
-          <a:prstGeom prst="rect">
-            <a:avLst/>
-          </a:prstGeom>
-          <a:noFill/>
-        </p:spPr>
-        <p:txBody>
-          <a:bodyPr wrap="square" anchor="ctr">
-            <a:spAutoFit/>
-          </a:bodyPr>
-          <a:lstStyle/>
-          <a:p>
-            <a:pPr algn="ctr">
-              <a:spcAft>
-                <a:spcPts val="600"/>
-              </a:spcAft>
-            </a:pPr>
-            <a:r>
-              <a:rPr sz="2200" b="1">
-                <a:solidFill>
-                  <a:srgbClr val="FFFFFF"/>
-                </a:solidFill>
-                <a:latin typeface="Calibri"/>
-              </a:rPr>
-              <a:t>1</a:t>
-            </a:r>
-          </a:p>
-        </p:txBody>
-      </p:sp>
-      <p:sp>
-        <p:nvSpPr>
-          <p:cNvPr id="8" name="TextBox 7"/>
-          <p:cNvSpPr txBox="1"/>
-          <p:nvPr/>
-        </p:nvSpPr>
-        <p:spPr>
-          <a:xfrm>
-            <a:off x="1460000" y="1900000"/>
-            <a:ext cx="5935600" cy="600000"/>
-          </a:xfrm>
-          <a:prstGeom prst="rect">
-            <a:avLst/>
-          </a:prstGeom>
-          <a:noFill/>
-        </p:spPr>
-        <p:txBody>
-          <a:bodyPr wrap="square" anchor="ctr">
-            <a:spAutoFit/>
-          </a:bodyPr>
-          <a:lstStyle/>
-          <a:p>
-            <a:pPr algn="l">
-              <a:spcAft>
-                <a:spcPts val="600"/>
-              </a:spcAft>
-            </a:pPr>
-            <a:r>
-              <a:rPr sz="1900" b="1">
-                <a:solidFill>
-                  <a:srgbClr val="1B2538"/>
-                </a:solidFill>
-                <a:latin typeface="Calibri"/>
-              </a:rPr>
-              <a:t>Загрузка GPKG</a:t>
-            </a:r>
-          </a:p>
-        </p:txBody>
-      </p:sp>
-      <p:sp>
-        <p:nvSpPr>
-          <p:cNvPr id="9" name="Rectangle 8"/>
-          <p:cNvSpPr/>
-          <p:nvPr/>
-        </p:nvSpPr>
-        <p:spPr>
-          <a:xfrm>
-            <a:off x="700000" y="2660000"/>
-            <a:ext cx="560000" cy="600000"/>
-          </a:xfrm>
-          <a:prstGeom prst="rect">
-            <a:avLst/>
-          </a:prstGeom>
-          <a:solidFill>
-            <a:srgbClr val="14A08F"/>
-          </a:solidFill>
-          <a:ln>
-            <a:noFill/>
-          </a:ln>
-          <a:effectLst/>
-        </p:spPr>
-        <p:style>
-          <a:lnRef idx="1">
-            <a:schemeClr val="accent1"/>
-          </a:lnRef>
-          <a:fillRef idx="3">
-            <a:schemeClr val="accent1"/>
-          </a:fillRef>
-          <a:effectRef idx="2">
-            <a:schemeClr val="accent1"/>
-          </a:effectRef>
-          <a:fontRef idx="minor">
-            <a:schemeClr val="lt1"/>
-          </a:fontRef>
-        </p:style>
-        <p:txBody>
-          <a:bodyPr rtlCol="0" anchor="ctr"/>
-          <a:lstStyle/>
-          <a:p>
-            <a:pPr algn="ctr"/>
-          </a:p>
-        </p:txBody>
-      </p:sp>
-      <p:sp>
-        <p:nvSpPr>
-          <p:cNvPr id="10" name="TextBox 9"/>
-          <p:cNvSpPr txBox="1"/>
-          <p:nvPr/>
-        </p:nvSpPr>
-        <p:spPr>
-          <a:xfrm>
-            <a:off x="700000" y="2660000"/>
-            <a:ext cx="560000" cy="600000"/>
-          </a:xfrm>
-          <a:prstGeom prst="rect">
-            <a:avLst/>
-          </a:prstGeom>
-          <a:noFill/>
-        </p:spPr>
-        <p:txBody>
-          <a:bodyPr wrap="square" anchor="ctr">
-            <a:spAutoFit/>
-          </a:bodyPr>
-          <a:lstStyle/>
-          <a:p>
-            <a:pPr algn="ctr">
-              <a:spcAft>
-                <a:spcPts val="600"/>
-              </a:spcAft>
-            </a:pPr>
-            <a:r>
-              <a:rPr sz="2200" b="1">
-                <a:solidFill>
-                  <a:srgbClr val="FFFFFF"/>
-                </a:solidFill>
-                <a:latin typeface="Calibri"/>
-              </a:rPr>
-              <a:t>2</a:t>
-            </a:r>
-          </a:p>
-        </p:txBody>
-      </p:sp>
-      <p:sp>
-        <p:nvSpPr>
-          <p:cNvPr id="11" name="TextBox 10"/>
-          <p:cNvSpPr txBox="1"/>
-          <p:nvPr/>
-        </p:nvSpPr>
-        <p:spPr>
-          <a:xfrm>
-            <a:off x="1460000" y="2660000"/>
-            <a:ext cx="5935600" cy="600000"/>
-          </a:xfrm>
-          <a:prstGeom prst="rect">
-            <a:avLst/>
-          </a:prstGeom>
-          <a:noFill/>
-        </p:spPr>
-        <p:txBody>
-          <a:bodyPr wrap="square" anchor="ctr">
-            <a:spAutoFit/>
-          </a:bodyPr>
-          <a:lstStyle/>
-          <a:p>
-            <a:pPr algn="l">
-              <a:spcAft>
-                <a:spcPts val="600"/>
-              </a:spcAft>
-            </a:pPr>
-            <a:r>
-              <a:rPr sz="1900" b="1">
-                <a:solidFill>
-                  <a:srgbClr val="1B2538"/>
-                </a:solidFill>
-                <a:latin typeface="Calibri"/>
-              </a:rPr>
-              <a:t>Автокласс по панораме</a:t>
-            </a:r>
-          </a:p>
-        </p:txBody>
-      </p:sp>
-      <p:sp>
-        <p:nvSpPr>
-          <p:cNvPr id="12" name="Rectangle 11"/>
-          <p:cNvSpPr/>
-          <p:nvPr/>
-        </p:nvSpPr>
-        <p:spPr>
-          <a:xfrm>
-            <a:off x="700000" y="3420000"/>
-            <a:ext cx="560000" cy="600000"/>
-          </a:xfrm>
-          <a:prstGeom prst="rect">
-            <a:avLst/>
-          </a:prstGeom>
-          <a:solidFill>
-            <a:srgbClr val="14A08F"/>
-          </a:solidFill>
-          <a:ln>
-            <a:noFill/>
-          </a:ln>
-          <a:effectLst/>
-        </p:spPr>
-        <p:style>
-          <a:lnRef idx="1">
-            <a:schemeClr val="accent1"/>
-          </a:lnRef>
-          <a:fillRef idx="3">
-            <a:schemeClr val="accent1"/>
-          </a:fillRef>
-          <a:effectRef idx="2">
-            <a:schemeClr val="accent1"/>
-          </a:effectRef>
-          <a:fontRef idx="minor">
-            <a:schemeClr val="lt1"/>
-          </a:fontRef>
-        </p:style>
-        <p:txBody>
-          <a:bodyPr rtlCol="0" anchor="ctr"/>
-          <a:lstStyle/>
-          <a:p>
-            <a:pPr algn="ctr"/>
-          </a:p>
-        </p:txBody>
-      </p:sp>
-      <p:sp>
-        <p:nvSpPr>
-          <p:cNvPr id="13" name="TextBox 12"/>
-          <p:cNvSpPr txBox="1"/>
-          <p:nvPr/>
-        </p:nvSpPr>
-        <p:spPr>
-          <a:xfrm>
-            <a:off x="700000" y="3420000"/>
-            <a:ext cx="560000" cy="600000"/>
-          </a:xfrm>
-          <a:prstGeom prst="rect">
-            <a:avLst/>
-          </a:prstGeom>
-          <a:noFill/>
-        </p:spPr>
-        <p:txBody>
-          <a:bodyPr wrap="square" anchor="ctr">
-            <a:spAutoFit/>
-          </a:bodyPr>
-          <a:lstStyle/>
-          <a:p>
-            <a:pPr algn="ctr">
-              <a:spcAft>
-                <a:spcPts val="600"/>
-              </a:spcAft>
-            </a:pPr>
-            <a:r>
-              <a:rPr sz="2200" b="1">
-                <a:solidFill>
-                  <a:srgbClr val="FFFFFF"/>
-                </a:solidFill>
-                <a:latin typeface="Calibri"/>
-              </a:rPr>
-              <a:t>3</a:t>
-            </a:r>
-          </a:p>
-        </p:txBody>
-      </p:sp>
-      <p:sp>
-        <p:nvSpPr>
-          <p:cNvPr id="14" name="TextBox 13"/>
-          <p:cNvSpPr txBox="1"/>
-          <p:nvPr/>
-        </p:nvSpPr>
-        <p:spPr>
-          <a:xfrm>
-            <a:off x="1460000" y="3420000"/>
-            <a:ext cx="5935600" cy="600000"/>
-          </a:xfrm>
-          <a:prstGeom prst="rect">
-            <a:avLst/>
-          </a:prstGeom>
-          <a:noFill/>
-        </p:spPr>
-        <p:txBody>
-          <a:bodyPr wrap="square" anchor="ctr">
-            <a:spAutoFit/>
-          </a:bodyPr>
-          <a:lstStyle/>
-          <a:p>
-            <a:pPr algn="l">
-              <a:spcAft>
-                <a:spcPts val="600"/>
-              </a:spcAft>
-            </a:pPr>
-            <a:r>
-              <a:rPr sz="1900" b="1">
-                <a:solidFill>
-                  <a:srgbClr val="1B2538"/>
-                </a:solidFill>
-                <a:latin typeface="Calibri"/>
-              </a:rPr>
-              <a:t>Карта + галерея ракурсов</a:t>
-            </a:r>
-          </a:p>
-        </p:txBody>
-      </p:sp>
-      <p:sp>
-        <p:nvSpPr>
-          <p:cNvPr id="15" name="Rectangle 14"/>
-          <p:cNvSpPr/>
-          <p:nvPr/>
-        </p:nvSpPr>
-        <p:spPr>
-          <a:xfrm>
-            <a:off x="700000" y="4180000"/>
-            <a:ext cx="560000" cy="600000"/>
-          </a:xfrm>
-          <a:prstGeom prst="rect">
-            <a:avLst/>
-          </a:prstGeom>
-          <a:solidFill>
-            <a:srgbClr val="14A08F"/>
-          </a:solidFill>
-          <a:ln>
-            <a:noFill/>
-          </a:ln>
-          <a:effectLst/>
-        </p:spPr>
-        <p:style>
-          <a:lnRef idx="1">
-            <a:schemeClr val="accent1"/>
-          </a:lnRef>
-          <a:fillRef idx="3">
-            <a:schemeClr val="accent1"/>
-          </a:fillRef>
-          <a:effectRef idx="2">
-            <a:schemeClr val="accent1"/>
-          </a:effectRef>
-          <a:fontRef idx="minor">
-            <a:schemeClr val="lt1"/>
-          </a:fontRef>
-        </p:style>
-        <p:txBody>
-          <a:bodyPr rtlCol="0" anchor="ctr"/>
-          <a:lstStyle/>
-          <a:p>
-            <a:pPr algn="ctr"/>
-          </a:p>
-        </p:txBody>
-      </p:sp>
-      <p:sp>
-        <p:nvSpPr>
-          <p:cNvPr id="16" name="TextBox 15"/>
-          <p:cNvSpPr txBox="1"/>
-          <p:nvPr/>
-        </p:nvSpPr>
-        <p:spPr>
-          <a:xfrm>
-            <a:off x="700000" y="4180000"/>
-            <a:ext cx="560000" cy="600000"/>
-          </a:xfrm>
-          <a:prstGeom prst="rect">
-            <a:avLst/>
-          </a:prstGeom>
-          <a:noFill/>
-        </p:spPr>
-        <p:txBody>
-          <a:bodyPr wrap="square" anchor="ctr">
-            <a:spAutoFit/>
-          </a:bodyPr>
-          <a:lstStyle/>
-          <a:p>
-            <a:pPr algn="ctr">
-              <a:spcAft>
-                <a:spcPts val="600"/>
-              </a:spcAft>
-            </a:pPr>
-            <a:r>
-              <a:rPr sz="2200" b="1">
-                <a:solidFill>
-                  <a:srgbClr val="FFFFFF"/>
-                </a:solidFill>
-                <a:latin typeface="Calibri"/>
-              </a:rPr>
-              <a:t>4</a:t>
-            </a:r>
-          </a:p>
-        </p:txBody>
-      </p:sp>
-      <p:sp>
-        <p:nvSpPr>
-          <p:cNvPr id="17" name="TextBox 16"/>
-          <p:cNvSpPr txBox="1"/>
-          <p:nvPr/>
-        </p:nvSpPr>
-        <p:spPr>
-          <a:xfrm>
-            <a:off x="1460000" y="4180000"/>
-            <a:ext cx="5935600" cy="600000"/>
-          </a:xfrm>
-          <a:prstGeom prst="rect">
-            <a:avLst/>
-          </a:prstGeom>
-          <a:noFill/>
-        </p:spPr>
-        <p:txBody>
-          <a:bodyPr wrap="square" anchor="ctr">
-            <a:spAutoFit/>
-          </a:bodyPr>
-          <a:lstStyle/>
-          <a:p>
-            <a:pPr algn="l">
-              <a:spcAft>
-                <a:spcPts val="600"/>
-              </a:spcAft>
-            </a:pPr>
-            <a:r>
-              <a:rPr sz="1900" b="1">
-                <a:solidFill>
-                  <a:srgbClr val="1B2538"/>
-                </a:solidFill>
-                <a:latin typeface="Calibri"/>
-              </a:rPr>
-              <a:t>Правка аналитиком</a:t>
-            </a:r>
-          </a:p>
-        </p:txBody>
-      </p:sp>
-      <p:sp>
-        <p:nvSpPr>
-          <p:cNvPr id="18" name="Rectangle 17"/>
-          <p:cNvSpPr/>
-          <p:nvPr/>
-        </p:nvSpPr>
-        <p:spPr>
-          <a:xfrm>
-            <a:off x="700000" y="4940000"/>
-            <a:ext cx="560000" cy="600000"/>
-          </a:xfrm>
-          <a:prstGeom prst="rect">
-            <a:avLst/>
-          </a:prstGeom>
-          <a:solidFill>
-            <a:srgbClr val="14A08F"/>
-          </a:solidFill>
-          <a:ln>
-            <a:noFill/>
-          </a:ln>
-          <a:effectLst/>
-        </p:spPr>
-        <p:style>
-          <a:lnRef idx="1">
-            <a:schemeClr val="accent1"/>
-          </a:lnRef>
-          <a:fillRef idx="3">
-            <a:schemeClr val="accent1"/>
-          </a:fillRef>
-          <a:effectRef idx="2">
-            <a:schemeClr val="accent1"/>
-          </a:effectRef>
-          <a:fontRef idx="minor">
-            <a:schemeClr val="lt1"/>
-          </a:fontRef>
-        </p:style>
-        <p:txBody>
-          <a:bodyPr rtlCol="0" anchor="ctr"/>
-          <a:lstStyle/>
-          <a:p>
-            <a:pPr algn="ctr"/>
-          </a:p>
-        </p:txBody>
-      </p:sp>
-      <p:sp>
-        <p:nvSpPr>
-          <p:cNvPr id="19" name="TextBox 18"/>
-          <p:cNvSpPr txBox="1"/>
-          <p:nvPr/>
-        </p:nvSpPr>
-        <p:spPr>
-          <a:xfrm>
-            <a:off x="700000" y="4940000"/>
-            <a:ext cx="560000" cy="600000"/>
-          </a:xfrm>
-          <a:prstGeom prst="rect">
-            <a:avLst/>
-          </a:prstGeom>
-          <a:noFill/>
-        </p:spPr>
-        <p:txBody>
-          <a:bodyPr wrap="square" anchor="ctr">
-            <a:spAutoFit/>
-          </a:bodyPr>
-          <a:lstStyle/>
-          <a:p>
-            <a:pPr algn="ctr">
-              <a:spcAft>
-                <a:spcPts val="600"/>
-              </a:spcAft>
-            </a:pPr>
-            <a:r>
-              <a:rPr sz="2200" b="1">
-                <a:solidFill>
-                  <a:srgbClr val="FFFFFF"/>
-                </a:solidFill>
-                <a:latin typeface="Calibri"/>
-              </a:rPr>
-              <a:t>5</a:t>
-            </a:r>
-          </a:p>
-        </p:txBody>
-      </p:sp>
-      <p:sp>
-        <p:nvSpPr>
-          <p:cNvPr id="20" name="TextBox 19"/>
-          <p:cNvSpPr txBox="1"/>
-          <p:nvPr/>
-        </p:nvSpPr>
-        <p:spPr>
-          <a:xfrm>
-            <a:off x="1460000" y="4940000"/>
-            <a:ext cx="5935600" cy="600000"/>
-          </a:xfrm>
-          <a:prstGeom prst="rect">
-            <a:avLst/>
-          </a:prstGeom>
-          <a:noFill/>
-        </p:spPr>
-        <p:txBody>
-          <a:bodyPr wrap="square" anchor="ctr">
-            <a:spAutoFit/>
-          </a:bodyPr>
-          <a:lstStyle/>
-          <a:p>
-            <a:pPr algn="l">
-              <a:spcAft>
-                <a:spcPts val="600"/>
-              </a:spcAft>
-            </a:pPr>
-            <a:r>
-              <a:rPr sz="1900" b="1">
-                <a:solidFill>
-                  <a:srgbClr val="1B2538"/>
-                </a:solidFill>
-                <a:latin typeface="Calibri"/>
-              </a:rPr>
-              <a:t>Экспорт GPKG</a:t>
-            </a:r>
-          </a:p>
-        </p:txBody>
-      </p:sp>
-      <p:sp>
-        <p:nvSpPr>
-          <p:cNvPr id="21" name="Rectangle 20"/>
-          <p:cNvSpPr/>
-          <p:nvPr/>
-        </p:nvSpPr>
-        <p:spPr>
-          <a:xfrm>
-            <a:off x="7606880" y="1900000"/>
-            <a:ext cx="3885120" cy="3400000"/>
-          </a:xfrm>
-          <a:prstGeom prst="rect">
-            <a:avLst/>
-          </a:prstGeom>
-          <a:solidFill>
-            <a:srgbClr val="0F1E3D"/>
-          </a:solidFill>
-          <a:ln>
-            <a:noFill/>
-          </a:ln>
-          <a:effectLst/>
-        </p:spPr>
-        <p:style>
-          <a:lnRef idx="1">
-            <a:schemeClr val="accent1"/>
-          </a:lnRef>
-          <a:fillRef idx="3">
-            <a:schemeClr val="accent1"/>
-          </a:fillRef>
-          <a:effectRef idx="2">
-            <a:schemeClr val="accent1"/>
-          </a:effectRef>
-          <a:fontRef idx="minor">
-            <a:schemeClr val="lt1"/>
-          </a:fontRef>
-        </p:style>
-        <p:txBody>
-          <a:bodyPr rtlCol="0" anchor="ctr"/>
-          <a:lstStyle/>
-          <a:p>
-            <a:pPr algn="ctr"/>
-          </a:p>
-        </p:txBody>
-      </p:sp>
-      <p:sp>
-        <p:nvSpPr>
-          <p:cNvPr id="22" name="TextBox 21"/>
-          <p:cNvSpPr txBox="1"/>
-          <p:nvPr/>
-        </p:nvSpPr>
-        <p:spPr>
-          <a:xfrm>
-            <a:off x="7886880" y="2150000"/>
-            <a:ext cx="3385120" cy="3000000"/>
+            <a:ext cx="10792000" cy="3800000"/>
           </a:xfrm>
           <a:prstGeom prst="rect">
             <a:avLst/>
@@ -10164,92 +11070,92 @@
           </a:bodyPr>
           <a:lstStyle/>
           <a:p>
-            <a:pPr algn="l">
+            <a:pPr>
               <a:spcAft>
-                <a:spcPts val="1200"/>
+                <a:spcPts val="1600"/>
               </a:spcAft>
             </a:pPr>
             <a:r>
-              <a:rPr sz="1400" b="1">
+              <a:rPr sz="1900" b="0">
+                <a:solidFill>
+                  <a:srgbClr val="1B2538"/>
+                </a:solidFill>
+                <a:latin typeface="Calibri"/>
+              </a:rPr>
+              <a:t>На всём GPKG текстовая эвристика даёт </a:t>
+            </a:r>
+            <a:r>
+              <a:rPr sz="1900" b="1">
                 <a:solidFill>
                   <a:srgbClr val="E87A22"/>
                 </a:solidFill>
                 <a:latin typeface="Calibri"/>
               </a:rPr>
-              <a:t>ПЕТЛЯ ОБРАТНОЙ СВЯЗИ</a:t>
-            </a:r>
-            <a:r>
-              <a:rPr sz="1600" b="0">
-                <a:solidFill>
-                  <a:srgbClr val="FFFFFF"/>
-                </a:solidFill>
-                <a:latin typeface="Calibri"/>
-              </a:rPr>
-              <a:t>Правки аналитиков = gold-метки</a:t>
+              <a:t>87.6%</a:t>
+            </a:r>
+            <a:r>
+              <a:rPr sz="1900" b="0">
+                <a:solidFill>
+                  <a:srgbClr val="1B2538"/>
+                </a:solidFill>
+                <a:latin typeface="Calibri"/>
+              </a:rPr>
+              <a:t> — выше ML. И это ожидаемо: текст кадастра уже содержит сильные подсказки.</a:t>
             </a:r>
           </a:p>
           <a:p>
             <a:pPr>
               <a:spcAft>
-                <a:spcPts val="1200"/>
+                <a:spcPts val="1600"/>
               </a:spcAft>
             </a:pPr>
             <a:r>
-              <a:rPr sz="1600" b="1">
-                <a:solidFill>
-                  <a:srgbClr val="E87A22"/>
-                </a:solidFill>
-                <a:latin typeface="Calibri"/>
-              </a:rPr>
-              <a:t>7535 участков</a:t>
-            </a:r>
-            <a:r>
-              <a:rPr sz="1600" b="0">
-                <a:solidFill>
-                  <a:srgbClr val="FFFFFF"/>
-                </a:solidFill>
-                <a:latin typeface="Calibri"/>
-              </a:rPr>
-              <a:t> с корректировками</a:t>
+              <a:rPr sz="1900" b="1">
+                <a:solidFill>
+                  <a:srgbClr val="14A08F"/>
+                </a:solidFill>
+                <a:latin typeface="Calibri"/>
+              </a:rPr>
+              <a:t>Но на кластере «зелень во дворах» текст бессилен — там класс различает только панорама. Это и есть ниша ML.</a:t>
             </a:r>
           </a:p>
           <a:p>
             <a:pPr>
               <a:spcAft>
-                <a:spcPts val="1200"/>
+                <a:spcPts val="1600"/>
               </a:spcAft>
             </a:pPr>
             <a:r>
-              <a:rPr sz="1600" b="0">
-                <a:solidFill>
-                  <a:srgbClr val="FFFFFF"/>
-                </a:solidFill>
-                <a:latin typeface="Calibri"/>
-              </a:rPr>
-              <a:t>→ дообучение модели</a:t>
+              <a:rPr sz="1900" b="0">
+                <a:solidFill>
+                  <a:srgbClr val="1B2538"/>
+                </a:solidFill>
+                <a:latin typeface="Calibri"/>
+              </a:rPr>
+              <a:t>Ограничения честно задокументированы: domain shift (обучение на research-домене), малые выборки с панорамой (25–75 объектов).</a:t>
             </a:r>
           </a:p>
           <a:p>
             <a:pPr>
               <a:spcAft>
-                <a:spcPts val="1200"/>
+                <a:spcPts val="1600"/>
               </a:spcAft>
             </a:pPr>
             <a:r>
-              <a:rPr sz="1400" b="0">
-                <a:solidFill>
-                  <a:srgbClr val="C7D0DC"/>
-                </a:solidFill>
-                <a:latin typeface="Calibri"/>
-              </a:rPr>
-              <a:t>Flask + Leaflet, экспорт в GeoPackage</a:t>
-            </a:r>
-          </a:p>
-        </p:txBody>
-      </p:sp>
-      <p:sp>
-        <p:nvSpPr>
-          <p:cNvPr id="23" name="TextBox 22"/>
+              <a:rPr sz="1900" b="1">
+                <a:solidFill>
+                  <a:srgbClr val="1B2538"/>
+                </a:solidFill>
+                <a:latin typeface="Calibri"/>
+              </a:rPr>
+              <a:t>Вывод: ML — дополнение к тексту на трудных кластерах, а не замена эвристики.</a:t>
+            </a:r>
+          </a:p>
+        </p:txBody>
+      </p:sp>
+      <p:sp>
+        <p:nvSpPr>
+          <p:cNvPr id="7" name="TextBox 6"/>
           <p:cNvSpPr txBox="1"/>
           <p:nvPr/>
         </p:nvSpPr>
@@ -10281,7 +11187,7 @@
                 </a:solidFill>
                 <a:latin typeface="Calibri"/>
               </a:rPr>
-              <a:t>8/10</a:t>
+              <a:t>8/11</a:t>
             </a:r>
           </a:p>
         </p:txBody>
@@ -10470,7 +11376,7 @@
                 </a:solidFill>
                 <a:latin typeface="Calibri"/>
               </a:rPr>
-              <a:t>ИНЖЕНЕРИЯ И MLOPS</a:t>
+              <a:t>ПРОДУКТ</a:t>
             </a:r>
           </a:p>
           <a:p>
@@ -10481,7 +11387,7 @@
                 </a:solidFill>
                 <a:latin typeface="Calibri"/>
               </a:rPr>
-              <a:t>Воспроизводимо и по-взрослому</a:t>
+              <a:t>Веб-инструмент аналитика с обратной связью</a:t>
             </a:r>
           </a:p>
         </p:txBody>
@@ -10495,53 +11401,7 @@
         <p:spPr>
           <a:xfrm>
             <a:off x="700000" y="1900000"/>
-            <a:ext cx="3464000" cy="1350000"/>
-          </a:xfrm>
-          <a:prstGeom prst="rect">
-            <a:avLst/>
-          </a:prstGeom>
-          <a:solidFill>
-            <a:srgbClr val="F3F5F7"/>
-          </a:solidFill>
-          <a:ln w="12700">
-            <a:solidFill>
-              <a:srgbClr val="DDE3EA"/>
-            </a:solidFill>
-          </a:ln>
-          <a:effectLst/>
-        </p:spPr>
-        <p:style>
-          <a:lnRef idx="1">
-            <a:schemeClr val="accent1"/>
-          </a:lnRef>
-          <a:fillRef idx="3">
-            <a:schemeClr val="accent1"/>
-          </a:fillRef>
-          <a:effectRef idx="2">
-            <a:schemeClr val="accent1"/>
-          </a:effectRef>
-          <a:fontRef idx="minor">
-            <a:schemeClr val="lt1"/>
-          </a:fontRef>
-        </p:style>
-        <p:txBody>
-          <a:bodyPr rtlCol="0" anchor="ctr"/>
-          <a:lstStyle/>
-          <a:p>
-            <a:pPr algn="ctr"/>
-          </a:p>
-        </p:txBody>
-      </p:sp>
-      <p:sp>
-        <p:nvSpPr>
-          <p:cNvPr id="7" name="Rectangle 6"/>
-          <p:cNvSpPr/>
-          <p:nvPr/>
-        </p:nvSpPr>
-        <p:spPr>
-          <a:xfrm>
-            <a:off x="700000" y="1900000"/>
-            <a:ext cx="3464000" cy="140000"/>
+            <a:ext cx="560000" cy="600000"/>
           </a:xfrm>
           <a:prstGeom prst="rect">
             <a:avLst/>
@@ -10578,14 +11438,53 @@
       </p:sp>
       <p:sp>
         <p:nvSpPr>
+          <p:cNvPr id="7" name="TextBox 6"/>
+          <p:cNvSpPr txBox="1"/>
+          <p:nvPr/>
+        </p:nvSpPr>
+        <p:spPr>
+          <a:xfrm>
+            <a:off x="700000" y="1900000"/>
+            <a:ext cx="560000" cy="600000"/>
+          </a:xfrm>
+          <a:prstGeom prst="rect">
+            <a:avLst/>
+          </a:prstGeom>
+          <a:noFill/>
+        </p:spPr>
+        <p:txBody>
+          <a:bodyPr wrap="square" anchor="ctr">
+            <a:spAutoFit/>
+          </a:bodyPr>
+          <a:lstStyle/>
+          <a:p>
+            <a:pPr algn="ctr">
+              <a:spcAft>
+                <a:spcPts val="600"/>
+              </a:spcAft>
+            </a:pPr>
+            <a:r>
+              <a:rPr sz="2200" b="1">
+                <a:solidFill>
+                  <a:srgbClr val="FFFFFF"/>
+                </a:solidFill>
+                <a:latin typeface="Calibri"/>
+              </a:rPr>
+              <a:t>1</a:t>
+            </a:r>
+          </a:p>
+        </p:txBody>
+      </p:sp>
+      <p:sp>
+        <p:nvSpPr>
           <p:cNvPr id="8" name="TextBox 7"/>
           <p:cNvSpPr txBox="1"/>
           <p:nvPr/>
         </p:nvSpPr>
         <p:spPr>
           <a:xfrm>
-            <a:off x="940000" y="2160000"/>
-            <a:ext cx="3064000" cy="950000"/>
+            <a:off x="1460000" y="1900000"/>
+            <a:ext cx="5935600" cy="600000"/>
           </a:xfrm>
           <a:prstGeom prst="rect">
             <a:avLst/>
@@ -10593,7 +11492,7 @@
           <a:noFill/>
         </p:spPr>
         <p:txBody>
-          <a:bodyPr wrap="square" anchor="t">
+          <a:bodyPr wrap="square" anchor="ctr">
             <a:spAutoFit/>
           </a:bodyPr>
           <a:lstStyle/>
@@ -10604,25 +11503,13 @@
               </a:spcAft>
             </a:pPr>
             <a:r>
-              <a:rPr sz="1600" b="1">
-                <a:solidFill>
-                  <a:srgbClr val="0F1E3D"/>
-                </a:solidFill>
-                <a:latin typeface="Calibri"/>
-              </a:rPr>
-              <a:t>Стек</a:t>
-            </a:r>
-          </a:p>
-          <a:p>
-            <a:r>
-              <a:rPr sz="1300">
-                <a:solidFill>
-                  <a:srgbClr val="5B6672"/>
-                </a:solidFill>
-                <a:latin typeface="Calibri"/>
-              </a:rPr>
-              <a:t>Python · PyTorch · OpenCLIP
-Flask · GeoPandas</a:t>
+              <a:rPr sz="1900" b="1">
+                <a:solidFill>
+                  <a:srgbClr val="1B2538"/>
+                </a:solidFill>
+                <a:latin typeface="Calibri"/>
+              </a:rPr>
+              <a:t>Загрузка GPKG</a:t>
             </a:r>
           </a:p>
         </p:txBody>
@@ -10635,54 +11522,8 @@
         </p:nvSpPr>
         <p:spPr>
           <a:xfrm>
-            <a:off x="4364000" y="1900000"/>
-            <a:ext cx="3464000" cy="1350000"/>
-          </a:xfrm>
-          <a:prstGeom prst="rect">
-            <a:avLst/>
-          </a:prstGeom>
-          <a:solidFill>
-            <a:srgbClr val="F3F5F7"/>
-          </a:solidFill>
-          <a:ln w="12700">
-            <a:solidFill>
-              <a:srgbClr val="DDE3EA"/>
-            </a:solidFill>
-          </a:ln>
-          <a:effectLst/>
-        </p:spPr>
-        <p:style>
-          <a:lnRef idx="1">
-            <a:schemeClr val="accent1"/>
-          </a:lnRef>
-          <a:fillRef idx="3">
-            <a:schemeClr val="accent1"/>
-          </a:fillRef>
-          <a:effectRef idx="2">
-            <a:schemeClr val="accent1"/>
-          </a:effectRef>
-          <a:fontRef idx="minor">
-            <a:schemeClr val="lt1"/>
-          </a:fontRef>
-        </p:style>
-        <p:txBody>
-          <a:bodyPr rtlCol="0" anchor="ctr"/>
-          <a:lstStyle/>
-          <a:p>
-            <a:pPr algn="ctr"/>
-          </a:p>
-        </p:txBody>
-      </p:sp>
-      <p:sp>
-        <p:nvSpPr>
-          <p:cNvPr id="10" name="Rectangle 9"/>
-          <p:cNvSpPr/>
-          <p:nvPr/>
-        </p:nvSpPr>
-        <p:spPr>
-          <a:xfrm>
-            <a:off x="4364000" y="1900000"/>
-            <a:ext cx="3464000" cy="140000"/>
+            <a:off x="700000" y="2660000"/>
+            <a:ext cx="560000" cy="600000"/>
           </a:xfrm>
           <a:prstGeom prst="rect">
             <a:avLst/>
@@ -10719,14 +11560,53 @@
       </p:sp>
       <p:sp>
         <p:nvSpPr>
+          <p:cNvPr id="10" name="TextBox 9"/>
+          <p:cNvSpPr txBox="1"/>
+          <p:nvPr/>
+        </p:nvSpPr>
+        <p:spPr>
+          <a:xfrm>
+            <a:off x="700000" y="2660000"/>
+            <a:ext cx="560000" cy="600000"/>
+          </a:xfrm>
+          <a:prstGeom prst="rect">
+            <a:avLst/>
+          </a:prstGeom>
+          <a:noFill/>
+        </p:spPr>
+        <p:txBody>
+          <a:bodyPr wrap="square" anchor="ctr">
+            <a:spAutoFit/>
+          </a:bodyPr>
+          <a:lstStyle/>
+          <a:p>
+            <a:pPr algn="ctr">
+              <a:spcAft>
+                <a:spcPts val="600"/>
+              </a:spcAft>
+            </a:pPr>
+            <a:r>
+              <a:rPr sz="2200" b="1">
+                <a:solidFill>
+                  <a:srgbClr val="FFFFFF"/>
+                </a:solidFill>
+                <a:latin typeface="Calibri"/>
+              </a:rPr>
+              <a:t>2</a:t>
+            </a:r>
+          </a:p>
+        </p:txBody>
+      </p:sp>
+      <p:sp>
+        <p:nvSpPr>
           <p:cNvPr id="11" name="TextBox 10"/>
           <p:cNvSpPr txBox="1"/>
           <p:nvPr/>
         </p:nvSpPr>
         <p:spPr>
           <a:xfrm>
-            <a:off x="4604000" y="2160000"/>
-            <a:ext cx="3064000" cy="950000"/>
+            <a:off x="1460000" y="2660000"/>
+            <a:ext cx="5935600" cy="600000"/>
           </a:xfrm>
           <a:prstGeom prst="rect">
             <a:avLst/>
@@ -10734,7 +11614,7 @@
           <a:noFill/>
         </p:spPr>
         <p:txBody>
-          <a:bodyPr wrap="square" anchor="t">
+          <a:bodyPr wrap="square" anchor="ctr">
             <a:spAutoFit/>
           </a:bodyPr>
           <a:lstStyle/>
@@ -10745,25 +11625,13 @@
               </a:spcAft>
             </a:pPr>
             <a:r>
-              <a:rPr sz="1600" b="1">
-                <a:solidFill>
-                  <a:srgbClr val="0F1E3D"/>
-                </a:solidFill>
-                <a:latin typeface="Calibri"/>
-              </a:rPr>
-              <a:t>Конфиги и трекинг</a:t>
-            </a:r>
-          </a:p>
-          <a:p>
-            <a:r>
-              <a:rPr sz="1300">
-                <a:solidFill>
-                  <a:srgbClr val="5B6672"/>
-                </a:solidFill>
-                <a:latin typeface="Calibri"/>
-              </a:rPr>
-              <a:t>Hydra · TensorBoard
-W&amp;B · MLflow</a:t>
+              <a:rPr sz="1900" b="1">
+                <a:solidFill>
+                  <a:srgbClr val="1B2538"/>
+                </a:solidFill>
+                <a:latin typeface="Calibri"/>
+              </a:rPr>
+              <a:t>Автокласс по панораме</a:t>
             </a:r>
           </a:p>
         </p:txBody>
@@ -10776,54 +11644,8 @@
         </p:nvSpPr>
         <p:spPr>
           <a:xfrm>
-            <a:off x="8028000" y="1900000"/>
-            <a:ext cx="3464000" cy="1350000"/>
-          </a:xfrm>
-          <a:prstGeom prst="rect">
-            <a:avLst/>
-          </a:prstGeom>
-          <a:solidFill>
-            <a:srgbClr val="F3F5F7"/>
-          </a:solidFill>
-          <a:ln w="12700">
-            <a:solidFill>
-              <a:srgbClr val="DDE3EA"/>
-            </a:solidFill>
-          </a:ln>
-          <a:effectLst/>
-        </p:spPr>
-        <p:style>
-          <a:lnRef idx="1">
-            <a:schemeClr val="accent1"/>
-          </a:lnRef>
-          <a:fillRef idx="3">
-            <a:schemeClr val="accent1"/>
-          </a:fillRef>
-          <a:effectRef idx="2">
-            <a:schemeClr val="accent1"/>
-          </a:effectRef>
-          <a:fontRef idx="minor">
-            <a:schemeClr val="lt1"/>
-          </a:fontRef>
-        </p:style>
-        <p:txBody>
-          <a:bodyPr rtlCol="0" anchor="ctr"/>
-          <a:lstStyle/>
-          <a:p>
-            <a:pPr algn="ctr"/>
-          </a:p>
-        </p:txBody>
-      </p:sp>
-      <p:sp>
-        <p:nvSpPr>
-          <p:cNvPr id="13" name="Rectangle 12"/>
-          <p:cNvSpPr/>
-          <p:nvPr/>
-        </p:nvSpPr>
-        <p:spPr>
-          <a:xfrm>
-            <a:off x="8028000" y="1900000"/>
-            <a:ext cx="3464000" cy="140000"/>
+            <a:off x="700000" y="3420000"/>
+            <a:ext cx="560000" cy="600000"/>
           </a:xfrm>
           <a:prstGeom prst="rect">
             <a:avLst/>
@@ -10860,14 +11682,53 @@
       </p:sp>
       <p:sp>
         <p:nvSpPr>
+          <p:cNvPr id="13" name="TextBox 12"/>
+          <p:cNvSpPr txBox="1"/>
+          <p:nvPr/>
+        </p:nvSpPr>
+        <p:spPr>
+          <a:xfrm>
+            <a:off x="700000" y="3420000"/>
+            <a:ext cx="560000" cy="600000"/>
+          </a:xfrm>
+          <a:prstGeom prst="rect">
+            <a:avLst/>
+          </a:prstGeom>
+          <a:noFill/>
+        </p:spPr>
+        <p:txBody>
+          <a:bodyPr wrap="square" anchor="ctr">
+            <a:spAutoFit/>
+          </a:bodyPr>
+          <a:lstStyle/>
+          <a:p>
+            <a:pPr algn="ctr">
+              <a:spcAft>
+                <a:spcPts val="600"/>
+              </a:spcAft>
+            </a:pPr>
+            <a:r>
+              <a:rPr sz="2200" b="1">
+                <a:solidFill>
+                  <a:srgbClr val="FFFFFF"/>
+                </a:solidFill>
+                <a:latin typeface="Calibri"/>
+              </a:rPr>
+              <a:t>3</a:t>
+            </a:r>
+          </a:p>
+        </p:txBody>
+      </p:sp>
+      <p:sp>
+        <p:nvSpPr>
           <p:cNvPr id="14" name="TextBox 13"/>
           <p:cNvSpPr txBox="1"/>
           <p:nvPr/>
         </p:nvSpPr>
         <p:spPr>
           <a:xfrm>
-            <a:off x="8268000" y="2160000"/>
-            <a:ext cx="3064000" cy="950000"/>
+            <a:off x="1460000" y="3420000"/>
+            <a:ext cx="5935600" cy="600000"/>
           </a:xfrm>
           <a:prstGeom prst="rect">
             <a:avLst/>
@@ -10875,7 +11736,7 @@
           <a:noFill/>
         </p:spPr>
         <p:txBody>
-          <a:bodyPr wrap="square" anchor="t">
+          <a:bodyPr wrap="square" anchor="ctr">
             <a:spAutoFit/>
           </a:bodyPr>
           <a:lstStyle/>
@@ -10886,25 +11747,13 @@
               </a:spcAft>
             </a:pPr>
             <a:r>
-              <a:rPr sz="1600" b="1">
-                <a:solidFill>
-                  <a:srgbClr val="0F1E3D"/>
-                </a:solidFill>
-                <a:latin typeface="Calibri"/>
-              </a:rPr>
-              <a:t>Пайплайн</a:t>
-            </a:r>
-          </a:p>
-          <a:p>
-            <a:r>
-              <a:rPr sz="1300">
-                <a:solidFill>
-                  <a:srgbClr val="5B6672"/>
-                </a:solidFill>
-                <a:latin typeface="Calibri"/>
-              </a:rPr>
-              <a:t>DVC · Makefile
-7 модульных шагов</a:t>
+              <a:rPr sz="1900" b="1">
+                <a:solidFill>
+                  <a:srgbClr val="1B2538"/>
+                </a:solidFill>
+                <a:latin typeface="Calibri"/>
+              </a:rPr>
+              <a:t>Карта + галерея ракурсов</a:t>
             </a:r>
           </a:p>
         </p:txBody>
@@ -10917,54 +11766,8 @@
         </p:nvSpPr>
         <p:spPr>
           <a:xfrm>
-            <a:off x="700000" y="3500000"/>
-            <a:ext cx="3464000" cy="1350000"/>
-          </a:xfrm>
-          <a:prstGeom prst="rect">
-            <a:avLst/>
-          </a:prstGeom>
-          <a:solidFill>
-            <a:srgbClr val="F3F5F7"/>
-          </a:solidFill>
-          <a:ln w="12700">
-            <a:solidFill>
-              <a:srgbClr val="DDE3EA"/>
-            </a:solidFill>
-          </a:ln>
-          <a:effectLst/>
-        </p:spPr>
-        <p:style>
-          <a:lnRef idx="1">
-            <a:schemeClr val="accent1"/>
-          </a:lnRef>
-          <a:fillRef idx="3">
-            <a:schemeClr val="accent1"/>
-          </a:fillRef>
-          <a:effectRef idx="2">
-            <a:schemeClr val="accent1"/>
-          </a:effectRef>
-          <a:fontRef idx="minor">
-            <a:schemeClr val="lt1"/>
-          </a:fontRef>
-        </p:style>
-        <p:txBody>
-          <a:bodyPr rtlCol="0" anchor="ctr"/>
-          <a:lstStyle/>
-          <a:p>
-            <a:pPr algn="ctr"/>
-          </a:p>
-        </p:txBody>
-      </p:sp>
-      <p:sp>
-        <p:nvSpPr>
-          <p:cNvPr id="16" name="Rectangle 15"/>
-          <p:cNvSpPr/>
-          <p:nvPr/>
-        </p:nvSpPr>
-        <p:spPr>
-          <a:xfrm>
-            <a:off x="700000" y="3500000"/>
-            <a:ext cx="3464000" cy="140000"/>
+            <a:off x="700000" y="4180000"/>
+            <a:ext cx="560000" cy="600000"/>
           </a:xfrm>
           <a:prstGeom prst="rect">
             <a:avLst/>
@@ -11001,14 +11804,53 @@
       </p:sp>
       <p:sp>
         <p:nvSpPr>
+          <p:cNvPr id="16" name="TextBox 15"/>
+          <p:cNvSpPr txBox="1"/>
+          <p:nvPr/>
+        </p:nvSpPr>
+        <p:spPr>
+          <a:xfrm>
+            <a:off x="700000" y="4180000"/>
+            <a:ext cx="560000" cy="600000"/>
+          </a:xfrm>
+          <a:prstGeom prst="rect">
+            <a:avLst/>
+          </a:prstGeom>
+          <a:noFill/>
+        </p:spPr>
+        <p:txBody>
+          <a:bodyPr wrap="square" anchor="ctr">
+            <a:spAutoFit/>
+          </a:bodyPr>
+          <a:lstStyle/>
+          <a:p>
+            <a:pPr algn="ctr">
+              <a:spcAft>
+                <a:spcPts val="600"/>
+              </a:spcAft>
+            </a:pPr>
+            <a:r>
+              <a:rPr sz="2200" b="1">
+                <a:solidFill>
+                  <a:srgbClr val="FFFFFF"/>
+                </a:solidFill>
+                <a:latin typeface="Calibri"/>
+              </a:rPr>
+              <a:t>4</a:t>
+            </a:r>
+          </a:p>
+        </p:txBody>
+      </p:sp>
+      <p:sp>
+        <p:nvSpPr>
           <p:cNvPr id="17" name="TextBox 16"/>
           <p:cNvSpPr txBox="1"/>
           <p:nvPr/>
         </p:nvSpPr>
         <p:spPr>
           <a:xfrm>
-            <a:off x="940000" y="3760000"/>
-            <a:ext cx="3064000" cy="950000"/>
+            <a:off x="1460000" y="4180000"/>
+            <a:ext cx="5935600" cy="600000"/>
           </a:xfrm>
           <a:prstGeom prst="rect">
             <a:avLst/>
@@ -11016,7 +11858,7 @@
           <a:noFill/>
         </p:spPr>
         <p:txBody>
-          <a:bodyPr wrap="square" anchor="t">
+          <a:bodyPr wrap="square" anchor="ctr">
             <a:spAutoFit/>
           </a:bodyPr>
           <a:lstStyle/>
@@ -11027,25 +11869,13 @@
               </a:spcAft>
             </a:pPr>
             <a:r>
-              <a:rPr sz="1600" b="1">
-                <a:solidFill>
-                  <a:srgbClr val="0F1E3D"/>
-                </a:solidFill>
-                <a:latin typeface="Calibri"/>
-              </a:rPr>
-              <a:t>Качество</a:t>
-            </a:r>
-          </a:p>
-          <a:p>
-            <a:r>
-              <a:rPr sz="1300">
-                <a:solidFill>
-                  <a:srgbClr val="5B6672"/>
-                </a:solidFill>
-                <a:latin typeface="Calibri"/>
-              </a:rPr>
-              <a:t>pytest · ruff · black
-pre-commit</a:t>
+              <a:rPr sz="1900" b="1">
+                <a:solidFill>
+                  <a:srgbClr val="1B2538"/>
+                </a:solidFill>
+                <a:latin typeface="Calibri"/>
+              </a:rPr>
+              <a:t>Правка аналитиком</a:t>
             </a:r>
           </a:p>
         </p:txBody>
@@ -11058,54 +11888,8 @@
         </p:nvSpPr>
         <p:spPr>
           <a:xfrm>
-            <a:off x="4364000" y="3500000"/>
-            <a:ext cx="3464000" cy="1350000"/>
-          </a:xfrm>
-          <a:prstGeom prst="rect">
-            <a:avLst/>
-          </a:prstGeom>
-          <a:solidFill>
-            <a:srgbClr val="F3F5F7"/>
-          </a:solidFill>
-          <a:ln w="12700">
-            <a:solidFill>
-              <a:srgbClr val="DDE3EA"/>
-            </a:solidFill>
-          </a:ln>
-          <a:effectLst/>
-        </p:spPr>
-        <p:style>
-          <a:lnRef idx="1">
-            <a:schemeClr val="accent1"/>
-          </a:lnRef>
-          <a:fillRef idx="3">
-            <a:schemeClr val="accent1"/>
-          </a:fillRef>
-          <a:effectRef idx="2">
-            <a:schemeClr val="accent1"/>
-          </a:effectRef>
-          <a:fontRef idx="minor">
-            <a:schemeClr val="lt1"/>
-          </a:fontRef>
-        </p:style>
-        <p:txBody>
-          <a:bodyPr rtlCol="0" anchor="ctr"/>
-          <a:lstStyle/>
-          <a:p>
-            <a:pPr algn="ctr"/>
-          </a:p>
-        </p:txBody>
-      </p:sp>
-      <p:sp>
-        <p:nvSpPr>
-          <p:cNvPr id="19" name="Rectangle 18"/>
-          <p:cNvSpPr/>
-          <p:nvPr/>
-        </p:nvSpPr>
-        <p:spPr>
-          <a:xfrm>
-            <a:off x="4364000" y="3500000"/>
-            <a:ext cx="3464000" cy="140000"/>
+            <a:off x="700000" y="4940000"/>
+            <a:ext cx="560000" cy="600000"/>
           </a:xfrm>
           <a:prstGeom prst="rect">
             <a:avLst/>
@@ -11142,14 +11926,53 @@
       </p:sp>
       <p:sp>
         <p:nvSpPr>
+          <p:cNvPr id="19" name="TextBox 18"/>
+          <p:cNvSpPr txBox="1"/>
+          <p:nvPr/>
+        </p:nvSpPr>
+        <p:spPr>
+          <a:xfrm>
+            <a:off x="700000" y="4940000"/>
+            <a:ext cx="560000" cy="600000"/>
+          </a:xfrm>
+          <a:prstGeom prst="rect">
+            <a:avLst/>
+          </a:prstGeom>
+          <a:noFill/>
+        </p:spPr>
+        <p:txBody>
+          <a:bodyPr wrap="square" anchor="ctr">
+            <a:spAutoFit/>
+          </a:bodyPr>
+          <a:lstStyle/>
+          <a:p>
+            <a:pPr algn="ctr">
+              <a:spcAft>
+                <a:spcPts val="600"/>
+              </a:spcAft>
+            </a:pPr>
+            <a:r>
+              <a:rPr sz="2200" b="1">
+                <a:solidFill>
+                  <a:srgbClr val="FFFFFF"/>
+                </a:solidFill>
+                <a:latin typeface="Calibri"/>
+              </a:rPr>
+              <a:t>5</a:t>
+            </a:r>
+          </a:p>
+        </p:txBody>
+      </p:sp>
+      <p:sp>
+        <p:nvSpPr>
           <p:cNvPr id="20" name="TextBox 19"/>
           <p:cNvSpPr txBox="1"/>
           <p:nvPr/>
         </p:nvSpPr>
         <p:spPr>
           <a:xfrm>
-            <a:off x="4604000" y="3760000"/>
-            <a:ext cx="3064000" cy="950000"/>
+            <a:off x="1460000" y="4940000"/>
+            <a:ext cx="5935600" cy="600000"/>
           </a:xfrm>
           <a:prstGeom prst="rect">
             <a:avLst/>
@@ -11157,7 +11980,7 @@
           <a:noFill/>
         </p:spPr>
         <p:txBody>
-          <a:bodyPr wrap="square" anchor="t">
+          <a:bodyPr wrap="square" anchor="ctr">
             <a:spAutoFit/>
           </a:bodyPr>
           <a:lstStyle/>
@@ -11168,25 +11991,13 @@
               </a:spcAft>
             </a:pPr>
             <a:r>
-              <a:rPr sz="1600" b="1">
-                <a:solidFill>
-                  <a:srgbClr val="0F1E3D"/>
-                </a:solidFill>
-                <a:latin typeface="Calibri"/>
-              </a:rPr>
-              <a:t>Доставка</a:t>
-            </a:r>
-          </a:p>
-          <a:p>
-            <a:r>
-              <a:rPr sz="1300">
-                <a:solidFill>
-                  <a:srgbClr val="5B6672"/>
-                </a:solidFill>
-                <a:latin typeface="Calibri"/>
-              </a:rPr>
-              <a:t>Docker · GitHub Actions CI
-demo-данные для CI</a:t>
+              <a:rPr sz="1900" b="1">
+                <a:solidFill>
+                  <a:srgbClr val="1B2538"/>
+                </a:solidFill>
+                <a:latin typeface="Calibri"/>
+              </a:rPr>
+              <a:t>Экспорт GPKG</a:t>
             </a:r>
           </a:p>
         </p:txBody>
@@ -11199,19 +12010,17 @@
         </p:nvSpPr>
         <p:spPr>
           <a:xfrm>
-            <a:off x="8028000" y="3500000"/>
-            <a:ext cx="3464000" cy="1350000"/>
+            <a:off x="7606880" y="1900000"/>
+            <a:ext cx="3885120" cy="3400000"/>
           </a:xfrm>
           <a:prstGeom prst="rect">
             <a:avLst/>
           </a:prstGeom>
           <a:solidFill>
-            <a:srgbClr val="F3F5F7"/>
+            <a:srgbClr val="0F1E3D"/>
           </a:solidFill>
-          <a:ln w="12700">
-            <a:solidFill>
-              <a:srgbClr val="DDE3EA"/>
-            </a:solidFill>
+          <a:ln>
+            <a:noFill/>
           </a:ln>
           <a:effectLst/>
         </p:spPr>
@@ -11239,58 +12048,14 @@
       </p:sp>
       <p:sp>
         <p:nvSpPr>
-          <p:cNvPr id="22" name="Rectangle 21"/>
-          <p:cNvSpPr/>
-          <p:nvPr/>
-        </p:nvSpPr>
-        <p:spPr>
-          <a:xfrm>
-            <a:off x="8028000" y="3500000"/>
-            <a:ext cx="3464000" cy="140000"/>
-          </a:xfrm>
-          <a:prstGeom prst="rect">
-            <a:avLst/>
-          </a:prstGeom>
-          <a:solidFill>
-            <a:srgbClr val="E87A22"/>
-          </a:solidFill>
-          <a:ln>
-            <a:noFill/>
-          </a:ln>
-          <a:effectLst/>
-        </p:spPr>
-        <p:style>
-          <a:lnRef idx="1">
-            <a:schemeClr val="accent1"/>
-          </a:lnRef>
-          <a:fillRef idx="3">
-            <a:schemeClr val="accent1"/>
-          </a:fillRef>
-          <a:effectRef idx="2">
-            <a:schemeClr val="accent1"/>
-          </a:effectRef>
-          <a:fontRef idx="minor">
-            <a:schemeClr val="lt1"/>
-          </a:fontRef>
-        </p:style>
-        <p:txBody>
-          <a:bodyPr rtlCol="0" anchor="ctr"/>
-          <a:lstStyle/>
-          <a:p>
-            <a:pPr algn="ctr"/>
-          </a:p>
-        </p:txBody>
-      </p:sp>
-      <p:sp>
-        <p:nvSpPr>
-          <p:cNvPr id="23" name="TextBox 22"/>
+          <p:cNvPr id="22" name="TextBox 21"/>
           <p:cNvSpPr txBox="1"/>
           <p:nvPr/>
         </p:nvSpPr>
         <p:spPr>
           <a:xfrm>
-            <a:off x="8268000" y="3760000"/>
-            <a:ext cx="3064000" cy="950000"/>
+            <a:off x="7886880" y="2150000"/>
+            <a:ext cx="3385120" cy="3000000"/>
           </a:xfrm>
           <a:prstGeom prst="rect">
             <a:avLst/>
@@ -11305,36 +12070,90 @@
           <a:p>
             <a:pPr algn="l">
               <a:spcAft>
-                <a:spcPts val="600"/>
+                <a:spcPts val="1200"/>
               </a:spcAft>
             </a:pPr>
             <a:r>
+              <a:rPr sz="1400" b="1">
+                <a:solidFill>
+                  <a:srgbClr val="E87A22"/>
+                </a:solidFill>
+                <a:latin typeface="Calibri"/>
+              </a:rPr>
+              <a:t>ПЕТЛЯ ОБРАТНОЙ СВЯЗИ</a:t>
+            </a:r>
+            <a:r>
+              <a:rPr sz="1600" b="0">
+                <a:solidFill>
+                  <a:srgbClr val="FFFFFF"/>
+                </a:solidFill>
+                <a:latin typeface="Calibri"/>
+              </a:rPr>
+              <a:t>Правки аналитиков = gold-метки</a:t>
+            </a:r>
+          </a:p>
+          <a:p>
+            <a:pPr>
+              <a:spcAft>
+                <a:spcPts val="1200"/>
+              </a:spcAft>
+            </a:pPr>
+            <a:r>
               <a:rPr sz="1600" b="1">
                 <a:solidFill>
-                  <a:srgbClr val="0F1E3D"/>
-                </a:solidFill>
-                <a:latin typeface="Calibri"/>
-              </a:rPr>
-              <a:t>AI-агент</a:t>
-            </a:r>
-          </a:p>
-          <a:p>
-            <a:r>
-              <a:rPr sz="1300">
-                <a:solidFill>
-                  <a:srgbClr val="5B6672"/>
-                </a:solidFill>
-                <a:latin typeface="Calibri"/>
-              </a:rPr>
-              <a:t>LangGraph: evaluate →
-plan → act до цели</a:t>
-            </a:r>
-          </a:p>
-        </p:txBody>
-      </p:sp>
-      <p:sp>
-        <p:nvSpPr>
-          <p:cNvPr id="24" name="TextBox 23"/>
+                  <a:srgbClr val="E87A22"/>
+                </a:solidFill>
+                <a:latin typeface="Calibri"/>
+              </a:rPr>
+              <a:t>7535 участков</a:t>
+            </a:r>
+            <a:r>
+              <a:rPr sz="1600" b="0">
+                <a:solidFill>
+                  <a:srgbClr val="FFFFFF"/>
+                </a:solidFill>
+                <a:latin typeface="Calibri"/>
+              </a:rPr>
+              <a:t> с корректировками</a:t>
+            </a:r>
+          </a:p>
+          <a:p>
+            <a:pPr>
+              <a:spcAft>
+                <a:spcPts val="1200"/>
+              </a:spcAft>
+            </a:pPr>
+            <a:r>
+              <a:rPr sz="1600" b="0">
+                <a:solidFill>
+                  <a:srgbClr val="FFFFFF"/>
+                </a:solidFill>
+                <a:latin typeface="Calibri"/>
+              </a:rPr>
+              <a:t>→ дообучение модели</a:t>
+            </a:r>
+          </a:p>
+          <a:p>
+            <a:pPr>
+              <a:spcAft>
+                <a:spcPts val="1200"/>
+              </a:spcAft>
+            </a:pPr>
+            <a:r>
+              <a:rPr sz="1400" b="0">
+                <a:solidFill>
+                  <a:srgbClr val="C7D0DC"/>
+                </a:solidFill>
+                <a:latin typeface="Calibri"/>
+              </a:rPr>
+              <a:t>Flask + Leaflet, экспорт в GeoPackage</a:t>
+            </a:r>
+          </a:p>
+        </p:txBody>
+      </p:sp>
+      <p:sp>
+        <p:nvSpPr>
+          <p:cNvPr id="23" name="TextBox 22"/>
           <p:cNvSpPr txBox="1"/>
           <p:nvPr/>
         </p:nvSpPr>
@@ -11366,7 +12185,7 @@
                 </a:solidFill>
                 <a:latin typeface="Calibri"/>
               </a:rPr>
-              <a:t>9/10</a:t>
+              <a:t>9/11</a:t>
             </a:r>
           </a:p>
         </p:txBody>
